--- a/aeza_umirhack_defense.pptx
+++ b/aeza_umirhack_defense.pptx
@@ -15,6 +15,7 @@
     <p:sldId id="263" r:id="rId15"/>
     <p:sldId id="264" r:id="rId16"/>
     <p:sldId id="265" r:id="rId17"/>
+    <p:sldId id="266" r:id="rId18"/>
   </p:sldIdLst>
   <p:sldSz cx="12191695" cy="6858000" type="screen4x3"/>
   <p:notesSz cx="6858000" cy="9144000"/>
@@ -779,6 +780,132 @@
           <a:lstStyle/>
           <a:p>
             <a:r>
+              <a:t>Что сказать (30 сек, при технически подкованном заказчике):</a:t>
+            </a:r>
+          </a:p>
+          <a:p>
+            <a:r>
+              <a:t>«Путь данных короткий: снимок Aéza проходит валидацию целиком до записи и</a:t>
+            </a:r>
+          </a:p>
+          <a:p>
+            <a:r>
+              <a:t>применяется атомарно, скоринг живёт в одном модуле, результат уходит в API и в панель.</a:t>
+            </a:r>
+          </a:p>
+          <a:p>
+            <a:r>
+              <a:t>Отдельно про пропуски: отсутствующий сигнал не превращается в ноль и не понижает</a:t>
+            </a:r>
+          </a:p>
+          <a:p>
+            <a:r>
+              <a:t>риск — фактор просто исключается, а веса перенормируются.</a:t>
+            </a:r>
+          </a:p>
+          <a:p>
+            <a:r>
+              <a:t>И про границы: истории уходов нет, календаря списаний нет, динамики нет, нагрузку</a:t>
+            </a:r>
+          </a:p>
+          <a:p>
+            <a:r>
+              <a:t>на больших объёмах мы не измеряли.»</a:t>
+            </a:r>
+          </a:p>
+          <a:p/>
+          <a:p>
+            <a:r>
+              <a:t>Показать: цепочку, затем два блока ограничений. Не читать всё вслух — выбрать 2–3 пункта.</a:t>
+            </a:r>
+          </a:p>
+          <a:p>
+            <a:r>
+              <a:t>Возможный вопрос: «Что будет на 10 000 клиентов?» — Список пагинируется, фильтры и</a:t>
+            </a:r>
+          </a:p>
+          <a:p>
+            <a:r>
+              <a:t>сортировка выполняются в SQL, а не в браузере. Нагрузочного тестирования не проводили —</a:t>
+            </a:r>
+          </a:p>
+          <a:p>
+            <a:r>
+              <a:t>говорим честно.</a:t>
+            </a:r>
+          </a:p>
+          <a:p>
+            <a:r>
+              <a:t>Переход: «Финальный слайд.»</a:t>
+            </a:r>
+          </a:p>
+        </p:txBody>
+      </p:sp>
+      <p:sp>
+        <p:nvSpPr>
+          <p:cNvPr id="4" name="Slide Number Placeholder 3"/>
+          <p:cNvSpPr>
+            <a:spLocks noGrp="1"/>
+          </p:cNvSpPr>
+          <p:nvPr>
+            <p:ph type="sldNum" idx="5" sz="quarter"/>
+          </p:nvPr>
+        </p:nvSpPr>
+        <p:spPr/>
+      </p:sp>
+    </p:spTree>
+  </p:cSld>
+  <p:clrMapOvr>
+    <a:masterClrMapping/>
+  </p:clrMapOvr>
+</p:notes>
+</file>
+
+<file path=ppt/notesSlides/notesSlide11.xml><?xml version="1.0" encoding="utf-8"?>
+<p:notes xmlns:a="http://schemas.openxmlformats.org/drawingml/2006/main" xmlns:p="http://schemas.openxmlformats.org/presentationml/2006/main" xmlns:r="http://schemas.openxmlformats.org/officeDocument/2006/relationships">
+  <p:cSld>
+    <p:spTree>
+      <p:nvGrpSpPr>
+        <p:cNvPr id="1" name=""/>
+        <p:cNvGrpSpPr/>
+        <p:nvPr/>
+      </p:nvGrpSpPr>
+      <p:grpSpPr>
+        <a:xfrm>
+          <a:off x="0" y="0"/>
+          <a:ext cx="0" cy="0"/>
+          <a:chOff x="0" y="0"/>
+          <a:chExt cx="0" cy="0"/>
+        </a:xfrm>
+      </p:grpSpPr>
+      <p:sp>
+        <p:nvSpPr>
+          <p:cNvPr id="2" name="Slide Image Placeholder 1"/>
+          <p:cNvSpPr>
+            <a:spLocks noGrp="1"/>
+          </p:cNvSpPr>
+          <p:nvPr>
+            <p:ph type="sldImg" idx="2"/>
+          </p:nvPr>
+        </p:nvSpPr>
+        <p:spPr/>
+      </p:sp>
+      <p:sp>
+        <p:nvSpPr>
+          <p:cNvPr id="3" name="Notes Placeholder 2"/>
+          <p:cNvSpPr>
+            <a:spLocks noGrp="1"/>
+          </p:cNvSpPr>
+          <p:nvPr>
+            <p:ph type="body" idx="3" sz="quarter"/>
+          </p:nvPr>
+        </p:nvSpPr>
+        <p:spPr/>
+        <p:txBody>
+          <a:bodyPr/>
+          <a:lstStyle/>
+          <a:p>
+            <a:r>
               <a:t>Что сказать (20 сек):</a:t>
             </a:r>
           </a:p>
@@ -910,17 +1037,12 @@
           </a:p>
           <a:p>
             <a:r>
-              <a:t>«По 30 услугам снимка: 12 уже близки к окончанию, 9 не продлятся автоматически,</a:t>
-            </a:r>
-          </a:p>
-          <a:p>
-            <a:r>
-              <a:t>по 6 есть неуспешные продления и 6 услуг приостановлены. Каждый сигнал по</a:t>
-            </a:r>
-          </a:p>
-          <a:p>
-            <a:r>
-              <a:t>отдельности выглядит безобидно. Вместе они описывают клиента, который может уйти.</a:t>
+              <a:t>«По 30 услугам снимка: 12 — близость даты окончания, 9 — автопродление отключено, 6 — услуга приостановлена, 6 — ожидание продления. Каждый сигнал по отдельности</a:t>
+            </a:r>
+          </a:p>
+          <a:p>
+            <a:r>
+              <a:t>выглядит безобидно. Вместе они описывают клиента, который может уйти.</a:t>
             </a:r>
           </a:p>
           <a:p>
@@ -1052,12 +1174,12 @@
           </a:p>
           <a:p>
             <a:r>
-              <a:t>строку user-0010@example.test — верхняя, балл 71,4), справа сводные метрики и блок</a:t>
-            </a:r>
-          </a:p>
-          <a:p>
-            <a:r>
-              <a:t>«Основные причины риска».</a:t>
+              <a:t>строку user-0010@example.test — балл 71,4, наверху списка вместе</a:t>
+            </a:r>
+          </a:p>
+          <a:p>
+            <a:r>
+              <a:t>с #5), справа сводные метрики и блок «Основные причины риска».</a:t>
             </a:r>
           </a:p>
           <a:p>
@@ -1147,32 +1269,37 @@
           </a:p>
           <a:p>
             <a:r>
-              <a:t>«Открываем список клиентов — он уже отсортирован по риску. Верхняя строка:</a:t>
-            </a:r>
-          </a:p>
-          <a:p>
-            <a:r>
-              <a:t>клиент #10, балл 71,4 из 100, категория «высокий». Выбираем его не случайно —</a:t>
-            </a:r>
-          </a:p>
-          <a:p>
-            <a:r>
-              <a:t>это максимум по списку.</a:t>
-            </a:r>
-          </a:p>
-          <a:p>
-            <a:r>
-              <a:t>Что мы про него знаем из данных: три услуги, все пригодны для прогноза,</a:t>
-            </a:r>
-          </a:p>
-          <a:p>
-            <a:r>
-              <a:t>баланс 203,79 €, всего пополнено 4 206,69 €. Выручка под риском — ноль,</a:t>
-            </a:r>
-          </a:p>
-          <a:p>
-            <a:r>
-              <a:t>и это отдельный важный момент, к нему вернёмся на слайде про деньги.</a:t>
+              <a:t>«Открываем список клиентов — он отсортирован по риску по убыванию. Наверху двое</a:t>
+            </a:r>
+          </a:p>
+          <a:p>
+            <a:r>
+              <a:t>с одинаковым максимумом 71,4: клиенты #5 и #10. Берём #10 — у него причину видно</a:t>
+            </a:r>
+          </a:p>
+          <a:p>
+            <a:r>
+              <a:t>на уровне услуги, и это делает разбор конкретным.</a:t>
+            </a:r>
+          </a:p>
+          <a:p>
+            <a:r>
+              <a:t>Что мы про него знаем из данных: три услуги, все пригодны для прогноза, из них две</a:t>
+            </a:r>
+          </a:p>
+          <a:p>
+            <a:r>
+              <a:t>высокого риска; баланс 203,79 €, всего пополнено 4 206,69 €.</a:t>
+            </a:r>
+          </a:p>
+          <a:p>
+            <a:r>
+              <a:t>Выручка под риском — ноль, и это отдельный важный момент, к нему вернёмся на слайде</a:t>
+            </a:r>
+          </a:p>
+          <a:p>
+            <a:r>
+              <a:t>про деньги.</a:t>
             </a:r>
           </a:p>
           <a:p>
@@ -1204,6 +1331,16 @@
           <a:p>
             <a:r>
               <a:t>Среднее замаскировало бы одну критичную услугу.</a:t>
+            </a:r>
+          </a:p>
+          <a:p>
+            <a:r>
+              <a:t>Возможный вопрос: «Почему не #5?» — У него тот же балл 71,4, но услуги иные;</a:t>
+            </a:r>
+          </a:p>
+          <a:p>
+            <a:r>
+              <a:t>для разбора причины #10 нагляднее, и он остаётся вторым в списке.</a:t>
             </a:r>
           </a:p>
           <a:p>
@@ -1419,73 +1556,77 @@
           <a:lstStyle/>
           <a:p>
             <a:r>
-              <a:t>Что сказать (45 сек):</a:t>
-            </a:r>
-          </a:p>
-          <a:p>
-            <a:r>
-              <a:t>«Здесь важно не сложить несопоставимое. У клиента #10 балл высокий — 71,4,</a:t>
-            </a:r>
-          </a:p>
-          <a:p>
-            <a:r>
-              <a:t>но выручка под риском ноль. Почему? Все его сроки уже прошли: просроченные</a:t>
-            </a:r>
-          </a:p>
-          <a:p>
-            <a:r>
-              <a:t>продления лежат в прошлом, а горизонт смотрит вперёд. Услуг с продлением</a:t>
-            </a:r>
-          </a:p>
-          <a:p>
-            <a:r>
-              <a:t>внутри 30 дней у него нет.</a:t>
-            </a:r>
-          </a:p>
-          <a:p>
-            <a:r>
-              <a:t>Баланс 203,79 € и пополнения 4 206,69 € — это не потерянные деньги. Мы держим</a:t>
-            </a:r>
-          </a:p>
-          <a:p>
-            <a:r>
-              <a:t>три величины раздельно: выручка под риском — прогноз, предстоящие продления —</a:t>
-            </a:r>
-          </a:p>
-          <a:p>
-            <a:r>
-              <a:t>сумма без риска, пополнения — справочная история.»</a:t>
-            </a:r>
-          </a:p>
-          <a:p/>
-          <a:p>
-            <a:r>
-              <a:t>Показать: формулу, затем таблицу «Ближайшие продления в горизонте» — 4 строки,</a:t>
-            </a:r>
-          </a:p>
-          <a:p>
-            <a:r>
-              <a:t>и три итоговые метрики внизу.</a:t>
-            </a:r>
-          </a:p>
-          <a:p>
-            <a:r>
-              <a:t>Возможный вопрос: «Почему сумма такая маленькая?» — Потому что горизонт 30 дней,</a:t>
-            </a:r>
-          </a:p>
-          <a:p>
-            <a:r>
-              <a:t>и в него попадают 4 продления из 30 услуг. Это честная оценка по доступным полям,</a:t>
-            </a:r>
-          </a:p>
-          <a:p>
-            <a:r>
-              <a:t>а не бухгалтерский прогноз: календаря будущих списаний в снимке нет.</a:t>
-            </a:r>
-          </a:p>
-          <a:p>
-            <a:r>
-              <a:t>Переход: «Теперь проверим гипотезу: изменим вес фактора.»</a:t>
+              <a:t>Что сказать (40 сек):</a:t>
+            </a:r>
+          </a:p>
+          <a:p>
+            <a:r>
+              <a:t>«Это не витрина «у нас есть AI». Модель не считает балл — она объясняет уже</a:t>
+            </a:r>
+          </a:p>
+          <a:p>
+            <a:r>
+              <a:t>посчитанный результат. В контекст она получает только факты движка и локальную</a:t>
+            </a:r>
+          </a:p>
+          <a:p>
+            <a:r>
+              <a:t>документацию; под ответом видно, на какие данные и документы она ссылалась.</a:t>
+            </a:r>
+          </a:p>
+          <a:p>
+            <a:r>
+              <a:t>И главное: если модель называет число, которого нет в фактах, оно удаляется</a:t>
+            </a:r>
+          </a:p>
+          <a:p>
+            <a:r>
+              <a:t>автоматически. Это второй слой защиты от выдумок.»</a:t>
+            </a:r>
+          </a:p>
+          <a:p>
+            <a:r>
+              <a:t>Показать: реальный ответ справа от скриншота, блок «ИСТОЧНИКИ» под ответом,</a:t>
+            </a:r>
+          </a:p>
+          <a:p>
+            <a:r>
+              <a:t>затем четыре карточки — особенно «Проверка после генерации» и «Аналитика без AI».</a:t>
+            </a:r>
+          </a:p>
+          <a:p>
+            <a:r>
+              <a:t>Возможный вопрос: «Данные уходят наружу?» — Нет. Провайдер только loopback,</a:t>
+            </a:r>
+          </a:p>
+          <a:p>
+            <a:r>
+              <a:t>внешние AI-API не используются; персональные данные не пишутся в логи.</a:t>
+            </a:r>
+          </a:p>
+          <a:p>
+            <a:r>
+              <a:t>Возможный вопрос: «Что если модель недоступна?» — 503 и понятный текст,</a:t>
+            </a:r>
+          </a:p>
+          <a:p>
+            <a:r>
+              <a:t>основная аналитика продолжает работать.</a:t>
+            </a:r>
+          </a:p>
+          <a:p>
+            <a:r>
+              <a:t>Ограничение: ответ занимает ≈40–90 с на CPU — это для интерактивного</a:t>
+            </a:r>
+          </a:p>
+          <a:p>
+            <a:r>
+              <a:t>разбора, а не для потока.</a:t>
+            </a:r>
+          </a:p>
+          <a:p>
+            <a:r>
+              <a:t>Переход: «Теперь деньги — отдельно от риска.»</a:t>
             </a:r>
           </a:p>
         </p:txBody>
@@ -1555,88 +1696,73 @@
           <a:lstStyle/>
           <a:p>
             <a:r>
-              <a:t>Что сказать (60 сек):</a:t>
-            </a:r>
-          </a:p>
-          <a:p>
-            <a:r>
-              <a:t>«Сначала формулируем ожидание: усилим фактор «близость даты окончания» с трёх</a:t>
-            </a:r>
-          </a:p>
-          <a:p>
-            <a:r>
-              <a:t>до девяти. Гипотеза — баллы вырастут, клиентов высокого риска станет больше.</a:t>
-            </a:r>
-          </a:p>
-          <a:p>
-            <a:r>
-              <a:t>Идём в настройки модели, меняем вес, нажимаем «Сохранить».</a:t>
-            </a:r>
-          </a:p>
-          <a:p>
-            <a:r>
-              <a:t>Смотрите, что произошло. Балл клиента #10: 71,4 → 81,8. Клиентов высокого риска:</a:t>
-            </a:r>
-          </a:p>
-          <a:p>
-            <a:r>
-              <a:t>3 → 3, среднего: 3 → 3. Выручка под риском: 5,80 → 7,72 €.</a:t>
-            </a:r>
-          </a:p>
-          <a:p>
-            <a:r>
-              <a:t>Это не декоративный контрол: настройка уходит на сервер, сохраняется в базе и</a:t>
-            </a:r>
-          </a:p>
-          <a:p>
-            <a:r>
-              <a:t>пересчитывает всю аналитику. Кнопка «Значения по умолчанию» возвращает исходные числа.»</a:t>
+              <a:t>Что сказать (45 сек):</a:t>
+            </a:r>
+          </a:p>
+          <a:p>
+            <a:r>
+              <a:t>«Здесь важно не сложить несопоставимое. У клиента #10 балл высокий — 71,4,</a:t>
+            </a:r>
+          </a:p>
+          <a:p>
+            <a:r>
+              <a:t>но выручка под риском ноль. Почему? Все его сроки уже прошли: просроченные</a:t>
+            </a:r>
+          </a:p>
+          <a:p>
+            <a:r>
+              <a:t>продления лежат в прошлом, а горизонт смотрит вперёд. Услуг с продлением</a:t>
+            </a:r>
+          </a:p>
+          <a:p>
+            <a:r>
+              <a:t>внутри 30 дней у него нет.</a:t>
+            </a:r>
+          </a:p>
+          <a:p>
+            <a:r>
+              <a:t>Баланс 203,79 € и пополнения 4 206,69 € — это не потерянные деньги. Мы держим</a:t>
+            </a:r>
+          </a:p>
+          <a:p>
+            <a:r>
+              <a:t>три величины раздельно: выручка под риском — прогноз, предстоящие продления —</a:t>
+            </a:r>
+          </a:p>
+          <a:p>
+            <a:r>
+              <a:t>сумма без риска, пополнения — справочная история.»</a:t>
             </a:r>
           </a:p>
           <a:p/>
           <a:p>
             <a:r>
-              <a:t>Показать: /settings → поле веса expiry_proximity 3 → 9 → «Сохранить». Сводка в шапке</a:t>
-            </a:r>
-          </a:p>
-          <a:p>
-            <a:r>
-              <a:t>обновляется на месте, без перезагрузки: выручка 5,80 → 7,72 €,</a:t>
-            </a:r>
-          </a:p>
-          <a:p>
-            <a:r>
-              <a:t>сумма весов 13.0 → 19.0. Затем открыть карточку клиента #10 (балл 81,8) и вернуться</a:t>
-            </a:r>
-          </a:p>
-          <a:p>
-            <a:r>
-              <a:t>в настройки, нажав «Значения по умолчанию».</a:t>
-            </a:r>
-          </a:p>
-          <a:p>
-            <a:r>
-              <a:t>Возможный вопрос: «Пересчёт автоматический?» — Да. Настройки сохраняются на сервере,</a:t>
-            </a:r>
-          </a:p>
-          <a:p>
-            <a:r>
-              <a:t>бэкенд пересчитывает всю аналитику, и интерфейс подтягивает новые значения сразу,</a:t>
-            </a:r>
-          </a:p>
-          <a:p>
-            <a:r>
-              <a:t>без ручной перезагрузки. Проверено на стенде: страница настроек остаётся открытой,</a:t>
-            </a:r>
-          </a:p>
-          <a:p>
-            <a:r>
-              <a:t>URL не меняется, числа в сводке обновляются сами.</a:t>
-            </a:r>
-          </a:p>
-          <a:p>
-            <a:r>
-              <a:t>Переход: «Что это даёт команде Aéza.»</a:t>
+              <a:t>Показать: формулу, затем таблицу «Ближайшие продления в горизонте» — 4 строки,</a:t>
+            </a:r>
+          </a:p>
+          <a:p>
+            <a:r>
+              <a:t>и три итоговые метрики внизу.</a:t>
+            </a:r>
+          </a:p>
+          <a:p>
+            <a:r>
+              <a:t>Возможный вопрос: «Почему сумма такая маленькая?» — Потому что горизонт 30 дней,</a:t>
+            </a:r>
+          </a:p>
+          <a:p>
+            <a:r>
+              <a:t>и в него попадают 4 продления из 30 услуг. Это честная оценка по доступным полям,</a:t>
+            </a:r>
+          </a:p>
+          <a:p>
+            <a:r>
+              <a:t>а не бухгалтерский прогноз: календаря будущих списаний в снимке нет.</a:t>
+            </a:r>
+          </a:p>
+          <a:p>
+            <a:r>
+              <a:t>Переход: «Теперь проверим гипотезу: изменим вес фактора.»</a:t>
             </a:r>
           </a:p>
         </p:txBody>
@@ -1706,63 +1832,108 @@
           <a:lstStyle/>
           <a:p>
             <a:r>
-              <a:t>Что сказать (35 сек):</a:t>
-            </a:r>
-          </a:p>
-          <a:p>
-            <a:r>
-              <a:t>«Что получает аналитик Aéza: приоритизированный список вместо ручного просмотра,</a:t>
-            </a:r>
-          </a:p>
-          <a:p>
-            <a:r>
-              <a:t>объяснение вместо непрозрачного числа, денежную оценку отдельно от баланса и</a:t>
-            </a:r>
-          </a:p>
-          <a:p>
-            <a:r>
-              <a:t>возможность проверить гипотезу, поменяв веса.</a:t>
-            </a:r>
-          </a:p>
-          <a:p>
-            <a:r>
-              <a:t>И сразу честно про границы: балл — не вероятность в процентах, точность мы не</a:t>
-            </a:r>
-          </a:p>
-          <a:p>
-            <a:r>
-              <a:t>измеряли, потому что в снимке нет истории уходов. Мы не обещаем снижение оттока —</a:t>
-            </a:r>
-          </a:p>
-          <a:p>
-            <a:r>
-              <a:t>мы даём инструмент для решения.»</a:t>
+              <a:t>Что сказать (60 сек):</a:t>
+            </a:r>
+          </a:p>
+          <a:p>
+            <a:r>
+              <a:t>«Сначала формулируем ожидание: усилим фактор «близость даты окончания» с трёх</a:t>
+            </a:r>
+          </a:p>
+          <a:p>
+            <a:r>
+              <a:t>до девяти. Гипотеза — баллы вырастут, услуг высокого риска станет больше.</a:t>
+            </a:r>
+          </a:p>
+          <a:p>
+            <a:r>
+              <a:t>Идём в настройки модели, меняем вес, нажимаем «Сохранить».</a:t>
+            </a:r>
+          </a:p>
+          <a:p>
+            <a:r>
+              <a:t>Смотрите, что произошло. Балл клиента #10: 71,4 → 81,8. Услуг высокого риска:</a:t>
+            </a:r>
+          </a:p>
+          <a:p>
+            <a:r>
+              <a:t>4 → 7, а выручка под риском: 5,80 → 7,72 €.</a:t>
+            </a:r>
+          </a:p>
+          <a:p>
+            <a:r>
+              <a:t>Это не декоративный контрол: настройка уходит на сервер, сохраняется в базе и</a:t>
+            </a:r>
+          </a:p>
+          <a:p>
+            <a:r>
+              <a:t>пересчитывает всю аналитику. Кнопка «Значения по умолчанию» возвращает исходные числа.»</a:t>
             </a:r>
           </a:p>
           <a:p/>
           <a:p>
             <a:r>
-              <a:t>Показать: четыре карточки, затем нижний блок ограничений — его проговариваем</a:t>
-            </a:r>
-          </a:p>
-          <a:p>
-            <a:r>
-              <a:t>обязательно, это сильный ход перед бизнес-заказчиком.</a:t>
-            </a:r>
-          </a:p>
-          <a:p>
-            <a:r>
-              <a:t>Возможный вопрос: «Какая точность модели?» — Не измерена и не заявлена. В данных</a:t>
-            </a:r>
-          </a:p>
-          <a:p>
-            <a:r>
-              <a:t>нет исходов оттока, обучать и валидировать классификатор не на чем.</a:t>
-            </a:r>
-          </a:p>
-          <a:p>
-            <a:r>
-              <a:t>Переход: «Коротко про то, как это устроено внутри.»</a:t>
+              <a:t>Показать: /settings → поле веса expiry_proximity 3 → 9 → «Сохранить». Сводка в шапке</a:t>
+            </a:r>
+          </a:p>
+          <a:p>
+            <a:r>
+              <a:t>обновляется на месте, без перезагрузки: выручка 5,80 → 7,72 €,</a:t>
+            </a:r>
+          </a:p>
+          <a:p>
+            <a:r>
+              <a:t>услуг высокого риска 4 → 7, сумма весов 13.0 → 19.0. Затем открыть карточку клиента #10 (балл 81,8) и вернуться</a:t>
+            </a:r>
+          </a:p>
+          <a:p>
+            <a:r>
+              <a:t>в настройки, нажав «Значения по умолчанию».</a:t>
+            </a:r>
+          </a:p>
+          <a:p>
+            <a:r>
+              <a:t>Возможный вопрос: «Почему клиентов высокого риска не стало больше?» — Категория</a:t>
+            </a:r>
+          </a:p>
+          <a:p>
+            <a:r>
+              <a:t>клиента берёт максимум по его услугам: у трёх клиентов уже был высокий балл, у</a:t>
+            </a:r>
+          </a:p>
+          <a:p>
+            <a:r>
+              <a:t>остальных даже усиленный вес не поднял его выше порога. Поэтому честный сигнал</a:t>
+            </a:r>
+          </a:p>
+          <a:p>
+            <a:r>
+              <a:t>изменения — число услуг высокого риска и выручка под риском.</a:t>
+            </a:r>
+          </a:p>
+          <a:p>
+            <a:r>
+              <a:t>Возможный вопрос: «Пересчёт автоматический?» — Да. Настройки сохраняются на сервере,</a:t>
+            </a:r>
+          </a:p>
+          <a:p>
+            <a:r>
+              <a:t>бэкенд пересчитывает всю аналитику, и интерфейс подтягивает новые значения сразу,</a:t>
+            </a:r>
+          </a:p>
+          <a:p>
+            <a:r>
+              <a:t>без ручной перезагрузки. Проверено на стенде: страница настроек остаётся открытой,</a:t>
+            </a:r>
+          </a:p>
+          <a:p>
+            <a:r>
+              <a:t>URL не меняется, числа в сводке обновляются сами.</a:t>
+            </a:r>
+          </a:p>
+          <a:p>
+            <a:r>
+              <a:t>Переход: «Что это даёт команде Aéza.»</a:t>
             </a:r>
           </a:p>
         </p:txBody>
@@ -1832,63 +2003,63 @@
           <a:lstStyle/>
           <a:p>
             <a:r>
-              <a:t>Что сказать (30 сек, при технически подкованном заказчике):</a:t>
-            </a:r>
-          </a:p>
-          <a:p>
-            <a:r>
-              <a:t>«Путь данных короткий: снимок Aéza проходит валидацию целиком до записи и</a:t>
-            </a:r>
-          </a:p>
-          <a:p>
-            <a:r>
-              <a:t>применяется атомарно, скоринг живёт в одном модуле, результат уходит в API и в панель.</a:t>
-            </a:r>
-          </a:p>
-          <a:p>
-            <a:r>
-              <a:t>Отдельно про пропуски: отсутствующий сигнал не превращается в ноль и не понижает</a:t>
-            </a:r>
-          </a:p>
-          <a:p>
-            <a:r>
-              <a:t>риск — фактор просто исключается, а веса перенормируются.</a:t>
-            </a:r>
-          </a:p>
-          <a:p>
-            <a:r>
-              <a:t>И про границы: истории уходов нет, календаря списаний нет, динамики нет, нагрузку</a:t>
-            </a:r>
-          </a:p>
-          <a:p>
-            <a:r>
-              <a:t>на больших объёмах мы не измеряли.»</a:t>
+              <a:t>Что сказать (35 сек):</a:t>
+            </a:r>
+          </a:p>
+          <a:p>
+            <a:r>
+              <a:t>«Что получает аналитик Aéza: приоритизированный список вместо ручного просмотра,</a:t>
+            </a:r>
+          </a:p>
+          <a:p>
+            <a:r>
+              <a:t>объяснение вместо непрозрачного числа, денежную оценку отдельно от баланса и</a:t>
+            </a:r>
+          </a:p>
+          <a:p>
+            <a:r>
+              <a:t>возможность проверить гипотезу, поменяв веса.</a:t>
+            </a:r>
+          </a:p>
+          <a:p>
+            <a:r>
+              <a:t>И сразу честно про границы: балл — не вероятность в процентах, точность мы не</a:t>
+            </a:r>
+          </a:p>
+          <a:p>
+            <a:r>
+              <a:t>измеряли, потому что в снимке нет истории уходов. Мы не обещаем снижение оттока —</a:t>
+            </a:r>
+          </a:p>
+          <a:p>
+            <a:r>
+              <a:t>мы даём инструмент для решения.»</a:t>
             </a:r>
           </a:p>
           <a:p/>
           <a:p>
             <a:r>
-              <a:t>Показать: цепочку, затем два блока ограничений. Не читать всё вслух — выбрать 2–3 пункта.</a:t>
-            </a:r>
-          </a:p>
-          <a:p>
-            <a:r>
-              <a:t>Возможный вопрос: «Что будет на 10 000 клиентов?» — Список пагинируется, фильтры и</a:t>
-            </a:r>
-          </a:p>
-          <a:p>
-            <a:r>
-              <a:t>сортировка выполняются в SQL, а не в браузере. Нагрузочного тестирования не проводили —</a:t>
-            </a:r>
-          </a:p>
-          <a:p>
-            <a:r>
-              <a:t>говорим честно.</a:t>
-            </a:r>
-          </a:p>
-          <a:p>
-            <a:r>
-              <a:t>Переход: «Финальный слайд.»</a:t>
+              <a:t>Показать: четыре карточки, затем нижний блок ограничений — его проговариваем</a:t>
+            </a:r>
+          </a:p>
+          <a:p>
+            <a:r>
+              <a:t>обязательно, это сильный ход перед бизнес-заказчиком.</a:t>
+            </a:r>
+          </a:p>
+          <a:p>
+            <a:r>
+              <a:t>Возможный вопрос: «Какая точность модели?» — Не измерена и не заявлена. В данных</a:t>
+            </a:r>
+          </a:p>
+          <a:p>
+            <a:r>
+              <a:t>нет исходов оттока, обучать и валидировать классификатор не на чем.</a:t>
+            </a:r>
+          </a:p>
+          <a:p>
+            <a:r>
+              <a:t>Переход: «Коротко про то, как это устроено внутри.»</a:t>
             </a:r>
           </a:p>
         </p:txBody>
@@ -5804,6 +5975,1741 @@
             <a:avLst/>
           </a:prstGeom>
           <a:solidFill>
+            <a:srgbClr val="F4F4F4"/>
+          </a:solidFill>
+          <a:ln>
+            <a:noFill/>
+          </a:ln>
+          <a:effectLst/>
+        </p:spPr>
+        <p:style>
+          <a:lnRef idx="1">
+            <a:schemeClr val="accent1"/>
+          </a:lnRef>
+          <a:fillRef idx="3">
+            <a:schemeClr val="accent1"/>
+          </a:fillRef>
+          <a:effectRef idx="2">
+            <a:schemeClr val="accent1"/>
+          </a:effectRef>
+          <a:fontRef idx="minor">
+            <a:schemeClr val="lt1"/>
+          </a:fontRef>
+        </p:style>
+        <p:txBody>
+          <a:bodyPr rtlCol="0" anchor="ctr"/>
+          <a:lstStyle/>
+          <a:p>
+            <a:pPr algn="ctr"/>
+          </a:p>
+        </p:txBody>
+      </p:sp>
+      <p:sp>
+        <p:nvSpPr>
+          <p:cNvPr id="3" name="TextBox 2"/>
+          <p:cNvSpPr txBox="1"/>
+          <p:nvPr/>
+        </p:nvSpPr>
+        <p:spPr>
+          <a:xfrm>
+            <a:off x="658368" y="548640"/>
+            <a:ext cx="10874959" cy="201168"/>
+          </a:xfrm>
+          <a:prstGeom prst="rect">
+            <a:avLst/>
+          </a:prstGeom>
+          <a:noFill/>
+        </p:spPr>
+        <p:txBody>
+          <a:bodyPr wrap="square" anchor="t" lIns="0" rIns="0" tIns="0" bIns="0">
+            <a:spAutoFit/>
+          </a:bodyPr>
+          <a:lstStyle/>
+          <a:p>
+            <a:pPr algn="l">
+              <a:lnSpc>
+                <a:spcPct val="116000"/>
+              </a:lnSpc>
+              <a:spcBef>
+                <a:spcPts val="0"/>
+              </a:spcBef>
+              <a:spcAft>
+                <a:spcPts val="0"/>
+              </a:spcAft>
+            </a:pPr>
+            <a:r>
+              <a:rPr sz="1050" b="1" i="0" spc="140">
+                <a:solidFill>
+                  <a:srgbClr val="B84A00"/>
+                </a:solidFill>
+                <a:latin typeface="Manrope"/>
+                <a:cs typeface="Manrope"/>
+                <a:ea typeface="Manrope"/>
+              </a:rPr>
+              <a:t>АРХИТЕКТУРА ДОВЕРИЯ И ОГРАНИЧЕНИЯ</a:t>
+            </a:r>
+          </a:p>
+        </p:txBody>
+      </p:sp>
+      <p:sp>
+        <p:nvSpPr>
+          <p:cNvPr id="4" name="TextBox 3"/>
+          <p:cNvSpPr txBox="1"/>
+          <p:nvPr/>
+        </p:nvSpPr>
+        <p:spPr>
+          <a:xfrm>
+            <a:off x="658368" y="795528"/>
+            <a:ext cx="10874959" cy="429768"/>
+          </a:xfrm>
+          <a:prstGeom prst="rect">
+            <a:avLst/>
+          </a:prstGeom>
+          <a:noFill/>
+        </p:spPr>
+        <p:txBody>
+          <a:bodyPr wrap="square" anchor="t" lIns="0" rIns="0" tIns="0" bIns="0">
+            <a:spAutoFit/>
+          </a:bodyPr>
+          <a:lstStyle/>
+          <a:p>
+            <a:pPr algn="l">
+              <a:lnSpc>
+                <a:spcPct val="108000"/>
+              </a:lnSpc>
+              <a:spcBef>
+                <a:spcPts val="0"/>
+              </a:spcBef>
+              <a:spcAft>
+                <a:spcPts val="0"/>
+              </a:spcAft>
+            </a:pPr>
+            <a:r>
+              <a:rPr sz="3000" b="1" i="0">
+                <a:solidFill>
+                  <a:srgbClr val="1A1A1A"/>
+                </a:solidFill>
+                <a:latin typeface="Manrope"/>
+                <a:cs typeface="Manrope"/>
+                <a:ea typeface="Manrope"/>
+              </a:rPr>
+              <a:t>Данные → проверка → расчёт → интерфейс</a:t>
+            </a:r>
+          </a:p>
+        </p:txBody>
+      </p:sp>
+      <p:sp>
+        <p:nvSpPr>
+          <p:cNvPr id="5" name="TextBox 4"/>
+          <p:cNvSpPr txBox="1"/>
+          <p:nvPr/>
+        </p:nvSpPr>
+        <p:spPr>
+          <a:xfrm>
+            <a:off x="658368" y="1344168"/>
+            <a:ext cx="10058400" cy="237744"/>
+          </a:xfrm>
+          <a:prstGeom prst="rect">
+            <a:avLst/>
+          </a:prstGeom>
+          <a:noFill/>
+        </p:spPr>
+        <p:txBody>
+          <a:bodyPr wrap="square" anchor="t" lIns="0" rIns="0" tIns="0" bIns="0">
+            <a:spAutoFit/>
+          </a:bodyPr>
+          <a:lstStyle/>
+          <a:p>
+            <a:pPr algn="l">
+              <a:lnSpc>
+                <a:spcPct val="128000"/>
+              </a:lnSpc>
+              <a:spcBef>
+                <a:spcPts val="0"/>
+              </a:spcBef>
+              <a:spcAft>
+                <a:spcPts val="0"/>
+              </a:spcAft>
+            </a:pPr>
+            <a:r>
+              <a:rPr sz="1350" b="0" i="0">
+                <a:solidFill>
+                  <a:srgbClr val="666666"/>
+                </a:solidFill>
+                <a:latin typeface="Manrope"/>
+                <a:cs typeface="Manrope"/>
+                <a:ea typeface="Manrope"/>
+              </a:rPr>
+              <a:t>Короткий путь данных. Никаких скрытых шагов и никакой подмены отсутствующих сигналов нулём.</a:t>
+            </a:r>
+          </a:p>
+        </p:txBody>
+      </p:sp>
+      <p:sp>
+        <p:nvSpPr>
+          <p:cNvPr id="6" name="Rectangle 5"/>
+          <p:cNvSpPr/>
+          <p:nvPr/>
+        </p:nvSpPr>
+        <p:spPr>
+          <a:xfrm>
+            <a:off x="658368" y="1856232"/>
+            <a:ext cx="2512999" cy="1188720"/>
+          </a:xfrm>
+          <a:prstGeom prst="rect">
+            <a:avLst/>
+          </a:prstGeom>
+          <a:solidFill>
+            <a:srgbClr val="FFFFFF"/>
+          </a:solidFill>
+          <a:ln w="11430">
+            <a:solidFill>
+              <a:srgbClr val="E1E1E1"/>
+            </a:solidFill>
+          </a:ln>
+          <a:effectLst/>
+        </p:spPr>
+        <p:style>
+          <a:lnRef idx="1">
+            <a:schemeClr val="accent1"/>
+          </a:lnRef>
+          <a:fillRef idx="3">
+            <a:schemeClr val="accent1"/>
+          </a:fillRef>
+          <a:effectRef idx="2">
+            <a:schemeClr val="accent1"/>
+          </a:effectRef>
+          <a:fontRef idx="minor">
+            <a:schemeClr val="lt1"/>
+          </a:fontRef>
+        </p:style>
+        <p:txBody>
+          <a:bodyPr rtlCol="0" anchor="ctr"/>
+          <a:lstStyle/>
+          <a:p>
+            <a:pPr algn="ctr"/>
+          </a:p>
+        </p:txBody>
+      </p:sp>
+      <p:sp>
+        <p:nvSpPr>
+          <p:cNvPr id="7" name="Rectangle 6"/>
+          <p:cNvSpPr/>
+          <p:nvPr/>
+        </p:nvSpPr>
+        <p:spPr>
+          <a:xfrm>
+            <a:off x="658368" y="1856232"/>
+            <a:ext cx="2512999" cy="41148"/>
+          </a:xfrm>
+          <a:prstGeom prst="rect">
+            <a:avLst/>
+          </a:prstGeom>
+          <a:solidFill>
+            <a:srgbClr val="1F1F1F"/>
+          </a:solidFill>
+          <a:ln>
+            <a:noFill/>
+          </a:ln>
+          <a:effectLst/>
+        </p:spPr>
+        <p:style>
+          <a:lnRef idx="1">
+            <a:schemeClr val="accent1"/>
+          </a:lnRef>
+          <a:fillRef idx="3">
+            <a:schemeClr val="accent1"/>
+          </a:fillRef>
+          <a:effectRef idx="2">
+            <a:schemeClr val="accent1"/>
+          </a:effectRef>
+          <a:fontRef idx="minor">
+            <a:schemeClr val="lt1"/>
+          </a:fontRef>
+        </p:style>
+        <p:txBody>
+          <a:bodyPr rtlCol="0" anchor="ctr"/>
+          <a:lstStyle/>
+          <a:p>
+            <a:pPr algn="ctr"/>
+          </a:p>
+        </p:txBody>
+      </p:sp>
+      <p:sp>
+        <p:nvSpPr>
+          <p:cNvPr id="8" name="TextBox 7"/>
+          <p:cNvSpPr txBox="1"/>
+          <p:nvPr/>
+        </p:nvSpPr>
+        <p:spPr>
+          <a:xfrm>
+            <a:off x="822960" y="2039112"/>
+            <a:ext cx="2183815" cy="185928"/>
+          </a:xfrm>
+          <a:prstGeom prst="rect">
+            <a:avLst/>
+          </a:prstGeom>
+          <a:noFill/>
+        </p:spPr>
+        <p:txBody>
+          <a:bodyPr wrap="square" anchor="t" lIns="0" rIns="0" tIns="0" bIns="0">
+            <a:spAutoFit/>
+          </a:bodyPr>
+          <a:lstStyle/>
+          <a:p>
+            <a:pPr algn="l">
+              <a:lnSpc>
+                <a:spcPct val="110000"/>
+              </a:lnSpc>
+              <a:spcBef>
+                <a:spcPts val="0"/>
+              </a:spcBef>
+              <a:spcAft>
+                <a:spcPts val="0"/>
+              </a:spcAft>
+            </a:pPr>
+            <a:r>
+              <a:rPr sz="1200" b="1" i="0">
+                <a:solidFill>
+                  <a:srgbClr val="1A1A1A"/>
+                </a:solidFill>
+                <a:latin typeface="Manrope SemiBold"/>
+                <a:cs typeface="Manrope SemiBold"/>
+                <a:ea typeface="Manrope SemiBold"/>
+              </a:rPr>
+              <a:t>Снимок Aéza</a:t>
+            </a:r>
+          </a:p>
+        </p:txBody>
+      </p:sp>
+      <p:sp>
+        <p:nvSpPr>
+          <p:cNvPr id="9" name="TextBox 8"/>
+          <p:cNvSpPr txBox="1"/>
+          <p:nvPr/>
+        </p:nvSpPr>
+        <p:spPr>
+          <a:xfrm>
+            <a:off x="822960" y="2270760"/>
+            <a:ext cx="2183815" cy="331978"/>
+          </a:xfrm>
+          <a:prstGeom prst="rect">
+            <a:avLst/>
+          </a:prstGeom>
+          <a:noFill/>
+        </p:spPr>
+        <p:txBody>
+          <a:bodyPr wrap="square" anchor="t" lIns="0" rIns="0" tIns="0" bIns="0">
+            <a:spAutoFit/>
+          </a:bodyPr>
+          <a:lstStyle/>
+          <a:p>
+            <a:pPr algn="l">
+              <a:lnSpc>
+                <a:spcPct val="130000"/>
+              </a:lnSpc>
+              <a:spcBef>
+                <a:spcPts val="0"/>
+              </a:spcBef>
+              <a:spcAft>
+                <a:spcPts val="0"/>
+              </a:spcAft>
+            </a:pPr>
+            <a:r>
+              <a:rPr sz="950" b="0" i="0">
+                <a:solidFill>
+                  <a:srgbClr val="666666"/>
+                </a:solidFill>
+                <a:latin typeface="Manrope"/>
+                <a:cs typeface="Manrope"/>
+                <a:ea typeface="Manrope"/>
+              </a:rPr>
+              <a:t>data.json: 10 аккаунтов, 30 услуг,</a:t>
+            </a:r>
+          </a:p>
+          <a:p>
+            <a:pPr algn="l">
+              <a:lnSpc>
+                <a:spcPct val="130000"/>
+              </a:lnSpc>
+              <a:spcBef>
+                <a:spcPts val="0"/>
+              </a:spcBef>
+              <a:spcAft>
+                <a:spcPts val="0"/>
+              </a:spcAft>
+            </a:pPr>
+            <a:r>
+              <a:rPr sz="950" b="0" i="0">
+                <a:solidFill>
+                  <a:srgbClr val="666666"/>
+                </a:solidFill>
+                <a:latin typeface="Manrope"/>
+                <a:cs typeface="Manrope"/>
+                <a:ea typeface="Manrope"/>
+              </a:rPr>
+              <a:t>100 транзакций</a:t>
+            </a:r>
+          </a:p>
+        </p:txBody>
+      </p:sp>
+      <p:sp>
+        <p:nvSpPr>
+          <p:cNvPr id="10" name="Right Arrow 9"/>
+          <p:cNvSpPr/>
+          <p:nvPr/>
+        </p:nvSpPr>
+        <p:spPr>
+          <a:xfrm>
+            <a:off x="3221659" y="2340864"/>
+            <a:ext cx="173736" cy="219456"/>
+          </a:xfrm>
+          <a:prstGeom prst="rightArrow">
+            <a:avLst/>
+          </a:prstGeom>
+          <a:solidFill>
+            <a:srgbClr val="E1E1E1"/>
+          </a:solidFill>
+          <a:ln>
+            <a:noFill/>
+          </a:ln>
+          <a:effectLst/>
+        </p:spPr>
+        <p:style>
+          <a:lnRef idx="1">
+            <a:schemeClr val="accent1"/>
+          </a:lnRef>
+          <a:fillRef idx="3">
+            <a:schemeClr val="accent1"/>
+          </a:fillRef>
+          <a:effectRef idx="2">
+            <a:schemeClr val="accent1"/>
+          </a:effectRef>
+          <a:fontRef idx="minor">
+            <a:schemeClr val="lt1"/>
+          </a:fontRef>
+        </p:style>
+        <p:txBody>
+          <a:bodyPr rtlCol="0" anchor="ctr"/>
+          <a:lstStyle/>
+          <a:p>
+            <a:pPr algn="ctr"/>
+          </a:p>
+        </p:txBody>
+      </p:sp>
+      <p:sp>
+        <p:nvSpPr>
+          <p:cNvPr id="11" name="Rectangle 10"/>
+          <p:cNvSpPr/>
+          <p:nvPr/>
+        </p:nvSpPr>
+        <p:spPr>
+          <a:xfrm>
+            <a:off x="3445687" y="1856232"/>
+            <a:ext cx="2512999" cy="1188720"/>
+          </a:xfrm>
+          <a:prstGeom prst="rect">
+            <a:avLst/>
+          </a:prstGeom>
+          <a:solidFill>
+            <a:srgbClr val="FFFFFF"/>
+          </a:solidFill>
+          <a:ln w="11430">
+            <a:solidFill>
+              <a:srgbClr val="E1E1E1"/>
+            </a:solidFill>
+          </a:ln>
+          <a:effectLst/>
+        </p:spPr>
+        <p:style>
+          <a:lnRef idx="1">
+            <a:schemeClr val="accent1"/>
+          </a:lnRef>
+          <a:fillRef idx="3">
+            <a:schemeClr val="accent1"/>
+          </a:fillRef>
+          <a:effectRef idx="2">
+            <a:schemeClr val="accent1"/>
+          </a:effectRef>
+          <a:fontRef idx="minor">
+            <a:schemeClr val="lt1"/>
+          </a:fontRef>
+        </p:style>
+        <p:txBody>
+          <a:bodyPr rtlCol="0" anchor="ctr"/>
+          <a:lstStyle/>
+          <a:p>
+            <a:pPr algn="ctr"/>
+          </a:p>
+        </p:txBody>
+      </p:sp>
+      <p:sp>
+        <p:nvSpPr>
+          <p:cNvPr id="12" name="Rectangle 11"/>
+          <p:cNvSpPr/>
+          <p:nvPr/>
+        </p:nvSpPr>
+        <p:spPr>
+          <a:xfrm>
+            <a:off x="3445687" y="1856232"/>
+            <a:ext cx="2512999" cy="41148"/>
+          </a:xfrm>
+          <a:prstGeom prst="rect">
+            <a:avLst/>
+          </a:prstGeom>
+          <a:solidFill>
+            <a:srgbClr val="1F1F1F"/>
+          </a:solidFill>
+          <a:ln>
+            <a:noFill/>
+          </a:ln>
+          <a:effectLst/>
+        </p:spPr>
+        <p:style>
+          <a:lnRef idx="1">
+            <a:schemeClr val="accent1"/>
+          </a:lnRef>
+          <a:fillRef idx="3">
+            <a:schemeClr val="accent1"/>
+          </a:fillRef>
+          <a:effectRef idx="2">
+            <a:schemeClr val="accent1"/>
+          </a:effectRef>
+          <a:fontRef idx="minor">
+            <a:schemeClr val="lt1"/>
+          </a:fontRef>
+        </p:style>
+        <p:txBody>
+          <a:bodyPr rtlCol="0" anchor="ctr"/>
+          <a:lstStyle/>
+          <a:p>
+            <a:pPr algn="ctr"/>
+          </a:p>
+        </p:txBody>
+      </p:sp>
+      <p:sp>
+        <p:nvSpPr>
+          <p:cNvPr id="13" name="TextBox 12"/>
+          <p:cNvSpPr txBox="1"/>
+          <p:nvPr/>
+        </p:nvSpPr>
+        <p:spPr>
+          <a:xfrm>
+            <a:off x="3610279" y="2039112"/>
+            <a:ext cx="2183815" cy="185928"/>
+          </a:xfrm>
+          <a:prstGeom prst="rect">
+            <a:avLst/>
+          </a:prstGeom>
+          <a:noFill/>
+        </p:spPr>
+        <p:txBody>
+          <a:bodyPr wrap="square" anchor="t" lIns="0" rIns="0" tIns="0" bIns="0">
+            <a:spAutoFit/>
+          </a:bodyPr>
+          <a:lstStyle/>
+          <a:p>
+            <a:pPr algn="l">
+              <a:lnSpc>
+                <a:spcPct val="110000"/>
+              </a:lnSpc>
+              <a:spcBef>
+                <a:spcPts val="0"/>
+              </a:spcBef>
+              <a:spcAft>
+                <a:spcPts val="0"/>
+              </a:spcAft>
+            </a:pPr>
+            <a:r>
+              <a:rPr sz="1200" b="1" i="0">
+                <a:solidFill>
+                  <a:srgbClr val="1A1A1A"/>
+                </a:solidFill>
+                <a:latin typeface="Manrope SemiBold"/>
+                <a:cs typeface="Manrope SemiBold"/>
+                <a:ea typeface="Manrope SemiBold"/>
+              </a:rPr>
+              <a:t>Импорт с проверкой</a:t>
+            </a:r>
+          </a:p>
+        </p:txBody>
+      </p:sp>
+      <p:sp>
+        <p:nvSpPr>
+          <p:cNvPr id="14" name="TextBox 13"/>
+          <p:cNvSpPr txBox="1"/>
+          <p:nvPr/>
+        </p:nvSpPr>
+        <p:spPr>
+          <a:xfrm>
+            <a:off x="3610279" y="2270760"/>
+            <a:ext cx="2183815" cy="331978"/>
+          </a:xfrm>
+          <a:prstGeom prst="rect">
+            <a:avLst/>
+          </a:prstGeom>
+          <a:noFill/>
+        </p:spPr>
+        <p:txBody>
+          <a:bodyPr wrap="square" anchor="t" lIns="0" rIns="0" tIns="0" bIns="0">
+            <a:spAutoFit/>
+          </a:bodyPr>
+          <a:lstStyle/>
+          <a:p>
+            <a:pPr algn="l">
+              <a:lnSpc>
+                <a:spcPct val="130000"/>
+              </a:lnSpc>
+              <a:spcBef>
+                <a:spcPts val="0"/>
+              </a:spcBef>
+              <a:spcAft>
+                <a:spcPts val="0"/>
+              </a:spcAft>
+            </a:pPr>
+            <a:r>
+              <a:rPr sz="950" b="0" i="0">
+                <a:solidFill>
+                  <a:srgbClr val="666666"/>
+                </a:solidFill>
+                <a:latin typeface="Manrope"/>
+                <a:cs typeface="Manrope"/>
+                <a:ea typeface="Manrope"/>
+              </a:rPr>
+              <a:t>валидация целиком до записи,</a:t>
+            </a:r>
+          </a:p>
+          <a:p>
+            <a:pPr algn="l">
+              <a:lnSpc>
+                <a:spcPct val="130000"/>
+              </a:lnSpc>
+              <a:spcBef>
+                <a:spcPts val="0"/>
+              </a:spcBef>
+              <a:spcAft>
+                <a:spcPts val="0"/>
+              </a:spcAft>
+            </a:pPr>
+            <a:r>
+              <a:rPr sz="950" b="0" i="0">
+                <a:solidFill>
+                  <a:srgbClr val="666666"/>
+                </a:solidFill>
+                <a:latin typeface="Manrope"/>
+                <a:cs typeface="Manrope"/>
+                <a:ea typeface="Manrope"/>
+              </a:rPr>
+              <a:t>применение атомарно</a:t>
+            </a:r>
+          </a:p>
+        </p:txBody>
+      </p:sp>
+      <p:sp>
+        <p:nvSpPr>
+          <p:cNvPr id="15" name="Right Arrow 14"/>
+          <p:cNvSpPr/>
+          <p:nvPr/>
+        </p:nvSpPr>
+        <p:spPr>
+          <a:xfrm>
+            <a:off x="6008978" y="2340864"/>
+            <a:ext cx="173736" cy="219456"/>
+          </a:xfrm>
+          <a:prstGeom prst="rightArrow">
+            <a:avLst/>
+          </a:prstGeom>
+          <a:solidFill>
+            <a:srgbClr val="E1E1E1"/>
+          </a:solidFill>
+          <a:ln>
+            <a:noFill/>
+          </a:ln>
+          <a:effectLst/>
+        </p:spPr>
+        <p:style>
+          <a:lnRef idx="1">
+            <a:schemeClr val="accent1"/>
+          </a:lnRef>
+          <a:fillRef idx="3">
+            <a:schemeClr val="accent1"/>
+          </a:fillRef>
+          <a:effectRef idx="2">
+            <a:schemeClr val="accent1"/>
+          </a:effectRef>
+          <a:fontRef idx="minor">
+            <a:schemeClr val="lt1"/>
+          </a:fontRef>
+        </p:style>
+        <p:txBody>
+          <a:bodyPr rtlCol="0" anchor="ctr"/>
+          <a:lstStyle/>
+          <a:p>
+            <a:pPr algn="ctr"/>
+          </a:p>
+        </p:txBody>
+      </p:sp>
+      <p:sp>
+        <p:nvSpPr>
+          <p:cNvPr id="16" name="Rectangle 15"/>
+          <p:cNvSpPr/>
+          <p:nvPr/>
+        </p:nvSpPr>
+        <p:spPr>
+          <a:xfrm>
+            <a:off x="6233006" y="1856232"/>
+            <a:ext cx="2512999" cy="1188720"/>
+          </a:xfrm>
+          <a:prstGeom prst="rect">
+            <a:avLst/>
+          </a:prstGeom>
+          <a:solidFill>
+            <a:srgbClr val="FFFFFF"/>
+          </a:solidFill>
+          <a:ln w="11430">
+            <a:solidFill>
+              <a:srgbClr val="E1E1E1"/>
+            </a:solidFill>
+          </a:ln>
+          <a:effectLst/>
+        </p:spPr>
+        <p:style>
+          <a:lnRef idx="1">
+            <a:schemeClr val="accent1"/>
+          </a:lnRef>
+          <a:fillRef idx="3">
+            <a:schemeClr val="accent1"/>
+          </a:fillRef>
+          <a:effectRef idx="2">
+            <a:schemeClr val="accent1"/>
+          </a:effectRef>
+          <a:fontRef idx="minor">
+            <a:schemeClr val="lt1"/>
+          </a:fontRef>
+        </p:style>
+        <p:txBody>
+          <a:bodyPr rtlCol="0" anchor="ctr"/>
+          <a:lstStyle/>
+          <a:p>
+            <a:pPr algn="ctr"/>
+          </a:p>
+        </p:txBody>
+      </p:sp>
+      <p:sp>
+        <p:nvSpPr>
+          <p:cNvPr id="17" name="Rectangle 16"/>
+          <p:cNvSpPr/>
+          <p:nvPr/>
+        </p:nvSpPr>
+        <p:spPr>
+          <a:xfrm>
+            <a:off x="6233006" y="1856232"/>
+            <a:ext cx="2512999" cy="41148"/>
+          </a:xfrm>
+          <a:prstGeom prst="rect">
+            <a:avLst/>
+          </a:prstGeom>
+          <a:solidFill>
+            <a:srgbClr val="1F1F1F"/>
+          </a:solidFill>
+          <a:ln>
+            <a:noFill/>
+          </a:ln>
+          <a:effectLst/>
+        </p:spPr>
+        <p:style>
+          <a:lnRef idx="1">
+            <a:schemeClr val="accent1"/>
+          </a:lnRef>
+          <a:fillRef idx="3">
+            <a:schemeClr val="accent1"/>
+          </a:fillRef>
+          <a:effectRef idx="2">
+            <a:schemeClr val="accent1"/>
+          </a:effectRef>
+          <a:fontRef idx="minor">
+            <a:schemeClr val="lt1"/>
+          </a:fontRef>
+        </p:style>
+        <p:txBody>
+          <a:bodyPr rtlCol="0" anchor="ctr"/>
+          <a:lstStyle/>
+          <a:p>
+            <a:pPr algn="ctr"/>
+          </a:p>
+        </p:txBody>
+      </p:sp>
+      <p:sp>
+        <p:nvSpPr>
+          <p:cNvPr id="18" name="TextBox 17"/>
+          <p:cNvSpPr txBox="1"/>
+          <p:nvPr/>
+        </p:nvSpPr>
+        <p:spPr>
+          <a:xfrm>
+            <a:off x="6397598" y="2039112"/>
+            <a:ext cx="2183815" cy="185928"/>
+          </a:xfrm>
+          <a:prstGeom prst="rect">
+            <a:avLst/>
+          </a:prstGeom>
+          <a:noFill/>
+        </p:spPr>
+        <p:txBody>
+          <a:bodyPr wrap="square" anchor="t" lIns="0" rIns="0" tIns="0" bIns="0">
+            <a:spAutoFit/>
+          </a:bodyPr>
+          <a:lstStyle/>
+          <a:p>
+            <a:pPr algn="l">
+              <a:lnSpc>
+                <a:spcPct val="110000"/>
+              </a:lnSpc>
+              <a:spcBef>
+                <a:spcPts val="0"/>
+              </a:spcBef>
+              <a:spcAft>
+                <a:spcPts val="0"/>
+              </a:spcAft>
+            </a:pPr>
+            <a:r>
+              <a:rPr sz="1200" b="1" i="0">
+                <a:solidFill>
+                  <a:srgbClr val="1A1A1A"/>
+                </a:solidFill>
+                <a:latin typeface="Manrope SemiBold"/>
+                <a:cs typeface="Manrope SemiBold"/>
+                <a:ea typeface="Manrope SemiBold"/>
+              </a:rPr>
+              <a:t>Скоринг</a:t>
+            </a:r>
+          </a:p>
+        </p:txBody>
+      </p:sp>
+      <p:sp>
+        <p:nvSpPr>
+          <p:cNvPr id="19" name="TextBox 18"/>
+          <p:cNvSpPr txBox="1"/>
+          <p:nvPr/>
+        </p:nvSpPr>
+        <p:spPr>
+          <a:xfrm>
+            <a:off x="6397598" y="2270760"/>
+            <a:ext cx="2183815" cy="331978"/>
+          </a:xfrm>
+          <a:prstGeom prst="rect">
+            <a:avLst/>
+          </a:prstGeom>
+          <a:noFill/>
+        </p:spPr>
+        <p:txBody>
+          <a:bodyPr wrap="square" anchor="t" lIns="0" rIns="0" tIns="0" bIns="0">
+            <a:spAutoFit/>
+          </a:bodyPr>
+          <a:lstStyle/>
+          <a:p>
+            <a:pPr algn="l">
+              <a:lnSpc>
+                <a:spcPct val="130000"/>
+              </a:lnSpc>
+              <a:spcBef>
+                <a:spcPts val="0"/>
+              </a:spcBef>
+              <a:spcAft>
+                <a:spcPts val="0"/>
+              </a:spcAft>
+            </a:pPr>
+            <a:r>
+              <a:rPr sz="950" b="0" i="0">
+                <a:solidFill>
+                  <a:srgbClr val="666666"/>
+                </a:solidFill>
+                <a:latin typeface="Manrope"/>
+                <a:cs typeface="Manrope"/>
+                <a:ea typeface="Manrope"/>
+              </a:rPr>
+              <a:t>один модуль: вес × фактор, сумма</a:t>
+            </a:r>
+          </a:p>
+          <a:p>
+            <a:pPr algn="l">
+              <a:lnSpc>
+                <a:spcPct val="130000"/>
+              </a:lnSpc>
+              <a:spcBef>
+                <a:spcPts val="0"/>
+              </a:spcBef>
+              <a:spcAft>
+                <a:spcPts val="0"/>
+              </a:spcAft>
+            </a:pPr>
+            <a:r>
+              <a:rPr sz="950" b="0" i="0">
+                <a:solidFill>
+                  <a:srgbClr val="666666"/>
+                </a:solidFill>
+                <a:latin typeface="Manrope"/>
+                <a:cs typeface="Manrope"/>
+                <a:ea typeface="Manrope"/>
+              </a:rPr>
+              <a:t>весов в знаменателе</a:t>
+            </a:r>
+          </a:p>
+        </p:txBody>
+      </p:sp>
+      <p:sp>
+        <p:nvSpPr>
+          <p:cNvPr id="20" name="Right Arrow 19"/>
+          <p:cNvSpPr/>
+          <p:nvPr/>
+        </p:nvSpPr>
+        <p:spPr>
+          <a:xfrm>
+            <a:off x="8796297" y="2340864"/>
+            <a:ext cx="173736" cy="219456"/>
+          </a:xfrm>
+          <a:prstGeom prst="rightArrow">
+            <a:avLst/>
+          </a:prstGeom>
+          <a:solidFill>
+            <a:srgbClr val="E1E1E1"/>
+          </a:solidFill>
+          <a:ln>
+            <a:noFill/>
+          </a:ln>
+          <a:effectLst/>
+        </p:spPr>
+        <p:style>
+          <a:lnRef idx="1">
+            <a:schemeClr val="accent1"/>
+          </a:lnRef>
+          <a:fillRef idx="3">
+            <a:schemeClr val="accent1"/>
+          </a:fillRef>
+          <a:effectRef idx="2">
+            <a:schemeClr val="accent1"/>
+          </a:effectRef>
+          <a:fontRef idx="minor">
+            <a:schemeClr val="lt1"/>
+          </a:fontRef>
+        </p:style>
+        <p:txBody>
+          <a:bodyPr rtlCol="0" anchor="ctr"/>
+          <a:lstStyle/>
+          <a:p>
+            <a:pPr algn="ctr"/>
+          </a:p>
+        </p:txBody>
+      </p:sp>
+      <p:sp>
+        <p:nvSpPr>
+          <p:cNvPr id="21" name="Rectangle 20"/>
+          <p:cNvSpPr/>
+          <p:nvPr/>
+        </p:nvSpPr>
+        <p:spPr>
+          <a:xfrm>
+            <a:off x="9020325" y="1856232"/>
+            <a:ext cx="2512999" cy="1188720"/>
+          </a:xfrm>
+          <a:prstGeom prst="rect">
+            <a:avLst/>
+          </a:prstGeom>
+          <a:solidFill>
+            <a:srgbClr val="FFFFFF"/>
+          </a:solidFill>
+          <a:ln w="11430">
+            <a:solidFill>
+              <a:srgbClr val="E1E1E1"/>
+            </a:solidFill>
+          </a:ln>
+          <a:effectLst/>
+        </p:spPr>
+        <p:style>
+          <a:lnRef idx="1">
+            <a:schemeClr val="accent1"/>
+          </a:lnRef>
+          <a:fillRef idx="3">
+            <a:schemeClr val="accent1"/>
+          </a:fillRef>
+          <a:effectRef idx="2">
+            <a:schemeClr val="accent1"/>
+          </a:effectRef>
+          <a:fontRef idx="minor">
+            <a:schemeClr val="lt1"/>
+          </a:fontRef>
+        </p:style>
+        <p:txBody>
+          <a:bodyPr rtlCol="0" anchor="ctr"/>
+          <a:lstStyle/>
+          <a:p>
+            <a:pPr algn="ctr"/>
+          </a:p>
+        </p:txBody>
+      </p:sp>
+      <p:sp>
+        <p:nvSpPr>
+          <p:cNvPr id="22" name="Rectangle 21"/>
+          <p:cNvSpPr/>
+          <p:nvPr/>
+        </p:nvSpPr>
+        <p:spPr>
+          <a:xfrm>
+            <a:off x="9020325" y="1856232"/>
+            <a:ext cx="2512999" cy="41148"/>
+          </a:xfrm>
+          <a:prstGeom prst="rect">
+            <a:avLst/>
+          </a:prstGeom>
+          <a:solidFill>
+            <a:srgbClr val="B84A00"/>
+          </a:solidFill>
+          <a:ln>
+            <a:noFill/>
+          </a:ln>
+          <a:effectLst/>
+        </p:spPr>
+        <p:style>
+          <a:lnRef idx="1">
+            <a:schemeClr val="accent1"/>
+          </a:lnRef>
+          <a:fillRef idx="3">
+            <a:schemeClr val="accent1"/>
+          </a:fillRef>
+          <a:effectRef idx="2">
+            <a:schemeClr val="accent1"/>
+          </a:effectRef>
+          <a:fontRef idx="minor">
+            <a:schemeClr val="lt1"/>
+          </a:fontRef>
+        </p:style>
+        <p:txBody>
+          <a:bodyPr rtlCol="0" anchor="ctr"/>
+          <a:lstStyle/>
+          <a:p>
+            <a:pPr algn="ctr"/>
+          </a:p>
+        </p:txBody>
+      </p:sp>
+      <p:sp>
+        <p:nvSpPr>
+          <p:cNvPr id="23" name="TextBox 22"/>
+          <p:cNvSpPr txBox="1"/>
+          <p:nvPr/>
+        </p:nvSpPr>
+        <p:spPr>
+          <a:xfrm>
+            <a:off x="9184917" y="2039112"/>
+            <a:ext cx="2183815" cy="185928"/>
+          </a:xfrm>
+          <a:prstGeom prst="rect">
+            <a:avLst/>
+          </a:prstGeom>
+          <a:noFill/>
+        </p:spPr>
+        <p:txBody>
+          <a:bodyPr wrap="square" anchor="t" lIns="0" rIns="0" tIns="0" bIns="0">
+            <a:spAutoFit/>
+          </a:bodyPr>
+          <a:lstStyle/>
+          <a:p>
+            <a:pPr algn="l">
+              <a:lnSpc>
+                <a:spcPct val="110000"/>
+              </a:lnSpc>
+              <a:spcBef>
+                <a:spcPts val="0"/>
+              </a:spcBef>
+              <a:spcAft>
+                <a:spcPts val="0"/>
+              </a:spcAft>
+            </a:pPr>
+            <a:r>
+              <a:rPr sz="1200" b="1" i="0">
+                <a:solidFill>
+                  <a:srgbClr val="1A1A1A"/>
+                </a:solidFill>
+                <a:latin typeface="Manrope SemiBold"/>
+                <a:cs typeface="Manrope SemiBold"/>
+                <a:ea typeface="Manrope SemiBold"/>
+              </a:rPr>
+              <a:t>API и интерфейс</a:t>
+            </a:r>
+          </a:p>
+        </p:txBody>
+      </p:sp>
+      <p:sp>
+        <p:nvSpPr>
+          <p:cNvPr id="24" name="TextBox 23"/>
+          <p:cNvSpPr txBox="1"/>
+          <p:nvPr/>
+        </p:nvSpPr>
+        <p:spPr>
+          <a:xfrm>
+            <a:off x="9184917" y="2270760"/>
+            <a:ext cx="2183815" cy="331978"/>
+          </a:xfrm>
+          <a:prstGeom prst="rect">
+            <a:avLst/>
+          </a:prstGeom>
+          <a:noFill/>
+        </p:spPr>
+        <p:txBody>
+          <a:bodyPr wrap="square" anchor="t" lIns="0" rIns="0" tIns="0" bIns="0">
+            <a:spAutoFit/>
+          </a:bodyPr>
+          <a:lstStyle/>
+          <a:p>
+            <a:pPr algn="l">
+              <a:lnSpc>
+                <a:spcPct val="130000"/>
+              </a:lnSpc>
+              <a:spcBef>
+                <a:spcPts val="0"/>
+              </a:spcBef>
+              <a:spcAft>
+                <a:spcPts val="0"/>
+              </a:spcAft>
+            </a:pPr>
+            <a:r>
+              <a:rPr sz="950" b="0" i="0">
+                <a:solidFill>
+                  <a:srgbClr val="666666"/>
+                </a:solidFill>
+                <a:latin typeface="Manrope"/>
+                <a:cs typeface="Manrope"/>
+                <a:ea typeface="Manrope"/>
+              </a:rPr>
+              <a:t>FastAPI + Postgres, панель</a:t>
+            </a:r>
+          </a:p>
+          <a:p>
+            <a:pPr algn="l">
+              <a:lnSpc>
+                <a:spcPct val="130000"/>
+              </a:lnSpc>
+              <a:spcBef>
+                <a:spcPts val="0"/>
+              </a:spcBef>
+              <a:spcAft>
+                <a:spcPts val="0"/>
+              </a:spcAft>
+            </a:pPr>
+            <a:r>
+              <a:rPr sz="950" b="0" i="0">
+                <a:solidFill>
+                  <a:srgbClr val="666666"/>
+                </a:solidFill>
+                <a:latin typeface="Manrope"/>
+                <a:cs typeface="Manrope"/>
+                <a:ea typeface="Manrope"/>
+              </a:rPr>
+              <a:t>аналитика на React</a:t>
+            </a:r>
+          </a:p>
+        </p:txBody>
+      </p:sp>
+      <p:sp>
+        <p:nvSpPr>
+          <p:cNvPr id="25" name="Rectangle 24"/>
+          <p:cNvSpPr/>
+          <p:nvPr/>
+        </p:nvSpPr>
+        <p:spPr>
+          <a:xfrm>
+            <a:off x="658368" y="3319272"/>
+            <a:ext cx="5274355" cy="2734056"/>
+          </a:xfrm>
+          <a:prstGeom prst="rect">
+            <a:avLst/>
+          </a:prstGeom>
+          <a:solidFill>
+            <a:srgbClr val="FFFFFF"/>
+          </a:solidFill>
+          <a:ln w="11430">
+            <a:solidFill>
+              <a:srgbClr val="E1E1E1"/>
+            </a:solidFill>
+          </a:ln>
+          <a:effectLst/>
+        </p:spPr>
+        <p:style>
+          <a:lnRef idx="1">
+            <a:schemeClr val="accent1"/>
+          </a:lnRef>
+          <a:fillRef idx="3">
+            <a:schemeClr val="accent1"/>
+          </a:fillRef>
+          <a:effectRef idx="2">
+            <a:schemeClr val="accent1"/>
+          </a:effectRef>
+          <a:fontRef idx="minor">
+            <a:schemeClr val="lt1"/>
+          </a:fontRef>
+        </p:style>
+        <p:txBody>
+          <a:bodyPr rtlCol="0" anchor="ctr"/>
+          <a:lstStyle/>
+          <a:p>
+            <a:pPr algn="ctr"/>
+          </a:p>
+        </p:txBody>
+      </p:sp>
+      <p:sp>
+        <p:nvSpPr>
+          <p:cNvPr id="26" name="TextBox 25"/>
+          <p:cNvSpPr txBox="1"/>
+          <p:nvPr/>
+        </p:nvSpPr>
+        <p:spPr>
+          <a:xfrm>
+            <a:off x="877824" y="3483864"/>
+            <a:ext cx="4835443" cy="192913"/>
+          </a:xfrm>
+          <a:prstGeom prst="rect">
+            <a:avLst/>
+          </a:prstGeom>
+          <a:noFill/>
+        </p:spPr>
+        <p:txBody>
+          <a:bodyPr wrap="square" anchor="t" lIns="0" rIns="0" tIns="0" bIns="0">
+            <a:spAutoFit/>
+          </a:bodyPr>
+          <a:lstStyle/>
+          <a:p>
+            <a:pPr algn="l">
+              <a:lnSpc>
+                <a:spcPct val="110000"/>
+              </a:lnSpc>
+              <a:spcBef>
+                <a:spcPts val="0"/>
+              </a:spcBef>
+              <a:spcAft>
+                <a:spcPts val="0"/>
+              </a:spcAft>
+            </a:pPr>
+            <a:r>
+              <a:rPr sz="1250" b="1" i="0">
+                <a:solidFill>
+                  <a:srgbClr val="1A1A1A"/>
+                </a:solidFill>
+                <a:latin typeface="Manrope SemiBold"/>
+                <a:cs typeface="Manrope SemiBold"/>
+                <a:ea typeface="Manrope SemiBold"/>
+              </a:rPr>
+              <a:t>Как обрабатываются пропуски</a:t>
+            </a:r>
+          </a:p>
+        </p:txBody>
+      </p:sp>
+      <p:sp>
+        <p:nvSpPr>
+          <p:cNvPr id="27" name="TextBox 26"/>
+          <p:cNvSpPr txBox="1"/>
+          <p:nvPr/>
+        </p:nvSpPr>
+        <p:spPr>
+          <a:xfrm>
+            <a:off x="877824" y="3731641"/>
+            <a:ext cx="4835443" cy="1379728"/>
+          </a:xfrm>
+          <a:prstGeom prst="rect">
+            <a:avLst/>
+          </a:prstGeom>
+          <a:noFill/>
+        </p:spPr>
+        <p:txBody>
+          <a:bodyPr wrap="square" anchor="t" lIns="0" rIns="0" tIns="0" bIns="0">
+            <a:spAutoFit/>
+          </a:bodyPr>
+          <a:lstStyle/>
+          <a:p>
+            <a:pPr algn="l">
+              <a:lnSpc>
+                <a:spcPct val="134000"/>
+              </a:lnSpc>
+              <a:spcBef>
+                <a:spcPts val="0"/>
+              </a:spcBef>
+              <a:spcAft>
+                <a:spcPts val="0"/>
+              </a:spcAft>
+            </a:pPr>
+            <a:r>
+              <a:rPr sz="1000" b="0" i="0">
+                <a:solidFill>
+                  <a:srgbClr val="666666"/>
+                </a:solidFill>
+                <a:latin typeface="Manrope"/>
+                <a:cs typeface="Manrope"/>
+                <a:ea typeface="Manrope"/>
+              </a:rPr>
+              <a:t>• Неизвестное ≠ ноль: фактор без данных исключается из числителя и</a:t>
+            </a:r>
+          </a:p>
+          <a:p>
+            <a:pPr algn="l">
+              <a:lnSpc>
+                <a:spcPct val="134000"/>
+              </a:lnSpc>
+              <a:spcBef>
+                <a:spcPts val="0"/>
+              </a:spcBef>
+              <a:spcAft>
+                <a:spcPts val="0"/>
+              </a:spcAft>
+            </a:pPr>
+            <a:r>
+              <a:rPr sz="1000" b="0" i="0">
+                <a:solidFill>
+                  <a:srgbClr val="666666"/>
+                </a:solidFill>
+                <a:latin typeface="Manrope"/>
+                <a:cs typeface="Manrope"/>
+                <a:ea typeface="Manrope"/>
+              </a:rPr>
+              <a:t>знаменателя, веса перенормируются.</a:t>
+            </a:r>
+          </a:p>
+          <a:p>
+            <a:pPr algn="l">
+              <a:lnSpc>
+                <a:spcPct val="134000"/>
+              </a:lnSpc>
+              <a:spcBef>
+                <a:spcPts val="0"/>
+              </a:spcBef>
+              <a:spcAft>
+                <a:spcPts val="0"/>
+              </a:spcAft>
+            </a:pPr>
+            <a:r>
+              <a:rPr sz="1000" b="0" i="0">
+                <a:solidFill>
+                  <a:srgbClr val="666666"/>
+                </a:solidFill>
+                <a:latin typeface="Manrope"/>
+                <a:cs typeface="Manrope"/>
+                <a:ea typeface="Manrope"/>
+              </a:rPr>
+              <a:t>• Услуги deleted и blocked — состоявшееся событие, а не прогноз: балл им не</a:t>
+            </a:r>
+          </a:p>
+          <a:p>
+            <a:pPr algn="l">
+              <a:lnSpc>
+                <a:spcPct val="134000"/>
+              </a:lnSpc>
+              <a:spcBef>
+                <a:spcPts val="0"/>
+              </a:spcBef>
+              <a:spcAft>
+                <a:spcPts val="0"/>
+              </a:spcAft>
+            </a:pPr>
+            <a:r>
+              <a:rPr sz="1000" b="0" i="0">
+                <a:solidFill>
+                  <a:srgbClr val="666666"/>
+                </a:solidFill>
+                <a:latin typeface="Manrope"/>
+                <a:cs typeface="Manrope"/>
+                <a:ea typeface="Manrope"/>
+              </a:rPr>
+              <a:t>присваивается.</a:t>
+            </a:r>
+          </a:p>
+          <a:p>
+            <a:pPr algn="l">
+              <a:lnSpc>
+                <a:spcPct val="134000"/>
+              </a:lnSpc>
+              <a:spcBef>
+                <a:spcPts val="0"/>
+              </a:spcBef>
+              <a:spcAft>
+                <a:spcPts val="0"/>
+              </a:spcAft>
+            </a:pPr>
+            <a:r>
+              <a:rPr sz="1000" b="0" i="0">
+                <a:solidFill>
+                  <a:srgbClr val="666666"/>
+                </a:solidFill>
+                <a:latin typeface="Manrope"/>
+                <a:cs typeface="Manrope"/>
+                <a:ea typeface="Manrope"/>
+              </a:rPr>
+              <a:t>• Цена не входит в формулу риска: price — это экспозиция, а не вероятность</a:t>
+            </a:r>
+          </a:p>
+          <a:p>
+            <a:pPr algn="l">
+              <a:lnSpc>
+                <a:spcPct val="134000"/>
+              </a:lnSpc>
+              <a:spcBef>
+                <a:spcPts val="0"/>
+              </a:spcBef>
+              <a:spcAft>
+                <a:spcPts val="0"/>
+              </a:spcAft>
+            </a:pPr>
+            <a:r>
+              <a:rPr sz="1000" b="0" i="0">
+                <a:solidFill>
+                  <a:srgbClr val="666666"/>
+                </a:solidFill>
+                <a:latin typeface="Manrope"/>
+                <a:cs typeface="Manrope"/>
+                <a:ea typeface="Manrope"/>
+              </a:rPr>
+              <a:t>ухода.</a:t>
+            </a:r>
+          </a:p>
+          <a:p>
+            <a:pPr algn="l">
+              <a:lnSpc>
+                <a:spcPct val="134000"/>
+              </a:lnSpc>
+              <a:spcBef>
+                <a:spcPts val="0"/>
+              </a:spcBef>
+              <a:spcAft>
+                <a:spcPts val="0"/>
+              </a:spcAft>
+            </a:pPr>
+            <a:r>
+              <a:rPr sz="1000" b="0" i="0">
+                <a:solidFill>
+                  <a:srgbClr val="666666"/>
+                </a:solidFill>
+                <a:latin typeface="Manrope"/>
+                <a:cs typeface="Manrope"/>
+                <a:ea typeface="Manrope"/>
+              </a:rPr>
+              <a:t>• Опорный момент зафиксирован (2026-10-19 15:00 UTC), поэтому числа</a:t>
+            </a:r>
+          </a:p>
+          <a:p>
+            <a:pPr algn="l">
+              <a:lnSpc>
+                <a:spcPct val="134000"/>
+              </a:lnSpc>
+              <a:spcBef>
+                <a:spcPts val="0"/>
+              </a:spcBef>
+              <a:spcAft>
+                <a:spcPts val="0"/>
+              </a:spcAft>
+            </a:pPr>
+            <a:r>
+              <a:rPr sz="1000" b="0" i="0">
+                <a:solidFill>
+                  <a:srgbClr val="666666"/>
+                </a:solidFill>
+                <a:latin typeface="Manrope"/>
+                <a:cs typeface="Manrope"/>
+                <a:ea typeface="Manrope"/>
+              </a:rPr>
+              <a:t>воспроизводимы.</a:t>
+            </a:r>
+          </a:p>
+        </p:txBody>
+      </p:sp>
+      <p:sp>
+        <p:nvSpPr>
+          <p:cNvPr id="28" name="Rectangle 27"/>
+          <p:cNvSpPr/>
+          <p:nvPr/>
+        </p:nvSpPr>
+        <p:spPr>
+          <a:xfrm>
+            <a:off x="6207043" y="3319272"/>
+            <a:ext cx="5326284" cy="2734056"/>
+          </a:xfrm>
+          <a:prstGeom prst="rect">
+            <a:avLst/>
+          </a:prstGeom>
+          <a:solidFill>
+            <a:srgbClr val="FFFFFF"/>
+          </a:solidFill>
+          <a:ln w="11430">
+            <a:solidFill>
+              <a:srgbClr val="E1E1E1"/>
+            </a:solidFill>
+          </a:ln>
+          <a:effectLst/>
+        </p:spPr>
+        <p:style>
+          <a:lnRef idx="1">
+            <a:schemeClr val="accent1"/>
+          </a:lnRef>
+          <a:fillRef idx="3">
+            <a:schemeClr val="accent1"/>
+          </a:fillRef>
+          <a:effectRef idx="2">
+            <a:schemeClr val="accent1"/>
+          </a:effectRef>
+          <a:fontRef idx="minor">
+            <a:schemeClr val="lt1"/>
+          </a:fontRef>
+        </p:style>
+        <p:txBody>
+          <a:bodyPr rtlCol="0" anchor="ctr"/>
+          <a:lstStyle/>
+          <a:p>
+            <a:pPr algn="ctr"/>
+          </a:p>
+        </p:txBody>
+      </p:sp>
+      <p:sp>
+        <p:nvSpPr>
+          <p:cNvPr id="29" name="TextBox 28"/>
+          <p:cNvSpPr txBox="1"/>
+          <p:nvPr/>
+        </p:nvSpPr>
+        <p:spPr>
+          <a:xfrm>
+            <a:off x="6426499" y="3483864"/>
+            <a:ext cx="4887372" cy="192913"/>
+          </a:xfrm>
+          <a:prstGeom prst="rect">
+            <a:avLst/>
+          </a:prstGeom>
+          <a:noFill/>
+        </p:spPr>
+        <p:txBody>
+          <a:bodyPr wrap="square" anchor="t" lIns="0" rIns="0" tIns="0" bIns="0">
+            <a:spAutoFit/>
+          </a:bodyPr>
+          <a:lstStyle/>
+          <a:p>
+            <a:pPr algn="l">
+              <a:lnSpc>
+                <a:spcPct val="110000"/>
+              </a:lnSpc>
+              <a:spcBef>
+                <a:spcPts val="0"/>
+              </a:spcBef>
+              <a:spcAft>
+                <a:spcPts val="0"/>
+              </a:spcAft>
+            </a:pPr>
+            <a:r>
+              <a:rPr sz="1250" b="1" i="0">
+                <a:solidFill>
+                  <a:srgbClr val="1A1A1A"/>
+                </a:solidFill>
+                <a:latin typeface="Manrope SemiBold"/>
+                <a:cs typeface="Manrope SemiBold"/>
+                <a:ea typeface="Manrope SemiBold"/>
+              </a:rPr>
+              <a:t>Ограничения, которые важно знать</a:t>
+            </a:r>
+          </a:p>
+        </p:txBody>
+      </p:sp>
+      <p:sp>
+        <p:nvSpPr>
+          <p:cNvPr id="30" name="TextBox 29"/>
+          <p:cNvSpPr txBox="1"/>
+          <p:nvPr/>
+        </p:nvSpPr>
+        <p:spPr>
+          <a:xfrm>
+            <a:off x="6426499" y="3731641"/>
+            <a:ext cx="4887372" cy="1039368"/>
+          </a:xfrm>
+          <a:prstGeom prst="rect">
+            <a:avLst/>
+          </a:prstGeom>
+          <a:noFill/>
+        </p:spPr>
+        <p:txBody>
+          <a:bodyPr wrap="square" anchor="t" lIns="0" rIns="0" tIns="0" bIns="0">
+            <a:spAutoFit/>
+          </a:bodyPr>
+          <a:lstStyle/>
+          <a:p>
+            <a:pPr algn="l">
+              <a:lnSpc>
+                <a:spcPct val="134000"/>
+              </a:lnSpc>
+              <a:spcBef>
+                <a:spcPts val="0"/>
+              </a:spcBef>
+              <a:spcAft>
+                <a:spcPts val="0"/>
+              </a:spcAft>
+            </a:pPr>
+            <a:r>
+              <a:rPr sz="1000" b="0" i="0">
+                <a:solidFill>
+                  <a:srgbClr val="666666"/>
+                </a:solidFill>
+                <a:latin typeface="Manrope"/>
+                <a:cs typeface="Manrope"/>
+                <a:ea typeface="Manrope"/>
+              </a:rPr>
+              <a:t>• Нет истории оттока — отсюда модель на правилах и отсутствие метрик</a:t>
+            </a:r>
+          </a:p>
+          <a:p>
+            <a:pPr algn="l">
+              <a:lnSpc>
+                <a:spcPct val="134000"/>
+              </a:lnSpc>
+              <a:spcBef>
+                <a:spcPts val="0"/>
+              </a:spcBef>
+              <a:spcAft>
+                <a:spcPts val="0"/>
+              </a:spcAft>
+            </a:pPr>
+            <a:r>
+              <a:rPr sz="1000" b="0" i="0">
+                <a:solidFill>
+                  <a:srgbClr val="666666"/>
+                </a:solidFill>
+                <a:latin typeface="Manrope"/>
+                <a:cs typeface="Manrope"/>
+                <a:ea typeface="Manrope"/>
+              </a:rPr>
+              <a:t>точности.</a:t>
+            </a:r>
+          </a:p>
+          <a:p>
+            <a:pPr algn="l">
+              <a:lnSpc>
+                <a:spcPct val="134000"/>
+              </a:lnSpc>
+              <a:spcBef>
+                <a:spcPts val="0"/>
+              </a:spcBef>
+              <a:spcAft>
+                <a:spcPts val="0"/>
+              </a:spcAft>
+            </a:pPr>
+            <a:r>
+              <a:rPr sz="1000" b="0" i="0">
+                <a:solidFill>
+                  <a:srgbClr val="666666"/>
+                </a:solidFill>
+                <a:latin typeface="Manrope"/>
+                <a:cs typeface="Manrope"/>
+                <a:ea typeface="Manrope"/>
+              </a:rPr>
+              <a:t>• Нет календаря будущих списаний: даты продлений выведены из expiresAt и</a:t>
+            </a:r>
+          </a:p>
+          <a:p>
+            <a:pPr algn="l">
+              <a:lnSpc>
+                <a:spcPct val="134000"/>
+              </a:lnSpc>
+              <a:spcBef>
+                <a:spcPts val="0"/>
+              </a:spcBef>
+              <a:spcAft>
+                <a:spcPts val="0"/>
+              </a:spcAft>
+            </a:pPr>
+            <a:r>
+              <a:rPr sz="1000" b="0" i="0">
+                <a:solidFill>
+                  <a:srgbClr val="666666"/>
+                </a:solidFill>
+                <a:latin typeface="Manrope"/>
+                <a:cs typeface="Manrope"/>
+                <a:ea typeface="Manrope"/>
+              </a:rPr>
+              <a:t>paymentTerm.</a:t>
+            </a:r>
+          </a:p>
+          <a:p>
+            <a:pPr algn="l">
+              <a:lnSpc>
+                <a:spcPct val="134000"/>
+              </a:lnSpc>
+              <a:spcBef>
+                <a:spcPts val="0"/>
+              </a:spcBef>
+              <a:spcAft>
+                <a:spcPts val="0"/>
+              </a:spcAft>
+            </a:pPr>
+            <a:r>
+              <a:rPr sz="1000" b="0" i="0">
+                <a:solidFill>
+                  <a:srgbClr val="666666"/>
+                </a:solidFill>
+                <a:latin typeface="Manrope"/>
+                <a:cs typeface="Manrope"/>
+                <a:ea typeface="Manrope"/>
+              </a:rPr>
+              <a:t>• Нет динамики: снимок описывает один момент, график тренда не строится.</a:t>
+            </a:r>
+          </a:p>
+          <a:p>
+            <a:pPr algn="l">
+              <a:lnSpc>
+                <a:spcPct val="134000"/>
+              </a:lnSpc>
+              <a:spcBef>
+                <a:spcPts val="0"/>
+              </a:spcBef>
+              <a:spcAft>
+                <a:spcPts val="0"/>
+              </a:spcAft>
+            </a:pPr>
+            <a:r>
+              <a:rPr sz="1000" b="0" i="0">
+                <a:solidFill>
+                  <a:srgbClr val="666666"/>
+                </a:solidFill>
+                <a:latin typeface="Manrope"/>
+                <a:cs typeface="Manrope"/>
+                <a:ea typeface="Manrope"/>
+              </a:rPr>
+              <a:t>• Нагрузка не измерялась: набор кейса — 10 / 30 / 100 записей.</a:t>
+            </a:r>
+          </a:p>
+        </p:txBody>
+      </p:sp>
+    </p:spTree>
+  </p:cSld>
+  <p:clrMapOvr>
+    <a:masterClrMapping/>
+  </p:clrMapOvr>
+</p:sld>
+</file>
+
+<file path=ppt/slides/slide11.xml><?xml version="1.0" encoding="utf-8"?>
+<p:sld xmlns:a="http://schemas.openxmlformats.org/drawingml/2006/main" xmlns:p="http://schemas.openxmlformats.org/presentationml/2006/main" xmlns:r="http://schemas.openxmlformats.org/officeDocument/2006/relationships">
+  <p:cSld>
+    <p:spTree>
+      <p:nvGrpSpPr>
+        <p:cNvPr id="1" name=""/>
+        <p:cNvGrpSpPr/>
+        <p:nvPr/>
+      </p:nvGrpSpPr>
+      <p:grpSpPr/>
+      <p:sp>
+        <p:nvSpPr>
+          <p:cNvPr id="2" name="Rectangle 1"/>
+          <p:cNvSpPr/>
+          <p:nvPr/>
+        </p:nvSpPr>
+        <p:spPr>
+          <a:xfrm>
+            <a:off x="0" y="0"/>
+            <a:ext cx="12191695" cy="6858000"/>
+          </a:xfrm>
+          <a:prstGeom prst="rect">
+            <a:avLst/>
+          </a:prstGeom>
+          <a:solidFill>
             <a:srgbClr val="131313"/>
           </a:solidFill>
           <a:ln>
@@ -8732,7 +10638,7 @@
                 <a:cs typeface="Manrope"/>
                 <a:ea typeface="Manrope"/>
               </a:rPr>
-              <a:t>неуспешные продления</a:t>
+              <a:t>услуга приостановлена</a:t>
             </a:r>
           </a:p>
         </p:txBody>
@@ -8870,7 +10776,7 @@
                 <a:cs typeface="Manrope"/>
                 <a:ea typeface="Manrope"/>
               </a:rPr>
-              <a:t>услуга приостановлена</a:t>
+              <a:t>ожидание продления</a:t>
             </a:r>
           </a:p>
         </p:txBody>
@@ -10473,7 +12379,7 @@
                 <a:cs typeface="Manrope"/>
                 <a:ea typeface="Manrope"/>
               </a:rPr>
-              <a:t>Верхняя строка списка, отсортированного по риску по убыванию. Слева — реальные поля снимка, справа — тот же</a:t>
+              <a:t>Максимум по базе: 71,4 — вместе с клиентом #5. Показан второй в списке и выбран потому, что его причину видно на</a:t>
             </a:r>
           </a:p>
           <a:p>
@@ -10497,7 +12403,7 @@
                 <a:cs typeface="Manrope"/>
                 <a:ea typeface="Manrope"/>
               </a:rPr>
-              <a:t>клиент в интерфейсе.</a:t>
+              <a:t>уровне услуги. Слева — реальные поля снимка, справа — тот же клиент в интерфейсе.</a:t>
             </a:r>
           </a:p>
         </p:txBody>
@@ -10986,7 +12892,7 @@
                 <a:cs typeface="Manrope Medium"/>
                 <a:ea typeface="Manrope Medium"/>
               </a:rPr>
-              <a:t>1 из 3</a:t>
+              <a:t>2 из 3</a:t>
             </a:r>
           </a:p>
         </p:txBody>
@@ -11305,7 +13211,7 @@
         <p:spPr>
           <a:xfrm>
             <a:off x="4759452" y="2718871"/>
-            <a:ext cx="3361791" cy="1250858"/>
+            <a:ext cx="3361791" cy="1197864"/>
           </a:xfrm>
           <a:prstGeom prst="rect">
             <a:avLst/>
@@ -11358,8 +13264,8 @@
         </p:blipFill>
         <p:spPr>
           <a:xfrm>
-            <a:off x="4791456" y="2750875"/>
-            <a:ext cx="3114365" cy="1186850"/>
+            <a:off x="5212714" y="2750875"/>
+            <a:ext cx="2455267" cy="1133856"/>
           </a:xfrm>
           <a:prstGeom prst="rect">
             <a:avLst/>
@@ -11375,7 +13281,7 @@
         <p:spPr>
           <a:xfrm>
             <a:off x="8203539" y="2718871"/>
-            <a:ext cx="3361791" cy="1250858"/>
+            <a:ext cx="3361791" cy="1197864"/>
           </a:xfrm>
           <a:prstGeom prst="rect">
             <a:avLst/>
@@ -11428,8 +13334,8 @@
         </p:blipFill>
         <p:spPr>
           <a:xfrm>
-            <a:off x="8235543" y="2750875"/>
-            <a:ext cx="3114365" cy="1186850"/>
+            <a:off x="8656801" y="2750875"/>
+            <a:ext cx="2455267" cy="1133856"/>
           </a:xfrm>
           <a:prstGeom prst="rect">
             <a:avLst/>
@@ -11444,7 +13350,7 @@
         </p:nvSpPr>
         <p:spPr>
           <a:xfrm>
-            <a:off x="4791456" y="4175469"/>
+            <a:off x="4791456" y="4067611"/>
             <a:ext cx="6741871" cy="151003"/>
           </a:xfrm>
           <a:prstGeom prst="rect">
@@ -11491,7 +13397,7 @@
         </p:nvSpPr>
         <p:spPr>
           <a:xfrm>
-            <a:off x="4759452" y="4390353"/>
+            <a:off x="4759452" y="4282495"/>
             <a:ext cx="6805879" cy="1513779"/>
           </a:xfrm>
           <a:prstGeom prst="rect">
@@ -11545,8 +13451,8 @@
         </p:blipFill>
         <p:spPr>
           <a:xfrm>
-            <a:off x="4791456" y="4422357"/>
-            <a:ext cx="6741871" cy="631621"/>
+            <a:off x="4791456" y="4314499"/>
+            <a:ext cx="6739146" cy="1449771"/>
           </a:xfrm>
           <a:prstGeom prst="rect">
             <a:avLst/>
@@ -11561,7 +13467,7 @@
         </p:nvSpPr>
         <p:spPr>
           <a:xfrm>
-            <a:off x="4791456" y="5981856"/>
+            <a:off x="4791456" y="5873998"/>
             <a:ext cx="6741871" cy="364998"/>
           </a:xfrm>
           <a:prstGeom prst="rect">
@@ -11595,7 +13501,7 @@
                 <a:cs typeface="Manrope"/>
                 <a:ea typeface="Manrope"/>
               </a:rPr>
-              <a:t>Почему именно этот клиент: максимальный балл в списке, услуга просрочена на 35 дней, 2 из 2 продлений не</a:t>
+              <a:t>Почему именно этот клиент: один из двух максимумов (71,4), и его причину видно на уровне услуги —</a:t>
             </a:r>
           </a:p>
           <a:p>
@@ -11619,7 +13525,7 @@
                 <a:cs typeface="Manrope"/>
                 <a:ea typeface="Manrope"/>
               </a:rPr>
-              <a:t>выполнены, автопродление отключено.</a:t>
+              <a:t>service-0030 просрочена на 35 дней, 2 из 2 продлений не выполнены, автопродление отключено.</a:t>
             </a:r>
           </a:p>
         </p:txBody>
@@ -11913,7 +13819,7 @@
                 <a:cs typeface="Manrope"/>
                 <a:ea typeface="Manrope"/>
               </a:rPr>
-              <a:t>Формула: 100 × Σ(вес × значение) / Σвес. По service-0030 балл 71,4 при сумме весов 13.0. Ниже — фактические вклады из</a:t>
+              <a:t>Формула: 100 × Σ(вес × значение) / Σвес. По service-0030 балл 71,4 при действующей сумме весов 10,5 (фактор без данных</a:t>
             </a:r>
           </a:p>
           <a:p>
@@ -11937,7 +13843,7 @@
                 <a:cs typeface="Manrope"/>
                 <a:ea typeface="Manrope"/>
               </a:rPr>
-              <a:t>интерфейса.</a:t>
+              <a:t>исключён из знаменателя). Ниже — фактические вклады из интерфейса.</a:t>
             </a:r>
           </a:p>
         </p:txBody>
@@ -12896,7 +14802,7 @@
                 <a:cs typeface="Manrope"/>
                 <a:ea typeface="Manrope"/>
               </a:rPr>
-              <a:t>ДЕНЕЖНАЯ ОЦЕНКА</a:t>
+              <a:t>AI-АНАЛИТИК</a:t>
             </a:r>
           </a:p>
         </p:txBody>
@@ -12943,7 +14849,7 @@
                 <a:cs typeface="Manrope"/>
                 <a:ea typeface="Manrope"/>
               </a:rPr>
-              <a:t>Риск и деньги — разные величины</a:t>
+              <a:t>Числа считает движок — AI их объясняет</a:t>
             </a:r>
           </a:p>
         </p:txBody>
@@ -12957,7 +14863,7 @@
         <p:spPr>
           <a:xfrm>
             <a:off x="658368" y="1344168"/>
-            <a:ext cx="10058400" cy="457200"/>
+            <a:ext cx="10058400" cy="440944"/>
           </a:xfrm>
           <a:prstGeom prst="rect">
             <a:avLst/>
@@ -12982,7 +14888,7 @@
               </a:spcAft>
             </a:pPr>
             <a:r>
-              <a:rPr sz="1350" b="0" i="0">
+              <a:rPr sz="1300" b="0" i="0">
                 <a:solidFill>
                   <a:srgbClr val="666666"/>
                 </a:solidFill>
@@ -12990,7 +14896,7 @@
                 <a:cs typeface="Manrope"/>
                 <a:ea typeface="Manrope"/>
               </a:rPr>
-              <a:t>Выручка под риском = стоимость продления × балл риска / 100, и только для открытых услуг с продлением внутри</a:t>
+              <a:t>Локальная модель (qwen2.5:3b-instruct через Ollama) формулирует объяснение поверх уже посчитанных фактов. Балл и суммы</a:t>
             </a:r>
           </a:p>
           <a:p>
@@ -13006,7 +14912,7 @@
               </a:spcAft>
             </a:pPr>
             <a:r>
-              <a:rPr sz="1350" b="0" i="0">
+              <a:rPr sz="1300" b="0" i="0">
                 <a:solidFill>
                   <a:srgbClr val="666666"/>
                 </a:solidFill>
@@ -13014,30 +14920,79 @@
                 <a:cs typeface="Manrope"/>
                 <a:ea typeface="Manrope"/>
               </a:rPr>
-              <a:t>горизонта.</a:t>
-            </a:r>
-          </a:p>
-        </p:txBody>
-      </p:sp>
-      <p:sp>
-        <p:nvSpPr>
-          <p:cNvPr id="6" name="Rectangle 5"/>
+              <a:t>модель не пересчитывает: она получает их из backend и обязана ссылаться на источники.</a:t>
+            </a:r>
+          </a:p>
+        </p:txBody>
+      </p:sp>
+      <p:sp>
+        <p:nvSpPr>
+          <p:cNvPr id="6" name="TextBox 5"/>
+          <p:cNvSpPr txBox="1"/>
+          <p:nvPr/>
+        </p:nvSpPr>
+        <p:spPr>
+          <a:xfrm>
+            <a:off x="658368" y="2059432"/>
+            <a:ext cx="6903720" cy="151003"/>
+          </a:xfrm>
+          <a:prstGeom prst="rect">
+            <a:avLst/>
+          </a:prstGeom>
+          <a:noFill/>
+        </p:spPr>
+        <p:txBody>
+          <a:bodyPr wrap="square" anchor="t" lIns="0" rIns="0" tIns="0" bIns="0">
+            <a:spAutoFit/>
+          </a:bodyPr>
+          <a:lstStyle/>
+          <a:p>
+            <a:pPr algn="l">
+              <a:lnSpc>
+                <a:spcPct val="110000"/>
+              </a:lnSpc>
+              <a:spcBef>
+                <a:spcPts val="0"/>
+              </a:spcBef>
+              <a:spcAft>
+                <a:spcPts val="0"/>
+              </a:spcAft>
+            </a:pPr>
+            <a:r>
+              <a:rPr sz="950" b="1" i="0">
+                <a:solidFill>
+                  <a:srgbClr val="666666"/>
+                </a:solidFill>
+                <a:latin typeface="Manrope"/>
+                <a:cs typeface="Manrope"/>
+                <a:ea typeface="Manrope"/>
+              </a:rPr>
+              <a:t>РЕАЛЬНЫЙ ОТВЕТ AI-АНАЛИТИКА · КЛИЕНТ #10</a:t>
+            </a:r>
+          </a:p>
+        </p:txBody>
+      </p:sp>
+      <p:sp>
+        <p:nvSpPr>
+          <p:cNvPr id="7" name="Rectangle 6"/>
           <p:cNvSpPr/>
           <p:nvPr/>
         </p:nvSpPr>
         <p:spPr>
           <a:xfrm>
-            <a:off x="658368" y="2075688"/>
-            <a:ext cx="10874959" cy="768096"/>
+            <a:off x="626364" y="2265172"/>
+            <a:ext cx="6967728" cy="3517594"/>
           </a:xfrm>
           <a:prstGeom prst="rect">
             <a:avLst/>
           </a:prstGeom>
           <a:solidFill>
-            <a:srgbClr val="131313"/>
+            <a:srgbClr val="FFFFFF"/>
           </a:solidFill>
-          <a:ln>
-            <a:noFill/>
+          <a:ln w="10160">
+            <a:solidFill>
+              <a:srgbClr val="E1E1E1"/>
+            </a:solidFill>
           </a:ln>
           <a:effectLst/>
         </p:spPr>
@@ -13063,16 +15018,40 @@
           </a:p>
         </p:txBody>
       </p:sp>
-      <p:sp>
-        <p:nvSpPr>
-          <p:cNvPr id="7" name="TextBox 6"/>
+      <p:pic>
+        <p:nvPicPr>
+          <p:cNvPr id="8" name="Picture 7" descr="ai_explain.png"/>
+          <p:cNvPicPr>
+            <a:picLocks noChangeAspect="1"/>
+          </p:cNvPicPr>
+          <p:nvPr/>
+        </p:nvPicPr>
+        <p:blipFill>
+          <a:blip r:embed="rId2"/>
+          <a:stretch>
+            <a:fillRect/>
+          </a:stretch>
+        </p:blipFill>
+        <p:spPr>
+          <a:xfrm>
+            <a:off x="658368" y="2297176"/>
+            <a:ext cx="6902582" cy="3453586"/>
+          </a:xfrm>
+          <a:prstGeom prst="rect">
+            <a:avLst/>
+          </a:prstGeom>
+        </p:spPr>
+      </p:pic>
+      <p:sp>
+        <p:nvSpPr>
+          <p:cNvPr id="9" name="TextBox 8"/>
           <p:cNvSpPr txBox="1"/>
           <p:nvPr/>
         </p:nvSpPr>
         <p:spPr>
           <a:xfrm>
-            <a:off x="932688" y="2212848"/>
-            <a:ext cx="6583680" cy="512064"/>
+            <a:off x="658368" y="5860490"/>
+            <a:ext cx="6903720" cy="180848"/>
           </a:xfrm>
           <a:prstGeom prst="rect">
             <a:avLst/>
@@ -13087,65 +15066,7 @@
           <a:p>
             <a:pPr algn="l">
               <a:lnSpc>
-                <a:spcPct val="116000"/>
-              </a:lnSpc>
-              <a:spcBef>
-                <a:spcPts val="0"/>
-              </a:spcBef>
-              <a:spcAft>
-                <a:spcPts val="0"/>
-              </a:spcAft>
-            </a:pPr>
-            <a:r>
-              <a:rPr sz="1500" b="0">
-                <a:solidFill>
-                  <a:srgbClr val="C9C9C9"/>
-                </a:solidFill>
-                <a:latin typeface="Manrope Medium"/>
-                <a:cs typeface="Manrope Medium"/>
-                <a:ea typeface="Manrope Medium"/>
-              </a:rPr>
-              <a:t>выручка под риском  </a:t>
-            </a:r>
-            <a:r>
-              <a:rPr sz="1500" b="1">
-                <a:solidFill>
-                  <a:srgbClr val="FFFFFF"/>
-                </a:solidFill>
-                <a:latin typeface="Manrope SemiBold"/>
-                <a:cs typeface="Manrope SemiBold"/>
-                <a:ea typeface="Manrope SemiBold"/>
-              </a:rPr>
-              <a:t>=  стоимость продления × балл риска / 100</a:t>
-            </a:r>
-          </a:p>
-        </p:txBody>
-      </p:sp>
-      <p:sp>
-        <p:nvSpPr>
-          <p:cNvPr id="8" name="TextBox 7"/>
-          <p:cNvSpPr txBox="1"/>
-          <p:nvPr/>
-        </p:nvSpPr>
-        <p:spPr>
-          <a:xfrm>
-            <a:off x="8065008" y="2295144"/>
-            <a:ext cx="3193999" cy="170687"/>
-          </a:xfrm>
-          <a:prstGeom prst="rect">
-            <a:avLst/>
-          </a:prstGeom>
-          <a:noFill/>
-        </p:spPr>
-        <p:txBody>
-          <a:bodyPr wrap="square" anchor="t" lIns="0" rIns="0" tIns="0" bIns="0">
-            <a:spAutoFit/>
-          </a:bodyPr>
-          <a:lstStyle/>
-          <a:p>
-            <a:pPr algn="l">
-              <a:lnSpc>
-                <a:spcPct val="120000"/>
+                <a:spcPct val="128000"/>
               </a:lnSpc>
               <a:spcBef>
                 <a:spcPts val="0"/>
@@ -13157,27 +15078,27 @@
             <a:r>
               <a:rPr sz="1000" b="0" i="0">
                 <a:solidFill>
-                  <a:srgbClr val="83CDB7"/>
-                </a:solidFill>
-                <a:latin typeface="Manrope Medium"/>
-                <a:cs typeface="Manrope Medium"/>
-                <a:ea typeface="Manrope Medium"/>
-              </a:rPr>
-              <a:t>Баланс в формулу не входит</a:t>
-            </a:r>
-          </a:p>
-        </p:txBody>
-      </p:sp>
-      <p:sp>
-        <p:nvSpPr>
-          <p:cNvPr id="9" name="Rectangle 8"/>
+                  <a:srgbClr val="666666"/>
+                </a:solidFill>
+                <a:latin typeface="Manrope"/>
+                <a:cs typeface="Manrope"/>
+                <a:ea typeface="Manrope"/>
+              </a:rPr>
+              <a:t>Ответ ссылается на фактические данные и документы проекта: каждый источник виден под ответом.</a:t>
+            </a:r>
+          </a:p>
+        </p:txBody>
+      </p:sp>
+      <p:sp>
+        <p:nvSpPr>
+          <p:cNvPr id="10" name="Rectangle 9"/>
           <p:cNvSpPr/>
           <p:nvPr/>
         </p:nvSpPr>
         <p:spPr>
           <a:xfrm>
-            <a:off x="658368" y="3118104"/>
-            <a:ext cx="3977639" cy="2935224"/>
+            <a:off x="7836408" y="2297176"/>
+            <a:ext cx="3696919" cy="813104"/>
           </a:xfrm>
           <a:prstGeom prst="rect">
             <a:avLst/>
@@ -13216,613 +15137,23 @@
       </p:sp>
       <p:sp>
         <p:nvSpPr>
-          <p:cNvPr id="10" name="TextBox 9"/>
-          <p:cNvSpPr txBox="1"/>
-          <p:nvPr/>
-        </p:nvSpPr>
-        <p:spPr>
-          <a:xfrm>
-            <a:off x="877824" y="3319272"/>
-            <a:ext cx="3538727" cy="359664"/>
-          </a:xfrm>
-          <a:prstGeom prst="rect">
-            <a:avLst/>
-          </a:prstGeom>
-          <a:noFill/>
-        </p:spPr>
-        <p:txBody>
-          <a:bodyPr wrap="square" anchor="t" lIns="0" rIns="0" tIns="0" bIns="0">
-            <a:spAutoFit/>
-          </a:bodyPr>
-          <a:lstStyle/>
-          <a:p>
-            <a:pPr algn="l">
-              <a:lnSpc>
-                <a:spcPct val="112000"/>
-              </a:lnSpc>
-              <a:spcBef>
-                <a:spcPts val="0"/>
-              </a:spcBef>
-              <a:spcAft>
-                <a:spcPts val="0"/>
-              </a:spcAft>
-            </a:pPr>
-            <a:r>
-              <a:rPr sz="1200" b="1" i="0">
-                <a:solidFill>
-                  <a:srgbClr val="1A1A1A"/>
-                </a:solidFill>
-                <a:latin typeface="Manrope SemiBold"/>
-                <a:cs typeface="Manrope SemiBold"/>
-                <a:ea typeface="Manrope SemiBold"/>
-              </a:rPr>
-              <a:t>Клиент #10 — высокий риск, но 0,00 € под</a:t>
-            </a:r>
-          </a:p>
-          <a:p>
-            <a:pPr algn="l">
-              <a:lnSpc>
-                <a:spcPct val="112000"/>
-              </a:lnSpc>
-              <a:spcBef>
-                <a:spcPts val="0"/>
-              </a:spcBef>
-              <a:spcAft>
-                <a:spcPts val="0"/>
-              </a:spcAft>
-            </a:pPr>
-            <a:r>
-              <a:rPr sz="1200" b="1" i="0">
-                <a:solidFill>
-                  <a:srgbClr val="1A1A1A"/>
-                </a:solidFill>
-                <a:latin typeface="Manrope SemiBold"/>
-                <a:cs typeface="Manrope SemiBold"/>
-                <a:ea typeface="Manrope SemiBold"/>
-              </a:rPr>
-              <a:t>риском</a:t>
-            </a:r>
-          </a:p>
-        </p:txBody>
-      </p:sp>
-      <p:sp>
-        <p:nvSpPr>
-          <p:cNvPr id="11" name="TextBox 10"/>
-          <p:cNvSpPr txBox="1"/>
-          <p:nvPr/>
-        </p:nvSpPr>
-        <p:spPr>
-          <a:xfrm>
-            <a:off x="877824" y="3703320"/>
-            <a:ext cx="3538727" cy="131635"/>
-          </a:xfrm>
-          <a:prstGeom prst="rect">
-            <a:avLst/>
-          </a:prstGeom>
-          <a:noFill/>
-        </p:spPr>
-        <p:txBody>
-          <a:bodyPr wrap="square" anchor="t" lIns="0" rIns="0" tIns="0" bIns="0">
-            <a:spAutoFit/>
-          </a:bodyPr>
-          <a:lstStyle/>
-          <a:p>
-            <a:pPr algn="l">
-              <a:lnSpc>
-                <a:spcPct val="105000"/>
-              </a:lnSpc>
-              <a:spcBef>
-                <a:spcPts val="0"/>
-              </a:spcBef>
-              <a:spcAft>
-                <a:spcPts val="0"/>
-              </a:spcAft>
-            </a:pPr>
-            <a:r>
-              <a:rPr sz="850" b="1" i="0">
-                <a:solidFill>
-                  <a:srgbClr val="666666"/>
-                </a:solidFill>
-                <a:latin typeface="Manrope SemiBold"/>
-                <a:cs typeface="Manrope SemiBold"/>
-                <a:ea typeface="Manrope SemiBold"/>
-              </a:rPr>
-              <a:t>БАЛЛ РИСКА КЛИЕНТА</a:t>
-            </a:r>
-          </a:p>
-        </p:txBody>
-      </p:sp>
-      <p:sp>
-        <p:nvSpPr>
-          <p:cNvPr id="12" name="TextBox 11"/>
-          <p:cNvSpPr txBox="1"/>
-          <p:nvPr/>
-        </p:nvSpPr>
-        <p:spPr>
-          <a:xfrm>
-            <a:off x="877824" y="3858768"/>
-            <a:ext cx="3538727" cy="232600"/>
-          </a:xfrm>
-          <a:prstGeom prst="rect">
-            <a:avLst/>
-          </a:prstGeom>
-          <a:noFill/>
-        </p:spPr>
-        <p:txBody>
-          <a:bodyPr wrap="square" anchor="t" lIns="0" rIns="0" tIns="0" bIns="0">
-            <a:spAutoFit/>
-          </a:bodyPr>
-          <a:lstStyle/>
-          <a:p>
-            <a:pPr algn="l">
-              <a:lnSpc>
-                <a:spcPct val="125000"/>
-              </a:lnSpc>
-              <a:spcBef>
-                <a:spcPts val="0"/>
-              </a:spcBef>
-              <a:spcAft>
-                <a:spcPts val="0"/>
-              </a:spcAft>
-            </a:pPr>
-            <a:r>
-              <a:rPr sz="1350" b="1" i="0">
-                <a:solidFill>
-                  <a:srgbClr val="B84A00"/>
-                </a:solidFill>
-                <a:latin typeface="Manrope SemiBold"/>
-                <a:cs typeface="Manrope SemiBold"/>
-                <a:ea typeface="Manrope SemiBold"/>
-              </a:rPr>
-              <a:t>71,4 / 100</a:t>
-            </a:r>
-          </a:p>
-        </p:txBody>
-      </p:sp>
-      <p:sp>
-        <p:nvSpPr>
-          <p:cNvPr id="13" name="TextBox 12"/>
-          <p:cNvSpPr txBox="1"/>
-          <p:nvPr/>
-        </p:nvSpPr>
-        <p:spPr>
-          <a:xfrm>
-            <a:off x="877824" y="4237672"/>
-            <a:ext cx="3538727" cy="131635"/>
-          </a:xfrm>
-          <a:prstGeom prst="rect">
-            <a:avLst/>
-          </a:prstGeom>
-          <a:noFill/>
-        </p:spPr>
-        <p:txBody>
-          <a:bodyPr wrap="square" anchor="t" lIns="0" rIns="0" tIns="0" bIns="0">
-            <a:spAutoFit/>
-          </a:bodyPr>
-          <a:lstStyle/>
-          <a:p>
-            <a:pPr algn="l">
-              <a:lnSpc>
-                <a:spcPct val="105000"/>
-              </a:lnSpc>
-              <a:spcBef>
-                <a:spcPts val="0"/>
-              </a:spcBef>
-              <a:spcAft>
-                <a:spcPts val="0"/>
-              </a:spcAft>
-            </a:pPr>
-            <a:r>
-              <a:rPr sz="850" b="1" i="0">
-                <a:solidFill>
-                  <a:srgbClr val="666666"/>
-                </a:solidFill>
-                <a:latin typeface="Manrope SemiBold"/>
-                <a:cs typeface="Manrope SemiBold"/>
-                <a:ea typeface="Manrope SemiBold"/>
-              </a:rPr>
-              <a:t>ВЫРУЧКА ПОД РИСКОМ</a:t>
-            </a:r>
-          </a:p>
-        </p:txBody>
-      </p:sp>
-      <p:sp>
-        <p:nvSpPr>
-          <p:cNvPr id="14" name="TextBox 13"/>
-          <p:cNvSpPr txBox="1"/>
-          <p:nvPr/>
-        </p:nvSpPr>
-        <p:spPr>
-          <a:xfrm>
-            <a:off x="877824" y="4393120"/>
-            <a:ext cx="3538727" cy="232600"/>
-          </a:xfrm>
-          <a:prstGeom prst="rect">
-            <a:avLst/>
-          </a:prstGeom>
-          <a:noFill/>
-        </p:spPr>
-        <p:txBody>
-          <a:bodyPr wrap="square" anchor="t" lIns="0" rIns="0" tIns="0" bIns="0">
-            <a:spAutoFit/>
-          </a:bodyPr>
-          <a:lstStyle/>
-          <a:p>
-            <a:pPr algn="l">
-              <a:lnSpc>
-                <a:spcPct val="125000"/>
-              </a:lnSpc>
-              <a:spcBef>
-                <a:spcPts val="0"/>
-              </a:spcBef>
-              <a:spcAft>
-                <a:spcPts val="0"/>
-              </a:spcAft>
-            </a:pPr>
-            <a:r>
-              <a:rPr sz="1350" b="1" i="0">
-                <a:solidFill>
-                  <a:srgbClr val="1A1A1A"/>
-                </a:solidFill>
-                <a:latin typeface="Manrope SemiBold"/>
-                <a:cs typeface="Manrope SemiBold"/>
-                <a:ea typeface="Manrope SemiBold"/>
-              </a:rPr>
-              <a:t>0,00 €</a:t>
-            </a:r>
-          </a:p>
-        </p:txBody>
-      </p:sp>
-      <p:sp>
-        <p:nvSpPr>
-          <p:cNvPr id="15" name="TextBox 14"/>
-          <p:cNvSpPr txBox="1"/>
-          <p:nvPr/>
-        </p:nvSpPr>
-        <p:spPr>
-          <a:xfrm>
-            <a:off x="877824" y="4772024"/>
-            <a:ext cx="3538727" cy="131635"/>
-          </a:xfrm>
-          <a:prstGeom prst="rect">
-            <a:avLst/>
-          </a:prstGeom>
-          <a:noFill/>
-        </p:spPr>
-        <p:txBody>
-          <a:bodyPr wrap="square" anchor="t" lIns="0" rIns="0" tIns="0" bIns="0">
-            <a:spAutoFit/>
-          </a:bodyPr>
-          <a:lstStyle/>
-          <a:p>
-            <a:pPr algn="l">
-              <a:lnSpc>
-                <a:spcPct val="105000"/>
-              </a:lnSpc>
-              <a:spcBef>
-                <a:spcPts val="0"/>
-              </a:spcBef>
-              <a:spcAft>
-                <a:spcPts val="0"/>
-              </a:spcAft>
-            </a:pPr>
-            <a:r>
-              <a:rPr sz="850" b="1" i="0">
-                <a:solidFill>
-                  <a:srgbClr val="666666"/>
-                </a:solidFill>
-                <a:latin typeface="Manrope SemiBold"/>
-                <a:cs typeface="Manrope SemiBold"/>
-                <a:ea typeface="Manrope SemiBold"/>
-              </a:rPr>
-              <a:t>ПОЧЕМУ НОЛЬ</a:t>
-            </a:r>
-          </a:p>
-        </p:txBody>
-      </p:sp>
-      <p:sp>
-        <p:nvSpPr>
-          <p:cNvPr id="16" name="TextBox 15"/>
-          <p:cNvSpPr txBox="1"/>
-          <p:nvPr/>
-        </p:nvSpPr>
-        <p:spPr>
-          <a:xfrm>
-            <a:off x="877824" y="4927472"/>
-            <a:ext cx="3538727" cy="169100"/>
-          </a:xfrm>
-          <a:prstGeom prst="rect">
-            <a:avLst/>
-          </a:prstGeom>
-          <a:noFill/>
-        </p:spPr>
-        <p:txBody>
-          <a:bodyPr wrap="square" anchor="t" lIns="0" rIns="0" tIns="0" bIns="0">
-            <a:spAutoFit/>
-          </a:bodyPr>
-          <a:lstStyle/>
-          <a:p>
-            <a:pPr algn="l">
-              <a:lnSpc>
-                <a:spcPct val="125000"/>
-              </a:lnSpc>
-              <a:spcBef>
-                <a:spcPts val="0"/>
-              </a:spcBef>
-              <a:spcAft>
-                <a:spcPts val="0"/>
-              </a:spcAft>
-            </a:pPr>
-            <a:r>
-              <a:rPr sz="950" b="0" i="0">
-                <a:solidFill>
-                  <a:srgbClr val="666666"/>
-                </a:solidFill>
-                <a:latin typeface="Manrope"/>
-                <a:cs typeface="Manrope"/>
-                <a:ea typeface="Manrope"/>
-              </a:rPr>
-              <a:t>Сроки уже прошли — горизонт смотрит вперёд.</a:t>
-            </a:r>
-          </a:p>
-        </p:txBody>
-      </p:sp>
-      <p:sp>
-        <p:nvSpPr>
-          <p:cNvPr id="17" name="TextBox 16"/>
-          <p:cNvSpPr txBox="1"/>
-          <p:nvPr/>
-        </p:nvSpPr>
-        <p:spPr>
-          <a:xfrm>
-            <a:off x="877824" y="5242876"/>
-            <a:ext cx="3538727" cy="131635"/>
-          </a:xfrm>
-          <a:prstGeom prst="rect">
-            <a:avLst/>
-          </a:prstGeom>
-          <a:noFill/>
-        </p:spPr>
-        <p:txBody>
-          <a:bodyPr wrap="square" anchor="t" lIns="0" rIns="0" tIns="0" bIns="0">
-            <a:spAutoFit/>
-          </a:bodyPr>
-          <a:lstStyle/>
-          <a:p>
-            <a:pPr algn="l">
-              <a:lnSpc>
-                <a:spcPct val="105000"/>
-              </a:lnSpc>
-              <a:spcBef>
-                <a:spcPts val="0"/>
-              </a:spcBef>
-              <a:spcAft>
-                <a:spcPts val="0"/>
-              </a:spcAft>
-            </a:pPr>
-            <a:r>
-              <a:rPr sz="850" b="1" i="0">
-                <a:solidFill>
-                  <a:srgbClr val="666666"/>
-                </a:solidFill>
-                <a:latin typeface="Manrope SemiBold"/>
-                <a:cs typeface="Manrope SemiBold"/>
-                <a:ea typeface="Manrope SemiBold"/>
-              </a:rPr>
-              <a:t>БАЛАНС — НЕ ВЫРУЧКА</a:t>
-            </a:r>
-          </a:p>
-        </p:txBody>
-      </p:sp>
-      <p:sp>
-        <p:nvSpPr>
-          <p:cNvPr id="18" name="TextBox 17"/>
-          <p:cNvSpPr txBox="1"/>
-          <p:nvPr/>
-        </p:nvSpPr>
-        <p:spPr>
-          <a:xfrm>
-            <a:off x="877824" y="5398324"/>
-            <a:ext cx="3538727" cy="232600"/>
-          </a:xfrm>
-          <a:prstGeom prst="rect">
-            <a:avLst/>
-          </a:prstGeom>
-          <a:noFill/>
-        </p:spPr>
-        <p:txBody>
-          <a:bodyPr wrap="square" anchor="t" lIns="0" rIns="0" tIns="0" bIns="0">
-            <a:spAutoFit/>
-          </a:bodyPr>
-          <a:lstStyle/>
-          <a:p>
-            <a:pPr algn="l">
-              <a:lnSpc>
-                <a:spcPct val="125000"/>
-              </a:lnSpc>
-              <a:spcBef>
-                <a:spcPts val="0"/>
-              </a:spcBef>
-              <a:spcAft>
-                <a:spcPts val="0"/>
-              </a:spcAft>
-            </a:pPr>
-            <a:r>
-              <a:rPr sz="1350" b="1" i="0">
-                <a:solidFill>
-                  <a:srgbClr val="666666"/>
-                </a:solidFill>
-                <a:latin typeface="Manrope SemiBold"/>
-                <a:cs typeface="Manrope SemiBold"/>
-                <a:ea typeface="Manrope SemiBold"/>
-              </a:rPr>
-              <a:t>203,79 €</a:t>
-            </a:r>
-          </a:p>
-        </p:txBody>
-      </p:sp>
-      <p:sp>
-        <p:nvSpPr>
-          <p:cNvPr id="19" name="TextBox 18"/>
-          <p:cNvSpPr txBox="1"/>
-          <p:nvPr/>
-        </p:nvSpPr>
-        <p:spPr>
-          <a:xfrm>
-            <a:off x="877824" y="5777228"/>
-            <a:ext cx="3538727" cy="131635"/>
-          </a:xfrm>
-          <a:prstGeom prst="rect">
-            <a:avLst/>
-          </a:prstGeom>
-          <a:noFill/>
-        </p:spPr>
-        <p:txBody>
-          <a:bodyPr wrap="square" anchor="t" lIns="0" rIns="0" tIns="0" bIns="0">
-            <a:spAutoFit/>
-          </a:bodyPr>
-          <a:lstStyle/>
-          <a:p>
-            <a:pPr algn="l">
-              <a:lnSpc>
-                <a:spcPct val="105000"/>
-              </a:lnSpc>
-              <a:spcBef>
-                <a:spcPts val="0"/>
-              </a:spcBef>
-              <a:spcAft>
-                <a:spcPts val="0"/>
-              </a:spcAft>
-            </a:pPr>
-            <a:r>
-              <a:rPr sz="850" b="1" i="0">
-                <a:solidFill>
-                  <a:srgbClr val="666666"/>
-                </a:solidFill>
-                <a:latin typeface="Manrope SemiBold"/>
-                <a:cs typeface="Manrope SemiBold"/>
-                <a:ea typeface="Manrope SemiBold"/>
-              </a:rPr>
-              <a:t>ВСЕГО ПОПОЛНЕНО — СПРАВОЧНО</a:t>
-            </a:r>
-          </a:p>
-        </p:txBody>
-      </p:sp>
-      <p:sp>
-        <p:nvSpPr>
-          <p:cNvPr id="20" name="TextBox 19"/>
-          <p:cNvSpPr txBox="1"/>
-          <p:nvPr/>
-        </p:nvSpPr>
-        <p:spPr>
-          <a:xfrm>
-            <a:off x="877824" y="5932676"/>
-            <a:ext cx="3538727" cy="232600"/>
-          </a:xfrm>
-          <a:prstGeom prst="rect">
-            <a:avLst/>
-          </a:prstGeom>
-          <a:noFill/>
-        </p:spPr>
-        <p:txBody>
-          <a:bodyPr wrap="square" anchor="t" lIns="0" rIns="0" tIns="0" bIns="0">
-            <a:spAutoFit/>
-          </a:bodyPr>
-          <a:lstStyle/>
-          <a:p>
-            <a:pPr algn="l">
-              <a:lnSpc>
-                <a:spcPct val="125000"/>
-              </a:lnSpc>
-              <a:spcBef>
-                <a:spcPts val="0"/>
-              </a:spcBef>
-              <a:spcAft>
-                <a:spcPts val="0"/>
-              </a:spcAft>
-            </a:pPr>
-            <a:r>
-              <a:rPr sz="1350" b="1" i="0">
-                <a:solidFill>
-                  <a:srgbClr val="666666"/>
-                </a:solidFill>
-                <a:latin typeface="Manrope SemiBold"/>
-                <a:cs typeface="Manrope SemiBold"/>
-                <a:ea typeface="Manrope SemiBold"/>
-              </a:rPr>
-              <a:t>4 206,69 €</a:t>
-            </a:r>
-          </a:p>
-        </p:txBody>
-      </p:sp>
-      <p:sp>
-        <p:nvSpPr>
-          <p:cNvPr id="21" name="TextBox 20"/>
-          <p:cNvSpPr txBox="1"/>
-          <p:nvPr/>
-        </p:nvSpPr>
-        <p:spPr>
-          <a:xfrm>
-            <a:off x="4910327" y="3090672"/>
-            <a:ext cx="6623000" cy="151003"/>
-          </a:xfrm>
-          <a:prstGeom prst="rect">
-            <a:avLst/>
-          </a:prstGeom>
-          <a:noFill/>
-        </p:spPr>
-        <p:txBody>
-          <a:bodyPr wrap="square" anchor="t" lIns="0" rIns="0" tIns="0" bIns="0">
-            <a:spAutoFit/>
-          </a:bodyPr>
-          <a:lstStyle/>
-          <a:p>
-            <a:pPr algn="l">
-              <a:lnSpc>
-                <a:spcPct val="110000"/>
-              </a:lnSpc>
-              <a:spcBef>
-                <a:spcPts val="0"/>
-              </a:spcBef>
-              <a:spcAft>
-                <a:spcPts val="0"/>
-              </a:spcAft>
-            </a:pPr>
-            <a:r>
-              <a:rPr sz="950" b="1" i="0">
-                <a:solidFill>
-                  <a:srgbClr val="666666"/>
-                </a:solidFill>
-                <a:latin typeface="Manrope"/>
-                <a:cs typeface="Manrope"/>
-                <a:ea typeface="Manrope"/>
-              </a:rPr>
-              <a:t>РЕАЛЬНЫЙ ИНТЕРФЕЙС · БЛИЖАЙШИЕ ПРОДЛЕНИЯ В ГОРИЗОНТЕ</a:t>
-            </a:r>
-          </a:p>
-        </p:txBody>
-      </p:sp>
-      <p:sp>
-        <p:nvSpPr>
-          <p:cNvPr id="22" name="Rectangle 21"/>
+          <p:cNvPr id="11" name="Rectangle 10"/>
           <p:cNvSpPr/>
           <p:nvPr/>
         </p:nvSpPr>
         <p:spPr>
           <a:xfrm>
-            <a:off x="4878323" y="3323844"/>
-            <a:ext cx="6687008" cy="1462829"/>
+            <a:off x="7836408" y="2297176"/>
+            <a:ext cx="41148" cy="813104"/>
           </a:xfrm>
           <a:prstGeom prst="rect">
             <a:avLst/>
           </a:prstGeom>
           <a:solidFill>
-            <a:srgbClr val="FFFFFF"/>
+            <a:srgbClr val="83CDB7"/>
           </a:solidFill>
-          <a:ln w="10160">
-            <a:solidFill>
-              <a:srgbClr val="E1E1E1"/>
-            </a:solidFill>
+          <a:ln>
+            <a:noFill/>
           </a:ln>
           <a:effectLst/>
         </p:spPr>
@@ -13848,40 +15179,134 @@
           </a:p>
         </p:txBody>
       </p:sp>
-      <p:pic>
-        <p:nvPicPr>
-          <p:cNvPr id="23" name="Picture 22" descr="renew_table.png"/>
-          <p:cNvPicPr>
-            <a:picLocks noChangeAspect="1"/>
-          </p:cNvPicPr>
-          <p:nvPr/>
-        </p:nvPicPr>
-        <p:blipFill>
-          <a:blip r:embed="rId2"/>
-          <a:stretch>
-            <a:fillRect/>
-          </a:stretch>
-        </p:blipFill>
-        <p:spPr>
-          <a:xfrm>
-            <a:off x="4910327" y="3355848"/>
-            <a:ext cx="6255671" cy="1398821"/>
-          </a:xfrm>
-          <a:prstGeom prst="rect">
-            <a:avLst/>
-          </a:prstGeom>
-        </p:spPr>
-      </p:pic>
-      <p:sp>
-        <p:nvSpPr>
-          <p:cNvPr id="24" name="Rectangle 23"/>
+      <p:sp>
+        <p:nvSpPr>
+          <p:cNvPr id="12" name="TextBox 11"/>
+          <p:cNvSpPr txBox="1"/>
+          <p:nvPr/>
+        </p:nvSpPr>
+        <p:spPr>
+          <a:xfrm>
+            <a:off x="8019288" y="2397760"/>
+            <a:ext cx="3331159" cy="169164"/>
+          </a:xfrm>
+          <a:prstGeom prst="rect">
+            <a:avLst/>
+          </a:prstGeom>
+          <a:noFill/>
+        </p:spPr>
+        <p:txBody>
+          <a:bodyPr wrap="square" anchor="t" lIns="0" rIns="0" tIns="0" bIns="0">
+            <a:spAutoFit/>
+          </a:bodyPr>
+          <a:lstStyle/>
+          <a:p>
+            <a:pPr algn="l">
+              <a:lnSpc>
+                <a:spcPct val="108000"/>
+              </a:lnSpc>
+              <a:spcBef>
+                <a:spcPts val="0"/>
+              </a:spcBef>
+              <a:spcAft>
+                <a:spcPts val="0"/>
+              </a:spcAft>
+            </a:pPr>
+            <a:r>
+              <a:rPr sz="1100" b="1" i="0">
+                <a:solidFill>
+                  <a:srgbClr val="1A1A1A"/>
+                </a:solidFill>
+                <a:latin typeface="Manrope SemiBold"/>
+                <a:cs typeface="Manrope SemiBold"/>
+                <a:ea typeface="Manrope SemiBold"/>
+              </a:rPr>
+              <a:t>Данные, а не догадки</a:t>
+            </a:r>
+          </a:p>
+        </p:txBody>
+      </p:sp>
+      <p:sp>
+        <p:nvSpPr>
+          <p:cNvPr id="13" name="TextBox 12"/>
+          <p:cNvSpPr txBox="1"/>
+          <p:nvPr/>
+        </p:nvSpPr>
+        <p:spPr>
+          <a:xfrm>
+            <a:off x="8019288" y="2603500"/>
+            <a:ext cx="3331159" cy="297180"/>
+          </a:xfrm>
+          <a:prstGeom prst="rect">
+            <a:avLst/>
+          </a:prstGeom>
+          <a:noFill/>
+        </p:spPr>
+        <p:txBody>
+          <a:bodyPr wrap="square" anchor="t" lIns="0" rIns="0" tIns="0" bIns="0">
+            <a:spAutoFit/>
+          </a:bodyPr>
+          <a:lstStyle/>
+          <a:p>
+            <a:pPr algn="l">
+              <a:lnSpc>
+                <a:spcPct val="122000"/>
+              </a:lnSpc>
+              <a:spcBef>
+                <a:spcPts val="0"/>
+              </a:spcBef>
+              <a:spcAft>
+                <a:spcPts val="0"/>
+              </a:spcAft>
+            </a:pPr>
+            <a:r>
+              <a:rPr sz="900" b="0" i="0">
+                <a:solidFill>
+                  <a:srgbClr val="666666"/>
+                </a:solidFill>
+                <a:latin typeface="Manrope"/>
+                <a:cs typeface="Manrope"/>
+                <a:ea typeface="Manrope"/>
+              </a:rPr>
+              <a:t>Модель отвечает только по фактам движка. Числа берутся</a:t>
+            </a:r>
+          </a:p>
+          <a:p>
+            <a:pPr algn="l">
+              <a:lnSpc>
+                <a:spcPct val="122000"/>
+              </a:lnSpc>
+              <a:spcBef>
+                <a:spcPts val="0"/>
+              </a:spcBef>
+              <a:spcAft>
+                <a:spcPts val="0"/>
+              </a:spcAft>
+            </a:pPr>
+            <a:r>
+              <a:rPr sz="900" b="0" i="0">
+                <a:solidFill>
+                  <a:srgbClr val="666666"/>
+                </a:solidFill>
+                <a:latin typeface="Manrope"/>
+                <a:cs typeface="Manrope"/>
+                <a:ea typeface="Manrope"/>
+              </a:rPr>
+              <a:t>из backend — их нельзя выдумать.</a:t>
+            </a:r>
+          </a:p>
+        </p:txBody>
+      </p:sp>
+      <p:sp>
+        <p:nvSpPr>
+          <p:cNvPr id="14" name="Rectangle 13"/>
           <p:cNvSpPr/>
           <p:nvPr/>
         </p:nvSpPr>
         <p:spPr>
           <a:xfrm>
-            <a:off x="4910327" y="4965192"/>
-            <a:ext cx="2134514" cy="1088136"/>
+            <a:off x="7836408" y="3178860"/>
+            <a:ext cx="3696919" cy="813104"/>
           </a:xfrm>
           <a:prstGeom prst="rect">
             <a:avLst/>
@@ -13920,14 +15345,58 @@
       </p:sp>
       <p:sp>
         <p:nvSpPr>
-          <p:cNvPr id="25" name="TextBox 24"/>
+          <p:cNvPr id="15" name="Rectangle 14"/>
+          <p:cNvSpPr/>
+          <p:nvPr/>
+        </p:nvSpPr>
+        <p:spPr>
+          <a:xfrm>
+            <a:off x="7836408" y="3178860"/>
+            <a:ext cx="41148" cy="813104"/>
+          </a:xfrm>
+          <a:prstGeom prst="rect">
+            <a:avLst/>
+          </a:prstGeom>
+          <a:solidFill>
+            <a:srgbClr val="83CDB7"/>
+          </a:solidFill>
+          <a:ln>
+            <a:noFill/>
+          </a:ln>
+          <a:effectLst/>
+        </p:spPr>
+        <p:style>
+          <a:lnRef idx="1">
+            <a:schemeClr val="accent1"/>
+          </a:lnRef>
+          <a:fillRef idx="3">
+            <a:schemeClr val="accent1"/>
+          </a:fillRef>
+          <a:effectRef idx="2">
+            <a:schemeClr val="accent1"/>
+          </a:effectRef>
+          <a:fontRef idx="minor">
+            <a:schemeClr val="lt1"/>
+          </a:fontRef>
+        </p:style>
+        <p:txBody>
+          <a:bodyPr rtlCol="0" anchor="ctr"/>
+          <a:lstStyle/>
+          <a:p>
+            <a:pPr algn="ctr"/>
+          </a:p>
+        </p:txBody>
+      </p:sp>
+      <p:sp>
+        <p:nvSpPr>
+          <p:cNvPr id="16" name="TextBox 15"/>
           <p:cNvSpPr txBox="1"/>
           <p:nvPr/>
         </p:nvSpPr>
         <p:spPr>
           <a:xfrm>
-            <a:off x="5038343" y="5093208"/>
-            <a:ext cx="1878482" cy="130048"/>
+            <a:off x="8019288" y="3279444"/>
+            <a:ext cx="3331159" cy="169164"/>
           </a:xfrm>
           <a:prstGeom prst="rect">
             <a:avLst/>
@@ -13942,39 +15411,39 @@
           <a:p>
             <a:pPr algn="l">
               <a:lnSpc>
-                <a:spcPct val="110000"/>
-              </a:lnSpc>
-              <a:spcBef>
-                <a:spcPts val="0"/>
-              </a:spcBef>
-              <a:spcAft>
-                <a:spcPts val="0"/>
-              </a:spcAft>
-            </a:pPr>
-            <a:r>
-              <a:rPr sz="800" b="1" i="0">
-                <a:solidFill>
-                  <a:srgbClr val="666666"/>
+                <a:spcPct val="108000"/>
+              </a:lnSpc>
+              <a:spcBef>
+                <a:spcPts val="0"/>
+              </a:spcBef>
+              <a:spcAft>
+                <a:spcPts val="0"/>
+              </a:spcAft>
+            </a:pPr>
+            <a:r>
+              <a:rPr sz="1100" b="1" i="0">
+                <a:solidFill>
+                  <a:srgbClr val="1A1A1A"/>
                 </a:solidFill>
                 <a:latin typeface="Manrope SemiBold"/>
                 <a:cs typeface="Manrope SemiBold"/>
                 <a:ea typeface="Manrope SemiBold"/>
               </a:rPr>
-              <a:t>ВЫРУЧКА ПОД РИСКОМ</a:t>
-            </a:r>
-          </a:p>
-        </p:txBody>
-      </p:sp>
-      <p:sp>
-        <p:nvSpPr>
-          <p:cNvPr id="26" name="TextBox 25"/>
+              <a:t>Проверка после генерации</a:t>
+            </a:r>
+          </a:p>
+        </p:txBody>
+      </p:sp>
+      <p:sp>
+        <p:nvSpPr>
+          <p:cNvPr id="17" name="TextBox 16"/>
           <p:cNvSpPr txBox="1"/>
           <p:nvPr/>
         </p:nvSpPr>
         <p:spPr>
           <a:xfrm>
-            <a:off x="5038343" y="5330952"/>
-            <a:ext cx="1878482" cy="221487"/>
+            <a:off x="8019288" y="3485184"/>
+            <a:ext cx="3331159" cy="297180"/>
           </a:xfrm>
           <a:prstGeom prst="rect">
             <a:avLst/>
@@ -13989,64 +15458,41 @@
           <a:p>
             <a:pPr algn="l">
               <a:lnSpc>
-                <a:spcPct val="100000"/>
-              </a:lnSpc>
-              <a:spcBef>
-                <a:spcPts val="0"/>
-              </a:spcBef>
-              <a:spcAft>
-                <a:spcPts val="0"/>
-              </a:spcAft>
-            </a:pPr>
-            <a:r>
-              <a:rPr sz="1600" b="1" i="0">
-                <a:solidFill>
-                  <a:srgbClr val="B84A00"/>
+                <a:spcPct val="122000"/>
+              </a:lnSpc>
+              <a:spcBef>
+                <a:spcPts val="0"/>
+              </a:spcBef>
+              <a:spcAft>
+                <a:spcPts val="0"/>
+              </a:spcAft>
+            </a:pPr>
+            <a:r>
+              <a:rPr sz="900" b="0" i="0">
+                <a:solidFill>
+                  <a:srgbClr val="666666"/>
                 </a:solidFill>
                 <a:latin typeface="Manrope"/>
                 <a:cs typeface="Manrope"/>
                 <a:ea typeface="Manrope"/>
               </a:rPr>
-              <a:t>5,80 €</a:t>
-            </a:r>
-          </a:p>
-        </p:txBody>
-      </p:sp>
-      <p:sp>
-        <p:nvSpPr>
-          <p:cNvPr id="27" name="TextBox 26"/>
-          <p:cNvSpPr txBox="1"/>
-          <p:nvPr/>
-        </p:nvSpPr>
-        <p:spPr>
-          <a:xfrm>
-            <a:off x="5038343" y="5641848"/>
-            <a:ext cx="1878482" cy="142430"/>
-          </a:xfrm>
-          <a:prstGeom prst="rect">
-            <a:avLst/>
-          </a:prstGeom>
-          <a:noFill/>
-        </p:spPr>
-        <p:txBody>
-          <a:bodyPr wrap="square" anchor="t" lIns="0" rIns="0" tIns="0" bIns="0">
-            <a:spAutoFit/>
-          </a:bodyPr>
-          <a:lstStyle/>
-          <a:p>
-            <a:pPr algn="l">
-              <a:lnSpc>
-                <a:spcPct val="115000"/>
-              </a:lnSpc>
-              <a:spcBef>
-                <a:spcPts val="0"/>
-              </a:spcBef>
-              <a:spcAft>
-                <a:spcPts val="0"/>
-              </a:spcAft>
-            </a:pPr>
-            <a:r>
-              <a:rPr sz="850" b="0" i="0">
+              <a:t>Если модель называет число вне фактов, оно удаляется</a:t>
+            </a:r>
+          </a:p>
+          <a:p>
+            <a:pPr algn="l">
+              <a:lnSpc>
+                <a:spcPct val="122000"/>
+              </a:lnSpc>
+              <a:spcBef>
+                <a:spcPts val="0"/>
+              </a:spcBef>
+              <a:spcAft>
+                <a:spcPts val="0"/>
+              </a:spcAft>
+            </a:pPr>
+            <a:r>
+              <a:rPr sz="900" b="0" i="0">
                 <a:solidFill>
                   <a:srgbClr val="666666"/>
                 </a:solidFill>
@@ -14054,21 +15500,21 @@
                 <a:cs typeface="Manrope"/>
                 <a:ea typeface="Manrope"/>
               </a:rPr>
-              <a:t>прогнозная экспозиция</a:t>
-            </a:r>
-          </a:p>
-        </p:txBody>
-      </p:sp>
-      <p:sp>
-        <p:nvSpPr>
-          <p:cNvPr id="28" name="Rectangle 27"/>
+              <a:t>автоматически. Это видно прямо в интерфейсе.</a:t>
+            </a:r>
+          </a:p>
+        </p:txBody>
+      </p:sp>
+      <p:sp>
+        <p:nvSpPr>
+          <p:cNvPr id="18" name="Rectangle 17"/>
           <p:cNvSpPr/>
           <p:nvPr/>
         </p:nvSpPr>
         <p:spPr>
           <a:xfrm>
-            <a:off x="7154569" y="4965192"/>
-            <a:ext cx="2134514" cy="1088136"/>
+            <a:off x="7836408" y="4060544"/>
+            <a:ext cx="3696919" cy="813104"/>
           </a:xfrm>
           <a:prstGeom prst="rect">
             <a:avLst/>
@@ -14107,14 +15553,58 @@
       </p:sp>
       <p:sp>
         <p:nvSpPr>
-          <p:cNvPr id="29" name="TextBox 28"/>
+          <p:cNvPr id="19" name="Rectangle 18"/>
+          <p:cNvSpPr/>
+          <p:nvPr/>
+        </p:nvSpPr>
+        <p:spPr>
+          <a:xfrm>
+            <a:off x="7836408" y="4060544"/>
+            <a:ext cx="41148" cy="813104"/>
+          </a:xfrm>
+          <a:prstGeom prst="rect">
+            <a:avLst/>
+          </a:prstGeom>
+          <a:solidFill>
+            <a:srgbClr val="83CDB7"/>
+          </a:solidFill>
+          <a:ln>
+            <a:noFill/>
+          </a:ln>
+          <a:effectLst/>
+        </p:spPr>
+        <p:style>
+          <a:lnRef idx="1">
+            <a:schemeClr val="accent1"/>
+          </a:lnRef>
+          <a:fillRef idx="3">
+            <a:schemeClr val="accent1"/>
+          </a:fillRef>
+          <a:effectRef idx="2">
+            <a:schemeClr val="accent1"/>
+          </a:effectRef>
+          <a:fontRef idx="minor">
+            <a:schemeClr val="lt1"/>
+          </a:fontRef>
+        </p:style>
+        <p:txBody>
+          <a:bodyPr rtlCol="0" anchor="ctr"/>
+          <a:lstStyle/>
+          <a:p>
+            <a:pPr algn="ctr"/>
+          </a:p>
+        </p:txBody>
+      </p:sp>
+      <p:sp>
+        <p:nvSpPr>
+          <p:cNvPr id="20" name="TextBox 19"/>
           <p:cNvSpPr txBox="1"/>
           <p:nvPr/>
         </p:nvSpPr>
         <p:spPr>
           <a:xfrm>
-            <a:off x="7282585" y="5093208"/>
-            <a:ext cx="1878482" cy="130048"/>
+            <a:off x="8019288" y="4161128"/>
+            <a:ext cx="3331159" cy="169164"/>
           </a:xfrm>
           <a:prstGeom prst="rect">
             <a:avLst/>
@@ -14129,39 +15619,39 @@
           <a:p>
             <a:pPr algn="l">
               <a:lnSpc>
-                <a:spcPct val="110000"/>
-              </a:lnSpc>
-              <a:spcBef>
-                <a:spcPts val="0"/>
-              </a:spcBef>
-              <a:spcAft>
-                <a:spcPts val="0"/>
-              </a:spcAft>
-            </a:pPr>
-            <a:r>
-              <a:rPr sz="800" b="1" i="0">
-                <a:solidFill>
-                  <a:srgbClr val="666666"/>
+                <a:spcPct val="108000"/>
+              </a:lnSpc>
+              <a:spcBef>
+                <a:spcPts val="0"/>
+              </a:spcBef>
+              <a:spcAft>
+                <a:spcPts val="0"/>
+              </a:spcAft>
+            </a:pPr>
+            <a:r>
+              <a:rPr sz="1100" b="1" i="0">
+                <a:solidFill>
+                  <a:srgbClr val="1A1A1A"/>
                 </a:solidFill>
                 <a:latin typeface="Manrope SemiBold"/>
                 <a:cs typeface="Manrope SemiBold"/>
                 <a:ea typeface="Manrope SemiBold"/>
               </a:rPr>
-              <a:t>ПРЕДСТОЯЩИЕ ПРОДЛЕНИЯ</a:t>
-            </a:r>
-          </a:p>
-        </p:txBody>
-      </p:sp>
-      <p:sp>
-        <p:nvSpPr>
-          <p:cNvPr id="30" name="TextBox 29"/>
+              <a:t>Приватность</a:t>
+            </a:r>
+          </a:p>
+        </p:txBody>
+      </p:sp>
+      <p:sp>
+        <p:nvSpPr>
+          <p:cNvPr id="21" name="TextBox 20"/>
           <p:cNvSpPr txBox="1"/>
           <p:nvPr/>
         </p:nvSpPr>
         <p:spPr>
           <a:xfrm>
-            <a:off x="7282585" y="5330952"/>
-            <a:ext cx="1878482" cy="221487"/>
+            <a:off x="8019288" y="4366868"/>
+            <a:ext cx="3331159" cy="436626"/>
           </a:xfrm>
           <a:prstGeom prst="rect">
             <a:avLst/>
@@ -14176,64 +15666,41 @@
           <a:p>
             <a:pPr algn="l">
               <a:lnSpc>
-                <a:spcPct val="100000"/>
-              </a:lnSpc>
-              <a:spcBef>
-                <a:spcPts val="0"/>
-              </a:spcBef>
-              <a:spcAft>
-                <a:spcPts val="0"/>
-              </a:spcAft>
-            </a:pPr>
-            <a:r>
-              <a:rPr sz="1600" b="1" i="0">
-                <a:solidFill>
-                  <a:srgbClr val="1A1A1A"/>
+                <a:spcPct val="122000"/>
+              </a:lnSpc>
+              <a:spcBef>
+                <a:spcPts val="0"/>
+              </a:spcBef>
+              <a:spcAft>
+                <a:spcPts val="0"/>
+              </a:spcAft>
+            </a:pPr>
+            <a:r>
+              <a:rPr sz="900" b="0" i="0">
+                <a:solidFill>
+                  <a:srgbClr val="666666"/>
                 </a:solidFill>
                 <a:latin typeface="Manrope"/>
                 <a:cs typeface="Manrope"/>
                 <a:ea typeface="Manrope"/>
               </a:rPr>
-              <a:t>17,03 €</a:t>
-            </a:r>
-          </a:p>
-        </p:txBody>
-      </p:sp>
-      <p:sp>
-        <p:nvSpPr>
-          <p:cNvPr id="31" name="TextBox 30"/>
-          <p:cNvSpPr txBox="1"/>
-          <p:nvPr/>
-        </p:nvSpPr>
-        <p:spPr>
-          <a:xfrm>
-            <a:off x="7282585" y="5641848"/>
-            <a:ext cx="1878482" cy="142430"/>
-          </a:xfrm>
-          <a:prstGeom prst="rect">
-            <a:avLst/>
-          </a:prstGeom>
-          <a:noFill/>
-        </p:spPr>
-        <p:txBody>
-          <a:bodyPr wrap="square" anchor="t" lIns="0" rIns="0" tIns="0" bIns="0">
-            <a:spAutoFit/>
-          </a:bodyPr>
-          <a:lstStyle/>
-          <a:p>
-            <a:pPr algn="l">
-              <a:lnSpc>
-                <a:spcPct val="115000"/>
-              </a:lnSpc>
-              <a:spcBef>
-                <a:spcPts val="0"/>
-              </a:spcBef>
-              <a:spcAft>
-                <a:spcPts val="0"/>
-              </a:spcAft>
-            </a:pPr>
-            <a:r>
-              <a:rPr sz="850" b="0" i="0">
+              <a:t>Провайдер только loopback, внешние AI-API не</a:t>
+            </a:r>
+          </a:p>
+          <a:p>
+            <a:pPr algn="l">
+              <a:lnSpc>
+                <a:spcPct val="122000"/>
+              </a:lnSpc>
+              <a:spcBef>
+                <a:spcPts val="0"/>
+              </a:spcBef>
+              <a:spcAft>
+                <a:spcPts val="0"/>
+              </a:spcAft>
+            </a:pPr>
+            <a:r>
+              <a:rPr sz="900" b="0" i="0">
                 <a:solidFill>
                   <a:srgbClr val="666666"/>
                 </a:solidFill>
@@ -14241,21 +15708,45 @@
                 <a:cs typeface="Manrope"/>
                 <a:ea typeface="Manrope"/>
               </a:rPr>
-              <a:t>сумма без учёта риска</a:t>
-            </a:r>
-          </a:p>
-        </p:txBody>
-      </p:sp>
-      <p:sp>
-        <p:nvSpPr>
-          <p:cNvPr id="32" name="Rectangle 31"/>
+              <a:t>используются. В контекст попадают лишь данные,</a:t>
+            </a:r>
+          </a:p>
+          <a:p>
+            <a:pPr algn="l">
+              <a:lnSpc>
+                <a:spcPct val="122000"/>
+              </a:lnSpc>
+              <a:spcBef>
+                <a:spcPts val="0"/>
+              </a:spcBef>
+              <a:spcAft>
+                <a:spcPts val="0"/>
+              </a:spcAft>
+            </a:pPr>
+            <a:r>
+              <a:rPr sz="900" b="0" i="0">
+                <a:solidFill>
+                  <a:srgbClr val="666666"/>
+                </a:solidFill>
+                <a:latin typeface="Manrope"/>
+                <a:cs typeface="Manrope"/>
+                <a:ea typeface="Manrope"/>
+              </a:rPr>
+              <a:t>доступные пользователю.</a:t>
+            </a:r>
+          </a:p>
+        </p:txBody>
+      </p:sp>
+      <p:sp>
+        <p:nvSpPr>
+          <p:cNvPr id="22" name="Rectangle 21"/>
           <p:cNvSpPr/>
           <p:nvPr/>
         </p:nvSpPr>
         <p:spPr>
           <a:xfrm>
-            <a:off x="9398811" y="4965192"/>
-            <a:ext cx="2134514" cy="1088136"/>
+            <a:off x="7836408" y="4942228"/>
+            <a:ext cx="3696919" cy="813104"/>
           </a:xfrm>
           <a:prstGeom prst="rect">
             <a:avLst/>
@@ -14294,14 +15785,58 @@
       </p:sp>
       <p:sp>
         <p:nvSpPr>
-          <p:cNvPr id="33" name="TextBox 32"/>
+          <p:cNvPr id="23" name="Rectangle 22"/>
+          <p:cNvSpPr/>
+          <p:nvPr/>
+        </p:nvSpPr>
+        <p:spPr>
+          <a:xfrm>
+            <a:off x="7836408" y="4942228"/>
+            <a:ext cx="41148" cy="813104"/>
+          </a:xfrm>
+          <a:prstGeom prst="rect">
+            <a:avLst/>
+          </a:prstGeom>
+          <a:solidFill>
+            <a:srgbClr val="83CDB7"/>
+          </a:solidFill>
+          <a:ln>
+            <a:noFill/>
+          </a:ln>
+          <a:effectLst/>
+        </p:spPr>
+        <p:style>
+          <a:lnRef idx="1">
+            <a:schemeClr val="accent1"/>
+          </a:lnRef>
+          <a:fillRef idx="3">
+            <a:schemeClr val="accent1"/>
+          </a:fillRef>
+          <a:effectRef idx="2">
+            <a:schemeClr val="accent1"/>
+          </a:effectRef>
+          <a:fontRef idx="minor">
+            <a:schemeClr val="lt1"/>
+          </a:fontRef>
+        </p:style>
+        <p:txBody>
+          <a:bodyPr rtlCol="0" anchor="ctr"/>
+          <a:lstStyle/>
+          <a:p>
+            <a:pPr algn="ctr"/>
+          </a:p>
+        </p:txBody>
+      </p:sp>
+      <p:sp>
+        <p:nvSpPr>
+          <p:cNvPr id="24" name="TextBox 23"/>
           <p:cNvSpPr txBox="1"/>
           <p:nvPr/>
         </p:nvSpPr>
         <p:spPr>
           <a:xfrm>
-            <a:off x="9526827" y="5093208"/>
-            <a:ext cx="1878482" cy="130048"/>
+            <a:off x="8019288" y="5042812"/>
+            <a:ext cx="3331159" cy="169164"/>
           </a:xfrm>
           <a:prstGeom prst="rect">
             <a:avLst/>
@@ -14316,39 +15851,39 @@
           <a:p>
             <a:pPr algn="l">
               <a:lnSpc>
-                <a:spcPct val="110000"/>
-              </a:lnSpc>
-              <a:spcBef>
-                <a:spcPts val="0"/>
-              </a:spcBef>
-              <a:spcAft>
-                <a:spcPts val="0"/>
-              </a:spcAft>
-            </a:pPr>
-            <a:r>
-              <a:rPr sz="800" b="1" i="0">
-                <a:solidFill>
-                  <a:srgbClr val="666666"/>
+                <a:spcPct val="108000"/>
+              </a:lnSpc>
+              <a:spcBef>
+                <a:spcPts val="0"/>
+              </a:spcBef>
+              <a:spcAft>
+                <a:spcPts val="0"/>
+              </a:spcAft>
+            </a:pPr>
+            <a:r>
+              <a:rPr sz="1100" b="1" i="0">
+                <a:solidFill>
+                  <a:srgbClr val="1A1A1A"/>
                 </a:solidFill>
                 <a:latin typeface="Manrope SemiBold"/>
                 <a:cs typeface="Manrope SemiBold"/>
                 <a:ea typeface="Manrope SemiBold"/>
               </a:rPr>
-              <a:t>ИСТОРИЧЕСКИЕ ПОПОЛНЕНИЯ</a:t>
-            </a:r>
-          </a:p>
-        </p:txBody>
-      </p:sp>
-      <p:sp>
-        <p:nvSpPr>
-          <p:cNvPr id="34" name="TextBox 33"/>
+              <a:t>Аналитика без AI</a:t>
+            </a:r>
+          </a:p>
+        </p:txBody>
+      </p:sp>
+      <p:sp>
+        <p:nvSpPr>
+          <p:cNvPr id="25" name="TextBox 24"/>
           <p:cNvSpPr txBox="1"/>
           <p:nvPr/>
         </p:nvSpPr>
         <p:spPr>
           <a:xfrm>
-            <a:off x="9526827" y="5330952"/>
-            <a:ext cx="1878482" cy="221487"/>
+            <a:off x="8019288" y="5248552"/>
+            <a:ext cx="3331159" cy="297180"/>
           </a:xfrm>
           <a:prstGeom prst="rect">
             <a:avLst/>
@@ -14363,17 +15898,17 @@
           <a:p>
             <a:pPr algn="l">
               <a:lnSpc>
-                <a:spcPct val="100000"/>
-              </a:lnSpc>
-              <a:spcBef>
-                <a:spcPts val="0"/>
-              </a:spcBef>
-              <a:spcAft>
-                <a:spcPts val="0"/>
-              </a:spcAft>
-            </a:pPr>
-            <a:r>
-              <a:rPr sz="1600" b="1" i="0">
+                <a:spcPct val="122000"/>
+              </a:lnSpc>
+              <a:spcBef>
+                <a:spcPts val="0"/>
+              </a:spcBef>
+              <a:spcAft>
+                <a:spcPts val="0"/>
+              </a:spcAft>
+            </a:pPr>
+            <a:r>
+              <a:rPr sz="900" b="0" i="0">
                 <a:solidFill>
                   <a:srgbClr val="666666"/>
                 </a:solidFill>
@@ -14381,46 +15916,23 @@
                 <a:cs typeface="Manrope"/>
                 <a:ea typeface="Manrope"/>
               </a:rPr>
-              <a:t>22 240,73 €</a:t>
-            </a:r>
-          </a:p>
-        </p:txBody>
-      </p:sp>
-      <p:sp>
-        <p:nvSpPr>
-          <p:cNvPr id="35" name="TextBox 34"/>
-          <p:cNvSpPr txBox="1"/>
-          <p:nvPr/>
-        </p:nvSpPr>
-        <p:spPr>
-          <a:xfrm>
-            <a:off x="9526827" y="5641848"/>
-            <a:ext cx="1878482" cy="142430"/>
-          </a:xfrm>
-          <a:prstGeom prst="rect">
-            <a:avLst/>
-          </a:prstGeom>
-          <a:noFill/>
-        </p:spPr>
-        <p:txBody>
-          <a:bodyPr wrap="square" anchor="t" lIns="0" rIns="0" tIns="0" bIns="0">
-            <a:spAutoFit/>
-          </a:bodyPr>
-          <a:lstStyle/>
-          <a:p>
-            <a:pPr algn="l">
-              <a:lnSpc>
-                <a:spcPct val="115000"/>
-              </a:lnSpc>
-              <a:spcBef>
-                <a:spcPts val="0"/>
-              </a:spcBef>
-              <a:spcAft>
-                <a:spcPts val="0"/>
-              </a:spcAft>
-            </a:pPr>
-            <a:r>
-              <a:rPr sz="850" b="0" i="0">
+              <a:t>Если модель недоступна, аналитика продолжает работать:</a:t>
+            </a:r>
+          </a:p>
+          <a:p>
+            <a:pPr algn="l">
+              <a:lnSpc>
+                <a:spcPct val="122000"/>
+              </a:lnSpc>
+              <a:spcBef>
+                <a:spcPts val="0"/>
+              </a:spcBef>
+              <a:spcAft>
+                <a:spcPts val="0"/>
+              </a:spcAft>
+            </a:pPr>
+            <a:r>
+              <a:rPr sz="900" b="0" i="0">
                 <a:solidFill>
                   <a:srgbClr val="666666"/>
                 </a:solidFill>
@@ -14428,14 +15940,14 @@
                 <a:cs typeface="Manrope"/>
                 <a:ea typeface="Manrope"/>
               </a:rPr>
-              <a:t>справочно, не суммируется</a:t>
-            </a:r>
-          </a:p>
-        </p:txBody>
-      </p:sp>
-      <p:sp>
-        <p:nvSpPr>
-          <p:cNvPr id="36" name="Rectangle 35"/>
+              <a:t>AI — слой объяснения, а не источник чисел.</a:t>
+            </a:r>
+          </a:p>
+        </p:txBody>
+      </p:sp>
+      <p:sp>
+        <p:nvSpPr>
+          <p:cNvPr id="26" name="Rectangle 25"/>
           <p:cNvSpPr/>
           <p:nvPr/>
         </p:nvSpPr>
@@ -14479,7 +15991,7 @@
       </p:sp>
       <p:sp>
         <p:nvSpPr>
-          <p:cNvPr id="37" name="TextBox 36"/>
+          <p:cNvPr id="27" name="TextBox 26"/>
           <p:cNvSpPr txBox="1"/>
           <p:nvPr/>
         </p:nvSpPr>
@@ -14519,7 +16031,7 @@
                 <a:cs typeface="Manrope"/>
                 <a:ea typeface="Manrope"/>
               </a:rPr>
-              <a:t>Горизонт 30 дней. Сумма по 4 продлениям: 0,36 + 0,70 + 1,81 + 2,93 = 5,80 €. Оценка не является гарантированным прогнозом потерь.</a:t>
+              <a:t>Проверено живым запуском: Ollama + qwen2.5:3b-instruct на CPU, 5 эндпоинта под авторизацией, ответ grounded=true. Балл риска — индекс, а не вероятность оттока.</a:t>
             </a:r>
           </a:p>
         </p:txBody>
@@ -14628,7 +16140,7 @@
                 <a:cs typeface="Manrope"/>
                 <a:ea typeface="Manrope"/>
               </a:rPr>
-              <a:t>СКВОЗНОЙ СЦЕНАРИЙ · ШАГ 4–5</a:t>
+              <a:t>ДЕНЕЖНАЯ ОЦЕНКА</a:t>
             </a:r>
           </a:p>
         </p:txBody>
@@ -14675,7 +16187,7 @@
                 <a:cs typeface="Manrope"/>
                 <a:ea typeface="Manrope"/>
               </a:rPr>
-              <a:t>Меняем вес — результат пересчитывается</a:t>
+              <a:t>Риск и деньги — разные величины</a:t>
             </a:r>
           </a:p>
         </p:txBody>
@@ -14722,7 +16234,7 @@
                 <a:cs typeface="Manrope"/>
                 <a:ea typeface="Manrope"/>
               </a:rPr>
-              <a:t>Гипотеза до изменения: усилим «близость даты окончания» с 3,0 до 9,0 — баллы вырастут. Проверяем на реальном</a:t>
+              <a:t>Выручка под риском = стоимость продления × балл риска / 100, и только для открытых услуг с продлением внутри</a:t>
             </a:r>
           </a:p>
           <a:p>
@@ -14746,7 +16258,7 @@
                 <a:cs typeface="Manrope"/>
                 <a:ea typeface="Manrope"/>
               </a:rPr>
-              <a:t>интерфейсе.</a:t>
+              <a:t>горизонта.</a:t>
             </a:r>
           </a:p>
         </p:txBody>
@@ -14760,7 +16272,156 @@
         <p:spPr>
           <a:xfrm>
             <a:off x="658368" y="2075688"/>
-            <a:ext cx="10874959" cy="420624"/>
+            <a:ext cx="10874959" cy="768096"/>
+          </a:xfrm>
+          <a:prstGeom prst="rect">
+            <a:avLst/>
+          </a:prstGeom>
+          <a:solidFill>
+            <a:srgbClr val="131313"/>
+          </a:solidFill>
+          <a:ln>
+            <a:noFill/>
+          </a:ln>
+          <a:effectLst/>
+        </p:spPr>
+        <p:style>
+          <a:lnRef idx="1">
+            <a:schemeClr val="accent1"/>
+          </a:lnRef>
+          <a:fillRef idx="3">
+            <a:schemeClr val="accent1"/>
+          </a:fillRef>
+          <a:effectRef idx="2">
+            <a:schemeClr val="accent1"/>
+          </a:effectRef>
+          <a:fontRef idx="minor">
+            <a:schemeClr val="lt1"/>
+          </a:fontRef>
+        </p:style>
+        <p:txBody>
+          <a:bodyPr rtlCol="0" anchor="ctr"/>
+          <a:lstStyle/>
+          <a:p>
+            <a:pPr algn="ctr"/>
+          </a:p>
+        </p:txBody>
+      </p:sp>
+      <p:sp>
+        <p:nvSpPr>
+          <p:cNvPr id="7" name="TextBox 6"/>
+          <p:cNvSpPr txBox="1"/>
+          <p:nvPr/>
+        </p:nvSpPr>
+        <p:spPr>
+          <a:xfrm>
+            <a:off x="932688" y="2212848"/>
+            <a:ext cx="6583680" cy="512064"/>
+          </a:xfrm>
+          <a:prstGeom prst="rect">
+            <a:avLst/>
+          </a:prstGeom>
+          <a:noFill/>
+        </p:spPr>
+        <p:txBody>
+          <a:bodyPr wrap="square" anchor="t" lIns="0" rIns="0" tIns="0" bIns="0">
+            <a:spAutoFit/>
+          </a:bodyPr>
+          <a:lstStyle/>
+          <a:p>
+            <a:pPr algn="l">
+              <a:lnSpc>
+                <a:spcPct val="116000"/>
+              </a:lnSpc>
+              <a:spcBef>
+                <a:spcPts val="0"/>
+              </a:spcBef>
+              <a:spcAft>
+                <a:spcPts val="0"/>
+              </a:spcAft>
+            </a:pPr>
+            <a:r>
+              <a:rPr sz="1500" b="0">
+                <a:solidFill>
+                  <a:srgbClr val="C9C9C9"/>
+                </a:solidFill>
+                <a:latin typeface="Manrope Medium"/>
+                <a:cs typeface="Manrope Medium"/>
+                <a:ea typeface="Manrope Medium"/>
+              </a:rPr>
+              <a:t>выручка под риском  </a:t>
+            </a:r>
+            <a:r>
+              <a:rPr sz="1500" b="1">
+                <a:solidFill>
+                  <a:srgbClr val="FFFFFF"/>
+                </a:solidFill>
+                <a:latin typeface="Manrope SemiBold"/>
+                <a:cs typeface="Manrope SemiBold"/>
+                <a:ea typeface="Manrope SemiBold"/>
+              </a:rPr>
+              <a:t>=  стоимость продления × балл риска / 100</a:t>
+            </a:r>
+          </a:p>
+        </p:txBody>
+      </p:sp>
+      <p:sp>
+        <p:nvSpPr>
+          <p:cNvPr id="8" name="TextBox 7"/>
+          <p:cNvSpPr txBox="1"/>
+          <p:nvPr/>
+        </p:nvSpPr>
+        <p:spPr>
+          <a:xfrm>
+            <a:off x="8065008" y="2295144"/>
+            <a:ext cx="3193999" cy="170687"/>
+          </a:xfrm>
+          <a:prstGeom prst="rect">
+            <a:avLst/>
+          </a:prstGeom>
+          <a:noFill/>
+        </p:spPr>
+        <p:txBody>
+          <a:bodyPr wrap="square" anchor="t" lIns="0" rIns="0" tIns="0" bIns="0">
+            <a:spAutoFit/>
+          </a:bodyPr>
+          <a:lstStyle/>
+          <a:p>
+            <a:pPr algn="l">
+              <a:lnSpc>
+                <a:spcPct val="120000"/>
+              </a:lnSpc>
+              <a:spcBef>
+                <a:spcPts val="0"/>
+              </a:spcBef>
+              <a:spcAft>
+                <a:spcPts val="0"/>
+              </a:spcAft>
+            </a:pPr>
+            <a:r>
+              <a:rPr sz="1000" b="0" i="0">
+                <a:solidFill>
+                  <a:srgbClr val="83CDB7"/>
+                </a:solidFill>
+                <a:latin typeface="Manrope Medium"/>
+                <a:cs typeface="Manrope Medium"/>
+                <a:ea typeface="Manrope Medium"/>
+              </a:rPr>
+              <a:t>Баланс в формулу не входит</a:t>
+            </a:r>
+          </a:p>
+        </p:txBody>
+      </p:sp>
+      <p:sp>
+        <p:nvSpPr>
+          <p:cNvPr id="9" name="Rectangle 8"/>
+          <p:cNvSpPr/>
+          <p:nvPr/>
+        </p:nvSpPr>
+        <p:spPr>
+          <a:xfrm>
+            <a:off x="658368" y="3118104"/>
+            <a:ext cx="3977639" cy="2935224"/>
           </a:xfrm>
           <a:prstGeom prst="rect">
             <a:avLst/>
@@ -14799,58 +16460,14 @@
       </p:sp>
       <p:sp>
         <p:nvSpPr>
-          <p:cNvPr id="7" name="Rectangle 6"/>
-          <p:cNvSpPr/>
-          <p:nvPr/>
-        </p:nvSpPr>
-        <p:spPr>
-          <a:xfrm>
-            <a:off x="658368" y="2075688"/>
-            <a:ext cx="41148" cy="420624"/>
-          </a:xfrm>
-          <a:prstGeom prst="rect">
-            <a:avLst/>
-          </a:prstGeom>
-          <a:solidFill>
-            <a:srgbClr val="B84A00"/>
-          </a:solidFill>
-          <a:ln>
-            <a:noFill/>
-          </a:ln>
-          <a:effectLst/>
-        </p:spPr>
-        <p:style>
-          <a:lnRef idx="1">
-            <a:schemeClr val="accent1"/>
-          </a:lnRef>
-          <a:fillRef idx="3">
-            <a:schemeClr val="accent1"/>
-          </a:fillRef>
-          <a:effectRef idx="2">
-            <a:schemeClr val="accent1"/>
-          </a:effectRef>
-          <a:fontRef idx="minor">
-            <a:schemeClr val="lt1"/>
-          </a:fontRef>
-        </p:style>
-        <p:txBody>
-          <a:bodyPr rtlCol="0" anchor="ctr"/>
-          <a:lstStyle/>
-          <a:p>
-            <a:pPr algn="ctr"/>
-          </a:p>
-        </p:txBody>
-      </p:sp>
-      <p:sp>
-        <p:nvSpPr>
-          <p:cNvPr id="8" name="TextBox 7"/>
+          <p:cNvPr id="10" name="TextBox 9"/>
           <p:cNvSpPr txBox="1"/>
           <p:nvPr/>
         </p:nvSpPr>
         <p:spPr>
           <a:xfrm>
-            <a:off x="877824" y="2176272"/>
-            <a:ext cx="10436047" cy="256032"/>
+            <a:off x="877824" y="3319272"/>
+            <a:ext cx="3538727" cy="359664"/>
           </a:xfrm>
           <a:prstGeom prst="rect">
             <a:avLst/>
@@ -14865,28 +16482,558 @@
           <a:p>
             <a:pPr algn="l">
               <a:lnSpc>
-                <a:spcPct val="116000"/>
-              </a:lnSpc>
-              <a:spcBef>
-                <a:spcPts val="0"/>
-              </a:spcBef>
-              <a:spcAft>
-                <a:spcPts val="0"/>
-              </a:spcAft>
-            </a:pPr>
-            <a:r>
-              <a:rPr sz="1100" b="1">
+                <a:spcPct val="112000"/>
+              </a:lnSpc>
+              <a:spcBef>
+                <a:spcPts val="0"/>
+              </a:spcBef>
+              <a:spcAft>
+                <a:spcPts val="0"/>
+              </a:spcAft>
+            </a:pPr>
+            <a:r>
+              <a:rPr sz="1200" b="1" i="0">
+                <a:solidFill>
+                  <a:srgbClr val="1A1A1A"/>
+                </a:solidFill>
+                <a:latin typeface="Manrope SemiBold"/>
+                <a:cs typeface="Manrope SemiBold"/>
+                <a:ea typeface="Manrope SemiBold"/>
+              </a:rPr>
+              <a:t>Клиент #10 — высокий риск, но 0,00 € под</a:t>
+            </a:r>
+          </a:p>
+          <a:p>
+            <a:pPr algn="l">
+              <a:lnSpc>
+                <a:spcPct val="112000"/>
+              </a:lnSpc>
+              <a:spcBef>
+                <a:spcPts val="0"/>
+              </a:spcBef>
+              <a:spcAft>
+                <a:spcPts val="0"/>
+              </a:spcAft>
+            </a:pPr>
+            <a:r>
+              <a:rPr sz="1200" b="1" i="0">
+                <a:solidFill>
+                  <a:srgbClr val="1A1A1A"/>
+                </a:solidFill>
+                <a:latin typeface="Manrope SemiBold"/>
+                <a:cs typeface="Manrope SemiBold"/>
+                <a:ea typeface="Manrope SemiBold"/>
+              </a:rPr>
+              <a:t>риском</a:t>
+            </a:r>
+          </a:p>
+        </p:txBody>
+      </p:sp>
+      <p:sp>
+        <p:nvSpPr>
+          <p:cNvPr id="11" name="TextBox 10"/>
+          <p:cNvSpPr txBox="1"/>
+          <p:nvPr/>
+        </p:nvSpPr>
+        <p:spPr>
+          <a:xfrm>
+            <a:off x="877824" y="3703320"/>
+            <a:ext cx="3538727" cy="131635"/>
+          </a:xfrm>
+          <a:prstGeom prst="rect">
+            <a:avLst/>
+          </a:prstGeom>
+          <a:noFill/>
+        </p:spPr>
+        <p:txBody>
+          <a:bodyPr wrap="square" anchor="t" lIns="0" rIns="0" tIns="0" bIns="0">
+            <a:spAutoFit/>
+          </a:bodyPr>
+          <a:lstStyle/>
+          <a:p>
+            <a:pPr algn="l">
+              <a:lnSpc>
+                <a:spcPct val="105000"/>
+              </a:lnSpc>
+              <a:spcBef>
+                <a:spcPts val="0"/>
+              </a:spcBef>
+              <a:spcAft>
+                <a:spcPts val="0"/>
+              </a:spcAft>
+            </a:pPr>
+            <a:r>
+              <a:rPr sz="850" b="1" i="0">
+                <a:solidFill>
+                  <a:srgbClr val="666666"/>
+                </a:solidFill>
+                <a:latin typeface="Manrope SemiBold"/>
+                <a:cs typeface="Manrope SemiBold"/>
+                <a:ea typeface="Manrope SemiBold"/>
+              </a:rPr>
+              <a:t>БАЛЛ РИСКА КЛИЕНТА</a:t>
+            </a:r>
+          </a:p>
+        </p:txBody>
+      </p:sp>
+      <p:sp>
+        <p:nvSpPr>
+          <p:cNvPr id="12" name="TextBox 11"/>
+          <p:cNvSpPr txBox="1"/>
+          <p:nvPr/>
+        </p:nvSpPr>
+        <p:spPr>
+          <a:xfrm>
+            <a:off x="877824" y="3858768"/>
+            <a:ext cx="3538727" cy="232600"/>
+          </a:xfrm>
+          <a:prstGeom prst="rect">
+            <a:avLst/>
+          </a:prstGeom>
+          <a:noFill/>
+        </p:spPr>
+        <p:txBody>
+          <a:bodyPr wrap="square" anchor="t" lIns="0" rIns="0" tIns="0" bIns="0">
+            <a:spAutoFit/>
+          </a:bodyPr>
+          <a:lstStyle/>
+          <a:p>
+            <a:pPr algn="l">
+              <a:lnSpc>
+                <a:spcPct val="125000"/>
+              </a:lnSpc>
+              <a:spcBef>
+                <a:spcPts val="0"/>
+              </a:spcBef>
+              <a:spcAft>
+                <a:spcPts val="0"/>
+              </a:spcAft>
+            </a:pPr>
+            <a:r>
+              <a:rPr sz="1350" b="1" i="0">
                 <a:solidFill>
                   <a:srgbClr val="B84A00"/>
+                </a:solidFill>
+                <a:latin typeface="Manrope SemiBold"/>
+                <a:cs typeface="Manrope SemiBold"/>
+                <a:ea typeface="Manrope SemiBold"/>
+              </a:rPr>
+              <a:t>71,4 / 100</a:t>
+            </a:r>
+          </a:p>
+        </p:txBody>
+      </p:sp>
+      <p:sp>
+        <p:nvSpPr>
+          <p:cNvPr id="13" name="TextBox 12"/>
+          <p:cNvSpPr txBox="1"/>
+          <p:nvPr/>
+        </p:nvSpPr>
+        <p:spPr>
+          <a:xfrm>
+            <a:off x="877824" y="4237672"/>
+            <a:ext cx="3538727" cy="131635"/>
+          </a:xfrm>
+          <a:prstGeom prst="rect">
+            <a:avLst/>
+          </a:prstGeom>
+          <a:noFill/>
+        </p:spPr>
+        <p:txBody>
+          <a:bodyPr wrap="square" anchor="t" lIns="0" rIns="0" tIns="0" bIns="0">
+            <a:spAutoFit/>
+          </a:bodyPr>
+          <a:lstStyle/>
+          <a:p>
+            <a:pPr algn="l">
+              <a:lnSpc>
+                <a:spcPct val="105000"/>
+              </a:lnSpc>
+              <a:spcBef>
+                <a:spcPts val="0"/>
+              </a:spcBef>
+              <a:spcAft>
+                <a:spcPts val="0"/>
+              </a:spcAft>
+            </a:pPr>
+            <a:r>
+              <a:rPr sz="850" b="1" i="0">
+                <a:solidFill>
+                  <a:srgbClr val="666666"/>
+                </a:solidFill>
+                <a:latin typeface="Manrope SemiBold"/>
+                <a:cs typeface="Manrope SemiBold"/>
+                <a:ea typeface="Manrope SemiBold"/>
+              </a:rPr>
+              <a:t>ВЫРУЧКА ПОД РИСКОМ</a:t>
+            </a:r>
+          </a:p>
+        </p:txBody>
+      </p:sp>
+      <p:sp>
+        <p:nvSpPr>
+          <p:cNvPr id="14" name="TextBox 13"/>
+          <p:cNvSpPr txBox="1"/>
+          <p:nvPr/>
+        </p:nvSpPr>
+        <p:spPr>
+          <a:xfrm>
+            <a:off x="877824" y="4393120"/>
+            <a:ext cx="3538727" cy="232600"/>
+          </a:xfrm>
+          <a:prstGeom prst="rect">
+            <a:avLst/>
+          </a:prstGeom>
+          <a:noFill/>
+        </p:spPr>
+        <p:txBody>
+          <a:bodyPr wrap="square" anchor="t" lIns="0" rIns="0" tIns="0" bIns="0">
+            <a:spAutoFit/>
+          </a:bodyPr>
+          <a:lstStyle/>
+          <a:p>
+            <a:pPr algn="l">
+              <a:lnSpc>
+                <a:spcPct val="125000"/>
+              </a:lnSpc>
+              <a:spcBef>
+                <a:spcPts val="0"/>
+              </a:spcBef>
+              <a:spcAft>
+                <a:spcPts val="0"/>
+              </a:spcAft>
+            </a:pPr>
+            <a:r>
+              <a:rPr sz="1350" b="1" i="0">
+                <a:solidFill>
+                  <a:srgbClr val="1A1A1A"/>
+                </a:solidFill>
+                <a:latin typeface="Manrope SemiBold"/>
+                <a:cs typeface="Manrope SemiBold"/>
+                <a:ea typeface="Manrope SemiBold"/>
+              </a:rPr>
+              <a:t>0,00 €</a:t>
+            </a:r>
+          </a:p>
+        </p:txBody>
+      </p:sp>
+      <p:sp>
+        <p:nvSpPr>
+          <p:cNvPr id="15" name="TextBox 14"/>
+          <p:cNvSpPr txBox="1"/>
+          <p:nvPr/>
+        </p:nvSpPr>
+        <p:spPr>
+          <a:xfrm>
+            <a:off x="877824" y="4772024"/>
+            <a:ext cx="3538727" cy="131635"/>
+          </a:xfrm>
+          <a:prstGeom prst="rect">
+            <a:avLst/>
+          </a:prstGeom>
+          <a:noFill/>
+        </p:spPr>
+        <p:txBody>
+          <a:bodyPr wrap="square" anchor="t" lIns="0" rIns="0" tIns="0" bIns="0">
+            <a:spAutoFit/>
+          </a:bodyPr>
+          <a:lstStyle/>
+          <a:p>
+            <a:pPr algn="l">
+              <a:lnSpc>
+                <a:spcPct val="105000"/>
+              </a:lnSpc>
+              <a:spcBef>
+                <a:spcPts val="0"/>
+              </a:spcBef>
+              <a:spcAft>
+                <a:spcPts val="0"/>
+              </a:spcAft>
+            </a:pPr>
+            <a:r>
+              <a:rPr sz="850" b="1" i="0">
+                <a:solidFill>
+                  <a:srgbClr val="666666"/>
+                </a:solidFill>
+                <a:latin typeface="Manrope SemiBold"/>
+                <a:cs typeface="Manrope SemiBold"/>
+                <a:ea typeface="Manrope SemiBold"/>
+              </a:rPr>
+              <a:t>ПОЧЕМУ НОЛЬ</a:t>
+            </a:r>
+          </a:p>
+        </p:txBody>
+      </p:sp>
+      <p:sp>
+        <p:nvSpPr>
+          <p:cNvPr id="16" name="TextBox 15"/>
+          <p:cNvSpPr txBox="1"/>
+          <p:nvPr/>
+        </p:nvSpPr>
+        <p:spPr>
+          <a:xfrm>
+            <a:off x="877824" y="4927472"/>
+            <a:ext cx="3538727" cy="169100"/>
+          </a:xfrm>
+          <a:prstGeom prst="rect">
+            <a:avLst/>
+          </a:prstGeom>
+          <a:noFill/>
+        </p:spPr>
+        <p:txBody>
+          <a:bodyPr wrap="square" anchor="t" lIns="0" rIns="0" tIns="0" bIns="0">
+            <a:spAutoFit/>
+          </a:bodyPr>
+          <a:lstStyle/>
+          <a:p>
+            <a:pPr algn="l">
+              <a:lnSpc>
+                <a:spcPct val="125000"/>
+              </a:lnSpc>
+              <a:spcBef>
+                <a:spcPts val="0"/>
+              </a:spcBef>
+              <a:spcAft>
+                <a:spcPts val="0"/>
+              </a:spcAft>
+            </a:pPr>
+            <a:r>
+              <a:rPr sz="950" b="0" i="0">
+                <a:solidFill>
+                  <a:srgbClr val="666666"/>
                 </a:solidFill>
                 <a:latin typeface="Manrope"/>
                 <a:cs typeface="Manrope"/>
                 <a:ea typeface="Manrope"/>
               </a:rPr>
-              <a:t>ГИПОТЕЗА ДО ИЗМЕНЕНИЯ   </a:t>
-            </a:r>
-            <a:r>
-              <a:rPr sz="1100" b="0">
+              <a:t>Сроки уже прошли — горизонт смотрит вперёд.</a:t>
+            </a:r>
+          </a:p>
+        </p:txBody>
+      </p:sp>
+      <p:sp>
+        <p:nvSpPr>
+          <p:cNvPr id="17" name="TextBox 16"/>
+          <p:cNvSpPr txBox="1"/>
+          <p:nvPr/>
+        </p:nvSpPr>
+        <p:spPr>
+          <a:xfrm>
+            <a:off x="877824" y="5242876"/>
+            <a:ext cx="3538727" cy="131635"/>
+          </a:xfrm>
+          <a:prstGeom prst="rect">
+            <a:avLst/>
+          </a:prstGeom>
+          <a:noFill/>
+        </p:spPr>
+        <p:txBody>
+          <a:bodyPr wrap="square" anchor="t" lIns="0" rIns="0" tIns="0" bIns="0">
+            <a:spAutoFit/>
+          </a:bodyPr>
+          <a:lstStyle/>
+          <a:p>
+            <a:pPr algn="l">
+              <a:lnSpc>
+                <a:spcPct val="105000"/>
+              </a:lnSpc>
+              <a:spcBef>
+                <a:spcPts val="0"/>
+              </a:spcBef>
+              <a:spcAft>
+                <a:spcPts val="0"/>
+              </a:spcAft>
+            </a:pPr>
+            <a:r>
+              <a:rPr sz="850" b="1" i="0">
+                <a:solidFill>
+                  <a:srgbClr val="666666"/>
+                </a:solidFill>
+                <a:latin typeface="Manrope SemiBold"/>
+                <a:cs typeface="Manrope SemiBold"/>
+                <a:ea typeface="Manrope SemiBold"/>
+              </a:rPr>
+              <a:t>БАЛАНС — НЕ ВЫРУЧКА</a:t>
+            </a:r>
+          </a:p>
+        </p:txBody>
+      </p:sp>
+      <p:sp>
+        <p:nvSpPr>
+          <p:cNvPr id="18" name="TextBox 17"/>
+          <p:cNvSpPr txBox="1"/>
+          <p:nvPr/>
+        </p:nvSpPr>
+        <p:spPr>
+          <a:xfrm>
+            <a:off x="877824" y="5398324"/>
+            <a:ext cx="3538727" cy="232600"/>
+          </a:xfrm>
+          <a:prstGeom prst="rect">
+            <a:avLst/>
+          </a:prstGeom>
+          <a:noFill/>
+        </p:spPr>
+        <p:txBody>
+          <a:bodyPr wrap="square" anchor="t" lIns="0" rIns="0" tIns="0" bIns="0">
+            <a:spAutoFit/>
+          </a:bodyPr>
+          <a:lstStyle/>
+          <a:p>
+            <a:pPr algn="l">
+              <a:lnSpc>
+                <a:spcPct val="125000"/>
+              </a:lnSpc>
+              <a:spcBef>
+                <a:spcPts val="0"/>
+              </a:spcBef>
+              <a:spcAft>
+                <a:spcPts val="0"/>
+              </a:spcAft>
+            </a:pPr>
+            <a:r>
+              <a:rPr sz="1350" b="1" i="0">
+                <a:solidFill>
+                  <a:srgbClr val="666666"/>
+                </a:solidFill>
+                <a:latin typeface="Manrope SemiBold"/>
+                <a:cs typeface="Manrope SemiBold"/>
+                <a:ea typeface="Manrope SemiBold"/>
+              </a:rPr>
+              <a:t>203,79 €</a:t>
+            </a:r>
+          </a:p>
+        </p:txBody>
+      </p:sp>
+      <p:sp>
+        <p:nvSpPr>
+          <p:cNvPr id="19" name="TextBox 18"/>
+          <p:cNvSpPr txBox="1"/>
+          <p:nvPr/>
+        </p:nvSpPr>
+        <p:spPr>
+          <a:xfrm>
+            <a:off x="877824" y="5777228"/>
+            <a:ext cx="3538727" cy="131635"/>
+          </a:xfrm>
+          <a:prstGeom prst="rect">
+            <a:avLst/>
+          </a:prstGeom>
+          <a:noFill/>
+        </p:spPr>
+        <p:txBody>
+          <a:bodyPr wrap="square" anchor="t" lIns="0" rIns="0" tIns="0" bIns="0">
+            <a:spAutoFit/>
+          </a:bodyPr>
+          <a:lstStyle/>
+          <a:p>
+            <a:pPr algn="l">
+              <a:lnSpc>
+                <a:spcPct val="105000"/>
+              </a:lnSpc>
+              <a:spcBef>
+                <a:spcPts val="0"/>
+              </a:spcBef>
+              <a:spcAft>
+                <a:spcPts val="0"/>
+              </a:spcAft>
+            </a:pPr>
+            <a:r>
+              <a:rPr sz="850" b="1" i="0">
+                <a:solidFill>
+                  <a:srgbClr val="666666"/>
+                </a:solidFill>
+                <a:latin typeface="Manrope SemiBold"/>
+                <a:cs typeface="Manrope SemiBold"/>
+                <a:ea typeface="Manrope SemiBold"/>
+              </a:rPr>
+              <a:t>ВСЕГО ПОПОЛНЕНО — СПРАВОЧНО</a:t>
+            </a:r>
+          </a:p>
+        </p:txBody>
+      </p:sp>
+      <p:sp>
+        <p:nvSpPr>
+          <p:cNvPr id="20" name="TextBox 19"/>
+          <p:cNvSpPr txBox="1"/>
+          <p:nvPr/>
+        </p:nvSpPr>
+        <p:spPr>
+          <a:xfrm>
+            <a:off x="877824" y="5932676"/>
+            <a:ext cx="3538727" cy="232600"/>
+          </a:xfrm>
+          <a:prstGeom prst="rect">
+            <a:avLst/>
+          </a:prstGeom>
+          <a:noFill/>
+        </p:spPr>
+        <p:txBody>
+          <a:bodyPr wrap="square" anchor="t" lIns="0" rIns="0" tIns="0" bIns="0">
+            <a:spAutoFit/>
+          </a:bodyPr>
+          <a:lstStyle/>
+          <a:p>
+            <a:pPr algn="l">
+              <a:lnSpc>
+                <a:spcPct val="125000"/>
+              </a:lnSpc>
+              <a:spcBef>
+                <a:spcPts val="0"/>
+              </a:spcBef>
+              <a:spcAft>
+                <a:spcPts val="0"/>
+              </a:spcAft>
+            </a:pPr>
+            <a:r>
+              <a:rPr sz="1350" b="1" i="0">
+                <a:solidFill>
+                  <a:srgbClr val="666666"/>
+                </a:solidFill>
+                <a:latin typeface="Manrope SemiBold"/>
+                <a:cs typeface="Manrope SemiBold"/>
+                <a:ea typeface="Manrope SemiBold"/>
+              </a:rPr>
+              <a:t>4 206,69 €</a:t>
+            </a:r>
+          </a:p>
+        </p:txBody>
+      </p:sp>
+      <p:sp>
+        <p:nvSpPr>
+          <p:cNvPr id="21" name="TextBox 20"/>
+          <p:cNvSpPr txBox="1"/>
+          <p:nvPr/>
+        </p:nvSpPr>
+        <p:spPr>
+          <a:xfrm>
+            <a:off x="4910327" y="3090672"/>
+            <a:ext cx="6623000" cy="151003"/>
+          </a:xfrm>
+          <a:prstGeom prst="rect">
+            <a:avLst/>
+          </a:prstGeom>
+          <a:noFill/>
+        </p:spPr>
+        <p:txBody>
+          <a:bodyPr wrap="square" anchor="t" lIns="0" rIns="0" tIns="0" bIns="0">
+            <a:spAutoFit/>
+          </a:bodyPr>
+          <a:lstStyle/>
+          <a:p>
+            <a:pPr algn="l">
+              <a:lnSpc>
+                <a:spcPct val="110000"/>
+              </a:lnSpc>
+              <a:spcBef>
+                <a:spcPts val="0"/>
+              </a:spcBef>
+              <a:spcAft>
+                <a:spcPts val="0"/>
+              </a:spcAft>
+            </a:pPr>
+            <a:r>
+              <a:rPr sz="950" b="1" i="0">
                 <a:solidFill>
                   <a:srgbClr val="666666"/>
                 </a:solidFill>
@@ -14894,115 +17041,21 @@
                 <a:cs typeface="Manrope"/>
                 <a:ea typeface="Manrope"/>
               </a:rPr>
-              <a:t>вес expiry_proximity 3,0 → 9,0 должен повысить баллы и число клиентов высокого риска</a:t>
-            </a:r>
-          </a:p>
-        </p:txBody>
-      </p:sp>
-      <p:sp>
-        <p:nvSpPr>
-          <p:cNvPr id="9" name="TextBox 8"/>
-          <p:cNvSpPr txBox="1"/>
-          <p:nvPr/>
-        </p:nvSpPr>
-        <p:spPr>
-          <a:xfrm>
-            <a:off x="658368" y="2734056"/>
-            <a:ext cx="5282031" cy="151003"/>
-          </a:xfrm>
-          <a:prstGeom prst="rect">
-            <a:avLst/>
-          </a:prstGeom>
-          <a:noFill/>
-        </p:spPr>
-        <p:txBody>
-          <a:bodyPr wrap="square" anchor="t" lIns="0" rIns="0" tIns="0" bIns="0">
-            <a:spAutoFit/>
-          </a:bodyPr>
-          <a:lstStyle/>
-          <a:p>
-            <a:pPr algn="l">
-              <a:lnSpc>
-                <a:spcPct val="110000"/>
-              </a:lnSpc>
-              <a:spcBef>
-                <a:spcPts val="0"/>
-              </a:spcBef>
-              <a:spcAft>
-                <a:spcPts val="0"/>
-              </a:spcAft>
-            </a:pPr>
-            <a:r>
-              <a:rPr sz="950" b="1" i="0">
-                <a:solidFill>
-                  <a:srgbClr val="666666"/>
-                </a:solidFill>
-                <a:latin typeface="Manrope"/>
-                <a:cs typeface="Manrope"/>
-                <a:ea typeface="Manrope"/>
-              </a:rPr>
-              <a:t>ДО · ВЕС 3,0</a:t>
-            </a:r>
-          </a:p>
-        </p:txBody>
-      </p:sp>
-      <p:sp>
-        <p:nvSpPr>
-          <p:cNvPr id="10" name="TextBox 9"/>
-          <p:cNvSpPr txBox="1"/>
-          <p:nvPr/>
-        </p:nvSpPr>
-        <p:spPr>
-          <a:xfrm>
-            <a:off x="6251295" y="2734056"/>
-            <a:ext cx="5282031" cy="151003"/>
-          </a:xfrm>
-          <a:prstGeom prst="rect">
-            <a:avLst/>
-          </a:prstGeom>
-          <a:noFill/>
-        </p:spPr>
-        <p:txBody>
-          <a:bodyPr wrap="square" anchor="t" lIns="0" rIns="0" tIns="0" bIns="0">
-            <a:spAutoFit/>
-          </a:bodyPr>
-          <a:lstStyle/>
-          <a:p>
-            <a:pPr algn="l">
-              <a:lnSpc>
-                <a:spcPct val="110000"/>
-              </a:lnSpc>
-              <a:spcBef>
-                <a:spcPts val="0"/>
-              </a:spcBef>
-              <a:spcAft>
-                <a:spcPts val="0"/>
-              </a:spcAft>
-            </a:pPr>
-            <a:r>
-              <a:rPr sz="950" b="1" i="0">
-                <a:solidFill>
-                  <a:srgbClr val="B84A00"/>
-                </a:solidFill>
-                <a:latin typeface="Manrope"/>
-                <a:cs typeface="Manrope"/>
-                <a:ea typeface="Manrope"/>
-              </a:rPr>
-              <a:t>ПОСЛЕ · ВЕС 9,0</a:t>
-            </a:r>
-          </a:p>
-        </p:txBody>
-      </p:sp>
-      <p:sp>
-        <p:nvSpPr>
-          <p:cNvPr id="11" name="Rectangle 10"/>
+              <a:t>РЕАЛЬНЫЙ ИНТЕРФЕЙС · БЛИЖАЙШИЕ ПРОДЛЕНИЯ В ГОРИЗОНТЕ</a:t>
+            </a:r>
+          </a:p>
+        </p:txBody>
+      </p:sp>
+      <p:sp>
+        <p:nvSpPr>
+          <p:cNvPr id="22" name="Rectangle 21"/>
           <p:cNvSpPr/>
           <p:nvPr/>
         </p:nvSpPr>
         <p:spPr>
           <a:xfrm>
-            <a:off x="626364" y="2921508"/>
-            <a:ext cx="5346039" cy="1978550"/>
+            <a:off x="4878323" y="3323844"/>
+            <a:ext cx="6687008" cy="1462829"/>
           </a:xfrm>
           <a:prstGeom prst="rect">
             <a:avLst/>
@@ -15041,7 +17094,7 @@
       </p:sp>
       <p:pic>
         <p:nvPicPr>
-          <p:cNvPr id="12" name="Picture 11" descr="t_set_before.png"/>
+          <p:cNvPr id="23" name="Picture 22" descr="renew_table.png"/>
           <p:cNvPicPr>
             <a:picLocks noChangeAspect="1"/>
           </p:cNvPicPr>
@@ -15055,8 +17108,8 @@
         </p:blipFill>
         <p:spPr>
           <a:xfrm>
-            <a:off x="658368" y="2953512"/>
-            <a:ext cx="5282031" cy="486502"/>
+            <a:off x="4910327" y="3355848"/>
+            <a:ext cx="6255671" cy="1398821"/>
           </a:xfrm>
           <a:prstGeom prst="rect">
             <a:avLst/>
@@ -15065,84 +17118,14 @@
       </p:pic>
       <p:sp>
         <p:nvSpPr>
-          <p:cNvPr id="13" name="Rectangle 12"/>
+          <p:cNvPr id="24" name="Rectangle 23"/>
           <p:cNvSpPr/>
           <p:nvPr/>
         </p:nvSpPr>
         <p:spPr>
           <a:xfrm>
-            <a:off x="6219291" y="2921508"/>
-            <a:ext cx="5346039" cy="1978550"/>
-          </a:xfrm>
-          <a:prstGeom prst="rect">
-            <a:avLst/>
-          </a:prstGeom>
-          <a:solidFill>
-            <a:srgbClr val="FFFFFF"/>
-          </a:solidFill>
-          <a:ln w="10160">
-            <a:solidFill>
-              <a:srgbClr val="E1E1E1"/>
-            </a:solidFill>
-          </a:ln>
-          <a:effectLst/>
-        </p:spPr>
-        <p:style>
-          <a:lnRef idx="1">
-            <a:schemeClr val="accent1"/>
-          </a:lnRef>
-          <a:fillRef idx="3">
-            <a:schemeClr val="accent1"/>
-          </a:fillRef>
-          <a:effectRef idx="2">
-            <a:schemeClr val="accent1"/>
-          </a:effectRef>
-          <a:fontRef idx="minor">
-            <a:schemeClr val="lt1"/>
-          </a:fontRef>
-        </p:style>
-        <p:txBody>
-          <a:bodyPr rtlCol="0" anchor="ctr"/>
-          <a:lstStyle/>
-          <a:p>
-            <a:pPr algn="ctr"/>
-          </a:p>
-        </p:txBody>
-      </p:sp>
-      <p:pic>
-        <p:nvPicPr>
-          <p:cNvPr id="14" name="Picture 13" descr="t_set_after.png"/>
-          <p:cNvPicPr>
-            <a:picLocks noChangeAspect="1"/>
-          </p:cNvPicPr>
-          <p:nvPr/>
-        </p:nvPicPr>
-        <p:blipFill>
-          <a:blip r:embed="rId3"/>
-          <a:stretch>
-            <a:fillRect/>
-          </a:stretch>
-        </p:blipFill>
-        <p:spPr>
-          <a:xfrm>
-            <a:off x="6251295" y="2953512"/>
-            <a:ext cx="5282031" cy="486502"/>
-          </a:xfrm>
-          <a:prstGeom prst="rect">
-            <a:avLst/>
-          </a:prstGeom>
-        </p:spPr>
-      </p:pic>
-      <p:sp>
-        <p:nvSpPr>
-          <p:cNvPr id="15" name="Rectangle 14"/>
-          <p:cNvSpPr/>
-          <p:nvPr/>
-        </p:nvSpPr>
-        <p:spPr>
-          <a:xfrm>
-            <a:off x="658368" y="3977640"/>
-            <a:ext cx="3533546" cy="640080"/>
+            <a:off x="4910327" y="4965192"/>
+            <a:ext cx="2134514" cy="1088136"/>
           </a:xfrm>
           <a:prstGeom prst="rect">
             <a:avLst/>
@@ -15181,14 +17164,14 @@
       </p:sp>
       <p:sp>
         <p:nvSpPr>
-          <p:cNvPr id="16" name="TextBox 15"/>
+          <p:cNvPr id="25" name="TextBox 24"/>
           <p:cNvSpPr txBox="1"/>
           <p:nvPr/>
         </p:nvSpPr>
         <p:spPr>
           <a:xfrm>
-            <a:off x="804672" y="4069080"/>
-            <a:ext cx="3240938" cy="131635"/>
+            <a:off x="5038343" y="5093208"/>
+            <a:ext cx="1878482" cy="130048"/>
           </a:xfrm>
           <a:prstGeom prst="rect">
             <a:avLst/>
@@ -15203,17 +17186,17 @@
           <a:p>
             <a:pPr algn="l">
               <a:lnSpc>
-                <a:spcPct val="105000"/>
-              </a:lnSpc>
-              <a:spcBef>
-                <a:spcPts val="0"/>
-              </a:spcBef>
-              <a:spcAft>
-                <a:spcPts val="0"/>
-              </a:spcAft>
-            </a:pPr>
-            <a:r>
-              <a:rPr sz="850" b="1" i="0">
+                <a:spcPct val="110000"/>
+              </a:lnSpc>
+              <a:spcBef>
+                <a:spcPts val="0"/>
+              </a:spcBef>
+              <a:spcAft>
+                <a:spcPts val="0"/>
+              </a:spcAft>
+            </a:pPr>
+            <a:r>
+              <a:rPr sz="800" b="1" i="0">
                 <a:solidFill>
                   <a:srgbClr val="666666"/>
                 </a:solidFill>
@@ -15221,21 +17204,21 @@
                 <a:cs typeface="Manrope SemiBold"/>
                 <a:ea typeface="Manrope SemiBold"/>
               </a:rPr>
-              <a:t>Балл риска клиента #10</a:t>
-            </a:r>
-          </a:p>
-        </p:txBody>
-      </p:sp>
-      <p:sp>
-        <p:nvSpPr>
-          <p:cNvPr id="17" name="TextBox 16"/>
+              <a:t>ВЫРУЧКА ПОД РИСКОМ</a:t>
+            </a:r>
+          </a:p>
+        </p:txBody>
+      </p:sp>
+      <p:sp>
+        <p:nvSpPr>
+          <p:cNvPr id="26" name="TextBox 25"/>
           <p:cNvSpPr txBox="1"/>
           <p:nvPr/>
         </p:nvSpPr>
         <p:spPr>
           <a:xfrm>
-            <a:off x="804672" y="4251960"/>
-            <a:ext cx="3240938" cy="310896"/>
+            <a:off x="5038343" y="5330952"/>
+            <a:ext cx="1878482" cy="221487"/>
           </a:xfrm>
           <a:prstGeom prst="rect">
             <a:avLst/>
@@ -15250,39 +17233,17 @@
           <a:p>
             <a:pPr algn="l">
               <a:lnSpc>
-                <a:spcPct val="116000"/>
-              </a:lnSpc>
-              <a:spcBef>
-                <a:spcPts val="0"/>
-              </a:spcBef>
-              <a:spcAft>
-                <a:spcPts val="0"/>
-              </a:spcAft>
-            </a:pPr>
-            <a:r>
-              <a:rPr sz="1500" b="0">
-                <a:solidFill>
-                  <a:srgbClr val="666666"/>
-                </a:solidFill>
-                <a:latin typeface="Manrope Medium"/>
-                <a:cs typeface="Manrope Medium"/>
-                <a:ea typeface="Manrope Medium"/>
-              </a:rPr>
-              <a:t>71,4</a:t>
-            </a:r>
-            <a:r>
-              <a:rPr sz="1500" b="0">
-                <a:solidFill>
-                  <a:srgbClr val="C9C9C9"/>
-                </a:solidFill>
-                <a:latin typeface="Manrope Medium"/>
-                <a:cs typeface="Manrope Medium"/>
-                <a:ea typeface="Manrope Medium"/>
-              </a:rPr>
-              <a:t>   →   </a:t>
-            </a:r>
-            <a:r>
-              <a:rPr sz="1500" b="1">
+                <a:spcPct val="100000"/>
+              </a:lnSpc>
+              <a:spcBef>
+                <a:spcPts val="0"/>
+              </a:spcBef>
+              <a:spcAft>
+                <a:spcPts val="0"/>
+              </a:spcAft>
+            </a:pPr>
+            <a:r>
+              <a:rPr sz="1600" b="1" i="0">
                 <a:solidFill>
                   <a:srgbClr val="B84A00"/>
                 </a:solidFill>
@@ -15290,21 +17251,68 @@
                 <a:cs typeface="Manrope"/>
                 <a:ea typeface="Manrope"/>
               </a:rPr>
-              <a:t>81,8</a:t>
-            </a:r>
-          </a:p>
-        </p:txBody>
-      </p:sp>
-      <p:sp>
-        <p:nvSpPr>
-          <p:cNvPr id="18" name="Rectangle 17"/>
+              <a:t>5,80 €</a:t>
+            </a:r>
+          </a:p>
+        </p:txBody>
+      </p:sp>
+      <p:sp>
+        <p:nvSpPr>
+          <p:cNvPr id="27" name="TextBox 26"/>
+          <p:cNvSpPr txBox="1"/>
+          <p:nvPr/>
+        </p:nvSpPr>
+        <p:spPr>
+          <a:xfrm>
+            <a:off x="5038343" y="5641848"/>
+            <a:ext cx="1878482" cy="142430"/>
+          </a:xfrm>
+          <a:prstGeom prst="rect">
+            <a:avLst/>
+          </a:prstGeom>
+          <a:noFill/>
+        </p:spPr>
+        <p:txBody>
+          <a:bodyPr wrap="square" anchor="t" lIns="0" rIns="0" tIns="0" bIns="0">
+            <a:spAutoFit/>
+          </a:bodyPr>
+          <a:lstStyle/>
+          <a:p>
+            <a:pPr algn="l">
+              <a:lnSpc>
+                <a:spcPct val="115000"/>
+              </a:lnSpc>
+              <a:spcBef>
+                <a:spcPts val="0"/>
+              </a:spcBef>
+              <a:spcAft>
+                <a:spcPts val="0"/>
+              </a:spcAft>
+            </a:pPr>
+            <a:r>
+              <a:rPr sz="850" b="0" i="0">
+                <a:solidFill>
+                  <a:srgbClr val="666666"/>
+                </a:solidFill>
+                <a:latin typeface="Manrope"/>
+                <a:cs typeface="Manrope"/>
+                <a:ea typeface="Manrope"/>
+              </a:rPr>
+              <a:t>прогнозная экспозиция</a:t>
+            </a:r>
+          </a:p>
+        </p:txBody>
+      </p:sp>
+      <p:sp>
+        <p:nvSpPr>
+          <p:cNvPr id="28" name="Rectangle 27"/>
           <p:cNvSpPr/>
           <p:nvPr/>
         </p:nvSpPr>
         <p:spPr>
           <a:xfrm>
-            <a:off x="4329074" y="3977640"/>
-            <a:ext cx="3533546" cy="640080"/>
+            <a:off x="7154569" y="4965192"/>
+            <a:ext cx="2134514" cy="1088136"/>
           </a:xfrm>
           <a:prstGeom prst="rect">
             <a:avLst/>
@@ -15343,14 +17351,14 @@
       </p:sp>
       <p:sp>
         <p:nvSpPr>
-          <p:cNvPr id="19" name="TextBox 18"/>
+          <p:cNvPr id="29" name="TextBox 28"/>
           <p:cNvSpPr txBox="1"/>
           <p:nvPr/>
         </p:nvSpPr>
         <p:spPr>
           <a:xfrm>
-            <a:off x="4475378" y="4069080"/>
-            <a:ext cx="3240938" cy="131635"/>
+            <a:off x="7282585" y="5093208"/>
+            <a:ext cx="1878482" cy="130048"/>
           </a:xfrm>
           <a:prstGeom prst="rect">
             <a:avLst/>
@@ -15365,17 +17373,17 @@
           <a:p>
             <a:pPr algn="l">
               <a:lnSpc>
-                <a:spcPct val="105000"/>
-              </a:lnSpc>
-              <a:spcBef>
-                <a:spcPts val="0"/>
-              </a:spcBef>
-              <a:spcAft>
-                <a:spcPts val="0"/>
-              </a:spcAft>
-            </a:pPr>
-            <a:r>
-              <a:rPr sz="850" b="1" i="0">
+                <a:spcPct val="110000"/>
+              </a:lnSpc>
+              <a:spcBef>
+                <a:spcPts val="0"/>
+              </a:spcBef>
+              <a:spcAft>
+                <a:spcPts val="0"/>
+              </a:spcAft>
+            </a:pPr>
+            <a:r>
+              <a:rPr sz="800" b="1" i="0">
                 <a:solidFill>
                   <a:srgbClr val="666666"/>
                 </a:solidFill>
@@ -15383,21 +17391,21 @@
                 <a:cs typeface="Manrope SemiBold"/>
                 <a:ea typeface="Manrope SemiBold"/>
               </a:rPr>
-              <a:t>Балл service-0030</a:t>
-            </a:r>
-          </a:p>
-        </p:txBody>
-      </p:sp>
-      <p:sp>
-        <p:nvSpPr>
-          <p:cNvPr id="20" name="TextBox 19"/>
+              <a:t>ПРЕДСТОЯЩИЕ ПРОДЛЕНИЯ</a:t>
+            </a:r>
+          </a:p>
+        </p:txBody>
+      </p:sp>
+      <p:sp>
+        <p:nvSpPr>
+          <p:cNvPr id="30" name="TextBox 29"/>
           <p:cNvSpPr txBox="1"/>
           <p:nvPr/>
         </p:nvSpPr>
         <p:spPr>
           <a:xfrm>
-            <a:off x="4475378" y="4251960"/>
-            <a:ext cx="3240938" cy="310896"/>
+            <a:off x="7282585" y="5330952"/>
+            <a:ext cx="1878482" cy="221487"/>
           </a:xfrm>
           <a:prstGeom prst="rect">
             <a:avLst/>
@@ -15412,61 +17420,86 @@
           <a:p>
             <a:pPr algn="l">
               <a:lnSpc>
-                <a:spcPct val="116000"/>
-              </a:lnSpc>
-              <a:spcBef>
-                <a:spcPts val="0"/>
-              </a:spcBef>
-              <a:spcAft>
-                <a:spcPts val="0"/>
-              </a:spcAft>
-            </a:pPr>
-            <a:r>
-              <a:rPr sz="1500" b="0">
-                <a:solidFill>
-                  <a:srgbClr val="666666"/>
-                </a:solidFill>
-                <a:latin typeface="Manrope Medium"/>
-                <a:cs typeface="Manrope Medium"/>
-                <a:ea typeface="Manrope Medium"/>
-              </a:rPr>
-              <a:t>71,4</a:t>
-            </a:r>
-            <a:r>
-              <a:rPr sz="1500" b="0">
-                <a:solidFill>
-                  <a:srgbClr val="C9C9C9"/>
-                </a:solidFill>
-                <a:latin typeface="Manrope Medium"/>
-                <a:cs typeface="Manrope Medium"/>
-                <a:ea typeface="Manrope Medium"/>
-              </a:rPr>
-              <a:t>   →   </a:t>
-            </a:r>
-            <a:r>
-              <a:rPr sz="1500" b="1">
-                <a:solidFill>
-                  <a:srgbClr val="B84A00"/>
+                <a:spcPct val="100000"/>
+              </a:lnSpc>
+              <a:spcBef>
+                <a:spcPts val="0"/>
+              </a:spcBef>
+              <a:spcAft>
+                <a:spcPts val="0"/>
+              </a:spcAft>
+            </a:pPr>
+            <a:r>
+              <a:rPr sz="1600" b="1" i="0">
+                <a:solidFill>
+                  <a:srgbClr val="1A1A1A"/>
                 </a:solidFill>
                 <a:latin typeface="Manrope"/>
                 <a:cs typeface="Manrope"/>
                 <a:ea typeface="Manrope"/>
               </a:rPr>
-              <a:t>81,8</a:t>
-            </a:r>
-          </a:p>
-        </p:txBody>
-      </p:sp>
-      <p:sp>
-        <p:nvSpPr>
-          <p:cNvPr id="21" name="Rectangle 20"/>
+              <a:t>17,03 €</a:t>
+            </a:r>
+          </a:p>
+        </p:txBody>
+      </p:sp>
+      <p:sp>
+        <p:nvSpPr>
+          <p:cNvPr id="31" name="TextBox 30"/>
+          <p:cNvSpPr txBox="1"/>
+          <p:nvPr/>
+        </p:nvSpPr>
+        <p:spPr>
+          <a:xfrm>
+            <a:off x="7282585" y="5641848"/>
+            <a:ext cx="1878482" cy="142430"/>
+          </a:xfrm>
+          <a:prstGeom prst="rect">
+            <a:avLst/>
+          </a:prstGeom>
+          <a:noFill/>
+        </p:spPr>
+        <p:txBody>
+          <a:bodyPr wrap="square" anchor="t" lIns="0" rIns="0" tIns="0" bIns="0">
+            <a:spAutoFit/>
+          </a:bodyPr>
+          <a:lstStyle/>
+          <a:p>
+            <a:pPr algn="l">
+              <a:lnSpc>
+                <a:spcPct val="115000"/>
+              </a:lnSpc>
+              <a:spcBef>
+                <a:spcPts val="0"/>
+              </a:spcBef>
+              <a:spcAft>
+                <a:spcPts val="0"/>
+              </a:spcAft>
+            </a:pPr>
+            <a:r>
+              <a:rPr sz="850" b="0" i="0">
+                <a:solidFill>
+                  <a:srgbClr val="666666"/>
+                </a:solidFill>
+                <a:latin typeface="Manrope"/>
+                <a:cs typeface="Manrope"/>
+                <a:ea typeface="Manrope"/>
+              </a:rPr>
+              <a:t>сумма без учёта риска</a:t>
+            </a:r>
+          </a:p>
+        </p:txBody>
+      </p:sp>
+      <p:sp>
+        <p:nvSpPr>
+          <p:cNvPr id="32" name="Rectangle 31"/>
           <p:cNvSpPr/>
           <p:nvPr/>
         </p:nvSpPr>
         <p:spPr>
           <a:xfrm>
-            <a:off x="7999780" y="3977640"/>
-            <a:ext cx="3533546" cy="640080"/>
+            <a:off x="9398811" y="4965192"/>
+            <a:ext cx="2134514" cy="1088136"/>
           </a:xfrm>
           <a:prstGeom prst="rect">
             <a:avLst/>
@@ -15505,14 +17538,14 @@
       </p:sp>
       <p:sp>
         <p:nvSpPr>
-          <p:cNvPr id="22" name="TextBox 21"/>
+          <p:cNvPr id="33" name="TextBox 32"/>
           <p:cNvSpPr txBox="1"/>
           <p:nvPr/>
         </p:nvSpPr>
         <p:spPr>
           <a:xfrm>
-            <a:off x="8146084" y="4069080"/>
-            <a:ext cx="3240938" cy="131635"/>
+            <a:off x="9526827" y="5093208"/>
+            <a:ext cx="1878482" cy="130048"/>
           </a:xfrm>
           <a:prstGeom prst="rect">
             <a:avLst/>
@@ -15527,17 +17560,17 @@
           <a:p>
             <a:pPr algn="l">
               <a:lnSpc>
-                <a:spcPct val="105000"/>
-              </a:lnSpc>
-              <a:spcBef>
-                <a:spcPts val="0"/>
-              </a:spcBef>
-              <a:spcAft>
-                <a:spcPts val="0"/>
-              </a:spcAft>
-            </a:pPr>
-            <a:r>
-              <a:rPr sz="850" b="1" i="0">
+                <a:spcPct val="110000"/>
+              </a:lnSpc>
+              <a:spcBef>
+                <a:spcPts val="0"/>
+              </a:spcBef>
+              <a:spcAft>
+                <a:spcPts val="0"/>
+              </a:spcAft>
+            </a:pPr>
+            <a:r>
+              <a:rPr sz="800" b="1" i="0">
                 <a:solidFill>
                   <a:srgbClr val="666666"/>
                 </a:solidFill>
@@ -15545,21 +17578,21 @@
                 <a:cs typeface="Manrope SemiBold"/>
                 <a:ea typeface="Manrope SemiBold"/>
               </a:rPr>
-              <a:t>Клиентов высокого риска</a:t>
-            </a:r>
-          </a:p>
-        </p:txBody>
-      </p:sp>
-      <p:sp>
-        <p:nvSpPr>
-          <p:cNvPr id="23" name="TextBox 22"/>
+              <a:t>ИСТОРИЧЕСКИЕ ПОПОЛНЕНИЯ</a:t>
+            </a:r>
+          </a:p>
+        </p:txBody>
+      </p:sp>
+      <p:sp>
+        <p:nvSpPr>
+          <p:cNvPr id="34" name="TextBox 33"/>
           <p:cNvSpPr txBox="1"/>
           <p:nvPr/>
         </p:nvSpPr>
         <p:spPr>
           <a:xfrm>
-            <a:off x="8146084" y="4251960"/>
-            <a:ext cx="3240938" cy="310896"/>
+            <a:off x="9526827" y="5330952"/>
+            <a:ext cx="1878482" cy="221487"/>
           </a:xfrm>
           <a:prstGeom prst="rect">
             <a:avLst/>
@@ -15574,72 +17607,95 @@
           <a:p>
             <a:pPr algn="l">
               <a:lnSpc>
-                <a:spcPct val="116000"/>
-              </a:lnSpc>
-              <a:spcBef>
-                <a:spcPts val="0"/>
-              </a:spcBef>
-              <a:spcAft>
-                <a:spcPts val="0"/>
-              </a:spcAft>
-            </a:pPr>
-            <a:r>
-              <a:rPr sz="1500" b="0">
+                <a:spcPct val="100000"/>
+              </a:lnSpc>
+              <a:spcBef>
+                <a:spcPts val="0"/>
+              </a:spcBef>
+              <a:spcAft>
+                <a:spcPts val="0"/>
+              </a:spcAft>
+            </a:pPr>
+            <a:r>
+              <a:rPr sz="1600" b="1" i="0">
                 <a:solidFill>
                   <a:srgbClr val="666666"/>
-                </a:solidFill>
-                <a:latin typeface="Manrope Medium"/>
-                <a:cs typeface="Manrope Medium"/>
-                <a:ea typeface="Manrope Medium"/>
-              </a:rPr>
-              <a:t>2</a:t>
-            </a:r>
-            <a:r>
-              <a:rPr sz="1500" b="0">
-                <a:solidFill>
-                  <a:srgbClr val="C9C9C9"/>
-                </a:solidFill>
-                <a:latin typeface="Manrope Medium"/>
-                <a:cs typeface="Manrope Medium"/>
-                <a:ea typeface="Manrope Medium"/>
-              </a:rPr>
-              <a:t>   →   </a:t>
-            </a:r>
-            <a:r>
-              <a:rPr sz="1500" b="1">
-                <a:solidFill>
-                  <a:srgbClr val="B84A00"/>
                 </a:solidFill>
                 <a:latin typeface="Manrope"/>
                 <a:cs typeface="Manrope"/>
                 <a:ea typeface="Manrope"/>
               </a:rPr>
-              <a:t>3</a:t>
-            </a:r>
-          </a:p>
-        </p:txBody>
-      </p:sp>
-      <p:sp>
-        <p:nvSpPr>
-          <p:cNvPr id="24" name="Rectangle 23"/>
+              <a:t>22 240,73 €</a:t>
+            </a:r>
+          </a:p>
+        </p:txBody>
+      </p:sp>
+      <p:sp>
+        <p:nvSpPr>
+          <p:cNvPr id="35" name="TextBox 34"/>
+          <p:cNvSpPr txBox="1"/>
+          <p:nvPr/>
+        </p:nvSpPr>
+        <p:spPr>
+          <a:xfrm>
+            <a:off x="9526827" y="5641848"/>
+            <a:ext cx="1878482" cy="142430"/>
+          </a:xfrm>
+          <a:prstGeom prst="rect">
+            <a:avLst/>
+          </a:prstGeom>
+          <a:noFill/>
+        </p:spPr>
+        <p:txBody>
+          <a:bodyPr wrap="square" anchor="t" lIns="0" rIns="0" tIns="0" bIns="0">
+            <a:spAutoFit/>
+          </a:bodyPr>
+          <a:lstStyle/>
+          <a:p>
+            <a:pPr algn="l">
+              <a:lnSpc>
+                <a:spcPct val="115000"/>
+              </a:lnSpc>
+              <a:spcBef>
+                <a:spcPts val="0"/>
+              </a:spcBef>
+              <a:spcAft>
+                <a:spcPts val="0"/>
+              </a:spcAft>
+            </a:pPr>
+            <a:r>
+              <a:rPr sz="850" b="0" i="0">
+                <a:solidFill>
+                  <a:srgbClr val="666666"/>
+                </a:solidFill>
+                <a:latin typeface="Manrope"/>
+                <a:cs typeface="Manrope"/>
+                <a:ea typeface="Manrope"/>
+              </a:rPr>
+              <a:t>справочно, не суммируется</a:t>
+            </a:r>
+          </a:p>
+        </p:txBody>
+      </p:sp>
+      <p:sp>
+        <p:nvSpPr>
+          <p:cNvPr id="36" name="Rectangle 35"/>
           <p:cNvSpPr/>
           <p:nvPr/>
         </p:nvSpPr>
         <p:spPr>
           <a:xfrm>
-            <a:off x="658368" y="4745736"/>
-            <a:ext cx="3533546" cy="640080"/>
+            <a:off x="658368" y="6217920"/>
+            <a:ext cx="10874959" cy="9525"/>
           </a:xfrm>
           <a:prstGeom prst="rect">
             <a:avLst/>
           </a:prstGeom>
           <a:solidFill>
-            <a:srgbClr val="FFFFFF"/>
+            <a:srgbClr val="E1E1E1"/>
           </a:solidFill>
-          <a:ln w="11430">
-            <a:solidFill>
-              <a:srgbClr val="E1E1E1"/>
-            </a:solidFill>
+          <a:ln>
+            <a:noFill/>
           </a:ln>
           <a:effectLst/>
         </p:spPr>
@@ -15667,14 +17723,14 @@
       </p:sp>
       <p:sp>
         <p:nvSpPr>
-          <p:cNvPr id="25" name="TextBox 24"/>
+          <p:cNvPr id="37" name="TextBox 36"/>
           <p:cNvSpPr txBox="1"/>
           <p:nvPr/>
         </p:nvSpPr>
         <p:spPr>
           <a:xfrm>
-            <a:off x="804672" y="4837176"/>
-            <a:ext cx="3240938" cy="131635"/>
+            <a:off x="658368" y="6355080"/>
+            <a:ext cx="10874959" cy="163067"/>
           </a:xfrm>
           <a:prstGeom prst="rect">
             <a:avLst/>
@@ -15689,489 +17745,25 @@
           <a:p>
             <a:pPr algn="l">
               <a:lnSpc>
-                <a:spcPct val="105000"/>
-              </a:lnSpc>
-              <a:spcBef>
-                <a:spcPts val="0"/>
-              </a:spcBef>
-              <a:spcAft>
-                <a:spcPts val="0"/>
-              </a:spcAft>
-            </a:pPr>
-            <a:r>
-              <a:rPr sz="850" b="1" i="0">
+                <a:spcPct val="120000"/>
+              </a:lnSpc>
+              <a:spcBef>
+                <a:spcPts val="0"/>
+              </a:spcBef>
+              <a:spcAft>
+                <a:spcPts val="0"/>
+              </a:spcAft>
+            </a:pPr>
+            <a:r>
+              <a:rPr sz="950" b="0" i="0">
                 <a:solidFill>
                   <a:srgbClr val="666666"/>
-                </a:solidFill>
-                <a:latin typeface="Manrope SemiBold"/>
-                <a:cs typeface="Manrope SemiBold"/>
-                <a:ea typeface="Manrope SemiBold"/>
-              </a:rPr>
-              <a:t>Клиентов среднего риска</a:t>
-            </a:r>
-          </a:p>
-        </p:txBody>
-      </p:sp>
-      <p:sp>
-        <p:nvSpPr>
-          <p:cNvPr id="26" name="TextBox 25"/>
-          <p:cNvSpPr txBox="1"/>
-          <p:nvPr/>
-        </p:nvSpPr>
-        <p:spPr>
-          <a:xfrm>
-            <a:off x="804672" y="5020056"/>
-            <a:ext cx="3240938" cy="310896"/>
-          </a:xfrm>
-          <a:prstGeom prst="rect">
-            <a:avLst/>
-          </a:prstGeom>
-          <a:noFill/>
-        </p:spPr>
-        <p:txBody>
-          <a:bodyPr wrap="square" anchor="t" lIns="0" rIns="0" tIns="0" bIns="0">
-            <a:spAutoFit/>
-          </a:bodyPr>
-          <a:lstStyle/>
-          <a:p>
-            <a:pPr algn="l">
-              <a:lnSpc>
-                <a:spcPct val="116000"/>
-              </a:lnSpc>
-              <a:spcBef>
-                <a:spcPts val="0"/>
-              </a:spcBef>
-              <a:spcAft>
-                <a:spcPts val="0"/>
-              </a:spcAft>
-            </a:pPr>
-            <a:r>
-              <a:rPr sz="1500" b="0">
-                <a:solidFill>
-                  <a:srgbClr val="666666"/>
-                </a:solidFill>
-                <a:latin typeface="Manrope Medium"/>
-                <a:cs typeface="Manrope Medium"/>
-                <a:ea typeface="Manrope Medium"/>
-              </a:rPr>
-              <a:t>4</a:t>
-            </a:r>
-            <a:r>
-              <a:rPr sz="1500" b="0">
-                <a:solidFill>
-                  <a:srgbClr val="C9C9C9"/>
-                </a:solidFill>
-                <a:latin typeface="Manrope Medium"/>
-                <a:cs typeface="Manrope Medium"/>
-                <a:ea typeface="Manrope Medium"/>
-              </a:rPr>
-              <a:t>   →   </a:t>
-            </a:r>
-            <a:r>
-              <a:rPr sz="1500" b="1">
-                <a:solidFill>
-                  <a:srgbClr val="B84A00"/>
                 </a:solidFill>
                 <a:latin typeface="Manrope"/>
                 <a:cs typeface="Manrope"/>
                 <a:ea typeface="Manrope"/>
               </a:rPr>
-              <a:t>3</a:t>
-            </a:r>
-          </a:p>
-        </p:txBody>
-      </p:sp>
-      <p:sp>
-        <p:nvSpPr>
-          <p:cNvPr id="27" name="Rectangle 26"/>
-          <p:cNvSpPr/>
-          <p:nvPr/>
-        </p:nvSpPr>
-        <p:spPr>
-          <a:xfrm>
-            <a:off x="4329074" y="4745736"/>
-            <a:ext cx="3533546" cy="640080"/>
-          </a:xfrm>
-          <a:prstGeom prst="rect">
-            <a:avLst/>
-          </a:prstGeom>
-          <a:solidFill>
-            <a:srgbClr val="FFFFFF"/>
-          </a:solidFill>
-          <a:ln w="11430">
-            <a:solidFill>
-              <a:srgbClr val="E1E1E1"/>
-            </a:solidFill>
-          </a:ln>
-          <a:effectLst/>
-        </p:spPr>
-        <p:style>
-          <a:lnRef idx="1">
-            <a:schemeClr val="accent1"/>
-          </a:lnRef>
-          <a:fillRef idx="3">
-            <a:schemeClr val="accent1"/>
-          </a:fillRef>
-          <a:effectRef idx="2">
-            <a:schemeClr val="accent1"/>
-          </a:effectRef>
-          <a:fontRef idx="minor">
-            <a:schemeClr val="lt1"/>
-          </a:fontRef>
-        </p:style>
-        <p:txBody>
-          <a:bodyPr rtlCol="0" anchor="ctr"/>
-          <a:lstStyle/>
-          <a:p>
-            <a:pPr algn="ctr"/>
-          </a:p>
-        </p:txBody>
-      </p:sp>
-      <p:sp>
-        <p:nvSpPr>
-          <p:cNvPr id="28" name="TextBox 27"/>
-          <p:cNvSpPr txBox="1"/>
-          <p:nvPr/>
-        </p:nvSpPr>
-        <p:spPr>
-          <a:xfrm>
-            <a:off x="4475378" y="4837176"/>
-            <a:ext cx="3240938" cy="131635"/>
-          </a:xfrm>
-          <a:prstGeom prst="rect">
-            <a:avLst/>
-          </a:prstGeom>
-          <a:noFill/>
-        </p:spPr>
-        <p:txBody>
-          <a:bodyPr wrap="square" anchor="t" lIns="0" rIns="0" tIns="0" bIns="0">
-            <a:spAutoFit/>
-          </a:bodyPr>
-          <a:lstStyle/>
-          <a:p>
-            <a:pPr algn="l">
-              <a:lnSpc>
-                <a:spcPct val="105000"/>
-              </a:lnSpc>
-              <a:spcBef>
-                <a:spcPts val="0"/>
-              </a:spcBef>
-              <a:spcAft>
-                <a:spcPts val="0"/>
-              </a:spcAft>
-            </a:pPr>
-            <a:r>
-              <a:rPr sz="850" b="1" i="0">
-                <a:solidFill>
-                  <a:srgbClr val="666666"/>
-                </a:solidFill>
-                <a:latin typeface="Manrope SemiBold"/>
-                <a:cs typeface="Manrope SemiBold"/>
-                <a:ea typeface="Manrope SemiBold"/>
-              </a:rPr>
-              <a:t>Выручка под риском</a:t>
-            </a:r>
-          </a:p>
-        </p:txBody>
-      </p:sp>
-      <p:sp>
-        <p:nvSpPr>
-          <p:cNvPr id="29" name="TextBox 28"/>
-          <p:cNvSpPr txBox="1"/>
-          <p:nvPr/>
-        </p:nvSpPr>
-        <p:spPr>
-          <a:xfrm>
-            <a:off x="4475378" y="5020056"/>
-            <a:ext cx="3240938" cy="310896"/>
-          </a:xfrm>
-          <a:prstGeom prst="rect">
-            <a:avLst/>
-          </a:prstGeom>
-          <a:noFill/>
-        </p:spPr>
-        <p:txBody>
-          <a:bodyPr wrap="square" anchor="t" lIns="0" rIns="0" tIns="0" bIns="0">
-            <a:spAutoFit/>
-          </a:bodyPr>
-          <a:lstStyle/>
-          <a:p>
-            <a:pPr algn="l">
-              <a:lnSpc>
-                <a:spcPct val="116000"/>
-              </a:lnSpc>
-              <a:spcBef>
-                <a:spcPts val="0"/>
-              </a:spcBef>
-              <a:spcAft>
-                <a:spcPts val="0"/>
-              </a:spcAft>
-            </a:pPr>
-            <a:r>
-              <a:rPr sz="1500" b="0">
-                <a:solidFill>
-                  <a:srgbClr val="666666"/>
-                </a:solidFill>
-                <a:latin typeface="Manrope Medium"/>
-                <a:cs typeface="Manrope Medium"/>
-                <a:ea typeface="Manrope Medium"/>
-              </a:rPr>
-              <a:t>5,80 €</a:t>
-            </a:r>
-            <a:r>
-              <a:rPr sz="1500" b="0">
-                <a:solidFill>
-                  <a:srgbClr val="C9C9C9"/>
-                </a:solidFill>
-                <a:latin typeface="Manrope Medium"/>
-                <a:cs typeface="Manrope Medium"/>
-                <a:ea typeface="Manrope Medium"/>
-              </a:rPr>
-              <a:t>   →   </a:t>
-            </a:r>
-            <a:r>
-              <a:rPr sz="1500" b="1">
-                <a:solidFill>
-                  <a:srgbClr val="B84A00"/>
-                </a:solidFill>
-                <a:latin typeface="Manrope"/>
-                <a:cs typeface="Manrope"/>
-                <a:ea typeface="Manrope"/>
-              </a:rPr>
-              <a:t>7,72 €</a:t>
-            </a:r>
-          </a:p>
-        </p:txBody>
-      </p:sp>
-      <p:sp>
-        <p:nvSpPr>
-          <p:cNvPr id="30" name="Rectangle 29"/>
-          <p:cNvSpPr/>
-          <p:nvPr/>
-        </p:nvSpPr>
-        <p:spPr>
-          <a:xfrm>
-            <a:off x="7999780" y="4745736"/>
-            <a:ext cx="3533546" cy="640080"/>
-          </a:xfrm>
-          <a:prstGeom prst="rect">
-            <a:avLst/>
-          </a:prstGeom>
-          <a:solidFill>
-            <a:srgbClr val="FFFFFF"/>
-          </a:solidFill>
-          <a:ln w="11430">
-            <a:solidFill>
-              <a:srgbClr val="E1E1E1"/>
-            </a:solidFill>
-          </a:ln>
-          <a:effectLst/>
-        </p:spPr>
-        <p:style>
-          <a:lnRef idx="1">
-            <a:schemeClr val="accent1"/>
-          </a:lnRef>
-          <a:fillRef idx="3">
-            <a:schemeClr val="accent1"/>
-          </a:fillRef>
-          <a:effectRef idx="2">
-            <a:schemeClr val="accent1"/>
-          </a:effectRef>
-          <a:fontRef idx="minor">
-            <a:schemeClr val="lt1"/>
-          </a:fontRef>
-        </p:style>
-        <p:txBody>
-          <a:bodyPr rtlCol="0" anchor="ctr"/>
-          <a:lstStyle/>
-          <a:p>
-            <a:pPr algn="ctr"/>
-          </a:p>
-        </p:txBody>
-      </p:sp>
-      <p:sp>
-        <p:nvSpPr>
-          <p:cNvPr id="31" name="TextBox 30"/>
-          <p:cNvSpPr txBox="1"/>
-          <p:nvPr/>
-        </p:nvSpPr>
-        <p:spPr>
-          <a:xfrm>
-            <a:off x="8146084" y="4837176"/>
-            <a:ext cx="3240938" cy="131635"/>
-          </a:xfrm>
-          <a:prstGeom prst="rect">
-            <a:avLst/>
-          </a:prstGeom>
-          <a:noFill/>
-        </p:spPr>
-        <p:txBody>
-          <a:bodyPr wrap="square" anchor="t" lIns="0" rIns="0" tIns="0" bIns="0">
-            <a:spAutoFit/>
-          </a:bodyPr>
-          <a:lstStyle/>
-          <a:p>
-            <a:pPr algn="l">
-              <a:lnSpc>
-                <a:spcPct val="105000"/>
-              </a:lnSpc>
-              <a:spcBef>
-                <a:spcPts val="0"/>
-              </a:spcBef>
-              <a:spcAft>
-                <a:spcPts val="0"/>
-              </a:spcAft>
-            </a:pPr>
-            <a:r>
-              <a:rPr sz="850" b="1" i="0">
-                <a:solidFill>
-                  <a:srgbClr val="666666"/>
-                </a:solidFill>
-                <a:latin typeface="Manrope SemiBold"/>
-                <a:cs typeface="Manrope SemiBold"/>
-                <a:ea typeface="Manrope SemiBold"/>
-              </a:rPr>
-              <a:t>Сумма весов</a:t>
-            </a:r>
-          </a:p>
-        </p:txBody>
-      </p:sp>
-      <p:sp>
-        <p:nvSpPr>
-          <p:cNvPr id="32" name="TextBox 31"/>
-          <p:cNvSpPr txBox="1"/>
-          <p:nvPr/>
-        </p:nvSpPr>
-        <p:spPr>
-          <a:xfrm>
-            <a:off x="8146084" y="5020056"/>
-            <a:ext cx="3240938" cy="310896"/>
-          </a:xfrm>
-          <a:prstGeom prst="rect">
-            <a:avLst/>
-          </a:prstGeom>
-          <a:noFill/>
-        </p:spPr>
-        <p:txBody>
-          <a:bodyPr wrap="square" anchor="t" lIns="0" rIns="0" tIns="0" bIns="0">
-            <a:spAutoFit/>
-          </a:bodyPr>
-          <a:lstStyle/>
-          <a:p>
-            <a:pPr algn="l">
-              <a:lnSpc>
-                <a:spcPct val="116000"/>
-              </a:lnSpc>
-              <a:spcBef>
-                <a:spcPts val="0"/>
-              </a:spcBef>
-              <a:spcAft>
-                <a:spcPts val="0"/>
-              </a:spcAft>
-            </a:pPr>
-            <a:r>
-              <a:rPr sz="1500" b="0">
-                <a:solidFill>
-                  <a:srgbClr val="666666"/>
-                </a:solidFill>
-                <a:latin typeface="Manrope Medium"/>
-                <a:cs typeface="Manrope Medium"/>
-                <a:ea typeface="Manrope Medium"/>
-              </a:rPr>
-              <a:t>13.0</a:t>
-            </a:r>
-            <a:r>
-              <a:rPr sz="1500" b="0">
-                <a:solidFill>
-                  <a:srgbClr val="C9C9C9"/>
-                </a:solidFill>
-                <a:latin typeface="Manrope Medium"/>
-                <a:cs typeface="Manrope Medium"/>
-                <a:ea typeface="Manrope Medium"/>
-              </a:rPr>
-              <a:t>   →   </a:t>
-            </a:r>
-            <a:r>
-              <a:rPr sz="1500" b="1">
-                <a:solidFill>
-                  <a:srgbClr val="B84A00"/>
-                </a:solidFill>
-                <a:latin typeface="Manrope"/>
-                <a:cs typeface="Manrope"/>
-                <a:ea typeface="Manrope"/>
-              </a:rPr>
-              <a:t>19.0</a:t>
-            </a:r>
-          </a:p>
-        </p:txBody>
-      </p:sp>
-      <p:sp>
-        <p:nvSpPr>
-          <p:cNvPr id="33" name="TextBox 32"/>
-          <p:cNvSpPr txBox="1"/>
-          <p:nvPr/>
-        </p:nvSpPr>
-        <p:spPr>
-          <a:xfrm>
-            <a:off x="658368" y="5641848"/>
-            <a:ext cx="10874959" cy="364998"/>
-          </a:xfrm>
-          <a:prstGeom prst="rect">
-            <a:avLst/>
-          </a:prstGeom>
-          <a:noFill/>
-        </p:spPr>
-        <p:txBody>
-          <a:bodyPr wrap="square" anchor="t" lIns="0" rIns="0" tIns="0" bIns="0">
-            <a:spAutoFit/>
-          </a:bodyPr>
-          <a:lstStyle/>
-          <a:p>
-            <a:pPr algn="l">
-              <a:lnSpc>
-                <a:spcPct val="130000"/>
-              </a:lnSpc>
-              <a:spcBef>
-                <a:spcPts val="0"/>
-              </a:spcBef>
-              <a:spcAft>
-                <a:spcPts val="0"/>
-              </a:spcAft>
-            </a:pPr>
-            <a:r>
-              <a:rPr sz="1050" b="0" i="0">
-                <a:solidFill>
-                  <a:srgbClr val="666666"/>
-                </a:solidFill>
-                <a:latin typeface="Manrope"/>
-                <a:cs typeface="Manrope"/>
-                <a:ea typeface="Manrope"/>
-              </a:rPr>
-              <a:t>Расчёт: сумма весов выросла с 13.0 до 19.0, вклад фактора — с 3.0 до 9.0, поэтому балл service-0030 стал 81,8. Настройка сохраняется на сервере, сводка обновляется сразу, без</a:t>
-            </a:r>
-          </a:p>
-          <a:p>
-            <a:pPr algn="l">
-              <a:lnSpc>
-                <a:spcPct val="130000"/>
-              </a:lnSpc>
-              <a:spcBef>
-                <a:spcPts val="0"/>
-              </a:spcBef>
-              <a:spcAft>
-                <a:spcPts val="0"/>
-              </a:spcAft>
-            </a:pPr>
-            <a:r>
-              <a:rPr sz="1050" b="0" i="0">
-                <a:solidFill>
-                  <a:srgbClr val="666666"/>
-                </a:solidFill>
-                <a:latin typeface="Manrope"/>
-                <a:cs typeface="Manrope"/>
-                <a:ea typeface="Manrope"/>
-              </a:rPr>
-              <a:t>перезагрузки страницы; кнопка «Значения по умолчанию» возвращает исходные 3,0 и прежние числа.</a:t>
+              <a:t>Горизонт 30 дней. Сумма по 4 продлениям: 0,36 + 0,70 + 1,81 + 2,93 = 5,80 €. Оценка не является гарантированным прогнозом потерь.</a:t>
             </a:r>
           </a:p>
         </p:txBody>
@@ -16280,7 +17872,7 @@
                 <a:cs typeface="Manrope"/>
                 <a:ea typeface="Manrope"/>
               </a:rPr>
-              <a:t>РЕЗУЛЬТАТ ДЛЯ БИЗНЕСА</a:t>
+              <a:t>СКВОЗНОЙ СЦЕНАРИЙ · ШАГ 4–5</a:t>
             </a:r>
           </a:p>
         </p:txBody>
@@ -16327,7 +17919,7 @@
                 <a:cs typeface="Manrope"/>
                 <a:ea typeface="Manrope"/>
               </a:rPr>
-              <a:t>Команда видит, с кого начать</a:t>
+              <a:t>Меняем вес — результат пересчитывается</a:t>
             </a:r>
           </a:p>
         </p:txBody>
@@ -16341,7 +17933,7 @@
         <p:spPr>
           <a:xfrm>
             <a:off x="658368" y="1344168"/>
-            <a:ext cx="10058400" cy="237744"/>
+            <a:ext cx="10058400" cy="457200"/>
           </a:xfrm>
           <a:prstGeom prst="rect">
             <a:avLst/>
@@ -16374,7 +17966,31 @@
                 <a:cs typeface="Manrope"/>
                 <a:ea typeface="Manrope"/>
               </a:rPr>
-              <a:t>Четыре подтверждённые возможности продукта — и то, что мы сознательно не заявляем.</a:t>
+              <a:t>Гипотеза до изменения: усилим «близость даты окончания» с 3,0 до 9,0 — баллы и число услуг высокого риска</a:t>
+            </a:r>
+          </a:p>
+          <a:p>
+            <a:pPr algn="l">
+              <a:lnSpc>
+                <a:spcPct val="128000"/>
+              </a:lnSpc>
+              <a:spcBef>
+                <a:spcPts val="0"/>
+              </a:spcBef>
+              <a:spcAft>
+                <a:spcPts val="0"/>
+              </a:spcAft>
+            </a:pPr>
+            <a:r>
+              <a:rPr sz="1350" b="0" i="0">
+                <a:solidFill>
+                  <a:srgbClr val="666666"/>
+                </a:solidFill>
+                <a:latin typeface="Manrope"/>
+                <a:cs typeface="Manrope"/>
+                <a:ea typeface="Manrope"/>
+              </a:rPr>
+              <a:t>вырастут. Проверяем на реальном интерфейсе.</a:t>
             </a:r>
           </a:p>
         </p:txBody>
@@ -16387,8 +18003,8 @@
         </p:nvSpPr>
         <p:spPr>
           <a:xfrm>
-            <a:off x="658368" y="1856232"/>
-            <a:ext cx="5300319" cy="969264"/>
+            <a:off x="658368" y="2075688"/>
+            <a:ext cx="10874959" cy="420624"/>
           </a:xfrm>
           <a:prstGeom prst="rect">
             <a:avLst/>
@@ -16433,14 +18049,14 @@
         </p:nvSpPr>
         <p:spPr>
           <a:xfrm>
-            <a:off x="658368" y="1856232"/>
-            <a:ext cx="41148" cy="969264"/>
+            <a:off x="658368" y="2075688"/>
+            <a:ext cx="41148" cy="420624"/>
           </a:xfrm>
           <a:prstGeom prst="rect">
             <a:avLst/>
           </a:prstGeom>
           <a:solidFill>
-            <a:srgbClr val="83CDB7"/>
+            <a:srgbClr val="B84A00"/>
           </a:solidFill>
           <a:ln>
             <a:noFill/>
@@ -16477,8 +18093,8 @@
         </p:nvSpPr>
         <p:spPr>
           <a:xfrm>
-            <a:off x="896112" y="2002536"/>
-            <a:ext cx="4843119" cy="199898"/>
+            <a:off x="877824" y="2176272"/>
+            <a:ext cx="10436047" cy="256032"/>
           </a:xfrm>
           <a:prstGeom prst="rect">
             <a:avLst/>
@@ -16493,25 +18109,36 @@
           <a:p>
             <a:pPr algn="l">
               <a:lnSpc>
-                <a:spcPct val="110000"/>
-              </a:lnSpc>
-              <a:spcBef>
-                <a:spcPts val="0"/>
-              </a:spcBef>
-              <a:spcAft>
-                <a:spcPts val="0"/>
-              </a:spcAft>
-            </a:pPr>
-            <a:r>
-              <a:rPr sz="1300" b="1" i="0">
-                <a:solidFill>
-                  <a:srgbClr val="1A1A1A"/>
-                </a:solidFill>
-                <a:latin typeface="Manrope SemiBold"/>
-                <a:cs typeface="Manrope SemiBold"/>
-                <a:ea typeface="Manrope SemiBold"/>
-              </a:rPr>
-              <a:t>Приоритет вместо ручного просмотра</a:t>
+                <a:spcPct val="116000"/>
+              </a:lnSpc>
+              <a:spcBef>
+                <a:spcPts val="0"/>
+              </a:spcBef>
+              <a:spcAft>
+                <a:spcPts val="0"/>
+              </a:spcAft>
+            </a:pPr>
+            <a:r>
+              <a:rPr sz="1100" b="1">
+                <a:solidFill>
+                  <a:srgbClr val="B84A00"/>
+                </a:solidFill>
+                <a:latin typeface="Manrope"/>
+                <a:cs typeface="Manrope"/>
+                <a:ea typeface="Manrope"/>
+              </a:rPr>
+              <a:t>ГИПОТЕЗА ДО ИЗМЕНЕНИЯ   </a:t>
+            </a:r>
+            <a:r>
+              <a:rPr sz="1100" b="0">
+                <a:solidFill>
+                  <a:srgbClr val="666666"/>
+                </a:solidFill>
+                <a:latin typeface="Manrope"/>
+                <a:cs typeface="Manrope"/>
+                <a:ea typeface="Manrope"/>
+              </a:rPr>
+              <a:t>вес expiry_proximity 3,0 → 9,0 должен повысить баллы и число услуг высокого риска</a:t>
             </a:r>
           </a:p>
         </p:txBody>
@@ -16524,8 +18151,8 @@
         </p:nvSpPr>
         <p:spPr>
           <a:xfrm>
-            <a:off x="896112" y="2248154"/>
-            <a:ext cx="4843119" cy="364998"/>
+            <a:off x="658368" y="2734056"/>
+            <a:ext cx="5282031" cy="151003"/>
           </a:xfrm>
           <a:prstGeom prst="rect">
             <a:avLst/>
@@ -16540,17 +18167,17 @@
           <a:p>
             <a:pPr algn="l">
               <a:lnSpc>
-                <a:spcPct val="130000"/>
-              </a:lnSpc>
-              <a:spcBef>
-                <a:spcPts val="0"/>
-              </a:spcBef>
-              <a:spcAft>
-                <a:spcPts val="0"/>
-              </a:spcAft>
-            </a:pPr>
-            <a:r>
-              <a:rPr sz="1050" b="0" i="0">
+                <a:spcPct val="110000"/>
+              </a:lnSpc>
+              <a:spcBef>
+                <a:spcPts val="0"/>
+              </a:spcBef>
+              <a:spcAft>
+                <a:spcPts val="0"/>
+              </a:spcAft>
+            </a:pPr>
+            <a:r>
+              <a:rPr sz="950" b="1" i="0">
                 <a:solidFill>
                   <a:srgbClr val="666666"/>
                 </a:solidFill>
@@ -16558,45 +18185,208 @@
                 <a:cs typeface="Manrope"/>
                 <a:ea typeface="Manrope"/>
               </a:rPr>
-              <a:t>Список отсортирован по риску, фильтр по категории оставляет только тех, кто</a:t>
-            </a:r>
-          </a:p>
-          <a:p>
-            <a:pPr algn="l">
-              <a:lnSpc>
-                <a:spcPct val="130000"/>
-              </a:lnSpc>
-              <a:spcBef>
-                <a:spcPts val="0"/>
-              </a:spcBef>
-              <a:spcAft>
-                <a:spcPts val="0"/>
-              </a:spcAft>
-            </a:pPr>
-            <a:r>
-              <a:rPr sz="1050" b="0" i="0">
-                <a:solidFill>
-                  <a:srgbClr val="666666"/>
+              <a:t>ДО · ВЕС 3,0</a:t>
+            </a:r>
+          </a:p>
+        </p:txBody>
+      </p:sp>
+      <p:sp>
+        <p:nvSpPr>
+          <p:cNvPr id="10" name="TextBox 9"/>
+          <p:cNvSpPr txBox="1"/>
+          <p:nvPr/>
+        </p:nvSpPr>
+        <p:spPr>
+          <a:xfrm>
+            <a:off x="6251295" y="2734056"/>
+            <a:ext cx="5282031" cy="151003"/>
+          </a:xfrm>
+          <a:prstGeom prst="rect">
+            <a:avLst/>
+          </a:prstGeom>
+          <a:noFill/>
+        </p:spPr>
+        <p:txBody>
+          <a:bodyPr wrap="square" anchor="t" lIns="0" rIns="0" tIns="0" bIns="0">
+            <a:spAutoFit/>
+          </a:bodyPr>
+          <a:lstStyle/>
+          <a:p>
+            <a:pPr algn="l">
+              <a:lnSpc>
+                <a:spcPct val="110000"/>
+              </a:lnSpc>
+              <a:spcBef>
+                <a:spcPts val="0"/>
+              </a:spcBef>
+              <a:spcAft>
+                <a:spcPts val="0"/>
+              </a:spcAft>
+            </a:pPr>
+            <a:r>
+              <a:rPr sz="950" b="1" i="0">
+                <a:solidFill>
+                  <a:srgbClr val="B84A00"/>
                 </a:solidFill>
                 <a:latin typeface="Manrope"/>
                 <a:cs typeface="Manrope"/>
                 <a:ea typeface="Manrope"/>
               </a:rPr>
-              <a:t>требует внимания.</a:t>
-            </a:r>
-          </a:p>
-        </p:txBody>
-      </p:sp>
-      <p:sp>
-        <p:nvSpPr>
-          <p:cNvPr id="10" name="Rectangle 9"/>
+              <a:t>ПОСЛЕ · ВЕС 9,0</a:t>
+            </a:r>
+          </a:p>
+        </p:txBody>
+      </p:sp>
+      <p:sp>
+        <p:nvSpPr>
+          <p:cNvPr id="11" name="Rectangle 10"/>
           <p:cNvSpPr/>
           <p:nvPr/>
         </p:nvSpPr>
         <p:spPr>
           <a:xfrm>
-            <a:off x="6233007" y="1856232"/>
-            <a:ext cx="5300319" cy="969264"/>
+            <a:off x="626364" y="2921508"/>
+            <a:ext cx="5346039" cy="1978550"/>
+          </a:xfrm>
+          <a:prstGeom prst="rect">
+            <a:avLst/>
+          </a:prstGeom>
+          <a:solidFill>
+            <a:srgbClr val="FFFFFF"/>
+          </a:solidFill>
+          <a:ln w="10160">
+            <a:solidFill>
+              <a:srgbClr val="E1E1E1"/>
+            </a:solidFill>
+          </a:ln>
+          <a:effectLst/>
+        </p:spPr>
+        <p:style>
+          <a:lnRef idx="1">
+            <a:schemeClr val="accent1"/>
+          </a:lnRef>
+          <a:fillRef idx="3">
+            <a:schemeClr val="accent1"/>
+          </a:fillRef>
+          <a:effectRef idx="2">
+            <a:schemeClr val="accent1"/>
+          </a:effectRef>
+          <a:fontRef idx="minor">
+            <a:schemeClr val="lt1"/>
+          </a:fontRef>
+        </p:style>
+        <p:txBody>
+          <a:bodyPr rtlCol="0" anchor="ctr"/>
+          <a:lstStyle/>
+          <a:p>
+            <a:pPr algn="ctr"/>
+          </a:p>
+        </p:txBody>
+      </p:sp>
+      <p:pic>
+        <p:nvPicPr>
+          <p:cNvPr id="12" name="Picture 11" descr="t_set_before.png"/>
+          <p:cNvPicPr>
+            <a:picLocks noChangeAspect="1"/>
+          </p:cNvPicPr>
+          <p:nvPr/>
+        </p:nvPicPr>
+        <p:blipFill>
+          <a:blip r:embed="rId2"/>
+          <a:stretch>
+            <a:fillRect/>
+          </a:stretch>
+        </p:blipFill>
+        <p:spPr>
+          <a:xfrm>
+            <a:off x="658368" y="2953512"/>
+            <a:ext cx="5282031" cy="486502"/>
+          </a:xfrm>
+          <a:prstGeom prst="rect">
+            <a:avLst/>
+          </a:prstGeom>
+        </p:spPr>
+      </p:pic>
+      <p:sp>
+        <p:nvSpPr>
+          <p:cNvPr id="13" name="Rectangle 12"/>
+          <p:cNvSpPr/>
+          <p:nvPr/>
+        </p:nvSpPr>
+        <p:spPr>
+          <a:xfrm>
+            <a:off x="6219291" y="2921508"/>
+            <a:ext cx="5346039" cy="1978550"/>
+          </a:xfrm>
+          <a:prstGeom prst="rect">
+            <a:avLst/>
+          </a:prstGeom>
+          <a:solidFill>
+            <a:srgbClr val="FFFFFF"/>
+          </a:solidFill>
+          <a:ln w="10160">
+            <a:solidFill>
+              <a:srgbClr val="E1E1E1"/>
+            </a:solidFill>
+          </a:ln>
+          <a:effectLst/>
+        </p:spPr>
+        <p:style>
+          <a:lnRef idx="1">
+            <a:schemeClr val="accent1"/>
+          </a:lnRef>
+          <a:fillRef idx="3">
+            <a:schemeClr val="accent1"/>
+          </a:fillRef>
+          <a:effectRef idx="2">
+            <a:schemeClr val="accent1"/>
+          </a:effectRef>
+          <a:fontRef idx="minor">
+            <a:schemeClr val="lt1"/>
+          </a:fontRef>
+        </p:style>
+        <p:txBody>
+          <a:bodyPr rtlCol="0" anchor="ctr"/>
+          <a:lstStyle/>
+          <a:p>
+            <a:pPr algn="ctr"/>
+          </a:p>
+        </p:txBody>
+      </p:sp>
+      <p:pic>
+        <p:nvPicPr>
+          <p:cNvPr id="14" name="Picture 13" descr="t_set_after.png"/>
+          <p:cNvPicPr>
+            <a:picLocks noChangeAspect="1"/>
+          </p:cNvPicPr>
+          <p:nvPr/>
+        </p:nvPicPr>
+        <p:blipFill>
+          <a:blip r:embed="rId3"/>
+          <a:stretch>
+            <a:fillRect/>
+          </a:stretch>
+        </p:blipFill>
+        <p:spPr>
+          <a:xfrm>
+            <a:off x="6251295" y="2953512"/>
+            <a:ext cx="5282031" cy="486502"/>
+          </a:xfrm>
+          <a:prstGeom prst="rect">
+            <a:avLst/>
+          </a:prstGeom>
+        </p:spPr>
+      </p:pic>
+      <p:sp>
+        <p:nvSpPr>
+          <p:cNvPr id="15" name="Rectangle 14"/>
+          <p:cNvSpPr/>
+          <p:nvPr/>
+        </p:nvSpPr>
+        <p:spPr>
+          <a:xfrm>
+            <a:off x="658368" y="3977640"/>
+            <a:ext cx="3533546" cy="640080"/>
           </a:xfrm>
           <a:prstGeom prst="rect">
             <a:avLst/>
@@ -16635,58 +18425,14 @@
       </p:sp>
       <p:sp>
         <p:nvSpPr>
-          <p:cNvPr id="11" name="Rectangle 10"/>
-          <p:cNvSpPr/>
-          <p:nvPr/>
-        </p:nvSpPr>
-        <p:spPr>
-          <a:xfrm>
-            <a:off x="6233007" y="1856232"/>
-            <a:ext cx="41148" cy="969264"/>
-          </a:xfrm>
-          <a:prstGeom prst="rect">
-            <a:avLst/>
-          </a:prstGeom>
-          <a:solidFill>
-            <a:srgbClr val="83CDB7"/>
-          </a:solidFill>
-          <a:ln>
-            <a:noFill/>
-          </a:ln>
-          <a:effectLst/>
-        </p:spPr>
-        <p:style>
-          <a:lnRef idx="1">
-            <a:schemeClr val="accent1"/>
-          </a:lnRef>
-          <a:fillRef idx="3">
-            <a:schemeClr val="accent1"/>
-          </a:fillRef>
-          <a:effectRef idx="2">
-            <a:schemeClr val="accent1"/>
-          </a:effectRef>
-          <a:fontRef idx="minor">
-            <a:schemeClr val="lt1"/>
-          </a:fontRef>
-        </p:style>
-        <p:txBody>
-          <a:bodyPr rtlCol="0" anchor="ctr"/>
-          <a:lstStyle/>
-          <a:p>
-            <a:pPr algn="ctr"/>
-          </a:p>
-        </p:txBody>
-      </p:sp>
-      <p:sp>
-        <p:nvSpPr>
-          <p:cNvPr id="12" name="TextBox 11"/>
+          <p:cNvPr id="16" name="TextBox 15"/>
           <p:cNvSpPr txBox="1"/>
           <p:nvPr/>
         </p:nvSpPr>
         <p:spPr>
           <a:xfrm>
-            <a:off x="6470751" y="2002536"/>
-            <a:ext cx="4843119" cy="199898"/>
+            <a:off x="804672" y="4069080"/>
+            <a:ext cx="3240938" cy="131635"/>
           </a:xfrm>
           <a:prstGeom prst="rect">
             <a:avLst/>
@@ -16701,39 +18447,39 @@
           <a:p>
             <a:pPr algn="l">
               <a:lnSpc>
-                <a:spcPct val="110000"/>
-              </a:lnSpc>
-              <a:spcBef>
-                <a:spcPts val="0"/>
-              </a:spcBef>
-              <a:spcAft>
-                <a:spcPts val="0"/>
-              </a:spcAft>
-            </a:pPr>
-            <a:r>
-              <a:rPr sz="1300" b="1" i="0">
-                <a:solidFill>
-                  <a:srgbClr val="1A1A1A"/>
+                <a:spcPct val="105000"/>
+              </a:lnSpc>
+              <a:spcBef>
+                <a:spcPts val="0"/>
+              </a:spcBef>
+              <a:spcAft>
+                <a:spcPts val="0"/>
+              </a:spcAft>
+            </a:pPr>
+            <a:r>
+              <a:rPr sz="850" b="1" i="0">
+                <a:solidFill>
+                  <a:srgbClr val="666666"/>
                 </a:solidFill>
                 <a:latin typeface="Manrope SemiBold"/>
                 <a:cs typeface="Manrope SemiBold"/>
                 <a:ea typeface="Manrope SemiBold"/>
               </a:rPr>
-              <a:t>Причина вместо непрозрачного числа</a:t>
-            </a:r>
-          </a:p>
-        </p:txBody>
-      </p:sp>
-      <p:sp>
-        <p:nvSpPr>
-          <p:cNvPr id="13" name="TextBox 12"/>
+              <a:t>Балл риска клиента #10</a:t>
+            </a:r>
+          </a:p>
+        </p:txBody>
+      </p:sp>
+      <p:sp>
+        <p:nvSpPr>
+          <p:cNvPr id="17" name="TextBox 16"/>
           <p:cNvSpPr txBox="1"/>
           <p:nvPr/>
         </p:nvSpPr>
         <p:spPr>
           <a:xfrm>
-            <a:off x="6470751" y="2248154"/>
-            <a:ext cx="4843119" cy="364998"/>
+            <a:off x="804672" y="4251960"/>
+            <a:ext cx="3240938" cy="310896"/>
           </a:xfrm>
           <a:prstGeom prst="rect">
             <a:avLst/>
@@ -16748,63 +18494,61 @@
           <a:p>
             <a:pPr algn="l">
               <a:lnSpc>
-                <a:spcPct val="130000"/>
-              </a:lnSpc>
-              <a:spcBef>
-                <a:spcPts val="0"/>
-              </a:spcBef>
-              <a:spcAft>
-                <a:spcPts val="0"/>
-              </a:spcAft>
-            </a:pPr>
-            <a:r>
-              <a:rPr sz="1050" b="0" i="0">
+                <a:spcPct val="116000"/>
+              </a:lnSpc>
+              <a:spcBef>
+                <a:spcPts val="0"/>
+              </a:spcBef>
+              <a:spcAft>
+                <a:spcPts val="0"/>
+              </a:spcAft>
+            </a:pPr>
+            <a:r>
+              <a:rPr sz="1500" b="0">
                 <a:solidFill>
                   <a:srgbClr val="666666"/>
+                </a:solidFill>
+                <a:latin typeface="Manrope Medium"/>
+                <a:cs typeface="Manrope Medium"/>
+                <a:ea typeface="Manrope Medium"/>
+              </a:rPr>
+              <a:t>71,4</a:t>
+            </a:r>
+            <a:r>
+              <a:rPr sz="1500" b="0">
+                <a:solidFill>
+                  <a:srgbClr val="C9C9C9"/>
+                </a:solidFill>
+                <a:latin typeface="Manrope Medium"/>
+                <a:cs typeface="Manrope Medium"/>
+                <a:ea typeface="Manrope Medium"/>
+              </a:rPr>
+              <a:t>   →   </a:t>
+            </a:r>
+            <a:r>
+              <a:rPr sz="1500" b="1">
+                <a:solidFill>
+                  <a:srgbClr val="B84A00"/>
                 </a:solidFill>
                 <a:latin typeface="Manrope"/>
                 <a:cs typeface="Manrope"/>
                 <a:ea typeface="Manrope"/>
               </a:rPr>
-              <a:t>Каждый балл разложен на факторы с числами из данных и рекомендациями по</a:t>
-            </a:r>
-          </a:p>
-          <a:p>
-            <a:pPr algn="l">
-              <a:lnSpc>
-                <a:spcPct val="130000"/>
-              </a:lnSpc>
-              <a:spcBef>
-                <a:spcPts val="0"/>
-              </a:spcBef>
-              <a:spcAft>
-                <a:spcPts val="0"/>
-              </a:spcAft>
-            </a:pPr>
-            <a:r>
-              <a:rPr sz="1050" b="0" i="0">
-                <a:solidFill>
-                  <a:srgbClr val="666666"/>
-                </a:solidFill>
-                <a:latin typeface="Manrope"/>
-                <a:cs typeface="Manrope"/>
-                <a:ea typeface="Manrope"/>
-              </a:rPr>
-              <a:t>удержанию.</a:t>
-            </a:r>
-          </a:p>
-        </p:txBody>
-      </p:sp>
-      <p:sp>
-        <p:nvSpPr>
-          <p:cNvPr id="14" name="Rectangle 13"/>
+              <a:t>81,8</a:t>
+            </a:r>
+          </a:p>
+        </p:txBody>
+      </p:sp>
+      <p:sp>
+        <p:nvSpPr>
+          <p:cNvPr id="18" name="Rectangle 17"/>
           <p:cNvSpPr/>
           <p:nvPr/>
         </p:nvSpPr>
         <p:spPr>
           <a:xfrm>
-            <a:off x="658368" y="2990088"/>
-            <a:ext cx="5300319" cy="969264"/>
+            <a:off x="4329074" y="3977640"/>
+            <a:ext cx="3533546" cy="640080"/>
           </a:xfrm>
           <a:prstGeom prst="rect">
             <a:avLst/>
@@ -16843,58 +18587,14 @@
       </p:sp>
       <p:sp>
         <p:nvSpPr>
-          <p:cNvPr id="15" name="Rectangle 14"/>
-          <p:cNvSpPr/>
-          <p:nvPr/>
-        </p:nvSpPr>
-        <p:spPr>
-          <a:xfrm>
-            <a:off x="658368" y="2990088"/>
-            <a:ext cx="41148" cy="969264"/>
-          </a:xfrm>
-          <a:prstGeom prst="rect">
-            <a:avLst/>
-          </a:prstGeom>
-          <a:solidFill>
-            <a:srgbClr val="83CDB7"/>
-          </a:solidFill>
-          <a:ln>
-            <a:noFill/>
-          </a:ln>
-          <a:effectLst/>
-        </p:spPr>
-        <p:style>
-          <a:lnRef idx="1">
-            <a:schemeClr val="accent1"/>
-          </a:lnRef>
-          <a:fillRef idx="3">
-            <a:schemeClr val="accent1"/>
-          </a:fillRef>
-          <a:effectRef idx="2">
-            <a:schemeClr val="accent1"/>
-          </a:effectRef>
-          <a:fontRef idx="minor">
-            <a:schemeClr val="lt1"/>
-          </a:fontRef>
-        </p:style>
-        <p:txBody>
-          <a:bodyPr rtlCol="0" anchor="ctr"/>
-          <a:lstStyle/>
-          <a:p>
-            <a:pPr algn="ctr"/>
-          </a:p>
-        </p:txBody>
-      </p:sp>
-      <p:sp>
-        <p:nvSpPr>
-          <p:cNvPr id="16" name="TextBox 15"/>
+          <p:cNvPr id="19" name="TextBox 18"/>
           <p:cNvSpPr txBox="1"/>
           <p:nvPr/>
         </p:nvSpPr>
         <p:spPr>
           <a:xfrm>
-            <a:off x="896112" y="3136392"/>
-            <a:ext cx="4843119" cy="199898"/>
+            <a:off x="4475378" y="4069080"/>
+            <a:ext cx="3240938" cy="131635"/>
           </a:xfrm>
           <a:prstGeom prst="rect">
             <a:avLst/>
@@ -16909,39 +18609,39 @@
           <a:p>
             <a:pPr algn="l">
               <a:lnSpc>
-                <a:spcPct val="110000"/>
-              </a:lnSpc>
-              <a:spcBef>
-                <a:spcPts val="0"/>
-              </a:spcBef>
-              <a:spcAft>
-                <a:spcPts val="0"/>
-              </a:spcAft>
-            </a:pPr>
-            <a:r>
-              <a:rPr sz="1300" b="1" i="0">
-                <a:solidFill>
-                  <a:srgbClr val="1A1A1A"/>
+                <a:spcPct val="105000"/>
+              </a:lnSpc>
+              <a:spcBef>
+                <a:spcPts val="0"/>
+              </a:spcBef>
+              <a:spcAft>
+                <a:spcPts val="0"/>
+              </a:spcAft>
+            </a:pPr>
+            <a:r>
+              <a:rPr sz="850" b="1" i="0">
+                <a:solidFill>
+                  <a:srgbClr val="666666"/>
                 </a:solidFill>
                 <a:latin typeface="Manrope SemiBold"/>
                 <a:cs typeface="Manrope SemiBold"/>
                 <a:ea typeface="Manrope SemiBold"/>
               </a:rPr>
-              <a:t>Деньги отдельно от риска</a:t>
-            </a:r>
-          </a:p>
-        </p:txBody>
-      </p:sp>
-      <p:sp>
-        <p:nvSpPr>
-          <p:cNvPr id="17" name="TextBox 16"/>
+              <a:t>Балл service-0030</a:t>
+            </a:r>
+          </a:p>
+        </p:txBody>
+      </p:sp>
+      <p:sp>
+        <p:nvSpPr>
+          <p:cNvPr id="20" name="TextBox 19"/>
           <p:cNvSpPr txBox="1"/>
           <p:nvPr/>
         </p:nvSpPr>
         <p:spPr>
           <a:xfrm>
-            <a:off x="896112" y="3382010"/>
-            <a:ext cx="4843119" cy="364998"/>
+            <a:off x="4475378" y="4251960"/>
+            <a:ext cx="3240938" cy="310896"/>
           </a:xfrm>
           <a:prstGeom prst="rect">
             <a:avLst/>
@@ -16956,63 +18656,61 @@
           <a:p>
             <a:pPr algn="l">
               <a:lnSpc>
-                <a:spcPct val="130000"/>
-              </a:lnSpc>
-              <a:spcBef>
-                <a:spcPts val="0"/>
-              </a:spcBef>
-              <a:spcAft>
-                <a:spcPts val="0"/>
-              </a:spcAft>
-            </a:pPr>
-            <a:r>
-              <a:rPr sz="1050" b="0" i="0">
+                <a:spcPct val="116000"/>
+              </a:lnSpc>
+              <a:spcBef>
+                <a:spcPts val="0"/>
+              </a:spcBef>
+              <a:spcAft>
+                <a:spcPts val="0"/>
+              </a:spcAft>
+            </a:pPr>
+            <a:r>
+              <a:rPr sz="1500" b="0">
                 <a:solidFill>
                   <a:srgbClr val="666666"/>
+                </a:solidFill>
+                <a:latin typeface="Manrope Medium"/>
+                <a:cs typeface="Manrope Medium"/>
+                <a:ea typeface="Manrope Medium"/>
+              </a:rPr>
+              <a:t>71,4</a:t>
+            </a:r>
+            <a:r>
+              <a:rPr sz="1500" b="0">
+                <a:solidFill>
+                  <a:srgbClr val="C9C9C9"/>
+                </a:solidFill>
+                <a:latin typeface="Manrope Medium"/>
+                <a:cs typeface="Manrope Medium"/>
+                <a:ea typeface="Manrope Medium"/>
+              </a:rPr>
+              <a:t>   →   </a:t>
+            </a:r>
+            <a:r>
+              <a:rPr sz="1500" b="1">
+                <a:solidFill>
+                  <a:srgbClr val="B84A00"/>
                 </a:solidFill>
                 <a:latin typeface="Manrope"/>
                 <a:cs typeface="Manrope"/>
                 <a:ea typeface="Manrope"/>
               </a:rPr>
-              <a:t>Выручка под риском считается по продлениям внутри горизонта; баланс и</a:t>
-            </a:r>
-          </a:p>
-          <a:p>
-            <a:pPr algn="l">
-              <a:lnSpc>
-                <a:spcPct val="130000"/>
-              </a:lnSpc>
-              <a:spcBef>
-                <a:spcPts val="0"/>
-              </a:spcBef>
-              <a:spcAft>
-                <a:spcPts val="0"/>
-              </a:spcAft>
-            </a:pPr>
-            <a:r>
-              <a:rPr sz="1050" b="0" i="0">
-                <a:solidFill>
-                  <a:srgbClr val="666666"/>
-                </a:solidFill>
-                <a:latin typeface="Manrope"/>
-                <a:cs typeface="Manrope"/>
-                <a:ea typeface="Manrope"/>
-              </a:rPr>
-              <a:t>пополнения с ней не смешиваются.</a:t>
-            </a:r>
-          </a:p>
-        </p:txBody>
-      </p:sp>
-      <p:sp>
-        <p:nvSpPr>
-          <p:cNvPr id="18" name="Rectangle 17"/>
+              <a:t>81,8</a:t>
+            </a:r>
+          </a:p>
+        </p:txBody>
+      </p:sp>
+      <p:sp>
+        <p:nvSpPr>
+          <p:cNvPr id="21" name="Rectangle 20"/>
           <p:cNvSpPr/>
           <p:nvPr/>
         </p:nvSpPr>
         <p:spPr>
           <a:xfrm>
-            <a:off x="6233007" y="2990088"/>
-            <a:ext cx="5300319" cy="969264"/>
+            <a:off x="7999780" y="3977640"/>
+            <a:ext cx="3533546" cy="640080"/>
           </a:xfrm>
           <a:prstGeom prst="rect">
             <a:avLst/>
@@ -17051,58 +18749,14 @@
       </p:sp>
       <p:sp>
         <p:nvSpPr>
-          <p:cNvPr id="19" name="Rectangle 18"/>
-          <p:cNvSpPr/>
-          <p:nvPr/>
-        </p:nvSpPr>
-        <p:spPr>
-          <a:xfrm>
-            <a:off x="6233007" y="2990088"/>
-            <a:ext cx="41148" cy="969264"/>
-          </a:xfrm>
-          <a:prstGeom prst="rect">
-            <a:avLst/>
-          </a:prstGeom>
-          <a:solidFill>
-            <a:srgbClr val="83CDB7"/>
-          </a:solidFill>
-          <a:ln>
-            <a:noFill/>
-          </a:ln>
-          <a:effectLst/>
-        </p:spPr>
-        <p:style>
-          <a:lnRef idx="1">
-            <a:schemeClr val="accent1"/>
-          </a:lnRef>
-          <a:fillRef idx="3">
-            <a:schemeClr val="accent1"/>
-          </a:fillRef>
-          <a:effectRef idx="2">
-            <a:schemeClr val="accent1"/>
-          </a:effectRef>
-          <a:fontRef idx="minor">
-            <a:schemeClr val="lt1"/>
-          </a:fontRef>
-        </p:style>
-        <p:txBody>
-          <a:bodyPr rtlCol="0" anchor="ctr"/>
-          <a:lstStyle/>
-          <a:p>
-            <a:pPr algn="ctr"/>
-          </a:p>
-        </p:txBody>
-      </p:sp>
-      <p:sp>
-        <p:nvSpPr>
-          <p:cNvPr id="20" name="TextBox 19"/>
+          <p:cNvPr id="22" name="TextBox 21"/>
           <p:cNvSpPr txBox="1"/>
           <p:nvPr/>
         </p:nvSpPr>
         <p:spPr>
           <a:xfrm>
-            <a:off x="6470751" y="3136392"/>
-            <a:ext cx="4843119" cy="199898"/>
+            <a:off x="8146084" y="4069080"/>
+            <a:ext cx="3240938" cy="131635"/>
           </a:xfrm>
           <a:prstGeom prst="rect">
             <a:avLst/>
@@ -17117,39 +18771,39 @@
           <a:p>
             <a:pPr algn="l">
               <a:lnSpc>
-                <a:spcPct val="110000"/>
-              </a:lnSpc>
-              <a:spcBef>
-                <a:spcPts val="0"/>
-              </a:spcBef>
-              <a:spcAft>
-                <a:spcPts val="0"/>
-              </a:spcAft>
-            </a:pPr>
-            <a:r>
-              <a:rPr sz="1300" b="1" i="0">
-                <a:solidFill>
-                  <a:srgbClr val="1A1A1A"/>
+                <a:spcPct val="105000"/>
+              </a:lnSpc>
+              <a:spcBef>
+                <a:spcPts val="0"/>
+              </a:spcBef>
+              <a:spcAft>
+                <a:spcPts val="0"/>
+              </a:spcAft>
+            </a:pPr>
+            <a:r>
+              <a:rPr sz="850" b="1" i="0">
+                <a:solidFill>
+                  <a:srgbClr val="666666"/>
                 </a:solidFill>
                 <a:latin typeface="Manrope SemiBold"/>
                 <a:cs typeface="Manrope SemiBold"/>
                 <a:ea typeface="Manrope SemiBold"/>
               </a:rPr>
-              <a:t>Проверка гипотез</a:t>
-            </a:r>
-          </a:p>
-        </p:txBody>
-      </p:sp>
-      <p:sp>
-        <p:nvSpPr>
-          <p:cNvPr id="21" name="TextBox 20"/>
+              <a:t>Услуг высокого риска</a:t>
+            </a:r>
+          </a:p>
+        </p:txBody>
+      </p:sp>
+      <p:sp>
+        <p:nvSpPr>
+          <p:cNvPr id="23" name="TextBox 22"/>
           <p:cNvSpPr txBox="1"/>
           <p:nvPr/>
         </p:nvSpPr>
         <p:spPr>
           <a:xfrm>
-            <a:off x="6470751" y="3382010"/>
-            <a:ext cx="4843119" cy="364998"/>
+            <a:off x="8146084" y="4251960"/>
+            <a:ext cx="3240938" cy="310896"/>
           </a:xfrm>
           <a:prstGeom prst="rect">
             <a:avLst/>
@@ -17164,63 +18818,61 @@
           <a:p>
             <a:pPr algn="l">
               <a:lnSpc>
-                <a:spcPct val="130000"/>
-              </a:lnSpc>
-              <a:spcBef>
-                <a:spcPts val="0"/>
-              </a:spcBef>
-              <a:spcAft>
-                <a:spcPts val="0"/>
-              </a:spcAft>
-            </a:pPr>
-            <a:r>
-              <a:rPr sz="1050" b="0" i="0">
+                <a:spcPct val="116000"/>
+              </a:lnSpc>
+              <a:spcBef>
+                <a:spcPts val="0"/>
+              </a:spcBef>
+              <a:spcAft>
+                <a:spcPts val="0"/>
+              </a:spcAft>
+            </a:pPr>
+            <a:r>
+              <a:rPr sz="1500" b="0">
                 <a:solidFill>
                   <a:srgbClr val="666666"/>
+                </a:solidFill>
+                <a:latin typeface="Manrope Medium"/>
+                <a:cs typeface="Manrope Medium"/>
+                <a:ea typeface="Manrope Medium"/>
+              </a:rPr>
+              <a:t>4</a:t>
+            </a:r>
+            <a:r>
+              <a:rPr sz="1500" b="0">
+                <a:solidFill>
+                  <a:srgbClr val="C9C9C9"/>
+                </a:solidFill>
+                <a:latin typeface="Manrope Medium"/>
+                <a:cs typeface="Manrope Medium"/>
+                <a:ea typeface="Manrope Medium"/>
+              </a:rPr>
+              <a:t>   →   </a:t>
+            </a:r>
+            <a:r>
+              <a:rPr sz="1500" b="1">
+                <a:solidFill>
+                  <a:srgbClr val="B84A00"/>
                 </a:solidFill>
                 <a:latin typeface="Manrope"/>
                 <a:cs typeface="Manrope"/>
                 <a:ea typeface="Manrope"/>
               </a:rPr>
-              <a:t>Веса, горизонт и пороги меняются из интерфейса; результат пересчитывается</a:t>
-            </a:r>
-          </a:p>
-          <a:p>
-            <a:pPr algn="l">
-              <a:lnSpc>
-                <a:spcPct val="130000"/>
-              </a:lnSpc>
-              <a:spcBef>
-                <a:spcPts val="0"/>
-              </a:spcBef>
-              <a:spcAft>
-                <a:spcPts val="0"/>
-              </a:spcAft>
-            </a:pPr>
-            <a:r>
-              <a:rPr sz="1050" b="0" i="0">
-                <a:solidFill>
-                  <a:srgbClr val="666666"/>
-                </a:solidFill>
-                <a:latin typeface="Manrope"/>
-                <a:cs typeface="Manrope"/>
-                <a:ea typeface="Manrope"/>
-              </a:rPr>
-              <a:t>сразу.</a:t>
-            </a:r>
-          </a:p>
-        </p:txBody>
-      </p:sp>
-      <p:sp>
-        <p:nvSpPr>
-          <p:cNvPr id="22" name="Rectangle 21"/>
+              <a:t>7</a:t>
+            </a:r>
+          </a:p>
+        </p:txBody>
+      </p:sp>
+      <p:sp>
+        <p:nvSpPr>
+          <p:cNvPr id="24" name="Rectangle 23"/>
           <p:cNvSpPr/>
           <p:nvPr/>
         </p:nvSpPr>
         <p:spPr>
           <a:xfrm>
-            <a:off x="658368" y="4233672"/>
-            <a:ext cx="10874959" cy="1819656"/>
+            <a:off x="658368" y="4745736"/>
+            <a:ext cx="3533546" cy="640080"/>
           </a:xfrm>
           <a:prstGeom prst="rect">
             <a:avLst/>
@@ -17259,23 +18911,141 @@
       </p:sp>
       <p:sp>
         <p:nvSpPr>
-          <p:cNvPr id="23" name="Rectangle 22"/>
+          <p:cNvPr id="25" name="TextBox 24"/>
+          <p:cNvSpPr txBox="1"/>
+          <p:nvPr/>
+        </p:nvSpPr>
+        <p:spPr>
+          <a:xfrm>
+            <a:off x="804672" y="4837176"/>
+            <a:ext cx="3240938" cy="131635"/>
+          </a:xfrm>
+          <a:prstGeom prst="rect">
+            <a:avLst/>
+          </a:prstGeom>
+          <a:noFill/>
+        </p:spPr>
+        <p:txBody>
+          <a:bodyPr wrap="square" anchor="t" lIns="0" rIns="0" tIns="0" bIns="0">
+            <a:spAutoFit/>
+          </a:bodyPr>
+          <a:lstStyle/>
+          <a:p>
+            <a:pPr algn="l">
+              <a:lnSpc>
+                <a:spcPct val="105000"/>
+              </a:lnSpc>
+              <a:spcBef>
+                <a:spcPts val="0"/>
+              </a:spcBef>
+              <a:spcAft>
+                <a:spcPts val="0"/>
+              </a:spcAft>
+            </a:pPr>
+            <a:r>
+              <a:rPr sz="850" b="1" i="0">
+                <a:solidFill>
+                  <a:srgbClr val="666666"/>
+                </a:solidFill>
+                <a:latin typeface="Manrope SemiBold"/>
+                <a:cs typeface="Manrope SemiBold"/>
+                <a:ea typeface="Manrope SemiBold"/>
+              </a:rPr>
+              <a:t>Выручка под риском</a:t>
+            </a:r>
+          </a:p>
+        </p:txBody>
+      </p:sp>
+      <p:sp>
+        <p:nvSpPr>
+          <p:cNvPr id="26" name="TextBox 25"/>
+          <p:cNvSpPr txBox="1"/>
+          <p:nvPr/>
+        </p:nvSpPr>
+        <p:spPr>
+          <a:xfrm>
+            <a:off x="804672" y="5020056"/>
+            <a:ext cx="3240938" cy="310896"/>
+          </a:xfrm>
+          <a:prstGeom prst="rect">
+            <a:avLst/>
+          </a:prstGeom>
+          <a:noFill/>
+        </p:spPr>
+        <p:txBody>
+          <a:bodyPr wrap="square" anchor="t" lIns="0" rIns="0" tIns="0" bIns="0">
+            <a:spAutoFit/>
+          </a:bodyPr>
+          <a:lstStyle/>
+          <a:p>
+            <a:pPr algn="l">
+              <a:lnSpc>
+                <a:spcPct val="116000"/>
+              </a:lnSpc>
+              <a:spcBef>
+                <a:spcPts val="0"/>
+              </a:spcBef>
+              <a:spcAft>
+                <a:spcPts val="0"/>
+              </a:spcAft>
+            </a:pPr>
+            <a:r>
+              <a:rPr sz="1500" b="0">
+                <a:solidFill>
+                  <a:srgbClr val="666666"/>
+                </a:solidFill>
+                <a:latin typeface="Manrope Medium"/>
+                <a:cs typeface="Manrope Medium"/>
+                <a:ea typeface="Manrope Medium"/>
+              </a:rPr>
+              <a:t>5,80 €</a:t>
+            </a:r>
+            <a:r>
+              <a:rPr sz="1500" b="0">
+                <a:solidFill>
+                  <a:srgbClr val="C9C9C9"/>
+                </a:solidFill>
+                <a:latin typeface="Manrope Medium"/>
+                <a:cs typeface="Manrope Medium"/>
+                <a:ea typeface="Manrope Medium"/>
+              </a:rPr>
+              <a:t>   →   </a:t>
+            </a:r>
+            <a:r>
+              <a:rPr sz="1500" b="1">
+                <a:solidFill>
+                  <a:srgbClr val="B84A00"/>
+                </a:solidFill>
+                <a:latin typeface="Manrope"/>
+                <a:cs typeface="Manrope"/>
+                <a:ea typeface="Manrope"/>
+              </a:rPr>
+              <a:t>7,72 €</a:t>
+            </a:r>
+          </a:p>
+        </p:txBody>
+      </p:sp>
+      <p:sp>
+        <p:nvSpPr>
+          <p:cNvPr id="27" name="Rectangle 26"/>
           <p:cNvSpPr/>
           <p:nvPr/>
         </p:nvSpPr>
         <p:spPr>
           <a:xfrm>
-            <a:off x="658368" y="4233672"/>
-            <a:ext cx="41148" cy="1819656"/>
+            <a:off x="4329074" y="4745736"/>
+            <a:ext cx="3533546" cy="640080"/>
           </a:xfrm>
           <a:prstGeom prst="rect">
             <a:avLst/>
           </a:prstGeom>
           <a:solidFill>
-            <a:srgbClr val="B84A00"/>
+            <a:srgbClr val="FFFFFF"/>
           </a:solidFill>
-          <a:ln>
-            <a:noFill/>
+          <a:ln w="11430">
+            <a:solidFill>
+              <a:srgbClr val="E1E1E1"/>
+            </a:solidFill>
           </a:ln>
           <a:effectLst/>
         </p:spPr>
@@ -17303,14 +19073,14 @@
       </p:sp>
       <p:sp>
         <p:nvSpPr>
-          <p:cNvPr id="24" name="TextBox 23"/>
+          <p:cNvPr id="28" name="TextBox 27"/>
           <p:cNvSpPr txBox="1"/>
           <p:nvPr/>
         </p:nvSpPr>
         <p:spPr>
           <a:xfrm>
-            <a:off x="896112" y="4398264"/>
-            <a:ext cx="10399471" cy="192913"/>
+            <a:off x="4475378" y="4837176"/>
+            <a:ext cx="3240938" cy="131635"/>
           </a:xfrm>
           <a:prstGeom prst="rect">
             <a:avLst/>
@@ -17325,39 +19095,39 @@
           <a:p>
             <a:pPr algn="l">
               <a:lnSpc>
-                <a:spcPct val="110000"/>
-              </a:lnSpc>
-              <a:spcBef>
-                <a:spcPts val="0"/>
-              </a:spcBef>
-              <a:spcAft>
-                <a:spcPts val="0"/>
-              </a:spcAft>
-            </a:pPr>
-            <a:r>
-              <a:rPr sz="1250" b="1" i="0">
-                <a:solidFill>
-                  <a:srgbClr val="1A1A1A"/>
+                <a:spcPct val="105000"/>
+              </a:lnSpc>
+              <a:spcBef>
+                <a:spcPts val="0"/>
+              </a:spcBef>
+              <a:spcAft>
+                <a:spcPts val="0"/>
+              </a:spcAft>
+            </a:pPr>
+            <a:r>
+              <a:rPr sz="850" b="1" i="0">
+                <a:solidFill>
+                  <a:srgbClr val="666666"/>
                 </a:solidFill>
                 <a:latin typeface="Manrope SemiBold"/>
                 <a:cs typeface="Manrope SemiBold"/>
                 <a:ea typeface="Manrope SemiBold"/>
               </a:rPr>
-              <a:t>Чего мы не заявляем</a:t>
-            </a:r>
-          </a:p>
-        </p:txBody>
-      </p:sp>
-      <p:sp>
-        <p:nvSpPr>
-          <p:cNvPr id="25" name="TextBox 24"/>
+              <a:t>Сумма весов</a:t>
+            </a:r>
+          </a:p>
+        </p:txBody>
+      </p:sp>
+      <p:sp>
+        <p:nvSpPr>
+          <p:cNvPr id="29" name="TextBox 28"/>
           <p:cNvSpPr txBox="1"/>
           <p:nvPr/>
         </p:nvSpPr>
         <p:spPr>
           <a:xfrm>
-            <a:off x="896112" y="4646041"/>
-            <a:ext cx="10399471" cy="364998"/>
+            <a:off x="4475378" y="5020056"/>
+            <a:ext cx="3240938" cy="310896"/>
           </a:xfrm>
           <a:prstGeom prst="rect">
             <a:avLst/>
@@ -17372,27 +19142,72 @@
           <a:p>
             <a:pPr algn="l">
               <a:lnSpc>
-                <a:spcPct val="130000"/>
-              </a:lnSpc>
-              <a:spcBef>
-                <a:spcPts val="0"/>
-              </a:spcBef>
-              <a:spcAft>
-                <a:spcPts val="0"/>
-              </a:spcAft>
-            </a:pPr>
-            <a:r>
-              <a:rPr sz="1050" b="0" i="0">
+                <a:spcPct val="116000"/>
+              </a:lnSpc>
+              <a:spcBef>
+                <a:spcPts val="0"/>
+              </a:spcBef>
+              <a:spcAft>
+                <a:spcPts val="0"/>
+              </a:spcAft>
+            </a:pPr>
+            <a:r>
+              <a:rPr sz="1500" b="0">
                 <a:solidFill>
                   <a:srgbClr val="666666"/>
+                </a:solidFill>
+                <a:latin typeface="Manrope Medium"/>
+                <a:cs typeface="Manrope Medium"/>
+                <a:ea typeface="Manrope Medium"/>
+              </a:rPr>
+              <a:t>13.0</a:t>
+            </a:r>
+            <a:r>
+              <a:rPr sz="1500" b="0">
+                <a:solidFill>
+                  <a:srgbClr val="C9C9C9"/>
+                </a:solidFill>
+                <a:latin typeface="Manrope Medium"/>
+                <a:cs typeface="Manrope Medium"/>
+                <a:ea typeface="Manrope Medium"/>
+              </a:rPr>
+              <a:t>   →   </a:t>
+            </a:r>
+            <a:r>
+              <a:rPr sz="1500" b="1">
+                <a:solidFill>
+                  <a:srgbClr val="B84A00"/>
                 </a:solidFill>
                 <a:latin typeface="Manrope"/>
                 <a:cs typeface="Manrope"/>
                 <a:ea typeface="Manrope"/>
               </a:rPr>
-              <a:t>Балл риска — не вероятность оттока в процентах: в снимке нет исторических исходов, поэтому модель построена на правилах, а не обучена. Точность, снижение оттока и</a:t>
-            </a:r>
-          </a:p>
+              <a:t>19.0</a:t>
+            </a:r>
+          </a:p>
+        </p:txBody>
+      </p:sp>
+      <p:sp>
+        <p:nvSpPr>
+          <p:cNvPr id="30" name="TextBox 29"/>
+          <p:cNvSpPr txBox="1"/>
+          <p:nvPr/>
+        </p:nvSpPr>
+        <p:spPr>
+          <a:xfrm>
+            <a:off x="658368" y="5641848"/>
+            <a:ext cx="10874959" cy="364998"/>
+          </a:xfrm>
+          <a:prstGeom prst="rect">
+            <a:avLst/>
+          </a:prstGeom>
+          <a:noFill/>
+        </p:spPr>
+        <p:txBody>
+          <a:bodyPr wrap="square" anchor="t" lIns="0" rIns="0" tIns="0" bIns="0">
+            <a:spAutoFit/>
+          </a:bodyPr>
+          <a:lstStyle/>
           <a:p>
             <a:pPr algn="l">
               <a:lnSpc>
@@ -17414,90 +19229,23 @@
                 <a:cs typeface="Manrope"/>
                 <a:ea typeface="Manrope"/>
               </a:rPr>
-              <a:t>рост выручки не измерены — мы их не обещаем. Продукт помогает анализировать и приоритизировать; удержание зависит от следующих действий команды.</a:t>
-            </a:r>
-          </a:p>
-        </p:txBody>
-      </p:sp>
-      <p:sp>
-        <p:nvSpPr>
-          <p:cNvPr id="26" name="Rectangle 25"/>
-          <p:cNvSpPr/>
-          <p:nvPr/>
-        </p:nvSpPr>
-        <p:spPr>
-          <a:xfrm>
-            <a:off x="658368" y="6217920"/>
-            <a:ext cx="10874959" cy="9525"/>
-          </a:xfrm>
-          <a:prstGeom prst="rect">
-            <a:avLst/>
-          </a:prstGeom>
-          <a:solidFill>
-            <a:srgbClr val="E1E1E1"/>
-          </a:solidFill>
-          <a:ln>
-            <a:noFill/>
-          </a:ln>
-          <a:effectLst/>
-        </p:spPr>
-        <p:style>
-          <a:lnRef idx="1">
-            <a:schemeClr val="accent1"/>
-          </a:lnRef>
-          <a:fillRef idx="3">
-            <a:schemeClr val="accent1"/>
-          </a:fillRef>
-          <a:effectRef idx="2">
-            <a:schemeClr val="accent1"/>
-          </a:effectRef>
-          <a:fontRef idx="minor">
-            <a:schemeClr val="lt1"/>
-          </a:fontRef>
-        </p:style>
-        <p:txBody>
-          <a:bodyPr rtlCol="0" anchor="ctr"/>
-          <a:lstStyle/>
-          <a:p>
-            <a:pPr algn="ctr"/>
-          </a:p>
-        </p:txBody>
-      </p:sp>
-      <p:sp>
-        <p:nvSpPr>
-          <p:cNvPr id="27" name="TextBox 26"/>
-          <p:cNvSpPr txBox="1"/>
-          <p:nvPr/>
-        </p:nvSpPr>
-        <p:spPr>
-          <a:xfrm>
-            <a:off x="658368" y="6355080"/>
-            <a:ext cx="10874959" cy="163067"/>
-          </a:xfrm>
-          <a:prstGeom prst="rect">
-            <a:avLst/>
-          </a:prstGeom>
-          <a:noFill/>
-        </p:spPr>
-        <p:txBody>
-          <a:bodyPr wrap="square" anchor="t" lIns="0" rIns="0" tIns="0" bIns="0">
-            <a:spAutoFit/>
-          </a:bodyPr>
-          <a:lstStyle/>
-          <a:p>
-            <a:pPr algn="l">
-              <a:lnSpc>
-                <a:spcPct val="120000"/>
-              </a:lnSpc>
-              <a:spcBef>
-                <a:spcPts val="0"/>
-              </a:spcBef>
-              <a:spcAft>
-                <a:spcPts val="0"/>
-              </a:spcAft>
-            </a:pPr>
-            <a:r>
-              <a:rPr sz="950" b="0" i="0">
+              <a:t>Расчёт: сумма весов выросла с 13.0 до 19.0, вклад фактора — с 3.0 до 9.0, поэтому балл service-0030 стал 81,8, а услуг высокого риска — 7 вместо 4. Настройка сохраняется на</a:t>
+            </a:r>
+          </a:p>
+          <a:p>
+            <a:pPr algn="l">
+              <a:lnSpc>
+                <a:spcPct val="130000"/>
+              </a:lnSpc>
+              <a:spcBef>
+                <a:spcPts val="0"/>
+              </a:spcBef>
+              <a:spcAft>
+                <a:spcPts val="0"/>
+              </a:spcAft>
+            </a:pPr>
+            <a:r>
+              <a:rPr sz="1050" b="0" i="0">
                 <a:solidFill>
                   <a:srgbClr val="666666"/>
                 </a:solidFill>
@@ -17505,7 +19253,7 @@
                 <a:cs typeface="Manrope"/>
                 <a:ea typeface="Manrope"/>
               </a:rPr>
-              <a:t>Подтверждено запуском продукта на датасете организатора: снимок импортирован, все экраны и пересчёт проверены вживую.</a:t>
+              <a:t>сервере, сводка обновляется сразу, без перезагрузки страницы; кнопка «Значения по умолчанию» возвращает исходные 3,0 и прежние числа.</a:t>
             </a:r>
           </a:p>
         </p:txBody>
@@ -17614,7 +19362,7 @@
                 <a:cs typeface="Manrope"/>
                 <a:ea typeface="Manrope"/>
               </a:rPr>
-              <a:t>АРХИТЕКТУРА ДОВЕРИЯ И ОГРАНИЧЕНИЯ</a:t>
+              <a:t>РЕЗУЛЬТАТ ДЛЯ БИЗНЕСА</a:t>
             </a:r>
           </a:p>
         </p:txBody>
@@ -17661,7 +19409,7 @@
                 <a:cs typeface="Manrope"/>
                 <a:ea typeface="Manrope"/>
               </a:rPr>
-              <a:t>Данные → проверка → расчёт → интерфейс</a:t>
+              <a:t>Команда видит, с кого начать</a:t>
             </a:r>
           </a:p>
         </p:txBody>
@@ -17708,7 +19456,7 @@
                 <a:cs typeface="Manrope"/>
                 <a:ea typeface="Manrope"/>
               </a:rPr>
-              <a:t>Короткий путь данных. Никаких скрытых шагов и никакой подмены отсутствующих сигналов нулём.</a:t>
+              <a:t>Четыре подтверждённые возможности продукта — и то, что мы сознательно не заявляем.</a:t>
             </a:r>
           </a:p>
         </p:txBody>
@@ -17722,7 +19470,7 @@
         <p:spPr>
           <a:xfrm>
             <a:off x="658368" y="1856232"/>
-            <a:ext cx="2512999" cy="1188720"/>
+            <a:ext cx="5300319" cy="969264"/>
           </a:xfrm>
           <a:prstGeom prst="rect">
             <a:avLst/>
@@ -17768,13 +19516,13 @@
         <p:spPr>
           <a:xfrm>
             <a:off x="658368" y="1856232"/>
-            <a:ext cx="2512999" cy="41148"/>
+            <a:ext cx="41148" cy="969264"/>
           </a:xfrm>
           <a:prstGeom prst="rect">
             <a:avLst/>
           </a:prstGeom>
           <a:solidFill>
-            <a:srgbClr val="1F1F1F"/>
+            <a:srgbClr val="83CDB7"/>
           </a:solidFill>
           <a:ln>
             <a:noFill/>
@@ -17811,8 +19559,8 @@
         </p:nvSpPr>
         <p:spPr>
           <a:xfrm>
-            <a:off x="822960" y="2039112"/>
-            <a:ext cx="2183815" cy="185928"/>
+            <a:off x="896112" y="2002536"/>
+            <a:ext cx="4843119" cy="199898"/>
           </a:xfrm>
           <a:prstGeom prst="rect">
             <a:avLst/>
@@ -17837,7 +19585,7 @@
               </a:spcAft>
             </a:pPr>
             <a:r>
-              <a:rPr sz="1200" b="1" i="0">
+              <a:rPr sz="1300" b="1" i="0">
                 <a:solidFill>
                   <a:srgbClr val="1A1A1A"/>
                 </a:solidFill>
@@ -17845,7 +19593,7 @@
                 <a:cs typeface="Manrope SemiBold"/>
                 <a:ea typeface="Manrope SemiBold"/>
               </a:rPr>
-              <a:t>Снимок Aéza</a:t>
+              <a:t>Приоритет вместо ручного просмотра</a:t>
             </a:r>
           </a:p>
         </p:txBody>
@@ -17858,8 +19606,8 @@
         </p:nvSpPr>
         <p:spPr>
           <a:xfrm>
-            <a:off x="822960" y="2270760"/>
-            <a:ext cx="2183815" cy="331978"/>
+            <a:off x="896112" y="2248154"/>
+            <a:ext cx="4843119" cy="364998"/>
           </a:xfrm>
           <a:prstGeom prst="rect">
             <a:avLst/>
@@ -17884,7 +19632,7 @@
               </a:spcAft>
             </a:pPr>
             <a:r>
-              <a:rPr sz="950" b="0" i="0">
+              <a:rPr sz="1050" b="0" i="0">
                 <a:solidFill>
                   <a:srgbClr val="666666"/>
                 </a:solidFill>
@@ -17892,7 +19640,7 @@
                 <a:cs typeface="Manrope"/>
                 <a:ea typeface="Manrope"/>
               </a:rPr>
-              <a:t>data.json: 10 аккаунтов, 30 услуг,</a:t>
+              <a:t>Список отсортирован по риску, фильтр по категории оставляет только тех, кто</a:t>
             </a:r>
           </a:p>
           <a:p>
@@ -17908,7 +19656,7 @@
               </a:spcAft>
             </a:pPr>
             <a:r>
-              <a:rPr sz="950" b="0" i="0">
+              <a:rPr sz="1050" b="0" i="0">
                 <a:solidFill>
                   <a:srgbClr val="666666"/>
                 </a:solidFill>
@@ -17916,65 +19664,21 @@
                 <a:cs typeface="Manrope"/>
                 <a:ea typeface="Manrope"/>
               </a:rPr>
-              <a:t>100 транзакций</a:t>
-            </a:r>
-          </a:p>
-        </p:txBody>
-      </p:sp>
-      <p:sp>
-        <p:nvSpPr>
-          <p:cNvPr id="10" name="Right Arrow 9"/>
+              <a:t>требует внимания.</a:t>
+            </a:r>
+          </a:p>
+        </p:txBody>
+      </p:sp>
+      <p:sp>
+        <p:nvSpPr>
+          <p:cNvPr id="10" name="Rectangle 9"/>
           <p:cNvSpPr/>
           <p:nvPr/>
         </p:nvSpPr>
         <p:spPr>
           <a:xfrm>
-            <a:off x="3221659" y="2340864"/>
-            <a:ext cx="173736" cy="219456"/>
-          </a:xfrm>
-          <a:prstGeom prst="rightArrow">
-            <a:avLst/>
-          </a:prstGeom>
-          <a:solidFill>
-            <a:srgbClr val="E1E1E1"/>
-          </a:solidFill>
-          <a:ln>
-            <a:noFill/>
-          </a:ln>
-          <a:effectLst/>
-        </p:spPr>
-        <p:style>
-          <a:lnRef idx="1">
-            <a:schemeClr val="accent1"/>
-          </a:lnRef>
-          <a:fillRef idx="3">
-            <a:schemeClr val="accent1"/>
-          </a:fillRef>
-          <a:effectRef idx="2">
-            <a:schemeClr val="accent1"/>
-          </a:effectRef>
-          <a:fontRef idx="minor">
-            <a:schemeClr val="lt1"/>
-          </a:fontRef>
-        </p:style>
-        <p:txBody>
-          <a:bodyPr rtlCol="0" anchor="ctr"/>
-          <a:lstStyle/>
-          <a:p>
-            <a:pPr algn="ctr"/>
-          </a:p>
-        </p:txBody>
-      </p:sp>
-      <p:sp>
-        <p:nvSpPr>
-          <p:cNvPr id="11" name="Rectangle 10"/>
-          <p:cNvSpPr/>
-          <p:nvPr/>
-        </p:nvSpPr>
-        <p:spPr>
-          <a:xfrm>
-            <a:off x="3445687" y="1856232"/>
-            <a:ext cx="2512999" cy="1188720"/>
+            <a:off x="6233007" y="1856232"/>
+            <a:ext cx="5300319" cy="969264"/>
           </a:xfrm>
           <a:prstGeom prst="rect">
             <a:avLst/>
@@ -18013,20 +19717,20 @@
       </p:sp>
       <p:sp>
         <p:nvSpPr>
-          <p:cNvPr id="12" name="Rectangle 11"/>
+          <p:cNvPr id="11" name="Rectangle 10"/>
           <p:cNvSpPr/>
           <p:nvPr/>
         </p:nvSpPr>
         <p:spPr>
           <a:xfrm>
-            <a:off x="3445687" y="1856232"/>
-            <a:ext cx="2512999" cy="41148"/>
+            <a:off x="6233007" y="1856232"/>
+            <a:ext cx="41148" cy="969264"/>
           </a:xfrm>
           <a:prstGeom prst="rect">
             <a:avLst/>
           </a:prstGeom>
           <a:solidFill>
-            <a:srgbClr val="1F1F1F"/>
+            <a:srgbClr val="83CDB7"/>
           </a:solidFill>
           <a:ln>
             <a:noFill/>
@@ -18057,14 +19761,14 @@
       </p:sp>
       <p:sp>
         <p:nvSpPr>
-          <p:cNvPr id="13" name="TextBox 12"/>
+          <p:cNvPr id="12" name="TextBox 11"/>
           <p:cNvSpPr txBox="1"/>
           <p:nvPr/>
         </p:nvSpPr>
         <p:spPr>
           <a:xfrm>
-            <a:off x="3610279" y="2039112"/>
-            <a:ext cx="2183815" cy="185928"/>
+            <a:off x="6470751" y="2002536"/>
+            <a:ext cx="4843119" cy="199898"/>
           </a:xfrm>
           <a:prstGeom prst="rect">
             <a:avLst/>
@@ -18089,7 +19793,7 @@
               </a:spcAft>
             </a:pPr>
             <a:r>
-              <a:rPr sz="1200" b="1" i="0">
+              <a:rPr sz="1300" b="1" i="0">
                 <a:solidFill>
                   <a:srgbClr val="1A1A1A"/>
                 </a:solidFill>
@@ -18097,21 +19801,21 @@
                 <a:cs typeface="Manrope SemiBold"/>
                 <a:ea typeface="Manrope SemiBold"/>
               </a:rPr>
-              <a:t>Импорт с проверкой</a:t>
-            </a:r>
-          </a:p>
-        </p:txBody>
-      </p:sp>
-      <p:sp>
-        <p:nvSpPr>
-          <p:cNvPr id="14" name="TextBox 13"/>
+              <a:t>Причина вместо непрозрачного числа</a:t>
+            </a:r>
+          </a:p>
+        </p:txBody>
+      </p:sp>
+      <p:sp>
+        <p:nvSpPr>
+          <p:cNvPr id="13" name="TextBox 12"/>
           <p:cNvSpPr txBox="1"/>
           <p:nvPr/>
         </p:nvSpPr>
         <p:spPr>
           <a:xfrm>
-            <a:off x="3610279" y="2270760"/>
-            <a:ext cx="2183815" cy="331978"/>
+            <a:off x="6470751" y="2248154"/>
+            <a:ext cx="4843119" cy="364998"/>
           </a:xfrm>
           <a:prstGeom prst="rect">
             <a:avLst/>
@@ -18136,7 +19840,7 @@
               </a:spcAft>
             </a:pPr>
             <a:r>
-              <a:rPr sz="950" b="0" i="0">
+              <a:rPr sz="1050" b="0" i="0">
                 <a:solidFill>
                   <a:srgbClr val="666666"/>
                 </a:solidFill>
@@ -18144,7 +19848,7 @@
                 <a:cs typeface="Manrope"/>
                 <a:ea typeface="Manrope"/>
               </a:rPr>
-              <a:t>валидация целиком до записи,</a:t>
+              <a:t>Каждый балл разложен на факторы с числами из данных и рекомендациями по</a:t>
             </a:r>
           </a:p>
           <a:p>
@@ -18160,7 +19864,7 @@
               </a:spcAft>
             </a:pPr>
             <a:r>
-              <a:rPr sz="950" b="0" i="0">
+              <a:rPr sz="1050" b="0" i="0">
                 <a:solidFill>
                   <a:srgbClr val="666666"/>
                 </a:solidFill>
@@ -18168,65 +19872,21 @@
                 <a:cs typeface="Manrope"/>
                 <a:ea typeface="Manrope"/>
               </a:rPr>
-              <a:t>применение атомарно</a:t>
-            </a:r>
-          </a:p>
-        </p:txBody>
-      </p:sp>
-      <p:sp>
-        <p:nvSpPr>
-          <p:cNvPr id="15" name="Right Arrow 14"/>
+              <a:t>удержанию.</a:t>
+            </a:r>
+          </a:p>
+        </p:txBody>
+      </p:sp>
+      <p:sp>
+        <p:nvSpPr>
+          <p:cNvPr id="14" name="Rectangle 13"/>
           <p:cNvSpPr/>
           <p:nvPr/>
         </p:nvSpPr>
         <p:spPr>
           <a:xfrm>
-            <a:off x="6008978" y="2340864"/>
-            <a:ext cx="173736" cy="219456"/>
-          </a:xfrm>
-          <a:prstGeom prst="rightArrow">
-            <a:avLst/>
-          </a:prstGeom>
-          <a:solidFill>
-            <a:srgbClr val="E1E1E1"/>
-          </a:solidFill>
-          <a:ln>
-            <a:noFill/>
-          </a:ln>
-          <a:effectLst/>
-        </p:spPr>
-        <p:style>
-          <a:lnRef idx="1">
-            <a:schemeClr val="accent1"/>
-          </a:lnRef>
-          <a:fillRef idx="3">
-            <a:schemeClr val="accent1"/>
-          </a:fillRef>
-          <a:effectRef idx="2">
-            <a:schemeClr val="accent1"/>
-          </a:effectRef>
-          <a:fontRef idx="minor">
-            <a:schemeClr val="lt1"/>
-          </a:fontRef>
-        </p:style>
-        <p:txBody>
-          <a:bodyPr rtlCol="0" anchor="ctr"/>
-          <a:lstStyle/>
-          <a:p>
-            <a:pPr algn="ctr"/>
-          </a:p>
-        </p:txBody>
-      </p:sp>
-      <p:sp>
-        <p:nvSpPr>
-          <p:cNvPr id="16" name="Rectangle 15"/>
-          <p:cNvSpPr/>
-          <p:nvPr/>
-        </p:nvSpPr>
-        <p:spPr>
-          <a:xfrm>
-            <a:off x="6233006" y="1856232"/>
-            <a:ext cx="2512999" cy="1188720"/>
+            <a:off x="658368" y="2990088"/>
+            <a:ext cx="5300319" cy="969264"/>
           </a:xfrm>
           <a:prstGeom prst="rect">
             <a:avLst/>
@@ -18265,20 +19925,20 @@
       </p:sp>
       <p:sp>
         <p:nvSpPr>
-          <p:cNvPr id="17" name="Rectangle 16"/>
+          <p:cNvPr id="15" name="Rectangle 14"/>
           <p:cNvSpPr/>
           <p:nvPr/>
         </p:nvSpPr>
         <p:spPr>
           <a:xfrm>
-            <a:off x="6233006" y="1856232"/>
-            <a:ext cx="2512999" cy="41148"/>
+            <a:off x="658368" y="2990088"/>
+            <a:ext cx="41148" cy="969264"/>
           </a:xfrm>
           <a:prstGeom prst="rect">
             <a:avLst/>
           </a:prstGeom>
           <a:solidFill>
-            <a:srgbClr val="1F1F1F"/>
+            <a:srgbClr val="83CDB7"/>
           </a:solidFill>
           <a:ln>
             <a:noFill/>
@@ -18309,14 +19969,14 @@
       </p:sp>
       <p:sp>
         <p:nvSpPr>
-          <p:cNvPr id="18" name="TextBox 17"/>
+          <p:cNvPr id="16" name="TextBox 15"/>
           <p:cNvSpPr txBox="1"/>
           <p:nvPr/>
         </p:nvSpPr>
         <p:spPr>
           <a:xfrm>
-            <a:off x="6397598" y="2039112"/>
-            <a:ext cx="2183815" cy="185928"/>
+            <a:off x="896112" y="3136392"/>
+            <a:ext cx="4843119" cy="199898"/>
           </a:xfrm>
           <a:prstGeom prst="rect">
             <a:avLst/>
@@ -18341,7 +20001,7 @@
               </a:spcAft>
             </a:pPr>
             <a:r>
-              <a:rPr sz="1200" b="1" i="0">
+              <a:rPr sz="1300" b="1" i="0">
                 <a:solidFill>
                   <a:srgbClr val="1A1A1A"/>
                 </a:solidFill>
@@ -18349,21 +20009,21 @@
                 <a:cs typeface="Manrope SemiBold"/>
                 <a:ea typeface="Manrope SemiBold"/>
               </a:rPr>
-              <a:t>Скоринг</a:t>
-            </a:r>
-          </a:p>
-        </p:txBody>
-      </p:sp>
-      <p:sp>
-        <p:nvSpPr>
-          <p:cNvPr id="19" name="TextBox 18"/>
+              <a:t>Деньги отдельно от риска</a:t>
+            </a:r>
+          </a:p>
+        </p:txBody>
+      </p:sp>
+      <p:sp>
+        <p:nvSpPr>
+          <p:cNvPr id="17" name="TextBox 16"/>
           <p:cNvSpPr txBox="1"/>
           <p:nvPr/>
         </p:nvSpPr>
         <p:spPr>
           <a:xfrm>
-            <a:off x="6397598" y="2270760"/>
-            <a:ext cx="2183815" cy="331978"/>
+            <a:off x="896112" y="3382010"/>
+            <a:ext cx="4843119" cy="364998"/>
           </a:xfrm>
           <a:prstGeom prst="rect">
             <a:avLst/>
@@ -18388,7 +20048,7 @@
               </a:spcAft>
             </a:pPr>
             <a:r>
-              <a:rPr sz="950" b="0" i="0">
+              <a:rPr sz="1050" b="0" i="0">
                 <a:solidFill>
                   <a:srgbClr val="666666"/>
                 </a:solidFill>
@@ -18396,7 +20056,7 @@
                 <a:cs typeface="Manrope"/>
                 <a:ea typeface="Manrope"/>
               </a:rPr>
-              <a:t>один модуль: вес × фактор, сумма</a:t>
+              <a:t>Выручка под риском считается по продлениям внутри горизонта; баланс и</a:t>
             </a:r>
           </a:p>
           <a:p>
@@ -18412,7 +20072,7 @@
               </a:spcAft>
             </a:pPr>
             <a:r>
-              <a:rPr sz="950" b="0" i="0">
+              <a:rPr sz="1050" b="0" i="0">
                 <a:solidFill>
                   <a:srgbClr val="666666"/>
                 </a:solidFill>
@@ -18420,65 +20080,21 @@
                 <a:cs typeface="Manrope"/>
                 <a:ea typeface="Manrope"/>
               </a:rPr>
-              <a:t>весов в знаменателе</a:t>
-            </a:r>
-          </a:p>
-        </p:txBody>
-      </p:sp>
-      <p:sp>
-        <p:nvSpPr>
-          <p:cNvPr id="20" name="Right Arrow 19"/>
+              <a:t>пополнения с ней не смешиваются.</a:t>
+            </a:r>
+          </a:p>
+        </p:txBody>
+      </p:sp>
+      <p:sp>
+        <p:nvSpPr>
+          <p:cNvPr id="18" name="Rectangle 17"/>
           <p:cNvSpPr/>
           <p:nvPr/>
         </p:nvSpPr>
         <p:spPr>
           <a:xfrm>
-            <a:off x="8796297" y="2340864"/>
-            <a:ext cx="173736" cy="219456"/>
-          </a:xfrm>
-          <a:prstGeom prst="rightArrow">
-            <a:avLst/>
-          </a:prstGeom>
-          <a:solidFill>
-            <a:srgbClr val="E1E1E1"/>
-          </a:solidFill>
-          <a:ln>
-            <a:noFill/>
-          </a:ln>
-          <a:effectLst/>
-        </p:spPr>
-        <p:style>
-          <a:lnRef idx="1">
-            <a:schemeClr val="accent1"/>
-          </a:lnRef>
-          <a:fillRef idx="3">
-            <a:schemeClr val="accent1"/>
-          </a:fillRef>
-          <a:effectRef idx="2">
-            <a:schemeClr val="accent1"/>
-          </a:effectRef>
-          <a:fontRef idx="minor">
-            <a:schemeClr val="lt1"/>
-          </a:fontRef>
-        </p:style>
-        <p:txBody>
-          <a:bodyPr rtlCol="0" anchor="ctr"/>
-          <a:lstStyle/>
-          <a:p>
-            <a:pPr algn="ctr"/>
-          </a:p>
-        </p:txBody>
-      </p:sp>
-      <p:sp>
-        <p:nvSpPr>
-          <p:cNvPr id="21" name="Rectangle 20"/>
-          <p:cNvSpPr/>
-          <p:nvPr/>
-        </p:nvSpPr>
-        <p:spPr>
-          <a:xfrm>
-            <a:off x="9020325" y="1856232"/>
-            <a:ext cx="2512999" cy="1188720"/>
+            <a:off x="6233007" y="2990088"/>
+            <a:ext cx="5300319" cy="969264"/>
           </a:xfrm>
           <a:prstGeom prst="rect">
             <a:avLst/>
@@ -18517,20 +20133,20 @@
       </p:sp>
       <p:sp>
         <p:nvSpPr>
-          <p:cNvPr id="22" name="Rectangle 21"/>
+          <p:cNvPr id="19" name="Rectangle 18"/>
           <p:cNvSpPr/>
           <p:nvPr/>
         </p:nvSpPr>
         <p:spPr>
           <a:xfrm>
-            <a:off x="9020325" y="1856232"/>
-            <a:ext cx="2512999" cy="41148"/>
+            <a:off x="6233007" y="2990088"/>
+            <a:ext cx="41148" cy="969264"/>
           </a:xfrm>
           <a:prstGeom prst="rect">
             <a:avLst/>
           </a:prstGeom>
           <a:solidFill>
-            <a:srgbClr val="B84A00"/>
+            <a:srgbClr val="83CDB7"/>
           </a:solidFill>
           <a:ln>
             <a:noFill/>
@@ -18561,14 +20177,14 @@
       </p:sp>
       <p:sp>
         <p:nvSpPr>
-          <p:cNvPr id="23" name="TextBox 22"/>
+          <p:cNvPr id="20" name="TextBox 19"/>
           <p:cNvSpPr txBox="1"/>
           <p:nvPr/>
         </p:nvSpPr>
         <p:spPr>
           <a:xfrm>
-            <a:off x="9184917" y="2039112"/>
-            <a:ext cx="2183815" cy="185928"/>
+            <a:off x="6470751" y="3136392"/>
+            <a:ext cx="4843119" cy="199898"/>
           </a:xfrm>
           <a:prstGeom prst="rect">
             <a:avLst/>
@@ -18593,7 +20209,7 @@
               </a:spcAft>
             </a:pPr>
             <a:r>
-              <a:rPr sz="1200" b="1" i="0">
+              <a:rPr sz="1300" b="1" i="0">
                 <a:solidFill>
                   <a:srgbClr val="1A1A1A"/>
                 </a:solidFill>
@@ -18601,21 +20217,21 @@
                 <a:cs typeface="Manrope SemiBold"/>
                 <a:ea typeface="Manrope SemiBold"/>
               </a:rPr>
-              <a:t>API и интерфейс</a:t>
-            </a:r>
-          </a:p>
-        </p:txBody>
-      </p:sp>
-      <p:sp>
-        <p:nvSpPr>
-          <p:cNvPr id="24" name="TextBox 23"/>
+              <a:t>Проверка гипотез</a:t>
+            </a:r>
+          </a:p>
+        </p:txBody>
+      </p:sp>
+      <p:sp>
+        <p:nvSpPr>
+          <p:cNvPr id="21" name="TextBox 20"/>
           <p:cNvSpPr txBox="1"/>
           <p:nvPr/>
         </p:nvSpPr>
         <p:spPr>
           <a:xfrm>
-            <a:off x="9184917" y="2270760"/>
-            <a:ext cx="2183815" cy="331978"/>
+            <a:off x="6470751" y="3382010"/>
+            <a:ext cx="4843119" cy="364998"/>
           </a:xfrm>
           <a:prstGeom prst="rect">
             <a:avLst/>
@@ -18640,7 +20256,7 @@
               </a:spcAft>
             </a:pPr>
             <a:r>
-              <a:rPr sz="950" b="0" i="0">
+              <a:rPr sz="1050" b="0" i="0">
                 <a:solidFill>
                   <a:srgbClr val="666666"/>
                 </a:solidFill>
@@ -18648,7 +20264,7 @@
                 <a:cs typeface="Manrope"/>
                 <a:ea typeface="Manrope"/>
               </a:rPr>
-              <a:t>FastAPI + Postgres, панель</a:t>
+              <a:t>Веса, горизонт и пороги меняются из интерфейса; результат пересчитывается</a:t>
             </a:r>
           </a:p>
           <a:p>
@@ -18664,7 +20280,7 @@
               </a:spcAft>
             </a:pPr>
             <a:r>
-              <a:rPr sz="950" b="0" i="0">
+              <a:rPr sz="1050" b="0" i="0">
                 <a:solidFill>
                   <a:srgbClr val="666666"/>
                 </a:solidFill>
@@ -18672,21 +20288,21 @@
                 <a:cs typeface="Manrope"/>
                 <a:ea typeface="Manrope"/>
               </a:rPr>
-              <a:t>аналитика на React</a:t>
-            </a:r>
-          </a:p>
-        </p:txBody>
-      </p:sp>
-      <p:sp>
-        <p:nvSpPr>
-          <p:cNvPr id="25" name="Rectangle 24"/>
+              <a:t>сразу.</a:t>
+            </a:r>
+          </a:p>
+        </p:txBody>
+      </p:sp>
+      <p:sp>
+        <p:nvSpPr>
+          <p:cNvPr id="22" name="Rectangle 21"/>
           <p:cNvSpPr/>
           <p:nvPr/>
         </p:nvSpPr>
         <p:spPr>
           <a:xfrm>
-            <a:off x="658368" y="3319272"/>
-            <a:ext cx="5274355" cy="2734056"/>
+            <a:off x="658368" y="4233672"/>
+            <a:ext cx="10874959" cy="1819656"/>
           </a:xfrm>
           <a:prstGeom prst="rect">
             <a:avLst/>
@@ -18725,287 +20341,23 @@
       </p:sp>
       <p:sp>
         <p:nvSpPr>
-          <p:cNvPr id="26" name="TextBox 25"/>
-          <p:cNvSpPr txBox="1"/>
-          <p:nvPr/>
-        </p:nvSpPr>
-        <p:spPr>
-          <a:xfrm>
-            <a:off x="877824" y="3483864"/>
-            <a:ext cx="4835443" cy="192913"/>
-          </a:xfrm>
-          <a:prstGeom prst="rect">
-            <a:avLst/>
-          </a:prstGeom>
-          <a:noFill/>
-        </p:spPr>
-        <p:txBody>
-          <a:bodyPr wrap="square" anchor="t" lIns="0" rIns="0" tIns="0" bIns="0">
-            <a:spAutoFit/>
-          </a:bodyPr>
-          <a:lstStyle/>
-          <a:p>
-            <a:pPr algn="l">
-              <a:lnSpc>
-                <a:spcPct val="110000"/>
-              </a:lnSpc>
-              <a:spcBef>
-                <a:spcPts val="0"/>
-              </a:spcBef>
-              <a:spcAft>
-                <a:spcPts val="0"/>
-              </a:spcAft>
-            </a:pPr>
-            <a:r>
-              <a:rPr sz="1250" b="1" i="0">
-                <a:solidFill>
-                  <a:srgbClr val="1A1A1A"/>
-                </a:solidFill>
-                <a:latin typeface="Manrope SemiBold"/>
-                <a:cs typeface="Manrope SemiBold"/>
-                <a:ea typeface="Manrope SemiBold"/>
-              </a:rPr>
-              <a:t>Как обрабатываются пропуски</a:t>
-            </a:r>
-          </a:p>
-        </p:txBody>
-      </p:sp>
-      <p:sp>
-        <p:nvSpPr>
-          <p:cNvPr id="27" name="TextBox 26"/>
-          <p:cNvSpPr txBox="1"/>
-          <p:nvPr/>
-        </p:nvSpPr>
-        <p:spPr>
-          <a:xfrm>
-            <a:off x="877824" y="3731641"/>
-            <a:ext cx="4835443" cy="1379728"/>
-          </a:xfrm>
-          <a:prstGeom prst="rect">
-            <a:avLst/>
-          </a:prstGeom>
-          <a:noFill/>
-        </p:spPr>
-        <p:txBody>
-          <a:bodyPr wrap="square" anchor="t" lIns="0" rIns="0" tIns="0" bIns="0">
-            <a:spAutoFit/>
-          </a:bodyPr>
-          <a:lstStyle/>
-          <a:p>
-            <a:pPr algn="l">
-              <a:lnSpc>
-                <a:spcPct val="134000"/>
-              </a:lnSpc>
-              <a:spcBef>
-                <a:spcPts val="0"/>
-              </a:spcBef>
-              <a:spcAft>
-                <a:spcPts val="0"/>
-              </a:spcAft>
-            </a:pPr>
-            <a:r>
-              <a:rPr sz="1000" b="0" i="0">
-                <a:solidFill>
-                  <a:srgbClr val="666666"/>
-                </a:solidFill>
-                <a:latin typeface="Manrope"/>
-                <a:cs typeface="Manrope"/>
-                <a:ea typeface="Manrope"/>
-              </a:rPr>
-              <a:t>• Неизвестное ≠ ноль: фактор без данных исключается из числителя и</a:t>
-            </a:r>
-          </a:p>
-          <a:p>
-            <a:pPr algn="l">
-              <a:lnSpc>
-                <a:spcPct val="134000"/>
-              </a:lnSpc>
-              <a:spcBef>
-                <a:spcPts val="0"/>
-              </a:spcBef>
-              <a:spcAft>
-                <a:spcPts val="0"/>
-              </a:spcAft>
-            </a:pPr>
-            <a:r>
-              <a:rPr sz="1000" b="0" i="0">
-                <a:solidFill>
-                  <a:srgbClr val="666666"/>
-                </a:solidFill>
-                <a:latin typeface="Manrope"/>
-                <a:cs typeface="Manrope"/>
-                <a:ea typeface="Manrope"/>
-              </a:rPr>
-              <a:t>знаменателя, веса перенормируются.</a:t>
-            </a:r>
-          </a:p>
-          <a:p>
-            <a:pPr algn="l">
-              <a:lnSpc>
-                <a:spcPct val="134000"/>
-              </a:lnSpc>
-              <a:spcBef>
-                <a:spcPts val="0"/>
-              </a:spcBef>
-              <a:spcAft>
-                <a:spcPts val="0"/>
-              </a:spcAft>
-            </a:pPr>
-            <a:r>
-              <a:rPr sz="1000" b="0" i="0">
-                <a:solidFill>
-                  <a:srgbClr val="666666"/>
-                </a:solidFill>
-                <a:latin typeface="Manrope"/>
-                <a:cs typeface="Manrope"/>
-                <a:ea typeface="Manrope"/>
-              </a:rPr>
-              <a:t>• Услуги deleted и blocked — состоявшееся событие, а не прогноз: балл им не</a:t>
-            </a:r>
-          </a:p>
-          <a:p>
-            <a:pPr algn="l">
-              <a:lnSpc>
-                <a:spcPct val="134000"/>
-              </a:lnSpc>
-              <a:spcBef>
-                <a:spcPts val="0"/>
-              </a:spcBef>
-              <a:spcAft>
-                <a:spcPts val="0"/>
-              </a:spcAft>
-            </a:pPr>
-            <a:r>
-              <a:rPr sz="1000" b="0" i="0">
-                <a:solidFill>
-                  <a:srgbClr val="666666"/>
-                </a:solidFill>
-                <a:latin typeface="Manrope"/>
-                <a:cs typeface="Manrope"/>
-                <a:ea typeface="Manrope"/>
-              </a:rPr>
-              <a:t>присваивается.</a:t>
-            </a:r>
-          </a:p>
-          <a:p>
-            <a:pPr algn="l">
-              <a:lnSpc>
-                <a:spcPct val="134000"/>
-              </a:lnSpc>
-              <a:spcBef>
-                <a:spcPts val="0"/>
-              </a:spcBef>
-              <a:spcAft>
-                <a:spcPts val="0"/>
-              </a:spcAft>
-            </a:pPr>
-            <a:r>
-              <a:rPr sz="1000" b="0" i="0">
-                <a:solidFill>
-                  <a:srgbClr val="666666"/>
-                </a:solidFill>
-                <a:latin typeface="Manrope"/>
-                <a:cs typeface="Manrope"/>
-                <a:ea typeface="Manrope"/>
-              </a:rPr>
-              <a:t>• Цена не входит в формулу риска: price — это экспозиция, а не вероятность</a:t>
-            </a:r>
-          </a:p>
-          <a:p>
-            <a:pPr algn="l">
-              <a:lnSpc>
-                <a:spcPct val="134000"/>
-              </a:lnSpc>
-              <a:spcBef>
-                <a:spcPts val="0"/>
-              </a:spcBef>
-              <a:spcAft>
-                <a:spcPts val="0"/>
-              </a:spcAft>
-            </a:pPr>
-            <a:r>
-              <a:rPr sz="1000" b="0" i="0">
-                <a:solidFill>
-                  <a:srgbClr val="666666"/>
-                </a:solidFill>
-                <a:latin typeface="Manrope"/>
-                <a:cs typeface="Manrope"/>
-                <a:ea typeface="Manrope"/>
-              </a:rPr>
-              <a:t>ухода.</a:t>
-            </a:r>
-          </a:p>
-          <a:p>
-            <a:pPr algn="l">
-              <a:lnSpc>
-                <a:spcPct val="134000"/>
-              </a:lnSpc>
-              <a:spcBef>
-                <a:spcPts val="0"/>
-              </a:spcBef>
-              <a:spcAft>
-                <a:spcPts val="0"/>
-              </a:spcAft>
-            </a:pPr>
-            <a:r>
-              <a:rPr sz="1000" b="0" i="0">
-                <a:solidFill>
-                  <a:srgbClr val="666666"/>
-                </a:solidFill>
-                <a:latin typeface="Manrope"/>
-                <a:cs typeface="Manrope"/>
-                <a:ea typeface="Manrope"/>
-              </a:rPr>
-              <a:t>• Опорный момент зафиксирован (2026-10-19 15:00 UTC), поэтому числа</a:t>
-            </a:r>
-          </a:p>
-          <a:p>
-            <a:pPr algn="l">
-              <a:lnSpc>
-                <a:spcPct val="134000"/>
-              </a:lnSpc>
-              <a:spcBef>
-                <a:spcPts val="0"/>
-              </a:spcBef>
-              <a:spcAft>
-                <a:spcPts val="0"/>
-              </a:spcAft>
-            </a:pPr>
-            <a:r>
-              <a:rPr sz="1000" b="0" i="0">
-                <a:solidFill>
-                  <a:srgbClr val="666666"/>
-                </a:solidFill>
-                <a:latin typeface="Manrope"/>
-                <a:cs typeface="Manrope"/>
-                <a:ea typeface="Manrope"/>
-              </a:rPr>
-              <a:t>воспроизводимы.</a:t>
-            </a:r>
-          </a:p>
-        </p:txBody>
-      </p:sp>
-      <p:sp>
-        <p:nvSpPr>
-          <p:cNvPr id="28" name="Rectangle 27"/>
+          <p:cNvPr id="23" name="Rectangle 22"/>
           <p:cNvSpPr/>
           <p:nvPr/>
         </p:nvSpPr>
         <p:spPr>
           <a:xfrm>
-            <a:off x="6207043" y="3319272"/>
-            <a:ext cx="5326284" cy="2734056"/>
+            <a:off x="658368" y="4233672"/>
+            <a:ext cx="41148" cy="1819656"/>
           </a:xfrm>
           <a:prstGeom prst="rect">
             <a:avLst/>
           </a:prstGeom>
           <a:solidFill>
-            <a:srgbClr val="FFFFFF"/>
+            <a:srgbClr val="B84A00"/>
           </a:solidFill>
-          <a:ln w="11430">
-            <a:solidFill>
-              <a:srgbClr val="E1E1E1"/>
-            </a:solidFill>
+          <a:ln>
+            <a:noFill/>
           </a:ln>
           <a:effectLst/>
         </p:spPr>
@@ -19033,14 +20385,14 @@
       </p:sp>
       <p:sp>
         <p:nvSpPr>
-          <p:cNvPr id="29" name="TextBox 28"/>
+          <p:cNvPr id="24" name="TextBox 23"/>
           <p:cNvSpPr txBox="1"/>
           <p:nvPr/>
         </p:nvSpPr>
         <p:spPr>
           <a:xfrm>
-            <a:off x="6426499" y="3483864"/>
-            <a:ext cx="4887372" cy="192913"/>
+            <a:off x="896112" y="4398264"/>
+            <a:ext cx="10399471" cy="192913"/>
           </a:xfrm>
           <a:prstGeom prst="rect">
             <a:avLst/>
@@ -19073,21 +20425,21 @@
                 <a:cs typeface="Manrope SemiBold"/>
                 <a:ea typeface="Manrope SemiBold"/>
               </a:rPr>
-              <a:t>Ограничения, которые важно знать</a:t>
-            </a:r>
-          </a:p>
-        </p:txBody>
-      </p:sp>
-      <p:sp>
-        <p:nvSpPr>
-          <p:cNvPr id="30" name="TextBox 29"/>
+              <a:t>Чего мы не заявляем</a:t>
+            </a:r>
+          </a:p>
+        </p:txBody>
+      </p:sp>
+      <p:sp>
+        <p:nvSpPr>
+          <p:cNvPr id="25" name="TextBox 24"/>
           <p:cNvSpPr txBox="1"/>
           <p:nvPr/>
         </p:nvSpPr>
         <p:spPr>
           <a:xfrm>
-            <a:off x="6426499" y="3731641"/>
-            <a:ext cx="4887372" cy="1039368"/>
+            <a:off x="896112" y="4646041"/>
+            <a:ext cx="10399471" cy="364998"/>
           </a:xfrm>
           <a:prstGeom prst="rect">
             <a:avLst/>
@@ -19102,17 +20454,17 @@
           <a:p>
             <a:pPr algn="l">
               <a:lnSpc>
-                <a:spcPct val="134000"/>
-              </a:lnSpc>
-              <a:spcBef>
-                <a:spcPts val="0"/>
-              </a:spcBef>
-              <a:spcAft>
-                <a:spcPts val="0"/>
-              </a:spcAft>
-            </a:pPr>
-            <a:r>
-              <a:rPr sz="1000" b="0" i="0">
+                <a:spcPct val="130000"/>
+              </a:lnSpc>
+              <a:spcBef>
+                <a:spcPts val="0"/>
+              </a:spcBef>
+              <a:spcAft>
+                <a:spcPts val="0"/>
+              </a:spcAft>
+            </a:pPr>
+            <a:r>
+              <a:rPr sz="1050" b="0" i="0">
                 <a:solidFill>
                   <a:srgbClr val="666666"/>
                 </a:solidFill>
@@ -19120,23 +20472,23 @@
                 <a:cs typeface="Manrope"/>
                 <a:ea typeface="Manrope"/>
               </a:rPr>
-              <a:t>• Нет истории оттока — отсюда модель на правилах и отсутствие метрик</a:t>
-            </a:r>
-          </a:p>
-          <a:p>
-            <a:pPr algn="l">
-              <a:lnSpc>
-                <a:spcPct val="134000"/>
-              </a:lnSpc>
-              <a:spcBef>
-                <a:spcPts val="0"/>
-              </a:spcBef>
-              <a:spcAft>
-                <a:spcPts val="0"/>
-              </a:spcAft>
-            </a:pPr>
-            <a:r>
-              <a:rPr sz="1000" b="0" i="0">
+              <a:t>Балл риска — не вероятность оттока в процентах: в снимке нет исторических исходов, поэтому модель построена на правилах, а не обучена. Точность, снижение оттока и</a:t>
+            </a:r>
+          </a:p>
+          <a:p>
+            <a:pPr algn="l">
+              <a:lnSpc>
+                <a:spcPct val="130000"/>
+              </a:lnSpc>
+              <a:spcBef>
+                <a:spcPts val="0"/>
+              </a:spcBef>
+              <a:spcAft>
+                <a:spcPts val="0"/>
+              </a:spcAft>
+            </a:pPr>
+            <a:r>
+              <a:rPr sz="1050" b="0" i="0">
                 <a:solidFill>
                   <a:srgbClr val="666666"/>
                 </a:solidFill>
@@ -19144,23 +20496,90 @@
                 <a:cs typeface="Manrope"/>
                 <a:ea typeface="Manrope"/>
               </a:rPr>
-              <a:t>точности.</a:t>
-            </a:r>
-          </a:p>
-          <a:p>
-            <a:pPr algn="l">
-              <a:lnSpc>
-                <a:spcPct val="134000"/>
-              </a:lnSpc>
-              <a:spcBef>
-                <a:spcPts val="0"/>
-              </a:spcBef>
-              <a:spcAft>
-                <a:spcPts val="0"/>
-              </a:spcAft>
-            </a:pPr>
-            <a:r>
-              <a:rPr sz="1000" b="0" i="0">
+              <a:t>рост выручки не измерены — мы их не обещаем. Продукт помогает анализировать и приоритизировать; удержание зависит от следующих действий команды.</a:t>
+            </a:r>
+          </a:p>
+        </p:txBody>
+      </p:sp>
+      <p:sp>
+        <p:nvSpPr>
+          <p:cNvPr id="26" name="Rectangle 25"/>
+          <p:cNvSpPr/>
+          <p:nvPr/>
+        </p:nvSpPr>
+        <p:spPr>
+          <a:xfrm>
+            <a:off x="658368" y="6217920"/>
+            <a:ext cx="10874959" cy="9525"/>
+          </a:xfrm>
+          <a:prstGeom prst="rect">
+            <a:avLst/>
+          </a:prstGeom>
+          <a:solidFill>
+            <a:srgbClr val="E1E1E1"/>
+          </a:solidFill>
+          <a:ln>
+            <a:noFill/>
+          </a:ln>
+          <a:effectLst/>
+        </p:spPr>
+        <p:style>
+          <a:lnRef idx="1">
+            <a:schemeClr val="accent1"/>
+          </a:lnRef>
+          <a:fillRef idx="3">
+            <a:schemeClr val="accent1"/>
+          </a:fillRef>
+          <a:effectRef idx="2">
+            <a:schemeClr val="accent1"/>
+          </a:effectRef>
+          <a:fontRef idx="minor">
+            <a:schemeClr val="lt1"/>
+          </a:fontRef>
+        </p:style>
+        <p:txBody>
+          <a:bodyPr rtlCol="0" anchor="ctr"/>
+          <a:lstStyle/>
+          <a:p>
+            <a:pPr algn="ctr"/>
+          </a:p>
+        </p:txBody>
+      </p:sp>
+      <p:sp>
+        <p:nvSpPr>
+          <p:cNvPr id="27" name="TextBox 26"/>
+          <p:cNvSpPr txBox="1"/>
+          <p:nvPr/>
+        </p:nvSpPr>
+        <p:spPr>
+          <a:xfrm>
+            <a:off x="658368" y="6355080"/>
+            <a:ext cx="10874959" cy="163067"/>
+          </a:xfrm>
+          <a:prstGeom prst="rect">
+            <a:avLst/>
+          </a:prstGeom>
+          <a:noFill/>
+        </p:spPr>
+        <p:txBody>
+          <a:bodyPr wrap="square" anchor="t" lIns="0" rIns="0" tIns="0" bIns="0">
+            <a:spAutoFit/>
+          </a:bodyPr>
+          <a:lstStyle/>
+          <a:p>
+            <a:pPr algn="l">
+              <a:lnSpc>
+                <a:spcPct val="120000"/>
+              </a:lnSpc>
+              <a:spcBef>
+                <a:spcPts val="0"/>
+              </a:spcBef>
+              <a:spcAft>
+                <a:spcPts val="0"/>
+              </a:spcAft>
+            </a:pPr>
+            <a:r>
+              <a:rPr sz="950" b="0" i="0">
                 <a:solidFill>
                   <a:srgbClr val="666666"/>
                 </a:solidFill>
@@ -19168,79 +20587,7 @@
                 <a:cs typeface="Manrope"/>
                 <a:ea typeface="Manrope"/>
               </a:rPr>
-              <a:t>• Нет календаря будущих списаний: даты продлений выведены из expiresAt и</a:t>
-            </a:r>
-          </a:p>
-          <a:p>
-            <a:pPr algn="l">
-              <a:lnSpc>
-                <a:spcPct val="134000"/>
-              </a:lnSpc>
-              <a:spcBef>
-                <a:spcPts val="0"/>
-              </a:spcBef>
-              <a:spcAft>
-                <a:spcPts val="0"/>
-              </a:spcAft>
-            </a:pPr>
-            <a:r>
-              <a:rPr sz="1000" b="0" i="0">
-                <a:solidFill>
-                  <a:srgbClr val="666666"/>
-                </a:solidFill>
-                <a:latin typeface="Manrope"/>
-                <a:cs typeface="Manrope"/>
-                <a:ea typeface="Manrope"/>
-              </a:rPr>
-              <a:t>paymentTerm.</a:t>
-            </a:r>
-          </a:p>
-          <a:p>
-            <a:pPr algn="l">
-              <a:lnSpc>
-                <a:spcPct val="134000"/>
-              </a:lnSpc>
-              <a:spcBef>
-                <a:spcPts val="0"/>
-              </a:spcBef>
-              <a:spcAft>
-                <a:spcPts val="0"/>
-              </a:spcAft>
-            </a:pPr>
-            <a:r>
-              <a:rPr sz="1000" b="0" i="0">
-                <a:solidFill>
-                  <a:srgbClr val="666666"/>
-                </a:solidFill>
-                <a:latin typeface="Manrope"/>
-                <a:cs typeface="Manrope"/>
-                <a:ea typeface="Manrope"/>
-              </a:rPr>
-              <a:t>• Нет динамики: снимок описывает один момент, график тренда не строится.</a:t>
-            </a:r>
-          </a:p>
-          <a:p>
-            <a:pPr algn="l">
-              <a:lnSpc>
-                <a:spcPct val="134000"/>
-              </a:lnSpc>
-              <a:spcBef>
-                <a:spcPts val="0"/>
-              </a:spcBef>
-              <a:spcAft>
-                <a:spcPts val="0"/>
-              </a:spcAft>
-            </a:pPr>
-            <a:r>
-              <a:rPr sz="1000" b="0" i="0">
-                <a:solidFill>
-                  <a:srgbClr val="666666"/>
-                </a:solidFill>
-                <a:latin typeface="Manrope"/>
-                <a:cs typeface="Manrope"/>
-                <a:ea typeface="Manrope"/>
-              </a:rPr>
-              <a:t>• Нагрузка не измерялась: набор кейса — 10 / 30 / 100 записей.</a:t>
+              <a:t>Подтверждено запуском продукта на датасете организатора: снимок импортирован, все экраны и пересчёт проверены вживую.</a:t>
             </a:r>
           </a:p>
         </p:txBody>

--- a/aeza_umirhack_defense.pptx
+++ b/aeza_umirhack_defense.pptx
@@ -19189,14 +19189,60 @@
       </p:sp>
       <p:sp>
         <p:nvSpPr>
-          <p:cNvPr id="30" name="TextBox 29"/>
+          <p:cNvPr id="30" name="Rectangle 29"/>
+          <p:cNvSpPr/>
+          <p:nvPr/>
+        </p:nvSpPr>
+        <p:spPr>
+          <a:xfrm>
+            <a:off x="7999780" y="4745736"/>
+            <a:ext cx="3533546" cy="640080"/>
+          </a:xfrm>
+          <a:prstGeom prst="rect">
+            <a:avLst/>
+          </a:prstGeom>
+          <a:solidFill>
+            <a:srgbClr val="FFFFFF"/>
+          </a:solidFill>
+          <a:ln w="11430">
+            <a:solidFill>
+              <a:srgbClr val="E1E1E1"/>
+            </a:solidFill>
+          </a:ln>
+          <a:effectLst/>
+        </p:spPr>
+        <p:style>
+          <a:lnRef idx="1">
+            <a:schemeClr val="accent1"/>
+          </a:lnRef>
+          <a:fillRef idx="3">
+            <a:schemeClr val="accent1"/>
+          </a:fillRef>
+          <a:effectRef idx="2">
+            <a:schemeClr val="accent1"/>
+          </a:effectRef>
+          <a:fontRef idx="minor">
+            <a:schemeClr val="lt1"/>
+          </a:fontRef>
+        </p:style>
+        <p:txBody>
+          <a:bodyPr rtlCol="0" anchor="ctr"/>
+          <a:lstStyle/>
+          <a:p>
+            <a:pPr algn="ctr"/>
+          </a:p>
+        </p:txBody>
+      </p:sp>
+      <p:sp>
+        <p:nvSpPr>
+          <p:cNvPr id="31" name="TextBox 30"/>
           <p:cNvSpPr txBox="1"/>
           <p:nvPr/>
         </p:nvSpPr>
         <p:spPr>
           <a:xfrm>
-            <a:off x="658368" y="5641848"/>
-            <a:ext cx="10874959" cy="364998"/>
+            <a:off x="8146084" y="4837176"/>
+            <a:ext cx="3240938" cy="131635"/>
           </a:xfrm>
           <a:prstGeom prst="rect">
             <a:avLst/>
@@ -19211,27 +19257,119 @@
           <a:p>
             <a:pPr algn="l">
               <a:lnSpc>
-                <a:spcPct val="130000"/>
-              </a:lnSpc>
-              <a:spcBef>
-                <a:spcPts val="0"/>
-              </a:spcBef>
-              <a:spcAft>
-                <a:spcPts val="0"/>
-              </a:spcAft>
-            </a:pPr>
-            <a:r>
-              <a:rPr sz="1050" b="0" i="0">
+                <a:spcPct val="105000"/>
+              </a:lnSpc>
+              <a:spcBef>
+                <a:spcPts val="0"/>
+              </a:spcBef>
+              <a:spcAft>
+                <a:spcPts val="0"/>
+              </a:spcAft>
+            </a:pPr>
+            <a:r>
+              <a:rPr sz="850" b="1" i="0">
                 <a:solidFill>
                   <a:srgbClr val="666666"/>
+                </a:solidFill>
+                <a:latin typeface="Manrope SemiBold"/>
+                <a:cs typeface="Manrope SemiBold"/>
+                <a:ea typeface="Manrope SemiBold"/>
+              </a:rPr>
+              <a:t>Клиентов высокого риска</a:t>
+            </a:r>
+          </a:p>
+        </p:txBody>
+      </p:sp>
+      <p:sp>
+        <p:nvSpPr>
+          <p:cNvPr id="32" name="TextBox 31"/>
+          <p:cNvSpPr txBox="1"/>
+          <p:nvPr/>
+        </p:nvSpPr>
+        <p:spPr>
+          <a:xfrm>
+            <a:off x="8146084" y="5020056"/>
+            <a:ext cx="3240938" cy="310896"/>
+          </a:xfrm>
+          <a:prstGeom prst="rect">
+            <a:avLst/>
+          </a:prstGeom>
+          <a:noFill/>
+        </p:spPr>
+        <p:txBody>
+          <a:bodyPr wrap="square" anchor="t" lIns="0" rIns="0" tIns="0" bIns="0">
+            <a:spAutoFit/>
+          </a:bodyPr>
+          <a:lstStyle/>
+          <a:p>
+            <a:pPr algn="l">
+              <a:lnSpc>
+                <a:spcPct val="116000"/>
+              </a:lnSpc>
+              <a:spcBef>
+                <a:spcPts val="0"/>
+              </a:spcBef>
+              <a:spcAft>
+                <a:spcPts val="0"/>
+              </a:spcAft>
+            </a:pPr>
+            <a:r>
+              <a:rPr sz="1500" b="0">
+                <a:solidFill>
+                  <a:srgbClr val="666666"/>
+                </a:solidFill>
+                <a:latin typeface="Manrope Medium"/>
+                <a:cs typeface="Manrope Medium"/>
+                <a:ea typeface="Manrope Medium"/>
+              </a:rPr>
+              <a:t>3</a:t>
+            </a:r>
+            <a:r>
+              <a:rPr sz="1500" b="0">
+                <a:solidFill>
+                  <a:srgbClr val="C9C9C9"/>
+                </a:solidFill>
+                <a:latin typeface="Manrope Medium"/>
+                <a:cs typeface="Manrope Medium"/>
+                <a:ea typeface="Manrope Medium"/>
+              </a:rPr>
+              <a:t>   →   </a:t>
+            </a:r>
+            <a:r>
+              <a:rPr sz="1500" b="1">
+                <a:solidFill>
+                  <a:srgbClr val="B84A00"/>
                 </a:solidFill>
                 <a:latin typeface="Manrope"/>
                 <a:cs typeface="Manrope"/>
                 <a:ea typeface="Manrope"/>
               </a:rPr>
-              <a:t>Расчёт: сумма весов выросла с 13.0 до 19.0, вклад фактора — с 3.0 до 9.0, поэтому балл service-0030 стал 81,8, а услуг высокого риска — 7 вместо 4. Настройка сохраняется на</a:t>
-            </a:r>
-          </a:p>
+              <a:t>3</a:t>
+            </a:r>
+          </a:p>
+        </p:txBody>
+      </p:sp>
+      <p:sp>
+        <p:nvSpPr>
+          <p:cNvPr id="33" name="TextBox 32"/>
+          <p:cNvSpPr txBox="1"/>
+          <p:nvPr/>
+        </p:nvSpPr>
+        <p:spPr>
+          <a:xfrm>
+            <a:off x="658368" y="5641848"/>
+            <a:ext cx="10874959" cy="538353"/>
+          </a:xfrm>
+          <a:prstGeom prst="rect">
+            <a:avLst/>
+          </a:prstGeom>
+          <a:noFill/>
+        </p:spPr>
+        <p:txBody>
+          <a:bodyPr wrap="square" anchor="t" lIns="0" rIns="0" tIns="0" bIns="0">
+            <a:spAutoFit/>
+          </a:bodyPr>
+          <a:lstStyle/>
           <a:p>
             <a:pPr algn="l">
               <a:lnSpc>
@@ -19253,7 +19391,55 @@
                 <a:cs typeface="Manrope"/>
                 <a:ea typeface="Manrope"/>
               </a:rPr>
-              <a:t>сервере, сводка обновляется сразу, без перезагрузки страницы; кнопка «Значения по умолчанию» возвращает исходные 3,0 и прежние числа.</a:t>
+              <a:t>Расчёт: сумма весов выросла с 13.0 до 19.0, вклад фактора — с 3.0 до 9.0, поэтому балл service-0030 стал 81,8, а услуг высокого риска — 7 вместо 4. Клиентов высокого риска</a:t>
+            </a:r>
+          </a:p>
+          <a:p>
+            <a:pPr algn="l">
+              <a:lnSpc>
+                <a:spcPct val="130000"/>
+              </a:lnSpc>
+              <a:spcBef>
+                <a:spcPts val="0"/>
+              </a:spcBef>
+              <a:spcAft>
+                <a:spcPts val="0"/>
+              </a:spcAft>
+            </a:pPr>
+            <a:r>
+              <a:rPr sz="1050" b="0" i="0">
+                <a:solidFill>
+                  <a:srgbClr val="666666"/>
+                </a:solidFill>
+                <a:latin typeface="Manrope"/>
+                <a:cs typeface="Manrope"/>
+                <a:ea typeface="Manrope"/>
+              </a:rPr>
+              <a:t>осталось 3: категория клиента — это максимум по его услугам, и усиленный вес поднял баллы средних клиентов, но не выше порога 65. Настройка сохраняется на сервере, сводка</a:t>
+            </a:r>
+          </a:p>
+          <a:p>
+            <a:pPr algn="l">
+              <a:lnSpc>
+                <a:spcPct val="130000"/>
+              </a:lnSpc>
+              <a:spcBef>
+                <a:spcPts val="0"/>
+              </a:spcBef>
+              <a:spcAft>
+                <a:spcPts val="0"/>
+              </a:spcAft>
+            </a:pPr>
+            <a:r>
+              <a:rPr sz="1050" b="0" i="0">
+                <a:solidFill>
+                  <a:srgbClr val="666666"/>
+                </a:solidFill>
+                <a:latin typeface="Manrope"/>
+                <a:cs typeface="Manrope"/>
+                <a:ea typeface="Manrope"/>
+              </a:rPr>
+              <a:t>обновляется сразу, без перезагрузки страницы; кнопка «Значения по умолчанию» возвращает исходные 3,0 и прежние числа.</a:t>
             </a:r>
           </a:p>
         </p:txBody>

--- a/aeza_umirhack_defense.pptx
+++ b/aeza_umirhack_defense.pptx
@@ -15,6 +15,7 @@
     <p:sldId id="263" r:id="rId15"/>
     <p:sldId id="264" r:id="rId16"/>
     <p:sldId id="265" r:id="rId17"/>
+    <p:sldId id="266" r:id="rId18"/>
   </p:sldIdLst>
   <p:sldSz cx="12191695" cy="6858000" type="screen4x3"/>
   <p:notesSz cx="6858000" cy="9144000"/>
@@ -779,6 +780,132 @@
           <a:lstStyle/>
           <a:p>
             <a:r>
+              <a:t>Что сказать (30 сек, при технически подкованном заказчике):</a:t>
+            </a:r>
+          </a:p>
+          <a:p>
+            <a:r>
+              <a:t>«Путь данных короткий: снимок Aéza проходит валидацию целиком до записи и</a:t>
+            </a:r>
+          </a:p>
+          <a:p>
+            <a:r>
+              <a:t>применяется атомарно, скоринг живёт в одном модуле, результат уходит в API и в панель.</a:t>
+            </a:r>
+          </a:p>
+          <a:p>
+            <a:r>
+              <a:t>Отдельно про пропуски: отсутствующий сигнал не превращается в ноль и не понижает</a:t>
+            </a:r>
+          </a:p>
+          <a:p>
+            <a:r>
+              <a:t>риск — фактор просто исключается, а веса перенормируются.</a:t>
+            </a:r>
+          </a:p>
+          <a:p>
+            <a:r>
+              <a:t>И про границы: истории уходов нет, календаря списаний нет, динамики нет, нагрузку</a:t>
+            </a:r>
+          </a:p>
+          <a:p>
+            <a:r>
+              <a:t>на больших объёмах мы не измеряли.»</a:t>
+            </a:r>
+          </a:p>
+          <a:p/>
+          <a:p>
+            <a:r>
+              <a:t>Показать: цепочку, затем два блока ограничений. Не читать всё вслух — выбрать 2–3 пункта.</a:t>
+            </a:r>
+          </a:p>
+          <a:p>
+            <a:r>
+              <a:t>Возможный вопрос: «Что будет на 10 000 клиентов?» — Список пагинируется, фильтры и</a:t>
+            </a:r>
+          </a:p>
+          <a:p>
+            <a:r>
+              <a:t>сортировка выполняются в SQL, а не в браузере. Нагрузочного тестирования не проводили —</a:t>
+            </a:r>
+          </a:p>
+          <a:p>
+            <a:r>
+              <a:t>говорим честно.</a:t>
+            </a:r>
+          </a:p>
+          <a:p>
+            <a:r>
+              <a:t>Переход: «Финальный слайд.»</a:t>
+            </a:r>
+          </a:p>
+        </p:txBody>
+      </p:sp>
+      <p:sp>
+        <p:nvSpPr>
+          <p:cNvPr id="4" name="Slide Number Placeholder 3"/>
+          <p:cNvSpPr>
+            <a:spLocks noGrp="1"/>
+          </p:cNvSpPr>
+          <p:nvPr>
+            <p:ph type="sldNum" idx="5" sz="quarter"/>
+          </p:nvPr>
+        </p:nvSpPr>
+        <p:spPr/>
+      </p:sp>
+    </p:spTree>
+  </p:cSld>
+  <p:clrMapOvr>
+    <a:masterClrMapping/>
+  </p:clrMapOvr>
+</p:notes>
+</file>
+
+<file path=ppt/notesSlides/notesSlide11.xml><?xml version="1.0" encoding="utf-8"?>
+<p:notes xmlns:a="http://schemas.openxmlformats.org/drawingml/2006/main" xmlns:p="http://schemas.openxmlformats.org/presentationml/2006/main" xmlns:r="http://schemas.openxmlformats.org/officeDocument/2006/relationships">
+  <p:cSld>
+    <p:spTree>
+      <p:nvGrpSpPr>
+        <p:cNvPr id="1" name=""/>
+        <p:cNvGrpSpPr/>
+        <p:nvPr/>
+      </p:nvGrpSpPr>
+      <p:grpSpPr>
+        <a:xfrm>
+          <a:off x="0" y="0"/>
+          <a:ext cx="0" cy="0"/>
+          <a:chOff x="0" y="0"/>
+          <a:chExt cx="0" cy="0"/>
+        </a:xfrm>
+      </p:grpSpPr>
+      <p:sp>
+        <p:nvSpPr>
+          <p:cNvPr id="2" name="Slide Image Placeholder 1"/>
+          <p:cNvSpPr>
+            <a:spLocks noGrp="1"/>
+          </p:cNvSpPr>
+          <p:nvPr>
+            <p:ph type="sldImg" idx="2"/>
+          </p:nvPr>
+        </p:nvSpPr>
+        <p:spPr/>
+      </p:sp>
+      <p:sp>
+        <p:nvSpPr>
+          <p:cNvPr id="3" name="Notes Placeholder 2"/>
+          <p:cNvSpPr>
+            <a:spLocks noGrp="1"/>
+          </p:cNvSpPr>
+          <p:nvPr>
+            <p:ph type="body" idx="3" sz="quarter"/>
+          </p:nvPr>
+        </p:nvSpPr>
+        <p:spPr/>
+        <p:txBody>
+          <a:bodyPr/>
+          <a:lstStyle/>
+          <a:p>
+            <a:r>
               <a:t>Что сказать (20 сек):</a:t>
             </a:r>
           </a:p>
@@ -910,17 +1037,12 @@
           </a:p>
           <a:p>
             <a:r>
-              <a:t>«По 30 услугам снимка: 12 уже близки к окончанию, 9 не продлятся автоматически,</a:t>
-            </a:r>
-          </a:p>
-          <a:p>
-            <a:r>
-              <a:t>по 6 есть неуспешные продления и 6 услуг приостановлены. Каждый сигнал по</a:t>
-            </a:r>
-          </a:p>
-          <a:p>
-            <a:r>
-              <a:t>отдельности выглядит безобидно. Вместе они описывают клиента, который может уйти.</a:t>
+              <a:t>«По 30 услугам снимка: 12 — близость даты окончания, 9 — автопродление отключено, 6 — услуга приостановлена, 6 — ожидание продления. Каждый сигнал по отдельности</a:t>
+            </a:r>
+          </a:p>
+          <a:p>
+            <a:r>
+              <a:t>выглядит безобидно. Вместе они описывают клиента, который может уйти.</a:t>
             </a:r>
           </a:p>
           <a:p>
@@ -1052,12 +1174,12 @@
           </a:p>
           <a:p>
             <a:r>
-              <a:t>строку user-0010@example.test — верхняя, балл 71,4), справа сводные метрики и блок</a:t>
-            </a:r>
-          </a:p>
-          <a:p>
-            <a:r>
-              <a:t>«Основные причины риска».</a:t>
+              <a:t>строку user-0010@example.test — балл 71,4, наверху списка вместе</a:t>
+            </a:r>
+          </a:p>
+          <a:p>
+            <a:r>
+              <a:t>с #5), справа сводные метрики и блок «Основные причины риска».</a:t>
             </a:r>
           </a:p>
           <a:p>
@@ -1147,32 +1269,37 @@
           </a:p>
           <a:p>
             <a:r>
-              <a:t>«Открываем список клиентов — он уже отсортирован по риску. Верхняя строка:</a:t>
-            </a:r>
-          </a:p>
-          <a:p>
-            <a:r>
-              <a:t>клиент #10, балл 71,4 из 100, категория «высокий». Выбираем его не случайно —</a:t>
-            </a:r>
-          </a:p>
-          <a:p>
-            <a:r>
-              <a:t>это максимум по списку.</a:t>
-            </a:r>
-          </a:p>
-          <a:p>
-            <a:r>
-              <a:t>Что мы про него знаем из данных: три услуги, все пригодны для прогноза,</a:t>
-            </a:r>
-          </a:p>
-          <a:p>
-            <a:r>
-              <a:t>баланс 203,79 €, всего пополнено 4 206,69 €. Выручка под риском — ноль,</a:t>
-            </a:r>
-          </a:p>
-          <a:p>
-            <a:r>
-              <a:t>и это отдельный важный момент, к нему вернёмся на слайде про деньги.</a:t>
+              <a:t>«Открываем список клиентов — он отсортирован по риску по убыванию. Наверху двое</a:t>
+            </a:r>
+          </a:p>
+          <a:p>
+            <a:r>
+              <a:t>с одинаковым максимумом 71,4: клиенты #5 и #10. Берём #10 — у него причину видно</a:t>
+            </a:r>
+          </a:p>
+          <a:p>
+            <a:r>
+              <a:t>на уровне услуги, и это делает разбор конкретным.</a:t>
+            </a:r>
+          </a:p>
+          <a:p>
+            <a:r>
+              <a:t>Что мы про него знаем из данных: три услуги, все пригодны для прогноза, из них две</a:t>
+            </a:r>
+          </a:p>
+          <a:p>
+            <a:r>
+              <a:t>высокого риска; баланс 203,79 €, всего пополнено 4 206,69 €.</a:t>
+            </a:r>
+          </a:p>
+          <a:p>
+            <a:r>
+              <a:t>Выручка под риском — ноль, и это отдельный важный момент, к нему вернёмся на слайде</a:t>
+            </a:r>
+          </a:p>
+          <a:p>
+            <a:r>
+              <a:t>про деньги.</a:t>
             </a:r>
           </a:p>
           <a:p>
@@ -1204,6 +1331,16 @@
           <a:p>
             <a:r>
               <a:t>Среднее замаскировало бы одну критичную услугу.</a:t>
+            </a:r>
+          </a:p>
+          <a:p>
+            <a:r>
+              <a:t>Возможный вопрос: «Почему не #5?» — У него тот же балл 71,4, но услуги иные;</a:t>
+            </a:r>
+          </a:p>
+          <a:p>
+            <a:r>
+              <a:t>для разбора причины #10 нагляднее, и он остаётся вторым в списке.</a:t>
             </a:r>
           </a:p>
           <a:p>
@@ -1419,73 +1556,77 @@
           <a:lstStyle/>
           <a:p>
             <a:r>
-              <a:t>Что сказать (45 сек):</a:t>
-            </a:r>
-          </a:p>
-          <a:p>
-            <a:r>
-              <a:t>«Здесь важно не сложить несопоставимое. У клиента #10 балл высокий — 71,4,</a:t>
-            </a:r>
-          </a:p>
-          <a:p>
-            <a:r>
-              <a:t>но выручка под риском ноль. Почему? Все его сроки уже прошли: просроченные</a:t>
-            </a:r>
-          </a:p>
-          <a:p>
-            <a:r>
-              <a:t>продления лежат в прошлом, а горизонт смотрит вперёд. Услуг с продлением</a:t>
-            </a:r>
-          </a:p>
-          <a:p>
-            <a:r>
-              <a:t>внутри 30 дней у него нет.</a:t>
-            </a:r>
-          </a:p>
-          <a:p>
-            <a:r>
-              <a:t>Баланс 203,79 € и пополнения 4 206,69 € — это не потерянные деньги. Мы держим</a:t>
-            </a:r>
-          </a:p>
-          <a:p>
-            <a:r>
-              <a:t>три величины раздельно: выручка под риском — прогноз, предстоящие продления —</a:t>
-            </a:r>
-          </a:p>
-          <a:p>
-            <a:r>
-              <a:t>сумма без риска, пополнения — справочная история.»</a:t>
-            </a:r>
-          </a:p>
-          <a:p/>
-          <a:p>
-            <a:r>
-              <a:t>Показать: формулу, затем таблицу «Ближайшие продления в горизонте» — 4 строки,</a:t>
-            </a:r>
-          </a:p>
-          <a:p>
-            <a:r>
-              <a:t>и три итоговые метрики внизу.</a:t>
-            </a:r>
-          </a:p>
-          <a:p>
-            <a:r>
-              <a:t>Возможный вопрос: «Почему сумма такая маленькая?» — Потому что горизонт 30 дней,</a:t>
-            </a:r>
-          </a:p>
-          <a:p>
-            <a:r>
-              <a:t>и в него попадают 4 продления из 30 услуг. Это честная оценка по доступным полям,</a:t>
-            </a:r>
-          </a:p>
-          <a:p>
-            <a:r>
-              <a:t>а не бухгалтерский прогноз: календаря будущих списаний в снимке нет.</a:t>
-            </a:r>
-          </a:p>
-          <a:p>
-            <a:r>
-              <a:t>Переход: «Теперь проверим гипотезу: изменим вес фактора.»</a:t>
+              <a:t>Что сказать (40 сек):</a:t>
+            </a:r>
+          </a:p>
+          <a:p>
+            <a:r>
+              <a:t>«Это не витрина «у нас есть AI». Модель не считает балл — она объясняет уже</a:t>
+            </a:r>
+          </a:p>
+          <a:p>
+            <a:r>
+              <a:t>посчитанный результат. В контекст она получает только факты движка и локальную</a:t>
+            </a:r>
+          </a:p>
+          <a:p>
+            <a:r>
+              <a:t>документацию; под ответом видно, на какие данные и документы она ссылалась.</a:t>
+            </a:r>
+          </a:p>
+          <a:p>
+            <a:r>
+              <a:t>И главное: если модель называет число, которого нет в фактах, оно удаляется</a:t>
+            </a:r>
+          </a:p>
+          <a:p>
+            <a:r>
+              <a:t>автоматически. Это второй слой защиты от выдумок.»</a:t>
+            </a:r>
+          </a:p>
+          <a:p>
+            <a:r>
+              <a:t>Показать: реальный ответ справа от скриншота, блок «ИСТОЧНИКИ» под ответом,</a:t>
+            </a:r>
+          </a:p>
+          <a:p>
+            <a:r>
+              <a:t>затем четыре карточки — особенно «Проверка после генерации» и «Аналитика без AI».</a:t>
+            </a:r>
+          </a:p>
+          <a:p>
+            <a:r>
+              <a:t>Возможный вопрос: «Данные уходят наружу?» — Нет. Провайдер только loopback,</a:t>
+            </a:r>
+          </a:p>
+          <a:p>
+            <a:r>
+              <a:t>внешние AI-API не используются; персональные данные не пишутся в логи.</a:t>
+            </a:r>
+          </a:p>
+          <a:p>
+            <a:r>
+              <a:t>Возможный вопрос: «Что если модель недоступна?» — 503 и понятный текст,</a:t>
+            </a:r>
+          </a:p>
+          <a:p>
+            <a:r>
+              <a:t>основная аналитика продолжает работать.</a:t>
+            </a:r>
+          </a:p>
+          <a:p>
+            <a:r>
+              <a:t>Ограничение: ответ занимает ≈40–90 с на CPU — это для интерактивного</a:t>
+            </a:r>
+          </a:p>
+          <a:p>
+            <a:r>
+              <a:t>разбора, а не для потока.</a:t>
+            </a:r>
+          </a:p>
+          <a:p>
+            <a:r>
+              <a:t>Переход: «Теперь деньги — отдельно от риска.»</a:t>
             </a:r>
           </a:p>
         </p:txBody>
@@ -1555,88 +1696,73 @@
           <a:lstStyle/>
           <a:p>
             <a:r>
-              <a:t>Что сказать (60 сек):</a:t>
-            </a:r>
-          </a:p>
-          <a:p>
-            <a:r>
-              <a:t>«Сначала формулируем ожидание: усилим фактор «близость даты окончания» с трёх</a:t>
-            </a:r>
-          </a:p>
-          <a:p>
-            <a:r>
-              <a:t>до девяти. Гипотеза — баллы вырастут, клиентов высокого риска станет больше.</a:t>
-            </a:r>
-          </a:p>
-          <a:p>
-            <a:r>
-              <a:t>Идём в настройки модели, меняем вес, нажимаем «Сохранить».</a:t>
-            </a:r>
-          </a:p>
-          <a:p>
-            <a:r>
-              <a:t>Смотрите, что произошло. Балл клиента #10: 71,4 → 81,8. Клиентов высокого риска:</a:t>
-            </a:r>
-          </a:p>
-          <a:p>
-            <a:r>
-              <a:t>3 → 3, среднего: 3 → 3. Выручка под риском: 5,80 → 7,72 €.</a:t>
-            </a:r>
-          </a:p>
-          <a:p>
-            <a:r>
-              <a:t>Это не декоративный контрол: настройка уходит на сервер, сохраняется в базе и</a:t>
-            </a:r>
-          </a:p>
-          <a:p>
-            <a:r>
-              <a:t>пересчитывает всю аналитику. Кнопка «Значения по умолчанию» возвращает исходные числа.»</a:t>
+              <a:t>Что сказать (45 сек):</a:t>
+            </a:r>
+          </a:p>
+          <a:p>
+            <a:r>
+              <a:t>«Здесь важно не сложить несопоставимое. У клиента #10 балл высокий — 71,4,</a:t>
+            </a:r>
+          </a:p>
+          <a:p>
+            <a:r>
+              <a:t>но выручка под риском ноль. Почему? Все его сроки уже прошли: просроченные</a:t>
+            </a:r>
+          </a:p>
+          <a:p>
+            <a:r>
+              <a:t>продления лежат в прошлом, а горизонт смотрит вперёд. Услуг с продлением</a:t>
+            </a:r>
+          </a:p>
+          <a:p>
+            <a:r>
+              <a:t>внутри 30 дней у него нет.</a:t>
+            </a:r>
+          </a:p>
+          <a:p>
+            <a:r>
+              <a:t>Баланс 203,79 € и пополнения 4 206,69 € — это не потерянные деньги. Мы держим</a:t>
+            </a:r>
+          </a:p>
+          <a:p>
+            <a:r>
+              <a:t>три величины раздельно: выручка под риском — прогноз, предстоящие продления —</a:t>
+            </a:r>
+          </a:p>
+          <a:p>
+            <a:r>
+              <a:t>сумма без риска, пополнения — справочная история.»</a:t>
             </a:r>
           </a:p>
           <a:p/>
           <a:p>
             <a:r>
-              <a:t>Показать: /settings → поле веса expiry_proximity 3 → 9 → «Сохранить». Сводка в шапке</a:t>
-            </a:r>
-          </a:p>
-          <a:p>
-            <a:r>
-              <a:t>обновляется на месте, без перезагрузки: выручка 5,80 → 7,72 €,</a:t>
-            </a:r>
-          </a:p>
-          <a:p>
-            <a:r>
-              <a:t>сумма весов 13.0 → 19.0. Затем открыть карточку клиента #10 (балл 81,8) и вернуться</a:t>
-            </a:r>
-          </a:p>
-          <a:p>
-            <a:r>
-              <a:t>в настройки, нажав «Значения по умолчанию».</a:t>
-            </a:r>
-          </a:p>
-          <a:p>
-            <a:r>
-              <a:t>Возможный вопрос: «Пересчёт автоматический?» — Да. Настройки сохраняются на сервере,</a:t>
-            </a:r>
-          </a:p>
-          <a:p>
-            <a:r>
-              <a:t>бэкенд пересчитывает всю аналитику, и интерфейс подтягивает новые значения сразу,</a:t>
-            </a:r>
-          </a:p>
-          <a:p>
-            <a:r>
-              <a:t>без ручной перезагрузки. Проверено на стенде: страница настроек остаётся открытой,</a:t>
-            </a:r>
-          </a:p>
-          <a:p>
-            <a:r>
-              <a:t>URL не меняется, числа в сводке обновляются сами.</a:t>
-            </a:r>
-          </a:p>
-          <a:p>
-            <a:r>
-              <a:t>Переход: «Что это даёт команде Aéza.»</a:t>
+              <a:t>Показать: формулу, затем таблицу «Ближайшие продления в горизонте» — 4 строки,</a:t>
+            </a:r>
+          </a:p>
+          <a:p>
+            <a:r>
+              <a:t>и три итоговые метрики внизу.</a:t>
+            </a:r>
+          </a:p>
+          <a:p>
+            <a:r>
+              <a:t>Возможный вопрос: «Почему сумма такая маленькая?» — Потому что горизонт 30 дней,</a:t>
+            </a:r>
+          </a:p>
+          <a:p>
+            <a:r>
+              <a:t>и в него попадают 4 продления из 30 услуг. Это честная оценка по доступным полям,</a:t>
+            </a:r>
+          </a:p>
+          <a:p>
+            <a:r>
+              <a:t>а не бухгалтерский прогноз: календаря будущих списаний в снимке нет.</a:t>
+            </a:r>
+          </a:p>
+          <a:p>
+            <a:r>
+              <a:t>Переход: «Теперь проверим гипотезу: изменим вес фактора.»</a:t>
             </a:r>
           </a:p>
         </p:txBody>
@@ -1706,63 +1832,108 @@
           <a:lstStyle/>
           <a:p>
             <a:r>
-              <a:t>Что сказать (35 сек):</a:t>
-            </a:r>
-          </a:p>
-          <a:p>
-            <a:r>
-              <a:t>«Что получает аналитик Aéza: приоритизированный список вместо ручного просмотра,</a:t>
-            </a:r>
-          </a:p>
-          <a:p>
-            <a:r>
-              <a:t>объяснение вместо непрозрачного числа, денежную оценку отдельно от баланса и</a:t>
-            </a:r>
-          </a:p>
-          <a:p>
-            <a:r>
-              <a:t>возможность проверить гипотезу, поменяв веса.</a:t>
-            </a:r>
-          </a:p>
-          <a:p>
-            <a:r>
-              <a:t>И сразу честно про границы: балл — не вероятность в процентах, точность мы не</a:t>
-            </a:r>
-          </a:p>
-          <a:p>
-            <a:r>
-              <a:t>измеряли, потому что в снимке нет истории уходов. Мы не обещаем снижение оттока —</a:t>
-            </a:r>
-          </a:p>
-          <a:p>
-            <a:r>
-              <a:t>мы даём инструмент для решения.»</a:t>
+              <a:t>Что сказать (60 сек):</a:t>
+            </a:r>
+          </a:p>
+          <a:p>
+            <a:r>
+              <a:t>«Сначала формулируем ожидание: усилим фактор «близость даты окончания» с трёх</a:t>
+            </a:r>
+          </a:p>
+          <a:p>
+            <a:r>
+              <a:t>до девяти. Гипотеза — баллы вырастут, услуг высокого риска станет больше.</a:t>
+            </a:r>
+          </a:p>
+          <a:p>
+            <a:r>
+              <a:t>Идём в настройки модели, меняем вес, нажимаем «Сохранить».</a:t>
+            </a:r>
+          </a:p>
+          <a:p>
+            <a:r>
+              <a:t>Смотрите, что произошло. Балл клиента #10: 71,4 → 81,8. Услуг высокого риска:</a:t>
+            </a:r>
+          </a:p>
+          <a:p>
+            <a:r>
+              <a:t>4 → 7, а выручка под риском: 5,80 → 7,72 €.</a:t>
+            </a:r>
+          </a:p>
+          <a:p>
+            <a:r>
+              <a:t>Это не декоративный контрол: настройка уходит на сервер, сохраняется в базе и</a:t>
+            </a:r>
+          </a:p>
+          <a:p>
+            <a:r>
+              <a:t>пересчитывает всю аналитику. Кнопка «Значения по умолчанию» возвращает исходные числа.»</a:t>
             </a:r>
           </a:p>
           <a:p/>
           <a:p>
             <a:r>
-              <a:t>Показать: четыре карточки, затем нижний блок ограничений — его проговариваем</a:t>
-            </a:r>
-          </a:p>
-          <a:p>
-            <a:r>
-              <a:t>обязательно, это сильный ход перед бизнес-заказчиком.</a:t>
-            </a:r>
-          </a:p>
-          <a:p>
-            <a:r>
-              <a:t>Возможный вопрос: «Какая точность модели?» — Не измерена и не заявлена. В данных</a:t>
-            </a:r>
-          </a:p>
-          <a:p>
-            <a:r>
-              <a:t>нет исходов оттока, обучать и валидировать классификатор не на чем.</a:t>
-            </a:r>
-          </a:p>
-          <a:p>
-            <a:r>
-              <a:t>Переход: «Коротко про то, как это устроено внутри.»</a:t>
+              <a:t>Показать: /settings → поле веса expiry_proximity 3 → 9 → «Сохранить». Сводка в шапке</a:t>
+            </a:r>
+          </a:p>
+          <a:p>
+            <a:r>
+              <a:t>обновляется на месте, без перезагрузки: выручка 5,80 → 7,72 €,</a:t>
+            </a:r>
+          </a:p>
+          <a:p>
+            <a:r>
+              <a:t>услуг высокого риска 4 → 7, сумма весов 13.0 → 19.0. Затем открыть карточку клиента #10 (балл 81,8) и вернуться</a:t>
+            </a:r>
+          </a:p>
+          <a:p>
+            <a:r>
+              <a:t>в настройки, нажав «Значения по умолчанию».</a:t>
+            </a:r>
+          </a:p>
+          <a:p>
+            <a:r>
+              <a:t>Возможный вопрос: «Почему клиентов высокого риска не стало больше?» — Категория</a:t>
+            </a:r>
+          </a:p>
+          <a:p>
+            <a:r>
+              <a:t>клиента берёт максимум по его услугам: у трёх клиентов уже был высокий балл, у</a:t>
+            </a:r>
+          </a:p>
+          <a:p>
+            <a:r>
+              <a:t>остальных даже усиленный вес не поднял его выше порога. Поэтому честный сигнал</a:t>
+            </a:r>
+          </a:p>
+          <a:p>
+            <a:r>
+              <a:t>изменения — число услуг высокого риска и выручка под риском.</a:t>
+            </a:r>
+          </a:p>
+          <a:p>
+            <a:r>
+              <a:t>Возможный вопрос: «Пересчёт автоматический?» — Да. Настройки сохраняются на сервере,</a:t>
+            </a:r>
+          </a:p>
+          <a:p>
+            <a:r>
+              <a:t>бэкенд пересчитывает всю аналитику, и интерфейс подтягивает новые значения сразу,</a:t>
+            </a:r>
+          </a:p>
+          <a:p>
+            <a:r>
+              <a:t>без ручной перезагрузки. Проверено на стенде: страница настроек остаётся открытой,</a:t>
+            </a:r>
+          </a:p>
+          <a:p>
+            <a:r>
+              <a:t>URL не меняется, числа в сводке обновляются сами.</a:t>
+            </a:r>
+          </a:p>
+          <a:p>
+            <a:r>
+              <a:t>Переход: «Что это даёт команде Aéza.»</a:t>
             </a:r>
           </a:p>
         </p:txBody>
@@ -1832,63 +2003,63 @@
           <a:lstStyle/>
           <a:p>
             <a:r>
-              <a:t>Что сказать (30 сек, при технически подкованном заказчике):</a:t>
-            </a:r>
-          </a:p>
-          <a:p>
-            <a:r>
-              <a:t>«Путь данных короткий: снимок Aéza проходит валидацию целиком до записи и</a:t>
-            </a:r>
-          </a:p>
-          <a:p>
-            <a:r>
-              <a:t>применяется атомарно, скоринг живёт в одном модуле, результат уходит в API и в панель.</a:t>
-            </a:r>
-          </a:p>
-          <a:p>
-            <a:r>
-              <a:t>Отдельно про пропуски: отсутствующий сигнал не превращается в ноль и не понижает</a:t>
-            </a:r>
-          </a:p>
-          <a:p>
-            <a:r>
-              <a:t>риск — фактор просто исключается, а веса перенормируются.</a:t>
-            </a:r>
-          </a:p>
-          <a:p>
-            <a:r>
-              <a:t>И про границы: истории уходов нет, календаря списаний нет, динамики нет, нагрузку</a:t>
-            </a:r>
-          </a:p>
-          <a:p>
-            <a:r>
-              <a:t>на больших объёмах мы не измеряли.»</a:t>
+              <a:t>Что сказать (35 сек):</a:t>
+            </a:r>
+          </a:p>
+          <a:p>
+            <a:r>
+              <a:t>«Что получает аналитик Aéza: приоритизированный список вместо ручного просмотра,</a:t>
+            </a:r>
+          </a:p>
+          <a:p>
+            <a:r>
+              <a:t>объяснение вместо непрозрачного числа, денежную оценку отдельно от баланса и</a:t>
+            </a:r>
+          </a:p>
+          <a:p>
+            <a:r>
+              <a:t>возможность проверить гипотезу, поменяв веса.</a:t>
+            </a:r>
+          </a:p>
+          <a:p>
+            <a:r>
+              <a:t>И сразу честно про границы: балл — не вероятность в процентах, точность мы не</a:t>
+            </a:r>
+          </a:p>
+          <a:p>
+            <a:r>
+              <a:t>измеряли, потому что в снимке нет истории уходов. Мы не обещаем снижение оттока —</a:t>
+            </a:r>
+          </a:p>
+          <a:p>
+            <a:r>
+              <a:t>мы даём инструмент для решения.»</a:t>
             </a:r>
           </a:p>
           <a:p/>
           <a:p>
             <a:r>
-              <a:t>Показать: цепочку, затем два блока ограничений. Не читать всё вслух — выбрать 2–3 пункта.</a:t>
-            </a:r>
-          </a:p>
-          <a:p>
-            <a:r>
-              <a:t>Возможный вопрос: «Что будет на 10 000 клиентов?» — Список пагинируется, фильтры и</a:t>
-            </a:r>
-          </a:p>
-          <a:p>
-            <a:r>
-              <a:t>сортировка выполняются в SQL, а не в браузере. Нагрузочного тестирования не проводили —</a:t>
-            </a:r>
-          </a:p>
-          <a:p>
-            <a:r>
-              <a:t>говорим честно.</a:t>
-            </a:r>
-          </a:p>
-          <a:p>
-            <a:r>
-              <a:t>Переход: «Финальный слайд.»</a:t>
+              <a:t>Показать: четыре карточки, затем нижний блок ограничений — его проговариваем</a:t>
+            </a:r>
+          </a:p>
+          <a:p>
+            <a:r>
+              <a:t>обязательно, это сильный ход перед бизнес-заказчиком.</a:t>
+            </a:r>
+          </a:p>
+          <a:p>
+            <a:r>
+              <a:t>Возможный вопрос: «Какая точность модели?» — Не измерена и не заявлена. В данных</a:t>
+            </a:r>
+          </a:p>
+          <a:p>
+            <a:r>
+              <a:t>нет исходов оттока, обучать и валидировать классификатор не на чем.</a:t>
+            </a:r>
+          </a:p>
+          <a:p>
+            <a:r>
+              <a:t>Переход: «Коротко про то, как это устроено внутри.»</a:t>
             </a:r>
           </a:p>
         </p:txBody>
@@ -5804,6 +5975,1741 @@
             <a:avLst/>
           </a:prstGeom>
           <a:solidFill>
+            <a:srgbClr val="F4F4F4"/>
+          </a:solidFill>
+          <a:ln>
+            <a:noFill/>
+          </a:ln>
+          <a:effectLst/>
+        </p:spPr>
+        <p:style>
+          <a:lnRef idx="1">
+            <a:schemeClr val="accent1"/>
+          </a:lnRef>
+          <a:fillRef idx="3">
+            <a:schemeClr val="accent1"/>
+          </a:fillRef>
+          <a:effectRef idx="2">
+            <a:schemeClr val="accent1"/>
+          </a:effectRef>
+          <a:fontRef idx="minor">
+            <a:schemeClr val="lt1"/>
+          </a:fontRef>
+        </p:style>
+        <p:txBody>
+          <a:bodyPr rtlCol="0" anchor="ctr"/>
+          <a:lstStyle/>
+          <a:p>
+            <a:pPr algn="ctr"/>
+          </a:p>
+        </p:txBody>
+      </p:sp>
+      <p:sp>
+        <p:nvSpPr>
+          <p:cNvPr id="3" name="TextBox 2"/>
+          <p:cNvSpPr txBox="1"/>
+          <p:nvPr/>
+        </p:nvSpPr>
+        <p:spPr>
+          <a:xfrm>
+            <a:off x="658368" y="548640"/>
+            <a:ext cx="10874959" cy="201168"/>
+          </a:xfrm>
+          <a:prstGeom prst="rect">
+            <a:avLst/>
+          </a:prstGeom>
+          <a:noFill/>
+        </p:spPr>
+        <p:txBody>
+          <a:bodyPr wrap="square" anchor="t" lIns="0" rIns="0" tIns="0" bIns="0">
+            <a:spAutoFit/>
+          </a:bodyPr>
+          <a:lstStyle/>
+          <a:p>
+            <a:pPr algn="l">
+              <a:lnSpc>
+                <a:spcPct val="116000"/>
+              </a:lnSpc>
+              <a:spcBef>
+                <a:spcPts val="0"/>
+              </a:spcBef>
+              <a:spcAft>
+                <a:spcPts val="0"/>
+              </a:spcAft>
+            </a:pPr>
+            <a:r>
+              <a:rPr sz="1050" b="1" i="0" spc="140">
+                <a:solidFill>
+                  <a:srgbClr val="B84A00"/>
+                </a:solidFill>
+                <a:latin typeface="Manrope"/>
+                <a:cs typeface="Manrope"/>
+                <a:ea typeface="Manrope"/>
+              </a:rPr>
+              <a:t>АРХИТЕКТУРА ДОВЕРИЯ И ОГРАНИЧЕНИЯ</a:t>
+            </a:r>
+          </a:p>
+        </p:txBody>
+      </p:sp>
+      <p:sp>
+        <p:nvSpPr>
+          <p:cNvPr id="4" name="TextBox 3"/>
+          <p:cNvSpPr txBox="1"/>
+          <p:nvPr/>
+        </p:nvSpPr>
+        <p:spPr>
+          <a:xfrm>
+            <a:off x="658368" y="795528"/>
+            <a:ext cx="10874959" cy="429768"/>
+          </a:xfrm>
+          <a:prstGeom prst="rect">
+            <a:avLst/>
+          </a:prstGeom>
+          <a:noFill/>
+        </p:spPr>
+        <p:txBody>
+          <a:bodyPr wrap="square" anchor="t" lIns="0" rIns="0" tIns="0" bIns="0">
+            <a:spAutoFit/>
+          </a:bodyPr>
+          <a:lstStyle/>
+          <a:p>
+            <a:pPr algn="l">
+              <a:lnSpc>
+                <a:spcPct val="108000"/>
+              </a:lnSpc>
+              <a:spcBef>
+                <a:spcPts val="0"/>
+              </a:spcBef>
+              <a:spcAft>
+                <a:spcPts val="0"/>
+              </a:spcAft>
+            </a:pPr>
+            <a:r>
+              <a:rPr sz="3000" b="1" i="0">
+                <a:solidFill>
+                  <a:srgbClr val="1A1A1A"/>
+                </a:solidFill>
+                <a:latin typeface="Manrope"/>
+                <a:cs typeface="Manrope"/>
+                <a:ea typeface="Manrope"/>
+              </a:rPr>
+              <a:t>Данные → проверка → расчёт → интерфейс</a:t>
+            </a:r>
+          </a:p>
+        </p:txBody>
+      </p:sp>
+      <p:sp>
+        <p:nvSpPr>
+          <p:cNvPr id="5" name="TextBox 4"/>
+          <p:cNvSpPr txBox="1"/>
+          <p:nvPr/>
+        </p:nvSpPr>
+        <p:spPr>
+          <a:xfrm>
+            <a:off x="658368" y="1344168"/>
+            <a:ext cx="10058400" cy="237744"/>
+          </a:xfrm>
+          <a:prstGeom prst="rect">
+            <a:avLst/>
+          </a:prstGeom>
+          <a:noFill/>
+        </p:spPr>
+        <p:txBody>
+          <a:bodyPr wrap="square" anchor="t" lIns="0" rIns="0" tIns="0" bIns="0">
+            <a:spAutoFit/>
+          </a:bodyPr>
+          <a:lstStyle/>
+          <a:p>
+            <a:pPr algn="l">
+              <a:lnSpc>
+                <a:spcPct val="128000"/>
+              </a:lnSpc>
+              <a:spcBef>
+                <a:spcPts val="0"/>
+              </a:spcBef>
+              <a:spcAft>
+                <a:spcPts val="0"/>
+              </a:spcAft>
+            </a:pPr>
+            <a:r>
+              <a:rPr sz="1350" b="0" i="0">
+                <a:solidFill>
+                  <a:srgbClr val="666666"/>
+                </a:solidFill>
+                <a:latin typeface="Manrope"/>
+                <a:cs typeface="Manrope"/>
+                <a:ea typeface="Manrope"/>
+              </a:rPr>
+              <a:t>Короткий путь данных. Никаких скрытых шагов и никакой подмены отсутствующих сигналов нулём.</a:t>
+            </a:r>
+          </a:p>
+        </p:txBody>
+      </p:sp>
+      <p:sp>
+        <p:nvSpPr>
+          <p:cNvPr id="6" name="Rectangle 5"/>
+          <p:cNvSpPr/>
+          <p:nvPr/>
+        </p:nvSpPr>
+        <p:spPr>
+          <a:xfrm>
+            <a:off x="658368" y="1856232"/>
+            <a:ext cx="2512999" cy="1188720"/>
+          </a:xfrm>
+          <a:prstGeom prst="rect">
+            <a:avLst/>
+          </a:prstGeom>
+          <a:solidFill>
+            <a:srgbClr val="FFFFFF"/>
+          </a:solidFill>
+          <a:ln w="11430">
+            <a:solidFill>
+              <a:srgbClr val="E1E1E1"/>
+            </a:solidFill>
+          </a:ln>
+          <a:effectLst/>
+        </p:spPr>
+        <p:style>
+          <a:lnRef idx="1">
+            <a:schemeClr val="accent1"/>
+          </a:lnRef>
+          <a:fillRef idx="3">
+            <a:schemeClr val="accent1"/>
+          </a:fillRef>
+          <a:effectRef idx="2">
+            <a:schemeClr val="accent1"/>
+          </a:effectRef>
+          <a:fontRef idx="minor">
+            <a:schemeClr val="lt1"/>
+          </a:fontRef>
+        </p:style>
+        <p:txBody>
+          <a:bodyPr rtlCol="0" anchor="ctr"/>
+          <a:lstStyle/>
+          <a:p>
+            <a:pPr algn="ctr"/>
+          </a:p>
+        </p:txBody>
+      </p:sp>
+      <p:sp>
+        <p:nvSpPr>
+          <p:cNvPr id="7" name="Rectangle 6"/>
+          <p:cNvSpPr/>
+          <p:nvPr/>
+        </p:nvSpPr>
+        <p:spPr>
+          <a:xfrm>
+            <a:off x="658368" y="1856232"/>
+            <a:ext cx="2512999" cy="41148"/>
+          </a:xfrm>
+          <a:prstGeom prst="rect">
+            <a:avLst/>
+          </a:prstGeom>
+          <a:solidFill>
+            <a:srgbClr val="1F1F1F"/>
+          </a:solidFill>
+          <a:ln>
+            <a:noFill/>
+          </a:ln>
+          <a:effectLst/>
+        </p:spPr>
+        <p:style>
+          <a:lnRef idx="1">
+            <a:schemeClr val="accent1"/>
+          </a:lnRef>
+          <a:fillRef idx="3">
+            <a:schemeClr val="accent1"/>
+          </a:fillRef>
+          <a:effectRef idx="2">
+            <a:schemeClr val="accent1"/>
+          </a:effectRef>
+          <a:fontRef idx="minor">
+            <a:schemeClr val="lt1"/>
+          </a:fontRef>
+        </p:style>
+        <p:txBody>
+          <a:bodyPr rtlCol="0" anchor="ctr"/>
+          <a:lstStyle/>
+          <a:p>
+            <a:pPr algn="ctr"/>
+          </a:p>
+        </p:txBody>
+      </p:sp>
+      <p:sp>
+        <p:nvSpPr>
+          <p:cNvPr id="8" name="TextBox 7"/>
+          <p:cNvSpPr txBox="1"/>
+          <p:nvPr/>
+        </p:nvSpPr>
+        <p:spPr>
+          <a:xfrm>
+            <a:off x="822960" y="2039112"/>
+            <a:ext cx="2183815" cy="185928"/>
+          </a:xfrm>
+          <a:prstGeom prst="rect">
+            <a:avLst/>
+          </a:prstGeom>
+          <a:noFill/>
+        </p:spPr>
+        <p:txBody>
+          <a:bodyPr wrap="square" anchor="t" lIns="0" rIns="0" tIns="0" bIns="0">
+            <a:spAutoFit/>
+          </a:bodyPr>
+          <a:lstStyle/>
+          <a:p>
+            <a:pPr algn="l">
+              <a:lnSpc>
+                <a:spcPct val="110000"/>
+              </a:lnSpc>
+              <a:spcBef>
+                <a:spcPts val="0"/>
+              </a:spcBef>
+              <a:spcAft>
+                <a:spcPts val="0"/>
+              </a:spcAft>
+            </a:pPr>
+            <a:r>
+              <a:rPr sz="1200" b="1" i="0">
+                <a:solidFill>
+                  <a:srgbClr val="1A1A1A"/>
+                </a:solidFill>
+                <a:latin typeface="Manrope SemiBold"/>
+                <a:cs typeface="Manrope SemiBold"/>
+                <a:ea typeface="Manrope SemiBold"/>
+              </a:rPr>
+              <a:t>Снимок Aéza</a:t>
+            </a:r>
+          </a:p>
+        </p:txBody>
+      </p:sp>
+      <p:sp>
+        <p:nvSpPr>
+          <p:cNvPr id="9" name="TextBox 8"/>
+          <p:cNvSpPr txBox="1"/>
+          <p:nvPr/>
+        </p:nvSpPr>
+        <p:spPr>
+          <a:xfrm>
+            <a:off x="822960" y="2270760"/>
+            <a:ext cx="2183815" cy="331978"/>
+          </a:xfrm>
+          <a:prstGeom prst="rect">
+            <a:avLst/>
+          </a:prstGeom>
+          <a:noFill/>
+        </p:spPr>
+        <p:txBody>
+          <a:bodyPr wrap="square" anchor="t" lIns="0" rIns="0" tIns="0" bIns="0">
+            <a:spAutoFit/>
+          </a:bodyPr>
+          <a:lstStyle/>
+          <a:p>
+            <a:pPr algn="l">
+              <a:lnSpc>
+                <a:spcPct val="130000"/>
+              </a:lnSpc>
+              <a:spcBef>
+                <a:spcPts val="0"/>
+              </a:spcBef>
+              <a:spcAft>
+                <a:spcPts val="0"/>
+              </a:spcAft>
+            </a:pPr>
+            <a:r>
+              <a:rPr sz="950" b="0" i="0">
+                <a:solidFill>
+                  <a:srgbClr val="666666"/>
+                </a:solidFill>
+                <a:latin typeface="Manrope"/>
+                <a:cs typeface="Manrope"/>
+                <a:ea typeface="Manrope"/>
+              </a:rPr>
+              <a:t>data.json: 10 аккаунтов, 30 услуг,</a:t>
+            </a:r>
+          </a:p>
+          <a:p>
+            <a:pPr algn="l">
+              <a:lnSpc>
+                <a:spcPct val="130000"/>
+              </a:lnSpc>
+              <a:spcBef>
+                <a:spcPts val="0"/>
+              </a:spcBef>
+              <a:spcAft>
+                <a:spcPts val="0"/>
+              </a:spcAft>
+            </a:pPr>
+            <a:r>
+              <a:rPr sz="950" b="0" i="0">
+                <a:solidFill>
+                  <a:srgbClr val="666666"/>
+                </a:solidFill>
+                <a:latin typeface="Manrope"/>
+                <a:cs typeface="Manrope"/>
+                <a:ea typeface="Manrope"/>
+              </a:rPr>
+              <a:t>100 транзакций</a:t>
+            </a:r>
+          </a:p>
+        </p:txBody>
+      </p:sp>
+      <p:sp>
+        <p:nvSpPr>
+          <p:cNvPr id="10" name="Right Arrow 9"/>
+          <p:cNvSpPr/>
+          <p:nvPr/>
+        </p:nvSpPr>
+        <p:spPr>
+          <a:xfrm>
+            <a:off x="3221659" y="2340864"/>
+            <a:ext cx="173736" cy="219456"/>
+          </a:xfrm>
+          <a:prstGeom prst="rightArrow">
+            <a:avLst/>
+          </a:prstGeom>
+          <a:solidFill>
+            <a:srgbClr val="E1E1E1"/>
+          </a:solidFill>
+          <a:ln>
+            <a:noFill/>
+          </a:ln>
+          <a:effectLst/>
+        </p:spPr>
+        <p:style>
+          <a:lnRef idx="1">
+            <a:schemeClr val="accent1"/>
+          </a:lnRef>
+          <a:fillRef idx="3">
+            <a:schemeClr val="accent1"/>
+          </a:fillRef>
+          <a:effectRef idx="2">
+            <a:schemeClr val="accent1"/>
+          </a:effectRef>
+          <a:fontRef idx="minor">
+            <a:schemeClr val="lt1"/>
+          </a:fontRef>
+        </p:style>
+        <p:txBody>
+          <a:bodyPr rtlCol="0" anchor="ctr"/>
+          <a:lstStyle/>
+          <a:p>
+            <a:pPr algn="ctr"/>
+          </a:p>
+        </p:txBody>
+      </p:sp>
+      <p:sp>
+        <p:nvSpPr>
+          <p:cNvPr id="11" name="Rectangle 10"/>
+          <p:cNvSpPr/>
+          <p:nvPr/>
+        </p:nvSpPr>
+        <p:spPr>
+          <a:xfrm>
+            <a:off x="3445687" y="1856232"/>
+            <a:ext cx="2512999" cy="1188720"/>
+          </a:xfrm>
+          <a:prstGeom prst="rect">
+            <a:avLst/>
+          </a:prstGeom>
+          <a:solidFill>
+            <a:srgbClr val="FFFFFF"/>
+          </a:solidFill>
+          <a:ln w="11430">
+            <a:solidFill>
+              <a:srgbClr val="E1E1E1"/>
+            </a:solidFill>
+          </a:ln>
+          <a:effectLst/>
+        </p:spPr>
+        <p:style>
+          <a:lnRef idx="1">
+            <a:schemeClr val="accent1"/>
+          </a:lnRef>
+          <a:fillRef idx="3">
+            <a:schemeClr val="accent1"/>
+          </a:fillRef>
+          <a:effectRef idx="2">
+            <a:schemeClr val="accent1"/>
+          </a:effectRef>
+          <a:fontRef idx="minor">
+            <a:schemeClr val="lt1"/>
+          </a:fontRef>
+        </p:style>
+        <p:txBody>
+          <a:bodyPr rtlCol="0" anchor="ctr"/>
+          <a:lstStyle/>
+          <a:p>
+            <a:pPr algn="ctr"/>
+          </a:p>
+        </p:txBody>
+      </p:sp>
+      <p:sp>
+        <p:nvSpPr>
+          <p:cNvPr id="12" name="Rectangle 11"/>
+          <p:cNvSpPr/>
+          <p:nvPr/>
+        </p:nvSpPr>
+        <p:spPr>
+          <a:xfrm>
+            <a:off x="3445687" y="1856232"/>
+            <a:ext cx="2512999" cy="41148"/>
+          </a:xfrm>
+          <a:prstGeom prst="rect">
+            <a:avLst/>
+          </a:prstGeom>
+          <a:solidFill>
+            <a:srgbClr val="1F1F1F"/>
+          </a:solidFill>
+          <a:ln>
+            <a:noFill/>
+          </a:ln>
+          <a:effectLst/>
+        </p:spPr>
+        <p:style>
+          <a:lnRef idx="1">
+            <a:schemeClr val="accent1"/>
+          </a:lnRef>
+          <a:fillRef idx="3">
+            <a:schemeClr val="accent1"/>
+          </a:fillRef>
+          <a:effectRef idx="2">
+            <a:schemeClr val="accent1"/>
+          </a:effectRef>
+          <a:fontRef idx="minor">
+            <a:schemeClr val="lt1"/>
+          </a:fontRef>
+        </p:style>
+        <p:txBody>
+          <a:bodyPr rtlCol="0" anchor="ctr"/>
+          <a:lstStyle/>
+          <a:p>
+            <a:pPr algn="ctr"/>
+          </a:p>
+        </p:txBody>
+      </p:sp>
+      <p:sp>
+        <p:nvSpPr>
+          <p:cNvPr id="13" name="TextBox 12"/>
+          <p:cNvSpPr txBox="1"/>
+          <p:nvPr/>
+        </p:nvSpPr>
+        <p:spPr>
+          <a:xfrm>
+            <a:off x="3610279" y="2039112"/>
+            <a:ext cx="2183815" cy="185928"/>
+          </a:xfrm>
+          <a:prstGeom prst="rect">
+            <a:avLst/>
+          </a:prstGeom>
+          <a:noFill/>
+        </p:spPr>
+        <p:txBody>
+          <a:bodyPr wrap="square" anchor="t" lIns="0" rIns="0" tIns="0" bIns="0">
+            <a:spAutoFit/>
+          </a:bodyPr>
+          <a:lstStyle/>
+          <a:p>
+            <a:pPr algn="l">
+              <a:lnSpc>
+                <a:spcPct val="110000"/>
+              </a:lnSpc>
+              <a:spcBef>
+                <a:spcPts val="0"/>
+              </a:spcBef>
+              <a:spcAft>
+                <a:spcPts val="0"/>
+              </a:spcAft>
+            </a:pPr>
+            <a:r>
+              <a:rPr sz="1200" b="1" i="0">
+                <a:solidFill>
+                  <a:srgbClr val="1A1A1A"/>
+                </a:solidFill>
+                <a:latin typeface="Manrope SemiBold"/>
+                <a:cs typeface="Manrope SemiBold"/>
+                <a:ea typeface="Manrope SemiBold"/>
+              </a:rPr>
+              <a:t>Импорт с проверкой</a:t>
+            </a:r>
+          </a:p>
+        </p:txBody>
+      </p:sp>
+      <p:sp>
+        <p:nvSpPr>
+          <p:cNvPr id="14" name="TextBox 13"/>
+          <p:cNvSpPr txBox="1"/>
+          <p:nvPr/>
+        </p:nvSpPr>
+        <p:spPr>
+          <a:xfrm>
+            <a:off x="3610279" y="2270760"/>
+            <a:ext cx="2183815" cy="331978"/>
+          </a:xfrm>
+          <a:prstGeom prst="rect">
+            <a:avLst/>
+          </a:prstGeom>
+          <a:noFill/>
+        </p:spPr>
+        <p:txBody>
+          <a:bodyPr wrap="square" anchor="t" lIns="0" rIns="0" tIns="0" bIns="0">
+            <a:spAutoFit/>
+          </a:bodyPr>
+          <a:lstStyle/>
+          <a:p>
+            <a:pPr algn="l">
+              <a:lnSpc>
+                <a:spcPct val="130000"/>
+              </a:lnSpc>
+              <a:spcBef>
+                <a:spcPts val="0"/>
+              </a:spcBef>
+              <a:spcAft>
+                <a:spcPts val="0"/>
+              </a:spcAft>
+            </a:pPr>
+            <a:r>
+              <a:rPr sz="950" b="0" i="0">
+                <a:solidFill>
+                  <a:srgbClr val="666666"/>
+                </a:solidFill>
+                <a:latin typeface="Manrope"/>
+                <a:cs typeface="Manrope"/>
+                <a:ea typeface="Manrope"/>
+              </a:rPr>
+              <a:t>валидация целиком до записи,</a:t>
+            </a:r>
+          </a:p>
+          <a:p>
+            <a:pPr algn="l">
+              <a:lnSpc>
+                <a:spcPct val="130000"/>
+              </a:lnSpc>
+              <a:spcBef>
+                <a:spcPts val="0"/>
+              </a:spcBef>
+              <a:spcAft>
+                <a:spcPts val="0"/>
+              </a:spcAft>
+            </a:pPr>
+            <a:r>
+              <a:rPr sz="950" b="0" i="0">
+                <a:solidFill>
+                  <a:srgbClr val="666666"/>
+                </a:solidFill>
+                <a:latin typeface="Manrope"/>
+                <a:cs typeface="Manrope"/>
+                <a:ea typeface="Manrope"/>
+              </a:rPr>
+              <a:t>применение атомарно</a:t>
+            </a:r>
+          </a:p>
+        </p:txBody>
+      </p:sp>
+      <p:sp>
+        <p:nvSpPr>
+          <p:cNvPr id="15" name="Right Arrow 14"/>
+          <p:cNvSpPr/>
+          <p:nvPr/>
+        </p:nvSpPr>
+        <p:spPr>
+          <a:xfrm>
+            <a:off x="6008978" y="2340864"/>
+            <a:ext cx="173736" cy="219456"/>
+          </a:xfrm>
+          <a:prstGeom prst="rightArrow">
+            <a:avLst/>
+          </a:prstGeom>
+          <a:solidFill>
+            <a:srgbClr val="E1E1E1"/>
+          </a:solidFill>
+          <a:ln>
+            <a:noFill/>
+          </a:ln>
+          <a:effectLst/>
+        </p:spPr>
+        <p:style>
+          <a:lnRef idx="1">
+            <a:schemeClr val="accent1"/>
+          </a:lnRef>
+          <a:fillRef idx="3">
+            <a:schemeClr val="accent1"/>
+          </a:fillRef>
+          <a:effectRef idx="2">
+            <a:schemeClr val="accent1"/>
+          </a:effectRef>
+          <a:fontRef idx="minor">
+            <a:schemeClr val="lt1"/>
+          </a:fontRef>
+        </p:style>
+        <p:txBody>
+          <a:bodyPr rtlCol="0" anchor="ctr"/>
+          <a:lstStyle/>
+          <a:p>
+            <a:pPr algn="ctr"/>
+          </a:p>
+        </p:txBody>
+      </p:sp>
+      <p:sp>
+        <p:nvSpPr>
+          <p:cNvPr id="16" name="Rectangle 15"/>
+          <p:cNvSpPr/>
+          <p:nvPr/>
+        </p:nvSpPr>
+        <p:spPr>
+          <a:xfrm>
+            <a:off x="6233006" y="1856232"/>
+            <a:ext cx="2512999" cy="1188720"/>
+          </a:xfrm>
+          <a:prstGeom prst="rect">
+            <a:avLst/>
+          </a:prstGeom>
+          <a:solidFill>
+            <a:srgbClr val="FFFFFF"/>
+          </a:solidFill>
+          <a:ln w="11430">
+            <a:solidFill>
+              <a:srgbClr val="E1E1E1"/>
+            </a:solidFill>
+          </a:ln>
+          <a:effectLst/>
+        </p:spPr>
+        <p:style>
+          <a:lnRef idx="1">
+            <a:schemeClr val="accent1"/>
+          </a:lnRef>
+          <a:fillRef idx="3">
+            <a:schemeClr val="accent1"/>
+          </a:fillRef>
+          <a:effectRef idx="2">
+            <a:schemeClr val="accent1"/>
+          </a:effectRef>
+          <a:fontRef idx="minor">
+            <a:schemeClr val="lt1"/>
+          </a:fontRef>
+        </p:style>
+        <p:txBody>
+          <a:bodyPr rtlCol="0" anchor="ctr"/>
+          <a:lstStyle/>
+          <a:p>
+            <a:pPr algn="ctr"/>
+          </a:p>
+        </p:txBody>
+      </p:sp>
+      <p:sp>
+        <p:nvSpPr>
+          <p:cNvPr id="17" name="Rectangle 16"/>
+          <p:cNvSpPr/>
+          <p:nvPr/>
+        </p:nvSpPr>
+        <p:spPr>
+          <a:xfrm>
+            <a:off x="6233006" y="1856232"/>
+            <a:ext cx="2512999" cy="41148"/>
+          </a:xfrm>
+          <a:prstGeom prst="rect">
+            <a:avLst/>
+          </a:prstGeom>
+          <a:solidFill>
+            <a:srgbClr val="1F1F1F"/>
+          </a:solidFill>
+          <a:ln>
+            <a:noFill/>
+          </a:ln>
+          <a:effectLst/>
+        </p:spPr>
+        <p:style>
+          <a:lnRef idx="1">
+            <a:schemeClr val="accent1"/>
+          </a:lnRef>
+          <a:fillRef idx="3">
+            <a:schemeClr val="accent1"/>
+          </a:fillRef>
+          <a:effectRef idx="2">
+            <a:schemeClr val="accent1"/>
+          </a:effectRef>
+          <a:fontRef idx="minor">
+            <a:schemeClr val="lt1"/>
+          </a:fontRef>
+        </p:style>
+        <p:txBody>
+          <a:bodyPr rtlCol="0" anchor="ctr"/>
+          <a:lstStyle/>
+          <a:p>
+            <a:pPr algn="ctr"/>
+          </a:p>
+        </p:txBody>
+      </p:sp>
+      <p:sp>
+        <p:nvSpPr>
+          <p:cNvPr id="18" name="TextBox 17"/>
+          <p:cNvSpPr txBox="1"/>
+          <p:nvPr/>
+        </p:nvSpPr>
+        <p:spPr>
+          <a:xfrm>
+            <a:off x="6397598" y="2039112"/>
+            <a:ext cx="2183815" cy="185928"/>
+          </a:xfrm>
+          <a:prstGeom prst="rect">
+            <a:avLst/>
+          </a:prstGeom>
+          <a:noFill/>
+        </p:spPr>
+        <p:txBody>
+          <a:bodyPr wrap="square" anchor="t" lIns="0" rIns="0" tIns="0" bIns="0">
+            <a:spAutoFit/>
+          </a:bodyPr>
+          <a:lstStyle/>
+          <a:p>
+            <a:pPr algn="l">
+              <a:lnSpc>
+                <a:spcPct val="110000"/>
+              </a:lnSpc>
+              <a:spcBef>
+                <a:spcPts val="0"/>
+              </a:spcBef>
+              <a:spcAft>
+                <a:spcPts val="0"/>
+              </a:spcAft>
+            </a:pPr>
+            <a:r>
+              <a:rPr sz="1200" b="1" i="0">
+                <a:solidFill>
+                  <a:srgbClr val="1A1A1A"/>
+                </a:solidFill>
+                <a:latin typeface="Manrope SemiBold"/>
+                <a:cs typeface="Manrope SemiBold"/>
+                <a:ea typeface="Manrope SemiBold"/>
+              </a:rPr>
+              <a:t>Скоринг</a:t>
+            </a:r>
+          </a:p>
+        </p:txBody>
+      </p:sp>
+      <p:sp>
+        <p:nvSpPr>
+          <p:cNvPr id="19" name="TextBox 18"/>
+          <p:cNvSpPr txBox="1"/>
+          <p:nvPr/>
+        </p:nvSpPr>
+        <p:spPr>
+          <a:xfrm>
+            <a:off x="6397598" y="2270760"/>
+            <a:ext cx="2183815" cy="331978"/>
+          </a:xfrm>
+          <a:prstGeom prst="rect">
+            <a:avLst/>
+          </a:prstGeom>
+          <a:noFill/>
+        </p:spPr>
+        <p:txBody>
+          <a:bodyPr wrap="square" anchor="t" lIns="0" rIns="0" tIns="0" bIns="0">
+            <a:spAutoFit/>
+          </a:bodyPr>
+          <a:lstStyle/>
+          <a:p>
+            <a:pPr algn="l">
+              <a:lnSpc>
+                <a:spcPct val="130000"/>
+              </a:lnSpc>
+              <a:spcBef>
+                <a:spcPts val="0"/>
+              </a:spcBef>
+              <a:spcAft>
+                <a:spcPts val="0"/>
+              </a:spcAft>
+            </a:pPr>
+            <a:r>
+              <a:rPr sz="950" b="0" i="0">
+                <a:solidFill>
+                  <a:srgbClr val="666666"/>
+                </a:solidFill>
+                <a:latin typeface="Manrope"/>
+                <a:cs typeface="Manrope"/>
+                <a:ea typeface="Manrope"/>
+              </a:rPr>
+              <a:t>один модуль: вес × фактор, сумма</a:t>
+            </a:r>
+          </a:p>
+          <a:p>
+            <a:pPr algn="l">
+              <a:lnSpc>
+                <a:spcPct val="130000"/>
+              </a:lnSpc>
+              <a:spcBef>
+                <a:spcPts val="0"/>
+              </a:spcBef>
+              <a:spcAft>
+                <a:spcPts val="0"/>
+              </a:spcAft>
+            </a:pPr>
+            <a:r>
+              <a:rPr sz="950" b="0" i="0">
+                <a:solidFill>
+                  <a:srgbClr val="666666"/>
+                </a:solidFill>
+                <a:latin typeface="Manrope"/>
+                <a:cs typeface="Manrope"/>
+                <a:ea typeface="Manrope"/>
+              </a:rPr>
+              <a:t>весов в знаменателе</a:t>
+            </a:r>
+          </a:p>
+        </p:txBody>
+      </p:sp>
+      <p:sp>
+        <p:nvSpPr>
+          <p:cNvPr id="20" name="Right Arrow 19"/>
+          <p:cNvSpPr/>
+          <p:nvPr/>
+        </p:nvSpPr>
+        <p:spPr>
+          <a:xfrm>
+            <a:off x="8796297" y="2340864"/>
+            <a:ext cx="173736" cy="219456"/>
+          </a:xfrm>
+          <a:prstGeom prst="rightArrow">
+            <a:avLst/>
+          </a:prstGeom>
+          <a:solidFill>
+            <a:srgbClr val="E1E1E1"/>
+          </a:solidFill>
+          <a:ln>
+            <a:noFill/>
+          </a:ln>
+          <a:effectLst/>
+        </p:spPr>
+        <p:style>
+          <a:lnRef idx="1">
+            <a:schemeClr val="accent1"/>
+          </a:lnRef>
+          <a:fillRef idx="3">
+            <a:schemeClr val="accent1"/>
+          </a:fillRef>
+          <a:effectRef idx="2">
+            <a:schemeClr val="accent1"/>
+          </a:effectRef>
+          <a:fontRef idx="minor">
+            <a:schemeClr val="lt1"/>
+          </a:fontRef>
+        </p:style>
+        <p:txBody>
+          <a:bodyPr rtlCol="0" anchor="ctr"/>
+          <a:lstStyle/>
+          <a:p>
+            <a:pPr algn="ctr"/>
+          </a:p>
+        </p:txBody>
+      </p:sp>
+      <p:sp>
+        <p:nvSpPr>
+          <p:cNvPr id="21" name="Rectangle 20"/>
+          <p:cNvSpPr/>
+          <p:nvPr/>
+        </p:nvSpPr>
+        <p:spPr>
+          <a:xfrm>
+            <a:off x="9020325" y="1856232"/>
+            <a:ext cx="2512999" cy="1188720"/>
+          </a:xfrm>
+          <a:prstGeom prst="rect">
+            <a:avLst/>
+          </a:prstGeom>
+          <a:solidFill>
+            <a:srgbClr val="FFFFFF"/>
+          </a:solidFill>
+          <a:ln w="11430">
+            <a:solidFill>
+              <a:srgbClr val="E1E1E1"/>
+            </a:solidFill>
+          </a:ln>
+          <a:effectLst/>
+        </p:spPr>
+        <p:style>
+          <a:lnRef idx="1">
+            <a:schemeClr val="accent1"/>
+          </a:lnRef>
+          <a:fillRef idx="3">
+            <a:schemeClr val="accent1"/>
+          </a:fillRef>
+          <a:effectRef idx="2">
+            <a:schemeClr val="accent1"/>
+          </a:effectRef>
+          <a:fontRef idx="minor">
+            <a:schemeClr val="lt1"/>
+          </a:fontRef>
+        </p:style>
+        <p:txBody>
+          <a:bodyPr rtlCol="0" anchor="ctr"/>
+          <a:lstStyle/>
+          <a:p>
+            <a:pPr algn="ctr"/>
+          </a:p>
+        </p:txBody>
+      </p:sp>
+      <p:sp>
+        <p:nvSpPr>
+          <p:cNvPr id="22" name="Rectangle 21"/>
+          <p:cNvSpPr/>
+          <p:nvPr/>
+        </p:nvSpPr>
+        <p:spPr>
+          <a:xfrm>
+            <a:off x="9020325" y="1856232"/>
+            <a:ext cx="2512999" cy="41148"/>
+          </a:xfrm>
+          <a:prstGeom prst="rect">
+            <a:avLst/>
+          </a:prstGeom>
+          <a:solidFill>
+            <a:srgbClr val="B84A00"/>
+          </a:solidFill>
+          <a:ln>
+            <a:noFill/>
+          </a:ln>
+          <a:effectLst/>
+        </p:spPr>
+        <p:style>
+          <a:lnRef idx="1">
+            <a:schemeClr val="accent1"/>
+          </a:lnRef>
+          <a:fillRef idx="3">
+            <a:schemeClr val="accent1"/>
+          </a:fillRef>
+          <a:effectRef idx="2">
+            <a:schemeClr val="accent1"/>
+          </a:effectRef>
+          <a:fontRef idx="minor">
+            <a:schemeClr val="lt1"/>
+          </a:fontRef>
+        </p:style>
+        <p:txBody>
+          <a:bodyPr rtlCol="0" anchor="ctr"/>
+          <a:lstStyle/>
+          <a:p>
+            <a:pPr algn="ctr"/>
+          </a:p>
+        </p:txBody>
+      </p:sp>
+      <p:sp>
+        <p:nvSpPr>
+          <p:cNvPr id="23" name="TextBox 22"/>
+          <p:cNvSpPr txBox="1"/>
+          <p:nvPr/>
+        </p:nvSpPr>
+        <p:spPr>
+          <a:xfrm>
+            <a:off x="9184917" y="2039112"/>
+            <a:ext cx="2183815" cy="185928"/>
+          </a:xfrm>
+          <a:prstGeom prst="rect">
+            <a:avLst/>
+          </a:prstGeom>
+          <a:noFill/>
+        </p:spPr>
+        <p:txBody>
+          <a:bodyPr wrap="square" anchor="t" lIns="0" rIns="0" tIns="0" bIns="0">
+            <a:spAutoFit/>
+          </a:bodyPr>
+          <a:lstStyle/>
+          <a:p>
+            <a:pPr algn="l">
+              <a:lnSpc>
+                <a:spcPct val="110000"/>
+              </a:lnSpc>
+              <a:spcBef>
+                <a:spcPts val="0"/>
+              </a:spcBef>
+              <a:spcAft>
+                <a:spcPts val="0"/>
+              </a:spcAft>
+            </a:pPr>
+            <a:r>
+              <a:rPr sz="1200" b="1" i="0">
+                <a:solidFill>
+                  <a:srgbClr val="1A1A1A"/>
+                </a:solidFill>
+                <a:latin typeface="Manrope SemiBold"/>
+                <a:cs typeface="Manrope SemiBold"/>
+                <a:ea typeface="Manrope SemiBold"/>
+              </a:rPr>
+              <a:t>API и интерфейс</a:t>
+            </a:r>
+          </a:p>
+        </p:txBody>
+      </p:sp>
+      <p:sp>
+        <p:nvSpPr>
+          <p:cNvPr id="24" name="TextBox 23"/>
+          <p:cNvSpPr txBox="1"/>
+          <p:nvPr/>
+        </p:nvSpPr>
+        <p:spPr>
+          <a:xfrm>
+            <a:off x="9184917" y="2270760"/>
+            <a:ext cx="2183815" cy="331978"/>
+          </a:xfrm>
+          <a:prstGeom prst="rect">
+            <a:avLst/>
+          </a:prstGeom>
+          <a:noFill/>
+        </p:spPr>
+        <p:txBody>
+          <a:bodyPr wrap="square" anchor="t" lIns="0" rIns="0" tIns="0" bIns="0">
+            <a:spAutoFit/>
+          </a:bodyPr>
+          <a:lstStyle/>
+          <a:p>
+            <a:pPr algn="l">
+              <a:lnSpc>
+                <a:spcPct val="130000"/>
+              </a:lnSpc>
+              <a:spcBef>
+                <a:spcPts val="0"/>
+              </a:spcBef>
+              <a:spcAft>
+                <a:spcPts val="0"/>
+              </a:spcAft>
+            </a:pPr>
+            <a:r>
+              <a:rPr sz="950" b="0" i="0">
+                <a:solidFill>
+                  <a:srgbClr val="666666"/>
+                </a:solidFill>
+                <a:latin typeface="Manrope"/>
+                <a:cs typeface="Manrope"/>
+                <a:ea typeface="Manrope"/>
+              </a:rPr>
+              <a:t>FastAPI + Postgres, панель</a:t>
+            </a:r>
+          </a:p>
+          <a:p>
+            <a:pPr algn="l">
+              <a:lnSpc>
+                <a:spcPct val="130000"/>
+              </a:lnSpc>
+              <a:spcBef>
+                <a:spcPts val="0"/>
+              </a:spcBef>
+              <a:spcAft>
+                <a:spcPts val="0"/>
+              </a:spcAft>
+            </a:pPr>
+            <a:r>
+              <a:rPr sz="950" b="0" i="0">
+                <a:solidFill>
+                  <a:srgbClr val="666666"/>
+                </a:solidFill>
+                <a:latin typeface="Manrope"/>
+                <a:cs typeface="Manrope"/>
+                <a:ea typeface="Manrope"/>
+              </a:rPr>
+              <a:t>аналитика на React</a:t>
+            </a:r>
+          </a:p>
+        </p:txBody>
+      </p:sp>
+      <p:sp>
+        <p:nvSpPr>
+          <p:cNvPr id="25" name="Rectangle 24"/>
+          <p:cNvSpPr/>
+          <p:nvPr/>
+        </p:nvSpPr>
+        <p:spPr>
+          <a:xfrm>
+            <a:off x="658368" y="3319272"/>
+            <a:ext cx="5274355" cy="2734056"/>
+          </a:xfrm>
+          <a:prstGeom prst="rect">
+            <a:avLst/>
+          </a:prstGeom>
+          <a:solidFill>
+            <a:srgbClr val="FFFFFF"/>
+          </a:solidFill>
+          <a:ln w="11430">
+            <a:solidFill>
+              <a:srgbClr val="E1E1E1"/>
+            </a:solidFill>
+          </a:ln>
+          <a:effectLst/>
+        </p:spPr>
+        <p:style>
+          <a:lnRef idx="1">
+            <a:schemeClr val="accent1"/>
+          </a:lnRef>
+          <a:fillRef idx="3">
+            <a:schemeClr val="accent1"/>
+          </a:fillRef>
+          <a:effectRef idx="2">
+            <a:schemeClr val="accent1"/>
+          </a:effectRef>
+          <a:fontRef idx="minor">
+            <a:schemeClr val="lt1"/>
+          </a:fontRef>
+        </p:style>
+        <p:txBody>
+          <a:bodyPr rtlCol="0" anchor="ctr"/>
+          <a:lstStyle/>
+          <a:p>
+            <a:pPr algn="ctr"/>
+          </a:p>
+        </p:txBody>
+      </p:sp>
+      <p:sp>
+        <p:nvSpPr>
+          <p:cNvPr id="26" name="TextBox 25"/>
+          <p:cNvSpPr txBox="1"/>
+          <p:nvPr/>
+        </p:nvSpPr>
+        <p:spPr>
+          <a:xfrm>
+            <a:off x="877824" y="3483864"/>
+            <a:ext cx="4835443" cy="192913"/>
+          </a:xfrm>
+          <a:prstGeom prst="rect">
+            <a:avLst/>
+          </a:prstGeom>
+          <a:noFill/>
+        </p:spPr>
+        <p:txBody>
+          <a:bodyPr wrap="square" anchor="t" lIns="0" rIns="0" tIns="0" bIns="0">
+            <a:spAutoFit/>
+          </a:bodyPr>
+          <a:lstStyle/>
+          <a:p>
+            <a:pPr algn="l">
+              <a:lnSpc>
+                <a:spcPct val="110000"/>
+              </a:lnSpc>
+              <a:spcBef>
+                <a:spcPts val="0"/>
+              </a:spcBef>
+              <a:spcAft>
+                <a:spcPts val="0"/>
+              </a:spcAft>
+            </a:pPr>
+            <a:r>
+              <a:rPr sz="1250" b="1" i="0">
+                <a:solidFill>
+                  <a:srgbClr val="1A1A1A"/>
+                </a:solidFill>
+                <a:latin typeface="Manrope SemiBold"/>
+                <a:cs typeface="Manrope SemiBold"/>
+                <a:ea typeface="Manrope SemiBold"/>
+              </a:rPr>
+              <a:t>Как обрабатываются пропуски</a:t>
+            </a:r>
+          </a:p>
+        </p:txBody>
+      </p:sp>
+      <p:sp>
+        <p:nvSpPr>
+          <p:cNvPr id="27" name="TextBox 26"/>
+          <p:cNvSpPr txBox="1"/>
+          <p:nvPr/>
+        </p:nvSpPr>
+        <p:spPr>
+          <a:xfrm>
+            <a:off x="877824" y="3731641"/>
+            <a:ext cx="4835443" cy="1379728"/>
+          </a:xfrm>
+          <a:prstGeom prst="rect">
+            <a:avLst/>
+          </a:prstGeom>
+          <a:noFill/>
+        </p:spPr>
+        <p:txBody>
+          <a:bodyPr wrap="square" anchor="t" lIns="0" rIns="0" tIns="0" bIns="0">
+            <a:spAutoFit/>
+          </a:bodyPr>
+          <a:lstStyle/>
+          <a:p>
+            <a:pPr algn="l">
+              <a:lnSpc>
+                <a:spcPct val="134000"/>
+              </a:lnSpc>
+              <a:spcBef>
+                <a:spcPts val="0"/>
+              </a:spcBef>
+              <a:spcAft>
+                <a:spcPts val="0"/>
+              </a:spcAft>
+            </a:pPr>
+            <a:r>
+              <a:rPr sz="1000" b="0" i="0">
+                <a:solidFill>
+                  <a:srgbClr val="666666"/>
+                </a:solidFill>
+                <a:latin typeface="Manrope"/>
+                <a:cs typeface="Manrope"/>
+                <a:ea typeface="Manrope"/>
+              </a:rPr>
+              <a:t>• Неизвестное ≠ ноль: фактор без данных исключается из числителя и</a:t>
+            </a:r>
+          </a:p>
+          <a:p>
+            <a:pPr algn="l">
+              <a:lnSpc>
+                <a:spcPct val="134000"/>
+              </a:lnSpc>
+              <a:spcBef>
+                <a:spcPts val="0"/>
+              </a:spcBef>
+              <a:spcAft>
+                <a:spcPts val="0"/>
+              </a:spcAft>
+            </a:pPr>
+            <a:r>
+              <a:rPr sz="1000" b="0" i="0">
+                <a:solidFill>
+                  <a:srgbClr val="666666"/>
+                </a:solidFill>
+                <a:latin typeface="Manrope"/>
+                <a:cs typeface="Manrope"/>
+                <a:ea typeface="Manrope"/>
+              </a:rPr>
+              <a:t>знаменателя, веса перенормируются.</a:t>
+            </a:r>
+          </a:p>
+          <a:p>
+            <a:pPr algn="l">
+              <a:lnSpc>
+                <a:spcPct val="134000"/>
+              </a:lnSpc>
+              <a:spcBef>
+                <a:spcPts val="0"/>
+              </a:spcBef>
+              <a:spcAft>
+                <a:spcPts val="0"/>
+              </a:spcAft>
+            </a:pPr>
+            <a:r>
+              <a:rPr sz="1000" b="0" i="0">
+                <a:solidFill>
+                  <a:srgbClr val="666666"/>
+                </a:solidFill>
+                <a:latin typeface="Manrope"/>
+                <a:cs typeface="Manrope"/>
+                <a:ea typeface="Manrope"/>
+              </a:rPr>
+              <a:t>• Услуги deleted и blocked — состоявшееся событие, а не прогноз: балл им не</a:t>
+            </a:r>
+          </a:p>
+          <a:p>
+            <a:pPr algn="l">
+              <a:lnSpc>
+                <a:spcPct val="134000"/>
+              </a:lnSpc>
+              <a:spcBef>
+                <a:spcPts val="0"/>
+              </a:spcBef>
+              <a:spcAft>
+                <a:spcPts val="0"/>
+              </a:spcAft>
+            </a:pPr>
+            <a:r>
+              <a:rPr sz="1000" b="0" i="0">
+                <a:solidFill>
+                  <a:srgbClr val="666666"/>
+                </a:solidFill>
+                <a:latin typeface="Manrope"/>
+                <a:cs typeface="Manrope"/>
+                <a:ea typeface="Manrope"/>
+              </a:rPr>
+              <a:t>присваивается.</a:t>
+            </a:r>
+          </a:p>
+          <a:p>
+            <a:pPr algn="l">
+              <a:lnSpc>
+                <a:spcPct val="134000"/>
+              </a:lnSpc>
+              <a:spcBef>
+                <a:spcPts val="0"/>
+              </a:spcBef>
+              <a:spcAft>
+                <a:spcPts val="0"/>
+              </a:spcAft>
+            </a:pPr>
+            <a:r>
+              <a:rPr sz="1000" b="0" i="0">
+                <a:solidFill>
+                  <a:srgbClr val="666666"/>
+                </a:solidFill>
+                <a:latin typeface="Manrope"/>
+                <a:cs typeface="Manrope"/>
+                <a:ea typeface="Manrope"/>
+              </a:rPr>
+              <a:t>• Цена не входит в формулу риска: price — это экспозиция, а не вероятность</a:t>
+            </a:r>
+          </a:p>
+          <a:p>
+            <a:pPr algn="l">
+              <a:lnSpc>
+                <a:spcPct val="134000"/>
+              </a:lnSpc>
+              <a:spcBef>
+                <a:spcPts val="0"/>
+              </a:spcBef>
+              <a:spcAft>
+                <a:spcPts val="0"/>
+              </a:spcAft>
+            </a:pPr>
+            <a:r>
+              <a:rPr sz="1000" b="0" i="0">
+                <a:solidFill>
+                  <a:srgbClr val="666666"/>
+                </a:solidFill>
+                <a:latin typeface="Manrope"/>
+                <a:cs typeface="Manrope"/>
+                <a:ea typeface="Manrope"/>
+              </a:rPr>
+              <a:t>ухода.</a:t>
+            </a:r>
+          </a:p>
+          <a:p>
+            <a:pPr algn="l">
+              <a:lnSpc>
+                <a:spcPct val="134000"/>
+              </a:lnSpc>
+              <a:spcBef>
+                <a:spcPts val="0"/>
+              </a:spcBef>
+              <a:spcAft>
+                <a:spcPts val="0"/>
+              </a:spcAft>
+            </a:pPr>
+            <a:r>
+              <a:rPr sz="1000" b="0" i="0">
+                <a:solidFill>
+                  <a:srgbClr val="666666"/>
+                </a:solidFill>
+                <a:latin typeface="Manrope"/>
+                <a:cs typeface="Manrope"/>
+                <a:ea typeface="Manrope"/>
+              </a:rPr>
+              <a:t>• Опорный момент зафиксирован (2026-10-19 15:00 UTC), поэтому числа</a:t>
+            </a:r>
+          </a:p>
+          <a:p>
+            <a:pPr algn="l">
+              <a:lnSpc>
+                <a:spcPct val="134000"/>
+              </a:lnSpc>
+              <a:spcBef>
+                <a:spcPts val="0"/>
+              </a:spcBef>
+              <a:spcAft>
+                <a:spcPts val="0"/>
+              </a:spcAft>
+            </a:pPr>
+            <a:r>
+              <a:rPr sz="1000" b="0" i="0">
+                <a:solidFill>
+                  <a:srgbClr val="666666"/>
+                </a:solidFill>
+                <a:latin typeface="Manrope"/>
+                <a:cs typeface="Manrope"/>
+                <a:ea typeface="Manrope"/>
+              </a:rPr>
+              <a:t>воспроизводимы.</a:t>
+            </a:r>
+          </a:p>
+        </p:txBody>
+      </p:sp>
+      <p:sp>
+        <p:nvSpPr>
+          <p:cNvPr id="28" name="Rectangle 27"/>
+          <p:cNvSpPr/>
+          <p:nvPr/>
+        </p:nvSpPr>
+        <p:spPr>
+          <a:xfrm>
+            <a:off x="6207043" y="3319272"/>
+            <a:ext cx="5326284" cy="2734056"/>
+          </a:xfrm>
+          <a:prstGeom prst="rect">
+            <a:avLst/>
+          </a:prstGeom>
+          <a:solidFill>
+            <a:srgbClr val="FFFFFF"/>
+          </a:solidFill>
+          <a:ln w="11430">
+            <a:solidFill>
+              <a:srgbClr val="E1E1E1"/>
+            </a:solidFill>
+          </a:ln>
+          <a:effectLst/>
+        </p:spPr>
+        <p:style>
+          <a:lnRef idx="1">
+            <a:schemeClr val="accent1"/>
+          </a:lnRef>
+          <a:fillRef idx="3">
+            <a:schemeClr val="accent1"/>
+          </a:fillRef>
+          <a:effectRef idx="2">
+            <a:schemeClr val="accent1"/>
+          </a:effectRef>
+          <a:fontRef idx="minor">
+            <a:schemeClr val="lt1"/>
+          </a:fontRef>
+        </p:style>
+        <p:txBody>
+          <a:bodyPr rtlCol="0" anchor="ctr"/>
+          <a:lstStyle/>
+          <a:p>
+            <a:pPr algn="ctr"/>
+          </a:p>
+        </p:txBody>
+      </p:sp>
+      <p:sp>
+        <p:nvSpPr>
+          <p:cNvPr id="29" name="TextBox 28"/>
+          <p:cNvSpPr txBox="1"/>
+          <p:nvPr/>
+        </p:nvSpPr>
+        <p:spPr>
+          <a:xfrm>
+            <a:off x="6426499" y="3483864"/>
+            <a:ext cx="4887372" cy="192913"/>
+          </a:xfrm>
+          <a:prstGeom prst="rect">
+            <a:avLst/>
+          </a:prstGeom>
+          <a:noFill/>
+        </p:spPr>
+        <p:txBody>
+          <a:bodyPr wrap="square" anchor="t" lIns="0" rIns="0" tIns="0" bIns="0">
+            <a:spAutoFit/>
+          </a:bodyPr>
+          <a:lstStyle/>
+          <a:p>
+            <a:pPr algn="l">
+              <a:lnSpc>
+                <a:spcPct val="110000"/>
+              </a:lnSpc>
+              <a:spcBef>
+                <a:spcPts val="0"/>
+              </a:spcBef>
+              <a:spcAft>
+                <a:spcPts val="0"/>
+              </a:spcAft>
+            </a:pPr>
+            <a:r>
+              <a:rPr sz="1250" b="1" i="0">
+                <a:solidFill>
+                  <a:srgbClr val="1A1A1A"/>
+                </a:solidFill>
+                <a:latin typeface="Manrope SemiBold"/>
+                <a:cs typeface="Manrope SemiBold"/>
+                <a:ea typeface="Manrope SemiBold"/>
+              </a:rPr>
+              <a:t>Ограничения, которые важно знать</a:t>
+            </a:r>
+          </a:p>
+        </p:txBody>
+      </p:sp>
+      <p:sp>
+        <p:nvSpPr>
+          <p:cNvPr id="30" name="TextBox 29"/>
+          <p:cNvSpPr txBox="1"/>
+          <p:nvPr/>
+        </p:nvSpPr>
+        <p:spPr>
+          <a:xfrm>
+            <a:off x="6426499" y="3731641"/>
+            <a:ext cx="4887372" cy="1039368"/>
+          </a:xfrm>
+          <a:prstGeom prst="rect">
+            <a:avLst/>
+          </a:prstGeom>
+          <a:noFill/>
+        </p:spPr>
+        <p:txBody>
+          <a:bodyPr wrap="square" anchor="t" lIns="0" rIns="0" tIns="0" bIns="0">
+            <a:spAutoFit/>
+          </a:bodyPr>
+          <a:lstStyle/>
+          <a:p>
+            <a:pPr algn="l">
+              <a:lnSpc>
+                <a:spcPct val="134000"/>
+              </a:lnSpc>
+              <a:spcBef>
+                <a:spcPts val="0"/>
+              </a:spcBef>
+              <a:spcAft>
+                <a:spcPts val="0"/>
+              </a:spcAft>
+            </a:pPr>
+            <a:r>
+              <a:rPr sz="1000" b="0" i="0">
+                <a:solidFill>
+                  <a:srgbClr val="666666"/>
+                </a:solidFill>
+                <a:latin typeface="Manrope"/>
+                <a:cs typeface="Manrope"/>
+                <a:ea typeface="Manrope"/>
+              </a:rPr>
+              <a:t>• Нет истории оттока — отсюда модель на правилах и отсутствие метрик</a:t>
+            </a:r>
+          </a:p>
+          <a:p>
+            <a:pPr algn="l">
+              <a:lnSpc>
+                <a:spcPct val="134000"/>
+              </a:lnSpc>
+              <a:spcBef>
+                <a:spcPts val="0"/>
+              </a:spcBef>
+              <a:spcAft>
+                <a:spcPts val="0"/>
+              </a:spcAft>
+            </a:pPr>
+            <a:r>
+              <a:rPr sz="1000" b="0" i="0">
+                <a:solidFill>
+                  <a:srgbClr val="666666"/>
+                </a:solidFill>
+                <a:latin typeface="Manrope"/>
+                <a:cs typeface="Manrope"/>
+                <a:ea typeface="Manrope"/>
+              </a:rPr>
+              <a:t>точности.</a:t>
+            </a:r>
+          </a:p>
+          <a:p>
+            <a:pPr algn="l">
+              <a:lnSpc>
+                <a:spcPct val="134000"/>
+              </a:lnSpc>
+              <a:spcBef>
+                <a:spcPts val="0"/>
+              </a:spcBef>
+              <a:spcAft>
+                <a:spcPts val="0"/>
+              </a:spcAft>
+            </a:pPr>
+            <a:r>
+              <a:rPr sz="1000" b="0" i="0">
+                <a:solidFill>
+                  <a:srgbClr val="666666"/>
+                </a:solidFill>
+                <a:latin typeface="Manrope"/>
+                <a:cs typeface="Manrope"/>
+                <a:ea typeface="Manrope"/>
+              </a:rPr>
+              <a:t>• Нет календаря будущих списаний: даты продлений выведены из expiresAt и</a:t>
+            </a:r>
+          </a:p>
+          <a:p>
+            <a:pPr algn="l">
+              <a:lnSpc>
+                <a:spcPct val="134000"/>
+              </a:lnSpc>
+              <a:spcBef>
+                <a:spcPts val="0"/>
+              </a:spcBef>
+              <a:spcAft>
+                <a:spcPts val="0"/>
+              </a:spcAft>
+            </a:pPr>
+            <a:r>
+              <a:rPr sz="1000" b="0" i="0">
+                <a:solidFill>
+                  <a:srgbClr val="666666"/>
+                </a:solidFill>
+                <a:latin typeface="Manrope"/>
+                <a:cs typeface="Manrope"/>
+                <a:ea typeface="Manrope"/>
+              </a:rPr>
+              <a:t>paymentTerm.</a:t>
+            </a:r>
+          </a:p>
+          <a:p>
+            <a:pPr algn="l">
+              <a:lnSpc>
+                <a:spcPct val="134000"/>
+              </a:lnSpc>
+              <a:spcBef>
+                <a:spcPts val="0"/>
+              </a:spcBef>
+              <a:spcAft>
+                <a:spcPts val="0"/>
+              </a:spcAft>
+            </a:pPr>
+            <a:r>
+              <a:rPr sz="1000" b="0" i="0">
+                <a:solidFill>
+                  <a:srgbClr val="666666"/>
+                </a:solidFill>
+                <a:latin typeface="Manrope"/>
+                <a:cs typeface="Manrope"/>
+                <a:ea typeface="Manrope"/>
+              </a:rPr>
+              <a:t>• Нет динамики: снимок описывает один момент, график тренда не строится.</a:t>
+            </a:r>
+          </a:p>
+          <a:p>
+            <a:pPr algn="l">
+              <a:lnSpc>
+                <a:spcPct val="134000"/>
+              </a:lnSpc>
+              <a:spcBef>
+                <a:spcPts val="0"/>
+              </a:spcBef>
+              <a:spcAft>
+                <a:spcPts val="0"/>
+              </a:spcAft>
+            </a:pPr>
+            <a:r>
+              <a:rPr sz="1000" b="0" i="0">
+                <a:solidFill>
+                  <a:srgbClr val="666666"/>
+                </a:solidFill>
+                <a:latin typeface="Manrope"/>
+                <a:cs typeface="Manrope"/>
+                <a:ea typeface="Manrope"/>
+              </a:rPr>
+              <a:t>• Нагрузка не измерялась: набор кейса — 10 / 30 / 100 записей.</a:t>
+            </a:r>
+          </a:p>
+        </p:txBody>
+      </p:sp>
+    </p:spTree>
+  </p:cSld>
+  <p:clrMapOvr>
+    <a:masterClrMapping/>
+  </p:clrMapOvr>
+</p:sld>
+</file>
+
+<file path=ppt/slides/slide11.xml><?xml version="1.0" encoding="utf-8"?>
+<p:sld xmlns:a="http://schemas.openxmlformats.org/drawingml/2006/main" xmlns:p="http://schemas.openxmlformats.org/presentationml/2006/main" xmlns:r="http://schemas.openxmlformats.org/officeDocument/2006/relationships">
+  <p:cSld>
+    <p:spTree>
+      <p:nvGrpSpPr>
+        <p:cNvPr id="1" name=""/>
+        <p:cNvGrpSpPr/>
+        <p:nvPr/>
+      </p:nvGrpSpPr>
+      <p:grpSpPr/>
+      <p:sp>
+        <p:nvSpPr>
+          <p:cNvPr id="2" name="Rectangle 1"/>
+          <p:cNvSpPr/>
+          <p:nvPr/>
+        </p:nvSpPr>
+        <p:spPr>
+          <a:xfrm>
+            <a:off x="0" y="0"/>
+            <a:ext cx="12191695" cy="6858000"/>
+          </a:xfrm>
+          <a:prstGeom prst="rect">
+            <a:avLst/>
+          </a:prstGeom>
+          <a:solidFill>
             <a:srgbClr val="131313"/>
           </a:solidFill>
           <a:ln>
@@ -8732,7 +10638,7 @@
                 <a:cs typeface="Manrope"/>
                 <a:ea typeface="Manrope"/>
               </a:rPr>
-              <a:t>неуспешные продления</a:t>
+              <a:t>услуга приостановлена</a:t>
             </a:r>
           </a:p>
         </p:txBody>
@@ -8870,7 +10776,7 @@
                 <a:cs typeface="Manrope"/>
                 <a:ea typeface="Manrope"/>
               </a:rPr>
-              <a:t>услуга приостановлена</a:t>
+              <a:t>ожидание продления</a:t>
             </a:r>
           </a:p>
         </p:txBody>
@@ -10473,7 +12379,7 @@
                 <a:cs typeface="Manrope"/>
                 <a:ea typeface="Manrope"/>
               </a:rPr>
-              <a:t>Верхняя строка списка, отсортированного по риску по убыванию. Слева — реальные поля снимка, справа — тот же</a:t>
+              <a:t>Максимум по базе: 71,4 — вместе с клиентом #5. Показан второй в списке и выбран потому, что его причину видно на</a:t>
             </a:r>
           </a:p>
           <a:p>
@@ -10497,7 +12403,7 @@
                 <a:cs typeface="Manrope"/>
                 <a:ea typeface="Manrope"/>
               </a:rPr>
-              <a:t>клиент в интерфейсе.</a:t>
+              <a:t>уровне услуги. Слева — реальные поля снимка, справа — тот же клиент в интерфейсе.</a:t>
             </a:r>
           </a:p>
         </p:txBody>
@@ -10986,7 +12892,7 @@
                 <a:cs typeface="Manrope Medium"/>
                 <a:ea typeface="Manrope Medium"/>
               </a:rPr>
-              <a:t>1 из 3</a:t>
+              <a:t>2 из 3</a:t>
             </a:r>
           </a:p>
         </p:txBody>
@@ -11305,7 +13211,7 @@
         <p:spPr>
           <a:xfrm>
             <a:off x="4759452" y="2718871"/>
-            <a:ext cx="3361791" cy="1250858"/>
+            <a:ext cx="3361791" cy="1197864"/>
           </a:xfrm>
           <a:prstGeom prst="rect">
             <a:avLst/>
@@ -11358,8 +13264,8 @@
         </p:blipFill>
         <p:spPr>
           <a:xfrm>
-            <a:off x="4791456" y="2750875"/>
-            <a:ext cx="3114365" cy="1186850"/>
+            <a:off x="5212714" y="2750875"/>
+            <a:ext cx="2455267" cy="1133856"/>
           </a:xfrm>
           <a:prstGeom prst="rect">
             <a:avLst/>
@@ -11375,7 +13281,7 @@
         <p:spPr>
           <a:xfrm>
             <a:off x="8203539" y="2718871"/>
-            <a:ext cx="3361791" cy="1250858"/>
+            <a:ext cx="3361791" cy="1197864"/>
           </a:xfrm>
           <a:prstGeom prst="rect">
             <a:avLst/>
@@ -11428,8 +13334,8 @@
         </p:blipFill>
         <p:spPr>
           <a:xfrm>
-            <a:off x="8235543" y="2750875"/>
-            <a:ext cx="3114365" cy="1186850"/>
+            <a:off x="8656801" y="2750875"/>
+            <a:ext cx="2455267" cy="1133856"/>
           </a:xfrm>
           <a:prstGeom prst="rect">
             <a:avLst/>
@@ -11444,7 +13350,7 @@
         </p:nvSpPr>
         <p:spPr>
           <a:xfrm>
-            <a:off x="4791456" y="4175469"/>
+            <a:off x="4791456" y="4067611"/>
             <a:ext cx="6741871" cy="151003"/>
           </a:xfrm>
           <a:prstGeom prst="rect">
@@ -11491,7 +13397,7 @@
         </p:nvSpPr>
         <p:spPr>
           <a:xfrm>
-            <a:off x="4759452" y="4390353"/>
+            <a:off x="4759452" y="4282495"/>
             <a:ext cx="6805879" cy="1513779"/>
           </a:xfrm>
           <a:prstGeom prst="rect">
@@ -11545,8 +13451,8 @@
         </p:blipFill>
         <p:spPr>
           <a:xfrm>
-            <a:off x="4791456" y="4422357"/>
-            <a:ext cx="6741871" cy="631621"/>
+            <a:off x="4791456" y="4314499"/>
+            <a:ext cx="6739146" cy="1449771"/>
           </a:xfrm>
           <a:prstGeom prst="rect">
             <a:avLst/>
@@ -11561,7 +13467,7 @@
         </p:nvSpPr>
         <p:spPr>
           <a:xfrm>
-            <a:off x="4791456" y="5981856"/>
+            <a:off x="4791456" y="5873998"/>
             <a:ext cx="6741871" cy="364998"/>
           </a:xfrm>
           <a:prstGeom prst="rect">
@@ -11595,7 +13501,7 @@
                 <a:cs typeface="Manrope"/>
                 <a:ea typeface="Manrope"/>
               </a:rPr>
-              <a:t>Почему именно этот клиент: максимальный балл в списке, услуга просрочена на 35 дней, 2 из 2 продлений не</a:t>
+              <a:t>Почему именно этот клиент: один из двух максимумов (71,4), и его причину видно на уровне услуги —</a:t>
             </a:r>
           </a:p>
           <a:p>
@@ -11619,7 +13525,7 @@
                 <a:cs typeface="Manrope"/>
                 <a:ea typeface="Manrope"/>
               </a:rPr>
-              <a:t>выполнены, автопродление отключено.</a:t>
+              <a:t>service-0030 просрочена на 35 дней, 2 из 2 продлений не выполнены, автопродление отключено.</a:t>
             </a:r>
           </a:p>
         </p:txBody>
@@ -11913,7 +13819,7 @@
                 <a:cs typeface="Manrope"/>
                 <a:ea typeface="Manrope"/>
               </a:rPr>
-              <a:t>Формула: 100 × Σ(вес × значение) / Σвес. По service-0030 балл 71,4 при сумме весов 13.0. Ниже — фактические вклады из</a:t>
+              <a:t>Формула: 100 × Σ(вес × значение) / Σвес. По service-0030 балл 71,4 при действующей сумме весов 10,5 (фактор без данных</a:t>
             </a:r>
           </a:p>
           <a:p>
@@ -11937,7 +13843,7 @@
                 <a:cs typeface="Manrope"/>
                 <a:ea typeface="Manrope"/>
               </a:rPr>
-              <a:t>интерфейса.</a:t>
+              <a:t>исключён из знаменателя). Ниже — фактические вклады из интерфейса.</a:t>
             </a:r>
           </a:p>
         </p:txBody>
@@ -12896,7 +14802,7 @@
                 <a:cs typeface="Manrope"/>
                 <a:ea typeface="Manrope"/>
               </a:rPr>
-              <a:t>ДЕНЕЖНАЯ ОЦЕНКА</a:t>
+              <a:t>AI-АНАЛИТИК</a:t>
             </a:r>
           </a:p>
         </p:txBody>
@@ -12943,7 +14849,7 @@
                 <a:cs typeface="Manrope"/>
                 <a:ea typeface="Manrope"/>
               </a:rPr>
-              <a:t>Риск и деньги — разные величины</a:t>
+              <a:t>Числа считает движок — AI их объясняет</a:t>
             </a:r>
           </a:p>
         </p:txBody>
@@ -12957,7 +14863,7 @@
         <p:spPr>
           <a:xfrm>
             <a:off x="658368" y="1344168"/>
-            <a:ext cx="10058400" cy="457200"/>
+            <a:ext cx="10058400" cy="440944"/>
           </a:xfrm>
           <a:prstGeom prst="rect">
             <a:avLst/>
@@ -12982,7 +14888,7 @@
               </a:spcAft>
             </a:pPr>
             <a:r>
-              <a:rPr sz="1350" b="0" i="0">
+              <a:rPr sz="1300" b="0" i="0">
                 <a:solidFill>
                   <a:srgbClr val="666666"/>
                 </a:solidFill>
@@ -12990,7 +14896,7 @@
                 <a:cs typeface="Manrope"/>
                 <a:ea typeface="Manrope"/>
               </a:rPr>
-              <a:t>Выручка под риском = стоимость продления × балл риска / 100, и только для открытых услуг с продлением внутри</a:t>
+              <a:t>Локальная модель (qwen2.5:3b-instruct через Ollama) формулирует объяснение поверх уже посчитанных фактов. Балл и суммы</a:t>
             </a:r>
           </a:p>
           <a:p>
@@ -13006,7 +14912,7 @@
               </a:spcAft>
             </a:pPr>
             <a:r>
-              <a:rPr sz="1350" b="0" i="0">
+              <a:rPr sz="1300" b="0" i="0">
                 <a:solidFill>
                   <a:srgbClr val="666666"/>
                 </a:solidFill>
@@ -13014,30 +14920,79 @@
                 <a:cs typeface="Manrope"/>
                 <a:ea typeface="Manrope"/>
               </a:rPr>
-              <a:t>горизонта.</a:t>
-            </a:r>
-          </a:p>
-        </p:txBody>
-      </p:sp>
-      <p:sp>
-        <p:nvSpPr>
-          <p:cNvPr id="6" name="Rectangle 5"/>
+              <a:t>модель не пересчитывает: она получает их из backend и обязана ссылаться на источники.</a:t>
+            </a:r>
+          </a:p>
+        </p:txBody>
+      </p:sp>
+      <p:sp>
+        <p:nvSpPr>
+          <p:cNvPr id="6" name="TextBox 5"/>
+          <p:cNvSpPr txBox="1"/>
+          <p:nvPr/>
+        </p:nvSpPr>
+        <p:spPr>
+          <a:xfrm>
+            <a:off x="658368" y="2059432"/>
+            <a:ext cx="6903720" cy="151003"/>
+          </a:xfrm>
+          <a:prstGeom prst="rect">
+            <a:avLst/>
+          </a:prstGeom>
+          <a:noFill/>
+        </p:spPr>
+        <p:txBody>
+          <a:bodyPr wrap="square" anchor="t" lIns="0" rIns="0" tIns="0" bIns="0">
+            <a:spAutoFit/>
+          </a:bodyPr>
+          <a:lstStyle/>
+          <a:p>
+            <a:pPr algn="l">
+              <a:lnSpc>
+                <a:spcPct val="110000"/>
+              </a:lnSpc>
+              <a:spcBef>
+                <a:spcPts val="0"/>
+              </a:spcBef>
+              <a:spcAft>
+                <a:spcPts val="0"/>
+              </a:spcAft>
+            </a:pPr>
+            <a:r>
+              <a:rPr sz="950" b="1" i="0">
+                <a:solidFill>
+                  <a:srgbClr val="666666"/>
+                </a:solidFill>
+                <a:latin typeface="Manrope"/>
+                <a:cs typeface="Manrope"/>
+                <a:ea typeface="Manrope"/>
+              </a:rPr>
+              <a:t>РЕАЛЬНЫЙ ОТВЕТ AI-АНАЛИТИКА · КЛИЕНТ #10</a:t>
+            </a:r>
+          </a:p>
+        </p:txBody>
+      </p:sp>
+      <p:sp>
+        <p:nvSpPr>
+          <p:cNvPr id="7" name="Rectangle 6"/>
           <p:cNvSpPr/>
           <p:nvPr/>
         </p:nvSpPr>
         <p:spPr>
           <a:xfrm>
-            <a:off x="658368" y="2075688"/>
-            <a:ext cx="10874959" cy="768096"/>
+            <a:off x="626364" y="2265172"/>
+            <a:ext cx="6967728" cy="3517594"/>
           </a:xfrm>
           <a:prstGeom prst="rect">
             <a:avLst/>
           </a:prstGeom>
           <a:solidFill>
-            <a:srgbClr val="131313"/>
+            <a:srgbClr val="FFFFFF"/>
           </a:solidFill>
-          <a:ln>
-            <a:noFill/>
+          <a:ln w="10160">
+            <a:solidFill>
+              <a:srgbClr val="E1E1E1"/>
+            </a:solidFill>
           </a:ln>
           <a:effectLst/>
         </p:spPr>
@@ -13063,16 +15018,40 @@
           </a:p>
         </p:txBody>
       </p:sp>
-      <p:sp>
-        <p:nvSpPr>
-          <p:cNvPr id="7" name="TextBox 6"/>
+      <p:pic>
+        <p:nvPicPr>
+          <p:cNvPr id="8" name="Picture 7" descr="ai_explain.png"/>
+          <p:cNvPicPr>
+            <a:picLocks noChangeAspect="1"/>
+          </p:cNvPicPr>
+          <p:nvPr/>
+        </p:nvPicPr>
+        <p:blipFill>
+          <a:blip r:embed="rId2"/>
+          <a:stretch>
+            <a:fillRect/>
+          </a:stretch>
+        </p:blipFill>
+        <p:spPr>
+          <a:xfrm>
+            <a:off x="658368" y="2297176"/>
+            <a:ext cx="6902582" cy="3453586"/>
+          </a:xfrm>
+          <a:prstGeom prst="rect">
+            <a:avLst/>
+          </a:prstGeom>
+        </p:spPr>
+      </p:pic>
+      <p:sp>
+        <p:nvSpPr>
+          <p:cNvPr id="9" name="TextBox 8"/>
           <p:cNvSpPr txBox="1"/>
           <p:nvPr/>
         </p:nvSpPr>
         <p:spPr>
           <a:xfrm>
-            <a:off x="932688" y="2212848"/>
-            <a:ext cx="6583680" cy="512064"/>
+            <a:off x="658368" y="5860490"/>
+            <a:ext cx="6903720" cy="180848"/>
           </a:xfrm>
           <a:prstGeom prst="rect">
             <a:avLst/>
@@ -13087,65 +15066,7 @@
           <a:p>
             <a:pPr algn="l">
               <a:lnSpc>
-                <a:spcPct val="116000"/>
-              </a:lnSpc>
-              <a:spcBef>
-                <a:spcPts val="0"/>
-              </a:spcBef>
-              <a:spcAft>
-                <a:spcPts val="0"/>
-              </a:spcAft>
-            </a:pPr>
-            <a:r>
-              <a:rPr sz="1500" b="0">
-                <a:solidFill>
-                  <a:srgbClr val="C9C9C9"/>
-                </a:solidFill>
-                <a:latin typeface="Manrope Medium"/>
-                <a:cs typeface="Manrope Medium"/>
-                <a:ea typeface="Manrope Medium"/>
-              </a:rPr>
-              <a:t>выручка под риском  </a:t>
-            </a:r>
-            <a:r>
-              <a:rPr sz="1500" b="1">
-                <a:solidFill>
-                  <a:srgbClr val="FFFFFF"/>
-                </a:solidFill>
-                <a:latin typeface="Manrope SemiBold"/>
-                <a:cs typeface="Manrope SemiBold"/>
-                <a:ea typeface="Manrope SemiBold"/>
-              </a:rPr>
-              <a:t>=  стоимость продления × балл риска / 100</a:t>
-            </a:r>
-          </a:p>
-        </p:txBody>
-      </p:sp>
-      <p:sp>
-        <p:nvSpPr>
-          <p:cNvPr id="8" name="TextBox 7"/>
-          <p:cNvSpPr txBox="1"/>
-          <p:nvPr/>
-        </p:nvSpPr>
-        <p:spPr>
-          <a:xfrm>
-            <a:off x="8065008" y="2295144"/>
-            <a:ext cx="3193999" cy="170687"/>
-          </a:xfrm>
-          <a:prstGeom prst="rect">
-            <a:avLst/>
-          </a:prstGeom>
-          <a:noFill/>
-        </p:spPr>
-        <p:txBody>
-          <a:bodyPr wrap="square" anchor="t" lIns="0" rIns="0" tIns="0" bIns="0">
-            <a:spAutoFit/>
-          </a:bodyPr>
-          <a:lstStyle/>
-          <a:p>
-            <a:pPr algn="l">
-              <a:lnSpc>
-                <a:spcPct val="120000"/>
+                <a:spcPct val="128000"/>
               </a:lnSpc>
               <a:spcBef>
                 <a:spcPts val="0"/>
@@ -13157,27 +15078,27 @@
             <a:r>
               <a:rPr sz="1000" b="0" i="0">
                 <a:solidFill>
-                  <a:srgbClr val="83CDB7"/>
-                </a:solidFill>
-                <a:latin typeface="Manrope Medium"/>
-                <a:cs typeface="Manrope Medium"/>
-                <a:ea typeface="Manrope Medium"/>
-              </a:rPr>
-              <a:t>Баланс в формулу не входит</a:t>
-            </a:r>
-          </a:p>
-        </p:txBody>
-      </p:sp>
-      <p:sp>
-        <p:nvSpPr>
-          <p:cNvPr id="9" name="Rectangle 8"/>
+                  <a:srgbClr val="666666"/>
+                </a:solidFill>
+                <a:latin typeface="Manrope"/>
+                <a:cs typeface="Manrope"/>
+                <a:ea typeface="Manrope"/>
+              </a:rPr>
+              <a:t>Ответ ссылается на фактические данные и документы проекта: каждый источник виден под ответом.</a:t>
+            </a:r>
+          </a:p>
+        </p:txBody>
+      </p:sp>
+      <p:sp>
+        <p:nvSpPr>
+          <p:cNvPr id="10" name="Rectangle 9"/>
           <p:cNvSpPr/>
           <p:nvPr/>
         </p:nvSpPr>
         <p:spPr>
           <a:xfrm>
-            <a:off x="658368" y="3118104"/>
-            <a:ext cx="3977639" cy="2935224"/>
+            <a:off x="7836408" y="2297176"/>
+            <a:ext cx="3696919" cy="813104"/>
           </a:xfrm>
           <a:prstGeom prst="rect">
             <a:avLst/>
@@ -13216,613 +15137,23 @@
       </p:sp>
       <p:sp>
         <p:nvSpPr>
-          <p:cNvPr id="10" name="TextBox 9"/>
-          <p:cNvSpPr txBox="1"/>
-          <p:nvPr/>
-        </p:nvSpPr>
-        <p:spPr>
-          <a:xfrm>
-            <a:off x="877824" y="3319272"/>
-            <a:ext cx="3538727" cy="359664"/>
-          </a:xfrm>
-          <a:prstGeom prst="rect">
-            <a:avLst/>
-          </a:prstGeom>
-          <a:noFill/>
-        </p:spPr>
-        <p:txBody>
-          <a:bodyPr wrap="square" anchor="t" lIns="0" rIns="0" tIns="0" bIns="0">
-            <a:spAutoFit/>
-          </a:bodyPr>
-          <a:lstStyle/>
-          <a:p>
-            <a:pPr algn="l">
-              <a:lnSpc>
-                <a:spcPct val="112000"/>
-              </a:lnSpc>
-              <a:spcBef>
-                <a:spcPts val="0"/>
-              </a:spcBef>
-              <a:spcAft>
-                <a:spcPts val="0"/>
-              </a:spcAft>
-            </a:pPr>
-            <a:r>
-              <a:rPr sz="1200" b="1" i="0">
-                <a:solidFill>
-                  <a:srgbClr val="1A1A1A"/>
-                </a:solidFill>
-                <a:latin typeface="Manrope SemiBold"/>
-                <a:cs typeface="Manrope SemiBold"/>
-                <a:ea typeface="Manrope SemiBold"/>
-              </a:rPr>
-              <a:t>Клиент #10 — высокий риск, но 0,00 € под</a:t>
-            </a:r>
-          </a:p>
-          <a:p>
-            <a:pPr algn="l">
-              <a:lnSpc>
-                <a:spcPct val="112000"/>
-              </a:lnSpc>
-              <a:spcBef>
-                <a:spcPts val="0"/>
-              </a:spcBef>
-              <a:spcAft>
-                <a:spcPts val="0"/>
-              </a:spcAft>
-            </a:pPr>
-            <a:r>
-              <a:rPr sz="1200" b="1" i="0">
-                <a:solidFill>
-                  <a:srgbClr val="1A1A1A"/>
-                </a:solidFill>
-                <a:latin typeface="Manrope SemiBold"/>
-                <a:cs typeface="Manrope SemiBold"/>
-                <a:ea typeface="Manrope SemiBold"/>
-              </a:rPr>
-              <a:t>риском</a:t>
-            </a:r>
-          </a:p>
-        </p:txBody>
-      </p:sp>
-      <p:sp>
-        <p:nvSpPr>
-          <p:cNvPr id="11" name="TextBox 10"/>
-          <p:cNvSpPr txBox="1"/>
-          <p:nvPr/>
-        </p:nvSpPr>
-        <p:spPr>
-          <a:xfrm>
-            <a:off x="877824" y="3703320"/>
-            <a:ext cx="3538727" cy="131635"/>
-          </a:xfrm>
-          <a:prstGeom prst="rect">
-            <a:avLst/>
-          </a:prstGeom>
-          <a:noFill/>
-        </p:spPr>
-        <p:txBody>
-          <a:bodyPr wrap="square" anchor="t" lIns="0" rIns="0" tIns="0" bIns="0">
-            <a:spAutoFit/>
-          </a:bodyPr>
-          <a:lstStyle/>
-          <a:p>
-            <a:pPr algn="l">
-              <a:lnSpc>
-                <a:spcPct val="105000"/>
-              </a:lnSpc>
-              <a:spcBef>
-                <a:spcPts val="0"/>
-              </a:spcBef>
-              <a:spcAft>
-                <a:spcPts val="0"/>
-              </a:spcAft>
-            </a:pPr>
-            <a:r>
-              <a:rPr sz="850" b="1" i="0">
-                <a:solidFill>
-                  <a:srgbClr val="666666"/>
-                </a:solidFill>
-                <a:latin typeface="Manrope SemiBold"/>
-                <a:cs typeface="Manrope SemiBold"/>
-                <a:ea typeface="Manrope SemiBold"/>
-              </a:rPr>
-              <a:t>БАЛЛ РИСКА КЛИЕНТА</a:t>
-            </a:r>
-          </a:p>
-        </p:txBody>
-      </p:sp>
-      <p:sp>
-        <p:nvSpPr>
-          <p:cNvPr id="12" name="TextBox 11"/>
-          <p:cNvSpPr txBox="1"/>
-          <p:nvPr/>
-        </p:nvSpPr>
-        <p:spPr>
-          <a:xfrm>
-            <a:off x="877824" y="3858768"/>
-            <a:ext cx="3538727" cy="232600"/>
-          </a:xfrm>
-          <a:prstGeom prst="rect">
-            <a:avLst/>
-          </a:prstGeom>
-          <a:noFill/>
-        </p:spPr>
-        <p:txBody>
-          <a:bodyPr wrap="square" anchor="t" lIns="0" rIns="0" tIns="0" bIns="0">
-            <a:spAutoFit/>
-          </a:bodyPr>
-          <a:lstStyle/>
-          <a:p>
-            <a:pPr algn="l">
-              <a:lnSpc>
-                <a:spcPct val="125000"/>
-              </a:lnSpc>
-              <a:spcBef>
-                <a:spcPts val="0"/>
-              </a:spcBef>
-              <a:spcAft>
-                <a:spcPts val="0"/>
-              </a:spcAft>
-            </a:pPr>
-            <a:r>
-              <a:rPr sz="1350" b="1" i="0">
-                <a:solidFill>
-                  <a:srgbClr val="B84A00"/>
-                </a:solidFill>
-                <a:latin typeface="Manrope SemiBold"/>
-                <a:cs typeface="Manrope SemiBold"/>
-                <a:ea typeface="Manrope SemiBold"/>
-              </a:rPr>
-              <a:t>71,4 / 100</a:t>
-            </a:r>
-          </a:p>
-        </p:txBody>
-      </p:sp>
-      <p:sp>
-        <p:nvSpPr>
-          <p:cNvPr id="13" name="TextBox 12"/>
-          <p:cNvSpPr txBox="1"/>
-          <p:nvPr/>
-        </p:nvSpPr>
-        <p:spPr>
-          <a:xfrm>
-            <a:off x="877824" y="4237672"/>
-            <a:ext cx="3538727" cy="131635"/>
-          </a:xfrm>
-          <a:prstGeom prst="rect">
-            <a:avLst/>
-          </a:prstGeom>
-          <a:noFill/>
-        </p:spPr>
-        <p:txBody>
-          <a:bodyPr wrap="square" anchor="t" lIns="0" rIns="0" tIns="0" bIns="0">
-            <a:spAutoFit/>
-          </a:bodyPr>
-          <a:lstStyle/>
-          <a:p>
-            <a:pPr algn="l">
-              <a:lnSpc>
-                <a:spcPct val="105000"/>
-              </a:lnSpc>
-              <a:spcBef>
-                <a:spcPts val="0"/>
-              </a:spcBef>
-              <a:spcAft>
-                <a:spcPts val="0"/>
-              </a:spcAft>
-            </a:pPr>
-            <a:r>
-              <a:rPr sz="850" b="1" i="0">
-                <a:solidFill>
-                  <a:srgbClr val="666666"/>
-                </a:solidFill>
-                <a:latin typeface="Manrope SemiBold"/>
-                <a:cs typeface="Manrope SemiBold"/>
-                <a:ea typeface="Manrope SemiBold"/>
-              </a:rPr>
-              <a:t>ВЫРУЧКА ПОД РИСКОМ</a:t>
-            </a:r>
-          </a:p>
-        </p:txBody>
-      </p:sp>
-      <p:sp>
-        <p:nvSpPr>
-          <p:cNvPr id="14" name="TextBox 13"/>
-          <p:cNvSpPr txBox="1"/>
-          <p:nvPr/>
-        </p:nvSpPr>
-        <p:spPr>
-          <a:xfrm>
-            <a:off x="877824" y="4393120"/>
-            <a:ext cx="3538727" cy="232600"/>
-          </a:xfrm>
-          <a:prstGeom prst="rect">
-            <a:avLst/>
-          </a:prstGeom>
-          <a:noFill/>
-        </p:spPr>
-        <p:txBody>
-          <a:bodyPr wrap="square" anchor="t" lIns="0" rIns="0" tIns="0" bIns="0">
-            <a:spAutoFit/>
-          </a:bodyPr>
-          <a:lstStyle/>
-          <a:p>
-            <a:pPr algn="l">
-              <a:lnSpc>
-                <a:spcPct val="125000"/>
-              </a:lnSpc>
-              <a:spcBef>
-                <a:spcPts val="0"/>
-              </a:spcBef>
-              <a:spcAft>
-                <a:spcPts val="0"/>
-              </a:spcAft>
-            </a:pPr>
-            <a:r>
-              <a:rPr sz="1350" b="1" i="0">
-                <a:solidFill>
-                  <a:srgbClr val="1A1A1A"/>
-                </a:solidFill>
-                <a:latin typeface="Manrope SemiBold"/>
-                <a:cs typeface="Manrope SemiBold"/>
-                <a:ea typeface="Manrope SemiBold"/>
-              </a:rPr>
-              <a:t>0,00 €</a:t>
-            </a:r>
-          </a:p>
-        </p:txBody>
-      </p:sp>
-      <p:sp>
-        <p:nvSpPr>
-          <p:cNvPr id="15" name="TextBox 14"/>
-          <p:cNvSpPr txBox="1"/>
-          <p:nvPr/>
-        </p:nvSpPr>
-        <p:spPr>
-          <a:xfrm>
-            <a:off x="877824" y="4772024"/>
-            <a:ext cx="3538727" cy="131635"/>
-          </a:xfrm>
-          <a:prstGeom prst="rect">
-            <a:avLst/>
-          </a:prstGeom>
-          <a:noFill/>
-        </p:spPr>
-        <p:txBody>
-          <a:bodyPr wrap="square" anchor="t" lIns="0" rIns="0" tIns="0" bIns="0">
-            <a:spAutoFit/>
-          </a:bodyPr>
-          <a:lstStyle/>
-          <a:p>
-            <a:pPr algn="l">
-              <a:lnSpc>
-                <a:spcPct val="105000"/>
-              </a:lnSpc>
-              <a:spcBef>
-                <a:spcPts val="0"/>
-              </a:spcBef>
-              <a:spcAft>
-                <a:spcPts val="0"/>
-              </a:spcAft>
-            </a:pPr>
-            <a:r>
-              <a:rPr sz="850" b="1" i="0">
-                <a:solidFill>
-                  <a:srgbClr val="666666"/>
-                </a:solidFill>
-                <a:latin typeface="Manrope SemiBold"/>
-                <a:cs typeface="Manrope SemiBold"/>
-                <a:ea typeface="Manrope SemiBold"/>
-              </a:rPr>
-              <a:t>ПОЧЕМУ НОЛЬ</a:t>
-            </a:r>
-          </a:p>
-        </p:txBody>
-      </p:sp>
-      <p:sp>
-        <p:nvSpPr>
-          <p:cNvPr id="16" name="TextBox 15"/>
-          <p:cNvSpPr txBox="1"/>
-          <p:nvPr/>
-        </p:nvSpPr>
-        <p:spPr>
-          <a:xfrm>
-            <a:off x="877824" y="4927472"/>
-            <a:ext cx="3538727" cy="169100"/>
-          </a:xfrm>
-          <a:prstGeom prst="rect">
-            <a:avLst/>
-          </a:prstGeom>
-          <a:noFill/>
-        </p:spPr>
-        <p:txBody>
-          <a:bodyPr wrap="square" anchor="t" lIns="0" rIns="0" tIns="0" bIns="0">
-            <a:spAutoFit/>
-          </a:bodyPr>
-          <a:lstStyle/>
-          <a:p>
-            <a:pPr algn="l">
-              <a:lnSpc>
-                <a:spcPct val="125000"/>
-              </a:lnSpc>
-              <a:spcBef>
-                <a:spcPts val="0"/>
-              </a:spcBef>
-              <a:spcAft>
-                <a:spcPts val="0"/>
-              </a:spcAft>
-            </a:pPr>
-            <a:r>
-              <a:rPr sz="950" b="0" i="0">
-                <a:solidFill>
-                  <a:srgbClr val="666666"/>
-                </a:solidFill>
-                <a:latin typeface="Manrope"/>
-                <a:cs typeface="Manrope"/>
-                <a:ea typeface="Manrope"/>
-              </a:rPr>
-              <a:t>Сроки уже прошли — горизонт смотрит вперёд.</a:t>
-            </a:r>
-          </a:p>
-        </p:txBody>
-      </p:sp>
-      <p:sp>
-        <p:nvSpPr>
-          <p:cNvPr id="17" name="TextBox 16"/>
-          <p:cNvSpPr txBox="1"/>
-          <p:nvPr/>
-        </p:nvSpPr>
-        <p:spPr>
-          <a:xfrm>
-            <a:off x="877824" y="5242876"/>
-            <a:ext cx="3538727" cy="131635"/>
-          </a:xfrm>
-          <a:prstGeom prst="rect">
-            <a:avLst/>
-          </a:prstGeom>
-          <a:noFill/>
-        </p:spPr>
-        <p:txBody>
-          <a:bodyPr wrap="square" anchor="t" lIns="0" rIns="0" tIns="0" bIns="0">
-            <a:spAutoFit/>
-          </a:bodyPr>
-          <a:lstStyle/>
-          <a:p>
-            <a:pPr algn="l">
-              <a:lnSpc>
-                <a:spcPct val="105000"/>
-              </a:lnSpc>
-              <a:spcBef>
-                <a:spcPts val="0"/>
-              </a:spcBef>
-              <a:spcAft>
-                <a:spcPts val="0"/>
-              </a:spcAft>
-            </a:pPr>
-            <a:r>
-              <a:rPr sz="850" b="1" i="0">
-                <a:solidFill>
-                  <a:srgbClr val="666666"/>
-                </a:solidFill>
-                <a:latin typeface="Manrope SemiBold"/>
-                <a:cs typeface="Manrope SemiBold"/>
-                <a:ea typeface="Manrope SemiBold"/>
-              </a:rPr>
-              <a:t>БАЛАНС — НЕ ВЫРУЧКА</a:t>
-            </a:r>
-          </a:p>
-        </p:txBody>
-      </p:sp>
-      <p:sp>
-        <p:nvSpPr>
-          <p:cNvPr id="18" name="TextBox 17"/>
-          <p:cNvSpPr txBox="1"/>
-          <p:nvPr/>
-        </p:nvSpPr>
-        <p:spPr>
-          <a:xfrm>
-            <a:off x="877824" y="5398324"/>
-            <a:ext cx="3538727" cy="232600"/>
-          </a:xfrm>
-          <a:prstGeom prst="rect">
-            <a:avLst/>
-          </a:prstGeom>
-          <a:noFill/>
-        </p:spPr>
-        <p:txBody>
-          <a:bodyPr wrap="square" anchor="t" lIns="0" rIns="0" tIns="0" bIns="0">
-            <a:spAutoFit/>
-          </a:bodyPr>
-          <a:lstStyle/>
-          <a:p>
-            <a:pPr algn="l">
-              <a:lnSpc>
-                <a:spcPct val="125000"/>
-              </a:lnSpc>
-              <a:spcBef>
-                <a:spcPts val="0"/>
-              </a:spcBef>
-              <a:spcAft>
-                <a:spcPts val="0"/>
-              </a:spcAft>
-            </a:pPr>
-            <a:r>
-              <a:rPr sz="1350" b="1" i="0">
-                <a:solidFill>
-                  <a:srgbClr val="666666"/>
-                </a:solidFill>
-                <a:latin typeface="Manrope SemiBold"/>
-                <a:cs typeface="Manrope SemiBold"/>
-                <a:ea typeface="Manrope SemiBold"/>
-              </a:rPr>
-              <a:t>203,79 €</a:t>
-            </a:r>
-          </a:p>
-        </p:txBody>
-      </p:sp>
-      <p:sp>
-        <p:nvSpPr>
-          <p:cNvPr id="19" name="TextBox 18"/>
-          <p:cNvSpPr txBox="1"/>
-          <p:nvPr/>
-        </p:nvSpPr>
-        <p:spPr>
-          <a:xfrm>
-            <a:off x="877824" y="5777228"/>
-            <a:ext cx="3538727" cy="131635"/>
-          </a:xfrm>
-          <a:prstGeom prst="rect">
-            <a:avLst/>
-          </a:prstGeom>
-          <a:noFill/>
-        </p:spPr>
-        <p:txBody>
-          <a:bodyPr wrap="square" anchor="t" lIns="0" rIns="0" tIns="0" bIns="0">
-            <a:spAutoFit/>
-          </a:bodyPr>
-          <a:lstStyle/>
-          <a:p>
-            <a:pPr algn="l">
-              <a:lnSpc>
-                <a:spcPct val="105000"/>
-              </a:lnSpc>
-              <a:spcBef>
-                <a:spcPts val="0"/>
-              </a:spcBef>
-              <a:spcAft>
-                <a:spcPts val="0"/>
-              </a:spcAft>
-            </a:pPr>
-            <a:r>
-              <a:rPr sz="850" b="1" i="0">
-                <a:solidFill>
-                  <a:srgbClr val="666666"/>
-                </a:solidFill>
-                <a:latin typeface="Manrope SemiBold"/>
-                <a:cs typeface="Manrope SemiBold"/>
-                <a:ea typeface="Manrope SemiBold"/>
-              </a:rPr>
-              <a:t>ВСЕГО ПОПОЛНЕНО — СПРАВОЧНО</a:t>
-            </a:r>
-          </a:p>
-        </p:txBody>
-      </p:sp>
-      <p:sp>
-        <p:nvSpPr>
-          <p:cNvPr id="20" name="TextBox 19"/>
-          <p:cNvSpPr txBox="1"/>
-          <p:nvPr/>
-        </p:nvSpPr>
-        <p:spPr>
-          <a:xfrm>
-            <a:off x="877824" y="5932676"/>
-            <a:ext cx="3538727" cy="232600"/>
-          </a:xfrm>
-          <a:prstGeom prst="rect">
-            <a:avLst/>
-          </a:prstGeom>
-          <a:noFill/>
-        </p:spPr>
-        <p:txBody>
-          <a:bodyPr wrap="square" anchor="t" lIns="0" rIns="0" tIns="0" bIns="0">
-            <a:spAutoFit/>
-          </a:bodyPr>
-          <a:lstStyle/>
-          <a:p>
-            <a:pPr algn="l">
-              <a:lnSpc>
-                <a:spcPct val="125000"/>
-              </a:lnSpc>
-              <a:spcBef>
-                <a:spcPts val="0"/>
-              </a:spcBef>
-              <a:spcAft>
-                <a:spcPts val="0"/>
-              </a:spcAft>
-            </a:pPr>
-            <a:r>
-              <a:rPr sz="1350" b="1" i="0">
-                <a:solidFill>
-                  <a:srgbClr val="666666"/>
-                </a:solidFill>
-                <a:latin typeface="Manrope SemiBold"/>
-                <a:cs typeface="Manrope SemiBold"/>
-                <a:ea typeface="Manrope SemiBold"/>
-              </a:rPr>
-              <a:t>4 206,69 €</a:t>
-            </a:r>
-          </a:p>
-        </p:txBody>
-      </p:sp>
-      <p:sp>
-        <p:nvSpPr>
-          <p:cNvPr id="21" name="TextBox 20"/>
-          <p:cNvSpPr txBox="1"/>
-          <p:nvPr/>
-        </p:nvSpPr>
-        <p:spPr>
-          <a:xfrm>
-            <a:off x="4910327" y="3090672"/>
-            <a:ext cx="6623000" cy="151003"/>
-          </a:xfrm>
-          <a:prstGeom prst="rect">
-            <a:avLst/>
-          </a:prstGeom>
-          <a:noFill/>
-        </p:spPr>
-        <p:txBody>
-          <a:bodyPr wrap="square" anchor="t" lIns="0" rIns="0" tIns="0" bIns="0">
-            <a:spAutoFit/>
-          </a:bodyPr>
-          <a:lstStyle/>
-          <a:p>
-            <a:pPr algn="l">
-              <a:lnSpc>
-                <a:spcPct val="110000"/>
-              </a:lnSpc>
-              <a:spcBef>
-                <a:spcPts val="0"/>
-              </a:spcBef>
-              <a:spcAft>
-                <a:spcPts val="0"/>
-              </a:spcAft>
-            </a:pPr>
-            <a:r>
-              <a:rPr sz="950" b="1" i="0">
-                <a:solidFill>
-                  <a:srgbClr val="666666"/>
-                </a:solidFill>
-                <a:latin typeface="Manrope"/>
-                <a:cs typeface="Manrope"/>
-                <a:ea typeface="Manrope"/>
-              </a:rPr>
-              <a:t>РЕАЛЬНЫЙ ИНТЕРФЕЙС · БЛИЖАЙШИЕ ПРОДЛЕНИЯ В ГОРИЗОНТЕ</a:t>
-            </a:r>
-          </a:p>
-        </p:txBody>
-      </p:sp>
-      <p:sp>
-        <p:nvSpPr>
-          <p:cNvPr id="22" name="Rectangle 21"/>
+          <p:cNvPr id="11" name="Rectangle 10"/>
           <p:cNvSpPr/>
           <p:nvPr/>
         </p:nvSpPr>
         <p:spPr>
           <a:xfrm>
-            <a:off x="4878323" y="3323844"/>
-            <a:ext cx="6687008" cy="1462829"/>
+            <a:off x="7836408" y="2297176"/>
+            <a:ext cx="41148" cy="813104"/>
           </a:xfrm>
           <a:prstGeom prst="rect">
             <a:avLst/>
           </a:prstGeom>
           <a:solidFill>
-            <a:srgbClr val="FFFFFF"/>
+            <a:srgbClr val="83CDB7"/>
           </a:solidFill>
-          <a:ln w="10160">
-            <a:solidFill>
-              <a:srgbClr val="E1E1E1"/>
-            </a:solidFill>
+          <a:ln>
+            <a:noFill/>
           </a:ln>
           <a:effectLst/>
         </p:spPr>
@@ -13848,40 +15179,134 @@
           </a:p>
         </p:txBody>
       </p:sp>
-      <p:pic>
-        <p:nvPicPr>
-          <p:cNvPr id="23" name="Picture 22" descr="renew_table.png"/>
-          <p:cNvPicPr>
-            <a:picLocks noChangeAspect="1"/>
-          </p:cNvPicPr>
-          <p:nvPr/>
-        </p:nvPicPr>
-        <p:blipFill>
-          <a:blip r:embed="rId2"/>
-          <a:stretch>
-            <a:fillRect/>
-          </a:stretch>
-        </p:blipFill>
-        <p:spPr>
-          <a:xfrm>
-            <a:off x="4910327" y="3355848"/>
-            <a:ext cx="6255671" cy="1398821"/>
-          </a:xfrm>
-          <a:prstGeom prst="rect">
-            <a:avLst/>
-          </a:prstGeom>
-        </p:spPr>
-      </p:pic>
-      <p:sp>
-        <p:nvSpPr>
-          <p:cNvPr id="24" name="Rectangle 23"/>
+      <p:sp>
+        <p:nvSpPr>
+          <p:cNvPr id="12" name="TextBox 11"/>
+          <p:cNvSpPr txBox="1"/>
+          <p:nvPr/>
+        </p:nvSpPr>
+        <p:spPr>
+          <a:xfrm>
+            <a:off x="8019288" y="2397760"/>
+            <a:ext cx="3331159" cy="169164"/>
+          </a:xfrm>
+          <a:prstGeom prst="rect">
+            <a:avLst/>
+          </a:prstGeom>
+          <a:noFill/>
+        </p:spPr>
+        <p:txBody>
+          <a:bodyPr wrap="square" anchor="t" lIns="0" rIns="0" tIns="0" bIns="0">
+            <a:spAutoFit/>
+          </a:bodyPr>
+          <a:lstStyle/>
+          <a:p>
+            <a:pPr algn="l">
+              <a:lnSpc>
+                <a:spcPct val="108000"/>
+              </a:lnSpc>
+              <a:spcBef>
+                <a:spcPts val="0"/>
+              </a:spcBef>
+              <a:spcAft>
+                <a:spcPts val="0"/>
+              </a:spcAft>
+            </a:pPr>
+            <a:r>
+              <a:rPr sz="1100" b="1" i="0">
+                <a:solidFill>
+                  <a:srgbClr val="1A1A1A"/>
+                </a:solidFill>
+                <a:latin typeface="Manrope SemiBold"/>
+                <a:cs typeface="Manrope SemiBold"/>
+                <a:ea typeface="Manrope SemiBold"/>
+              </a:rPr>
+              <a:t>Данные, а не догадки</a:t>
+            </a:r>
+          </a:p>
+        </p:txBody>
+      </p:sp>
+      <p:sp>
+        <p:nvSpPr>
+          <p:cNvPr id="13" name="TextBox 12"/>
+          <p:cNvSpPr txBox="1"/>
+          <p:nvPr/>
+        </p:nvSpPr>
+        <p:spPr>
+          <a:xfrm>
+            <a:off x="8019288" y="2603500"/>
+            <a:ext cx="3331159" cy="297180"/>
+          </a:xfrm>
+          <a:prstGeom prst="rect">
+            <a:avLst/>
+          </a:prstGeom>
+          <a:noFill/>
+        </p:spPr>
+        <p:txBody>
+          <a:bodyPr wrap="square" anchor="t" lIns="0" rIns="0" tIns="0" bIns="0">
+            <a:spAutoFit/>
+          </a:bodyPr>
+          <a:lstStyle/>
+          <a:p>
+            <a:pPr algn="l">
+              <a:lnSpc>
+                <a:spcPct val="122000"/>
+              </a:lnSpc>
+              <a:spcBef>
+                <a:spcPts val="0"/>
+              </a:spcBef>
+              <a:spcAft>
+                <a:spcPts val="0"/>
+              </a:spcAft>
+            </a:pPr>
+            <a:r>
+              <a:rPr sz="900" b="0" i="0">
+                <a:solidFill>
+                  <a:srgbClr val="666666"/>
+                </a:solidFill>
+                <a:latin typeface="Manrope"/>
+                <a:cs typeface="Manrope"/>
+                <a:ea typeface="Manrope"/>
+              </a:rPr>
+              <a:t>Модель отвечает только по фактам движка. Числа берутся</a:t>
+            </a:r>
+          </a:p>
+          <a:p>
+            <a:pPr algn="l">
+              <a:lnSpc>
+                <a:spcPct val="122000"/>
+              </a:lnSpc>
+              <a:spcBef>
+                <a:spcPts val="0"/>
+              </a:spcBef>
+              <a:spcAft>
+                <a:spcPts val="0"/>
+              </a:spcAft>
+            </a:pPr>
+            <a:r>
+              <a:rPr sz="900" b="0" i="0">
+                <a:solidFill>
+                  <a:srgbClr val="666666"/>
+                </a:solidFill>
+                <a:latin typeface="Manrope"/>
+                <a:cs typeface="Manrope"/>
+                <a:ea typeface="Manrope"/>
+              </a:rPr>
+              <a:t>из backend — их нельзя выдумать.</a:t>
+            </a:r>
+          </a:p>
+        </p:txBody>
+      </p:sp>
+      <p:sp>
+        <p:nvSpPr>
+          <p:cNvPr id="14" name="Rectangle 13"/>
           <p:cNvSpPr/>
           <p:nvPr/>
         </p:nvSpPr>
         <p:spPr>
           <a:xfrm>
-            <a:off x="4910327" y="4965192"/>
-            <a:ext cx="2134514" cy="1088136"/>
+            <a:off x="7836408" y="3178860"/>
+            <a:ext cx="3696919" cy="813104"/>
           </a:xfrm>
           <a:prstGeom prst="rect">
             <a:avLst/>
@@ -13920,14 +15345,58 @@
       </p:sp>
       <p:sp>
         <p:nvSpPr>
-          <p:cNvPr id="25" name="TextBox 24"/>
+          <p:cNvPr id="15" name="Rectangle 14"/>
+          <p:cNvSpPr/>
+          <p:nvPr/>
+        </p:nvSpPr>
+        <p:spPr>
+          <a:xfrm>
+            <a:off x="7836408" y="3178860"/>
+            <a:ext cx="41148" cy="813104"/>
+          </a:xfrm>
+          <a:prstGeom prst="rect">
+            <a:avLst/>
+          </a:prstGeom>
+          <a:solidFill>
+            <a:srgbClr val="83CDB7"/>
+          </a:solidFill>
+          <a:ln>
+            <a:noFill/>
+          </a:ln>
+          <a:effectLst/>
+        </p:spPr>
+        <p:style>
+          <a:lnRef idx="1">
+            <a:schemeClr val="accent1"/>
+          </a:lnRef>
+          <a:fillRef idx="3">
+            <a:schemeClr val="accent1"/>
+          </a:fillRef>
+          <a:effectRef idx="2">
+            <a:schemeClr val="accent1"/>
+          </a:effectRef>
+          <a:fontRef idx="minor">
+            <a:schemeClr val="lt1"/>
+          </a:fontRef>
+        </p:style>
+        <p:txBody>
+          <a:bodyPr rtlCol="0" anchor="ctr"/>
+          <a:lstStyle/>
+          <a:p>
+            <a:pPr algn="ctr"/>
+          </a:p>
+        </p:txBody>
+      </p:sp>
+      <p:sp>
+        <p:nvSpPr>
+          <p:cNvPr id="16" name="TextBox 15"/>
           <p:cNvSpPr txBox="1"/>
           <p:nvPr/>
         </p:nvSpPr>
         <p:spPr>
           <a:xfrm>
-            <a:off x="5038343" y="5093208"/>
-            <a:ext cx="1878482" cy="130048"/>
+            <a:off x="8019288" y="3279444"/>
+            <a:ext cx="3331159" cy="169164"/>
           </a:xfrm>
           <a:prstGeom prst="rect">
             <a:avLst/>
@@ -13942,39 +15411,39 @@
           <a:p>
             <a:pPr algn="l">
               <a:lnSpc>
-                <a:spcPct val="110000"/>
-              </a:lnSpc>
-              <a:spcBef>
-                <a:spcPts val="0"/>
-              </a:spcBef>
-              <a:spcAft>
-                <a:spcPts val="0"/>
-              </a:spcAft>
-            </a:pPr>
-            <a:r>
-              <a:rPr sz="800" b="1" i="0">
-                <a:solidFill>
-                  <a:srgbClr val="666666"/>
+                <a:spcPct val="108000"/>
+              </a:lnSpc>
+              <a:spcBef>
+                <a:spcPts val="0"/>
+              </a:spcBef>
+              <a:spcAft>
+                <a:spcPts val="0"/>
+              </a:spcAft>
+            </a:pPr>
+            <a:r>
+              <a:rPr sz="1100" b="1" i="0">
+                <a:solidFill>
+                  <a:srgbClr val="1A1A1A"/>
                 </a:solidFill>
                 <a:latin typeface="Manrope SemiBold"/>
                 <a:cs typeface="Manrope SemiBold"/>
                 <a:ea typeface="Manrope SemiBold"/>
               </a:rPr>
-              <a:t>ВЫРУЧКА ПОД РИСКОМ</a:t>
-            </a:r>
-          </a:p>
-        </p:txBody>
-      </p:sp>
-      <p:sp>
-        <p:nvSpPr>
-          <p:cNvPr id="26" name="TextBox 25"/>
+              <a:t>Проверка после генерации</a:t>
+            </a:r>
+          </a:p>
+        </p:txBody>
+      </p:sp>
+      <p:sp>
+        <p:nvSpPr>
+          <p:cNvPr id="17" name="TextBox 16"/>
           <p:cNvSpPr txBox="1"/>
           <p:nvPr/>
         </p:nvSpPr>
         <p:spPr>
           <a:xfrm>
-            <a:off x="5038343" y="5330952"/>
-            <a:ext cx="1878482" cy="221487"/>
+            <a:off x="8019288" y="3485184"/>
+            <a:ext cx="3331159" cy="297180"/>
           </a:xfrm>
           <a:prstGeom prst="rect">
             <a:avLst/>
@@ -13989,64 +15458,41 @@
           <a:p>
             <a:pPr algn="l">
               <a:lnSpc>
-                <a:spcPct val="100000"/>
-              </a:lnSpc>
-              <a:spcBef>
-                <a:spcPts val="0"/>
-              </a:spcBef>
-              <a:spcAft>
-                <a:spcPts val="0"/>
-              </a:spcAft>
-            </a:pPr>
-            <a:r>
-              <a:rPr sz="1600" b="1" i="0">
-                <a:solidFill>
-                  <a:srgbClr val="B84A00"/>
+                <a:spcPct val="122000"/>
+              </a:lnSpc>
+              <a:spcBef>
+                <a:spcPts val="0"/>
+              </a:spcBef>
+              <a:spcAft>
+                <a:spcPts val="0"/>
+              </a:spcAft>
+            </a:pPr>
+            <a:r>
+              <a:rPr sz="900" b="0" i="0">
+                <a:solidFill>
+                  <a:srgbClr val="666666"/>
                 </a:solidFill>
                 <a:latin typeface="Manrope"/>
                 <a:cs typeface="Manrope"/>
                 <a:ea typeface="Manrope"/>
               </a:rPr>
-              <a:t>5,80 €</a:t>
-            </a:r>
-          </a:p>
-        </p:txBody>
-      </p:sp>
-      <p:sp>
-        <p:nvSpPr>
-          <p:cNvPr id="27" name="TextBox 26"/>
-          <p:cNvSpPr txBox="1"/>
-          <p:nvPr/>
-        </p:nvSpPr>
-        <p:spPr>
-          <a:xfrm>
-            <a:off x="5038343" y="5641848"/>
-            <a:ext cx="1878482" cy="142430"/>
-          </a:xfrm>
-          <a:prstGeom prst="rect">
-            <a:avLst/>
-          </a:prstGeom>
-          <a:noFill/>
-        </p:spPr>
-        <p:txBody>
-          <a:bodyPr wrap="square" anchor="t" lIns="0" rIns="0" tIns="0" bIns="0">
-            <a:spAutoFit/>
-          </a:bodyPr>
-          <a:lstStyle/>
-          <a:p>
-            <a:pPr algn="l">
-              <a:lnSpc>
-                <a:spcPct val="115000"/>
-              </a:lnSpc>
-              <a:spcBef>
-                <a:spcPts val="0"/>
-              </a:spcBef>
-              <a:spcAft>
-                <a:spcPts val="0"/>
-              </a:spcAft>
-            </a:pPr>
-            <a:r>
-              <a:rPr sz="850" b="0" i="0">
+              <a:t>Если модель называет число вне фактов, оно удаляется</a:t>
+            </a:r>
+          </a:p>
+          <a:p>
+            <a:pPr algn="l">
+              <a:lnSpc>
+                <a:spcPct val="122000"/>
+              </a:lnSpc>
+              <a:spcBef>
+                <a:spcPts val="0"/>
+              </a:spcBef>
+              <a:spcAft>
+                <a:spcPts val="0"/>
+              </a:spcAft>
+            </a:pPr>
+            <a:r>
+              <a:rPr sz="900" b="0" i="0">
                 <a:solidFill>
                   <a:srgbClr val="666666"/>
                 </a:solidFill>
@@ -14054,21 +15500,21 @@
                 <a:cs typeface="Manrope"/>
                 <a:ea typeface="Manrope"/>
               </a:rPr>
-              <a:t>прогнозная экспозиция</a:t>
-            </a:r>
-          </a:p>
-        </p:txBody>
-      </p:sp>
-      <p:sp>
-        <p:nvSpPr>
-          <p:cNvPr id="28" name="Rectangle 27"/>
+              <a:t>автоматически. Это видно прямо в интерфейсе.</a:t>
+            </a:r>
+          </a:p>
+        </p:txBody>
+      </p:sp>
+      <p:sp>
+        <p:nvSpPr>
+          <p:cNvPr id="18" name="Rectangle 17"/>
           <p:cNvSpPr/>
           <p:nvPr/>
         </p:nvSpPr>
         <p:spPr>
           <a:xfrm>
-            <a:off x="7154569" y="4965192"/>
-            <a:ext cx="2134514" cy="1088136"/>
+            <a:off x="7836408" y="4060544"/>
+            <a:ext cx="3696919" cy="813104"/>
           </a:xfrm>
           <a:prstGeom prst="rect">
             <a:avLst/>
@@ -14107,14 +15553,58 @@
       </p:sp>
       <p:sp>
         <p:nvSpPr>
-          <p:cNvPr id="29" name="TextBox 28"/>
+          <p:cNvPr id="19" name="Rectangle 18"/>
+          <p:cNvSpPr/>
+          <p:nvPr/>
+        </p:nvSpPr>
+        <p:spPr>
+          <a:xfrm>
+            <a:off x="7836408" y="4060544"/>
+            <a:ext cx="41148" cy="813104"/>
+          </a:xfrm>
+          <a:prstGeom prst="rect">
+            <a:avLst/>
+          </a:prstGeom>
+          <a:solidFill>
+            <a:srgbClr val="83CDB7"/>
+          </a:solidFill>
+          <a:ln>
+            <a:noFill/>
+          </a:ln>
+          <a:effectLst/>
+        </p:spPr>
+        <p:style>
+          <a:lnRef idx="1">
+            <a:schemeClr val="accent1"/>
+          </a:lnRef>
+          <a:fillRef idx="3">
+            <a:schemeClr val="accent1"/>
+          </a:fillRef>
+          <a:effectRef idx="2">
+            <a:schemeClr val="accent1"/>
+          </a:effectRef>
+          <a:fontRef idx="minor">
+            <a:schemeClr val="lt1"/>
+          </a:fontRef>
+        </p:style>
+        <p:txBody>
+          <a:bodyPr rtlCol="0" anchor="ctr"/>
+          <a:lstStyle/>
+          <a:p>
+            <a:pPr algn="ctr"/>
+          </a:p>
+        </p:txBody>
+      </p:sp>
+      <p:sp>
+        <p:nvSpPr>
+          <p:cNvPr id="20" name="TextBox 19"/>
           <p:cNvSpPr txBox="1"/>
           <p:nvPr/>
         </p:nvSpPr>
         <p:spPr>
           <a:xfrm>
-            <a:off x="7282585" y="5093208"/>
-            <a:ext cx="1878482" cy="130048"/>
+            <a:off x="8019288" y="4161128"/>
+            <a:ext cx="3331159" cy="169164"/>
           </a:xfrm>
           <a:prstGeom prst="rect">
             <a:avLst/>
@@ -14129,39 +15619,39 @@
           <a:p>
             <a:pPr algn="l">
               <a:lnSpc>
-                <a:spcPct val="110000"/>
-              </a:lnSpc>
-              <a:spcBef>
-                <a:spcPts val="0"/>
-              </a:spcBef>
-              <a:spcAft>
-                <a:spcPts val="0"/>
-              </a:spcAft>
-            </a:pPr>
-            <a:r>
-              <a:rPr sz="800" b="1" i="0">
-                <a:solidFill>
-                  <a:srgbClr val="666666"/>
+                <a:spcPct val="108000"/>
+              </a:lnSpc>
+              <a:spcBef>
+                <a:spcPts val="0"/>
+              </a:spcBef>
+              <a:spcAft>
+                <a:spcPts val="0"/>
+              </a:spcAft>
+            </a:pPr>
+            <a:r>
+              <a:rPr sz="1100" b="1" i="0">
+                <a:solidFill>
+                  <a:srgbClr val="1A1A1A"/>
                 </a:solidFill>
                 <a:latin typeface="Manrope SemiBold"/>
                 <a:cs typeface="Manrope SemiBold"/>
                 <a:ea typeface="Manrope SemiBold"/>
               </a:rPr>
-              <a:t>ПРЕДСТОЯЩИЕ ПРОДЛЕНИЯ</a:t>
-            </a:r>
-          </a:p>
-        </p:txBody>
-      </p:sp>
-      <p:sp>
-        <p:nvSpPr>
-          <p:cNvPr id="30" name="TextBox 29"/>
+              <a:t>Приватность</a:t>
+            </a:r>
+          </a:p>
+        </p:txBody>
+      </p:sp>
+      <p:sp>
+        <p:nvSpPr>
+          <p:cNvPr id="21" name="TextBox 20"/>
           <p:cNvSpPr txBox="1"/>
           <p:nvPr/>
         </p:nvSpPr>
         <p:spPr>
           <a:xfrm>
-            <a:off x="7282585" y="5330952"/>
-            <a:ext cx="1878482" cy="221487"/>
+            <a:off x="8019288" y="4366868"/>
+            <a:ext cx="3331159" cy="436626"/>
           </a:xfrm>
           <a:prstGeom prst="rect">
             <a:avLst/>
@@ -14176,64 +15666,41 @@
           <a:p>
             <a:pPr algn="l">
               <a:lnSpc>
-                <a:spcPct val="100000"/>
-              </a:lnSpc>
-              <a:spcBef>
-                <a:spcPts val="0"/>
-              </a:spcBef>
-              <a:spcAft>
-                <a:spcPts val="0"/>
-              </a:spcAft>
-            </a:pPr>
-            <a:r>
-              <a:rPr sz="1600" b="1" i="0">
-                <a:solidFill>
-                  <a:srgbClr val="1A1A1A"/>
+                <a:spcPct val="122000"/>
+              </a:lnSpc>
+              <a:spcBef>
+                <a:spcPts val="0"/>
+              </a:spcBef>
+              <a:spcAft>
+                <a:spcPts val="0"/>
+              </a:spcAft>
+            </a:pPr>
+            <a:r>
+              <a:rPr sz="900" b="0" i="0">
+                <a:solidFill>
+                  <a:srgbClr val="666666"/>
                 </a:solidFill>
                 <a:latin typeface="Manrope"/>
                 <a:cs typeface="Manrope"/>
                 <a:ea typeface="Manrope"/>
               </a:rPr>
-              <a:t>17,03 €</a:t>
-            </a:r>
-          </a:p>
-        </p:txBody>
-      </p:sp>
-      <p:sp>
-        <p:nvSpPr>
-          <p:cNvPr id="31" name="TextBox 30"/>
-          <p:cNvSpPr txBox="1"/>
-          <p:nvPr/>
-        </p:nvSpPr>
-        <p:spPr>
-          <a:xfrm>
-            <a:off x="7282585" y="5641848"/>
-            <a:ext cx="1878482" cy="142430"/>
-          </a:xfrm>
-          <a:prstGeom prst="rect">
-            <a:avLst/>
-          </a:prstGeom>
-          <a:noFill/>
-        </p:spPr>
-        <p:txBody>
-          <a:bodyPr wrap="square" anchor="t" lIns="0" rIns="0" tIns="0" bIns="0">
-            <a:spAutoFit/>
-          </a:bodyPr>
-          <a:lstStyle/>
-          <a:p>
-            <a:pPr algn="l">
-              <a:lnSpc>
-                <a:spcPct val="115000"/>
-              </a:lnSpc>
-              <a:spcBef>
-                <a:spcPts val="0"/>
-              </a:spcBef>
-              <a:spcAft>
-                <a:spcPts val="0"/>
-              </a:spcAft>
-            </a:pPr>
-            <a:r>
-              <a:rPr sz="850" b="0" i="0">
+              <a:t>Провайдер только loopback, внешние AI-API не</a:t>
+            </a:r>
+          </a:p>
+          <a:p>
+            <a:pPr algn="l">
+              <a:lnSpc>
+                <a:spcPct val="122000"/>
+              </a:lnSpc>
+              <a:spcBef>
+                <a:spcPts val="0"/>
+              </a:spcBef>
+              <a:spcAft>
+                <a:spcPts val="0"/>
+              </a:spcAft>
+            </a:pPr>
+            <a:r>
+              <a:rPr sz="900" b="0" i="0">
                 <a:solidFill>
                   <a:srgbClr val="666666"/>
                 </a:solidFill>
@@ -14241,21 +15708,45 @@
                 <a:cs typeface="Manrope"/>
                 <a:ea typeface="Manrope"/>
               </a:rPr>
-              <a:t>сумма без учёта риска</a:t>
-            </a:r>
-          </a:p>
-        </p:txBody>
-      </p:sp>
-      <p:sp>
-        <p:nvSpPr>
-          <p:cNvPr id="32" name="Rectangle 31"/>
+              <a:t>используются. В контекст попадают лишь данные,</a:t>
+            </a:r>
+          </a:p>
+          <a:p>
+            <a:pPr algn="l">
+              <a:lnSpc>
+                <a:spcPct val="122000"/>
+              </a:lnSpc>
+              <a:spcBef>
+                <a:spcPts val="0"/>
+              </a:spcBef>
+              <a:spcAft>
+                <a:spcPts val="0"/>
+              </a:spcAft>
+            </a:pPr>
+            <a:r>
+              <a:rPr sz="900" b="0" i="0">
+                <a:solidFill>
+                  <a:srgbClr val="666666"/>
+                </a:solidFill>
+                <a:latin typeface="Manrope"/>
+                <a:cs typeface="Manrope"/>
+                <a:ea typeface="Manrope"/>
+              </a:rPr>
+              <a:t>доступные пользователю.</a:t>
+            </a:r>
+          </a:p>
+        </p:txBody>
+      </p:sp>
+      <p:sp>
+        <p:nvSpPr>
+          <p:cNvPr id="22" name="Rectangle 21"/>
           <p:cNvSpPr/>
           <p:nvPr/>
         </p:nvSpPr>
         <p:spPr>
           <a:xfrm>
-            <a:off x="9398811" y="4965192"/>
-            <a:ext cx="2134514" cy="1088136"/>
+            <a:off x="7836408" y="4942228"/>
+            <a:ext cx="3696919" cy="813104"/>
           </a:xfrm>
           <a:prstGeom prst="rect">
             <a:avLst/>
@@ -14294,14 +15785,58 @@
       </p:sp>
       <p:sp>
         <p:nvSpPr>
-          <p:cNvPr id="33" name="TextBox 32"/>
+          <p:cNvPr id="23" name="Rectangle 22"/>
+          <p:cNvSpPr/>
+          <p:nvPr/>
+        </p:nvSpPr>
+        <p:spPr>
+          <a:xfrm>
+            <a:off x="7836408" y="4942228"/>
+            <a:ext cx="41148" cy="813104"/>
+          </a:xfrm>
+          <a:prstGeom prst="rect">
+            <a:avLst/>
+          </a:prstGeom>
+          <a:solidFill>
+            <a:srgbClr val="83CDB7"/>
+          </a:solidFill>
+          <a:ln>
+            <a:noFill/>
+          </a:ln>
+          <a:effectLst/>
+        </p:spPr>
+        <p:style>
+          <a:lnRef idx="1">
+            <a:schemeClr val="accent1"/>
+          </a:lnRef>
+          <a:fillRef idx="3">
+            <a:schemeClr val="accent1"/>
+          </a:fillRef>
+          <a:effectRef idx="2">
+            <a:schemeClr val="accent1"/>
+          </a:effectRef>
+          <a:fontRef idx="minor">
+            <a:schemeClr val="lt1"/>
+          </a:fontRef>
+        </p:style>
+        <p:txBody>
+          <a:bodyPr rtlCol="0" anchor="ctr"/>
+          <a:lstStyle/>
+          <a:p>
+            <a:pPr algn="ctr"/>
+          </a:p>
+        </p:txBody>
+      </p:sp>
+      <p:sp>
+        <p:nvSpPr>
+          <p:cNvPr id="24" name="TextBox 23"/>
           <p:cNvSpPr txBox="1"/>
           <p:nvPr/>
         </p:nvSpPr>
         <p:spPr>
           <a:xfrm>
-            <a:off x="9526827" y="5093208"/>
-            <a:ext cx="1878482" cy="130048"/>
+            <a:off x="8019288" y="5042812"/>
+            <a:ext cx="3331159" cy="169164"/>
           </a:xfrm>
           <a:prstGeom prst="rect">
             <a:avLst/>
@@ -14316,39 +15851,39 @@
           <a:p>
             <a:pPr algn="l">
               <a:lnSpc>
-                <a:spcPct val="110000"/>
-              </a:lnSpc>
-              <a:spcBef>
-                <a:spcPts val="0"/>
-              </a:spcBef>
-              <a:spcAft>
-                <a:spcPts val="0"/>
-              </a:spcAft>
-            </a:pPr>
-            <a:r>
-              <a:rPr sz="800" b="1" i="0">
-                <a:solidFill>
-                  <a:srgbClr val="666666"/>
+                <a:spcPct val="108000"/>
+              </a:lnSpc>
+              <a:spcBef>
+                <a:spcPts val="0"/>
+              </a:spcBef>
+              <a:spcAft>
+                <a:spcPts val="0"/>
+              </a:spcAft>
+            </a:pPr>
+            <a:r>
+              <a:rPr sz="1100" b="1" i="0">
+                <a:solidFill>
+                  <a:srgbClr val="1A1A1A"/>
                 </a:solidFill>
                 <a:latin typeface="Manrope SemiBold"/>
                 <a:cs typeface="Manrope SemiBold"/>
                 <a:ea typeface="Manrope SemiBold"/>
               </a:rPr>
-              <a:t>ИСТОРИЧЕСКИЕ ПОПОЛНЕНИЯ</a:t>
-            </a:r>
-          </a:p>
-        </p:txBody>
-      </p:sp>
-      <p:sp>
-        <p:nvSpPr>
-          <p:cNvPr id="34" name="TextBox 33"/>
+              <a:t>Аналитика без AI</a:t>
+            </a:r>
+          </a:p>
+        </p:txBody>
+      </p:sp>
+      <p:sp>
+        <p:nvSpPr>
+          <p:cNvPr id="25" name="TextBox 24"/>
           <p:cNvSpPr txBox="1"/>
           <p:nvPr/>
         </p:nvSpPr>
         <p:spPr>
           <a:xfrm>
-            <a:off x="9526827" y="5330952"/>
-            <a:ext cx="1878482" cy="221487"/>
+            <a:off x="8019288" y="5248552"/>
+            <a:ext cx="3331159" cy="297180"/>
           </a:xfrm>
           <a:prstGeom prst="rect">
             <a:avLst/>
@@ -14363,17 +15898,17 @@
           <a:p>
             <a:pPr algn="l">
               <a:lnSpc>
-                <a:spcPct val="100000"/>
-              </a:lnSpc>
-              <a:spcBef>
-                <a:spcPts val="0"/>
-              </a:spcBef>
-              <a:spcAft>
-                <a:spcPts val="0"/>
-              </a:spcAft>
-            </a:pPr>
-            <a:r>
-              <a:rPr sz="1600" b="1" i="0">
+                <a:spcPct val="122000"/>
+              </a:lnSpc>
+              <a:spcBef>
+                <a:spcPts val="0"/>
+              </a:spcBef>
+              <a:spcAft>
+                <a:spcPts val="0"/>
+              </a:spcAft>
+            </a:pPr>
+            <a:r>
+              <a:rPr sz="900" b="0" i="0">
                 <a:solidFill>
                   <a:srgbClr val="666666"/>
                 </a:solidFill>
@@ -14381,46 +15916,23 @@
                 <a:cs typeface="Manrope"/>
                 <a:ea typeface="Manrope"/>
               </a:rPr>
-              <a:t>22 240,73 €</a:t>
-            </a:r>
-          </a:p>
-        </p:txBody>
-      </p:sp>
-      <p:sp>
-        <p:nvSpPr>
-          <p:cNvPr id="35" name="TextBox 34"/>
-          <p:cNvSpPr txBox="1"/>
-          <p:nvPr/>
-        </p:nvSpPr>
-        <p:spPr>
-          <a:xfrm>
-            <a:off x="9526827" y="5641848"/>
-            <a:ext cx="1878482" cy="142430"/>
-          </a:xfrm>
-          <a:prstGeom prst="rect">
-            <a:avLst/>
-          </a:prstGeom>
-          <a:noFill/>
-        </p:spPr>
-        <p:txBody>
-          <a:bodyPr wrap="square" anchor="t" lIns="0" rIns="0" tIns="0" bIns="0">
-            <a:spAutoFit/>
-          </a:bodyPr>
-          <a:lstStyle/>
-          <a:p>
-            <a:pPr algn="l">
-              <a:lnSpc>
-                <a:spcPct val="115000"/>
-              </a:lnSpc>
-              <a:spcBef>
-                <a:spcPts val="0"/>
-              </a:spcBef>
-              <a:spcAft>
-                <a:spcPts val="0"/>
-              </a:spcAft>
-            </a:pPr>
-            <a:r>
-              <a:rPr sz="850" b="0" i="0">
+              <a:t>Если модель недоступна, аналитика продолжает работать:</a:t>
+            </a:r>
+          </a:p>
+          <a:p>
+            <a:pPr algn="l">
+              <a:lnSpc>
+                <a:spcPct val="122000"/>
+              </a:lnSpc>
+              <a:spcBef>
+                <a:spcPts val="0"/>
+              </a:spcBef>
+              <a:spcAft>
+                <a:spcPts val="0"/>
+              </a:spcAft>
+            </a:pPr>
+            <a:r>
+              <a:rPr sz="900" b="0" i="0">
                 <a:solidFill>
                   <a:srgbClr val="666666"/>
                 </a:solidFill>
@@ -14428,14 +15940,14 @@
                 <a:cs typeface="Manrope"/>
                 <a:ea typeface="Manrope"/>
               </a:rPr>
-              <a:t>справочно, не суммируется</a:t>
-            </a:r>
-          </a:p>
-        </p:txBody>
-      </p:sp>
-      <p:sp>
-        <p:nvSpPr>
-          <p:cNvPr id="36" name="Rectangle 35"/>
+              <a:t>AI — слой объяснения, а не источник чисел.</a:t>
+            </a:r>
+          </a:p>
+        </p:txBody>
+      </p:sp>
+      <p:sp>
+        <p:nvSpPr>
+          <p:cNvPr id="26" name="Rectangle 25"/>
           <p:cNvSpPr/>
           <p:nvPr/>
         </p:nvSpPr>
@@ -14479,7 +15991,7 @@
       </p:sp>
       <p:sp>
         <p:nvSpPr>
-          <p:cNvPr id="37" name="TextBox 36"/>
+          <p:cNvPr id="27" name="TextBox 26"/>
           <p:cNvSpPr txBox="1"/>
           <p:nvPr/>
         </p:nvSpPr>
@@ -14519,7 +16031,7 @@
                 <a:cs typeface="Manrope"/>
                 <a:ea typeface="Manrope"/>
               </a:rPr>
-              <a:t>Горизонт 30 дней. Сумма по 4 продлениям: 0,36 + 0,70 + 1,81 + 2,93 = 5,80 €. Оценка не является гарантированным прогнозом потерь.</a:t>
+              <a:t>Проверено живым запуском: Ollama + qwen2.5:3b-instruct на CPU, 5 эндпоинта под авторизацией, ответ grounded=true. Балл риска — индекс, а не вероятность оттока.</a:t>
             </a:r>
           </a:p>
         </p:txBody>
@@ -14628,7 +16140,7 @@
                 <a:cs typeface="Manrope"/>
                 <a:ea typeface="Manrope"/>
               </a:rPr>
-              <a:t>СКВОЗНОЙ СЦЕНАРИЙ · ШАГ 4–5</a:t>
+              <a:t>ДЕНЕЖНАЯ ОЦЕНКА</a:t>
             </a:r>
           </a:p>
         </p:txBody>
@@ -14675,7 +16187,7 @@
                 <a:cs typeface="Manrope"/>
                 <a:ea typeface="Manrope"/>
               </a:rPr>
-              <a:t>Меняем вес — результат пересчитывается</a:t>
+              <a:t>Риск и деньги — разные величины</a:t>
             </a:r>
           </a:p>
         </p:txBody>
@@ -14722,7 +16234,7 @@
                 <a:cs typeface="Manrope"/>
                 <a:ea typeface="Manrope"/>
               </a:rPr>
-              <a:t>Гипотеза до изменения: усилим «близость даты окончания» с 3,0 до 9,0 — баллы вырастут. Проверяем на реальном</a:t>
+              <a:t>Выручка под риском = стоимость продления × балл риска / 100, и только для открытых услуг с продлением внутри</a:t>
             </a:r>
           </a:p>
           <a:p>
@@ -14746,7 +16258,7 @@
                 <a:cs typeface="Manrope"/>
                 <a:ea typeface="Manrope"/>
               </a:rPr>
-              <a:t>интерфейсе.</a:t>
+              <a:t>горизонта.</a:t>
             </a:r>
           </a:p>
         </p:txBody>
@@ -14760,7 +16272,156 @@
         <p:spPr>
           <a:xfrm>
             <a:off x="658368" y="2075688"/>
-            <a:ext cx="10874959" cy="420624"/>
+            <a:ext cx="10874959" cy="768096"/>
+          </a:xfrm>
+          <a:prstGeom prst="rect">
+            <a:avLst/>
+          </a:prstGeom>
+          <a:solidFill>
+            <a:srgbClr val="131313"/>
+          </a:solidFill>
+          <a:ln>
+            <a:noFill/>
+          </a:ln>
+          <a:effectLst/>
+        </p:spPr>
+        <p:style>
+          <a:lnRef idx="1">
+            <a:schemeClr val="accent1"/>
+          </a:lnRef>
+          <a:fillRef idx="3">
+            <a:schemeClr val="accent1"/>
+          </a:fillRef>
+          <a:effectRef idx="2">
+            <a:schemeClr val="accent1"/>
+          </a:effectRef>
+          <a:fontRef idx="minor">
+            <a:schemeClr val="lt1"/>
+          </a:fontRef>
+        </p:style>
+        <p:txBody>
+          <a:bodyPr rtlCol="0" anchor="ctr"/>
+          <a:lstStyle/>
+          <a:p>
+            <a:pPr algn="ctr"/>
+          </a:p>
+        </p:txBody>
+      </p:sp>
+      <p:sp>
+        <p:nvSpPr>
+          <p:cNvPr id="7" name="TextBox 6"/>
+          <p:cNvSpPr txBox="1"/>
+          <p:nvPr/>
+        </p:nvSpPr>
+        <p:spPr>
+          <a:xfrm>
+            <a:off x="932688" y="2212848"/>
+            <a:ext cx="6583680" cy="512064"/>
+          </a:xfrm>
+          <a:prstGeom prst="rect">
+            <a:avLst/>
+          </a:prstGeom>
+          <a:noFill/>
+        </p:spPr>
+        <p:txBody>
+          <a:bodyPr wrap="square" anchor="t" lIns="0" rIns="0" tIns="0" bIns="0">
+            <a:spAutoFit/>
+          </a:bodyPr>
+          <a:lstStyle/>
+          <a:p>
+            <a:pPr algn="l">
+              <a:lnSpc>
+                <a:spcPct val="116000"/>
+              </a:lnSpc>
+              <a:spcBef>
+                <a:spcPts val="0"/>
+              </a:spcBef>
+              <a:spcAft>
+                <a:spcPts val="0"/>
+              </a:spcAft>
+            </a:pPr>
+            <a:r>
+              <a:rPr sz="1500" b="0">
+                <a:solidFill>
+                  <a:srgbClr val="C9C9C9"/>
+                </a:solidFill>
+                <a:latin typeface="Manrope Medium"/>
+                <a:cs typeface="Manrope Medium"/>
+                <a:ea typeface="Manrope Medium"/>
+              </a:rPr>
+              <a:t>выручка под риском  </a:t>
+            </a:r>
+            <a:r>
+              <a:rPr sz="1500" b="1">
+                <a:solidFill>
+                  <a:srgbClr val="FFFFFF"/>
+                </a:solidFill>
+                <a:latin typeface="Manrope SemiBold"/>
+                <a:cs typeface="Manrope SemiBold"/>
+                <a:ea typeface="Manrope SemiBold"/>
+              </a:rPr>
+              <a:t>=  стоимость продления × балл риска / 100</a:t>
+            </a:r>
+          </a:p>
+        </p:txBody>
+      </p:sp>
+      <p:sp>
+        <p:nvSpPr>
+          <p:cNvPr id="8" name="TextBox 7"/>
+          <p:cNvSpPr txBox="1"/>
+          <p:nvPr/>
+        </p:nvSpPr>
+        <p:spPr>
+          <a:xfrm>
+            <a:off x="8065008" y="2295144"/>
+            <a:ext cx="3193999" cy="170687"/>
+          </a:xfrm>
+          <a:prstGeom prst="rect">
+            <a:avLst/>
+          </a:prstGeom>
+          <a:noFill/>
+        </p:spPr>
+        <p:txBody>
+          <a:bodyPr wrap="square" anchor="t" lIns="0" rIns="0" tIns="0" bIns="0">
+            <a:spAutoFit/>
+          </a:bodyPr>
+          <a:lstStyle/>
+          <a:p>
+            <a:pPr algn="l">
+              <a:lnSpc>
+                <a:spcPct val="120000"/>
+              </a:lnSpc>
+              <a:spcBef>
+                <a:spcPts val="0"/>
+              </a:spcBef>
+              <a:spcAft>
+                <a:spcPts val="0"/>
+              </a:spcAft>
+            </a:pPr>
+            <a:r>
+              <a:rPr sz="1000" b="0" i="0">
+                <a:solidFill>
+                  <a:srgbClr val="83CDB7"/>
+                </a:solidFill>
+                <a:latin typeface="Manrope Medium"/>
+                <a:cs typeface="Manrope Medium"/>
+                <a:ea typeface="Manrope Medium"/>
+              </a:rPr>
+              <a:t>Баланс в формулу не входит</a:t>
+            </a:r>
+          </a:p>
+        </p:txBody>
+      </p:sp>
+      <p:sp>
+        <p:nvSpPr>
+          <p:cNvPr id="9" name="Rectangle 8"/>
+          <p:cNvSpPr/>
+          <p:nvPr/>
+        </p:nvSpPr>
+        <p:spPr>
+          <a:xfrm>
+            <a:off x="658368" y="3118104"/>
+            <a:ext cx="3977639" cy="2935224"/>
           </a:xfrm>
           <a:prstGeom prst="rect">
             <a:avLst/>
@@ -14799,58 +16460,14 @@
       </p:sp>
       <p:sp>
         <p:nvSpPr>
-          <p:cNvPr id="7" name="Rectangle 6"/>
-          <p:cNvSpPr/>
-          <p:nvPr/>
-        </p:nvSpPr>
-        <p:spPr>
-          <a:xfrm>
-            <a:off x="658368" y="2075688"/>
-            <a:ext cx="41148" cy="420624"/>
-          </a:xfrm>
-          <a:prstGeom prst="rect">
-            <a:avLst/>
-          </a:prstGeom>
-          <a:solidFill>
-            <a:srgbClr val="B84A00"/>
-          </a:solidFill>
-          <a:ln>
-            <a:noFill/>
-          </a:ln>
-          <a:effectLst/>
-        </p:spPr>
-        <p:style>
-          <a:lnRef idx="1">
-            <a:schemeClr val="accent1"/>
-          </a:lnRef>
-          <a:fillRef idx="3">
-            <a:schemeClr val="accent1"/>
-          </a:fillRef>
-          <a:effectRef idx="2">
-            <a:schemeClr val="accent1"/>
-          </a:effectRef>
-          <a:fontRef idx="minor">
-            <a:schemeClr val="lt1"/>
-          </a:fontRef>
-        </p:style>
-        <p:txBody>
-          <a:bodyPr rtlCol="0" anchor="ctr"/>
-          <a:lstStyle/>
-          <a:p>
-            <a:pPr algn="ctr"/>
-          </a:p>
-        </p:txBody>
-      </p:sp>
-      <p:sp>
-        <p:nvSpPr>
-          <p:cNvPr id="8" name="TextBox 7"/>
+          <p:cNvPr id="10" name="TextBox 9"/>
           <p:cNvSpPr txBox="1"/>
           <p:nvPr/>
         </p:nvSpPr>
         <p:spPr>
           <a:xfrm>
-            <a:off x="877824" y="2176272"/>
-            <a:ext cx="10436047" cy="256032"/>
+            <a:off x="877824" y="3319272"/>
+            <a:ext cx="3538727" cy="359664"/>
           </a:xfrm>
           <a:prstGeom prst="rect">
             <a:avLst/>
@@ -14865,28 +16482,558 @@
           <a:p>
             <a:pPr algn="l">
               <a:lnSpc>
-                <a:spcPct val="116000"/>
-              </a:lnSpc>
-              <a:spcBef>
-                <a:spcPts val="0"/>
-              </a:spcBef>
-              <a:spcAft>
-                <a:spcPts val="0"/>
-              </a:spcAft>
-            </a:pPr>
-            <a:r>
-              <a:rPr sz="1100" b="1">
+                <a:spcPct val="112000"/>
+              </a:lnSpc>
+              <a:spcBef>
+                <a:spcPts val="0"/>
+              </a:spcBef>
+              <a:spcAft>
+                <a:spcPts val="0"/>
+              </a:spcAft>
+            </a:pPr>
+            <a:r>
+              <a:rPr sz="1200" b="1" i="0">
+                <a:solidFill>
+                  <a:srgbClr val="1A1A1A"/>
+                </a:solidFill>
+                <a:latin typeface="Manrope SemiBold"/>
+                <a:cs typeface="Manrope SemiBold"/>
+                <a:ea typeface="Manrope SemiBold"/>
+              </a:rPr>
+              <a:t>Клиент #10 — высокий риск, но 0,00 € под</a:t>
+            </a:r>
+          </a:p>
+          <a:p>
+            <a:pPr algn="l">
+              <a:lnSpc>
+                <a:spcPct val="112000"/>
+              </a:lnSpc>
+              <a:spcBef>
+                <a:spcPts val="0"/>
+              </a:spcBef>
+              <a:spcAft>
+                <a:spcPts val="0"/>
+              </a:spcAft>
+            </a:pPr>
+            <a:r>
+              <a:rPr sz="1200" b="1" i="0">
+                <a:solidFill>
+                  <a:srgbClr val="1A1A1A"/>
+                </a:solidFill>
+                <a:latin typeface="Manrope SemiBold"/>
+                <a:cs typeface="Manrope SemiBold"/>
+                <a:ea typeface="Manrope SemiBold"/>
+              </a:rPr>
+              <a:t>риском</a:t>
+            </a:r>
+          </a:p>
+        </p:txBody>
+      </p:sp>
+      <p:sp>
+        <p:nvSpPr>
+          <p:cNvPr id="11" name="TextBox 10"/>
+          <p:cNvSpPr txBox="1"/>
+          <p:nvPr/>
+        </p:nvSpPr>
+        <p:spPr>
+          <a:xfrm>
+            <a:off x="877824" y="3703320"/>
+            <a:ext cx="3538727" cy="131635"/>
+          </a:xfrm>
+          <a:prstGeom prst="rect">
+            <a:avLst/>
+          </a:prstGeom>
+          <a:noFill/>
+        </p:spPr>
+        <p:txBody>
+          <a:bodyPr wrap="square" anchor="t" lIns="0" rIns="0" tIns="0" bIns="0">
+            <a:spAutoFit/>
+          </a:bodyPr>
+          <a:lstStyle/>
+          <a:p>
+            <a:pPr algn="l">
+              <a:lnSpc>
+                <a:spcPct val="105000"/>
+              </a:lnSpc>
+              <a:spcBef>
+                <a:spcPts val="0"/>
+              </a:spcBef>
+              <a:spcAft>
+                <a:spcPts val="0"/>
+              </a:spcAft>
+            </a:pPr>
+            <a:r>
+              <a:rPr sz="850" b="1" i="0">
+                <a:solidFill>
+                  <a:srgbClr val="666666"/>
+                </a:solidFill>
+                <a:latin typeface="Manrope SemiBold"/>
+                <a:cs typeface="Manrope SemiBold"/>
+                <a:ea typeface="Manrope SemiBold"/>
+              </a:rPr>
+              <a:t>БАЛЛ РИСКА КЛИЕНТА</a:t>
+            </a:r>
+          </a:p>
+        </p:txBody>
+      </p:sp>
+      <p:sp>
+        <p:nvSpPr>
+          <p:cNvPr id="12" name="TextBox 11"/>
+          <p:cNvSpPr txBox="1"/>
+          <p:nvPr/>
+        </p:nvSpPr>
+        <p:spPr>
+          <a:xfrm>
+            <a:off x="877824" y="3858768"/>
+            <a:ext cx="3538727" cy="232600"/>
+          </a:xfrm>
+          <a:prstGeom prst="rect">
+            <a:avLst/>
+          </a:prstGeom>
+          <a:noFill/>
+        </p:spPr>
+        <p:txBody>
+          <a:bodyPr wrap="square" anchor="t" lIns="0" rIns="0" tIns="0" bIns="0">
+            <a:spAutoFit/>
+          </a:bodyPr>
+          <a:lstStyle/>
+          <a:p>
+            <a:pPr algn="l">
+              <a:lnSpc>
+                <a:spcPct val="125000"/>
+              </a:lnSpc>
+              <a:spcBef>
+                <a:spcPts val="0"/>
+              </a:spcBef>
+              <a:spcAft>
+                <a:spcPts val="0"/>
+              </a:spcAft>
+            </a:pPr>
+            <a:r>
+              <a:rPr sz="1350" b="1" i="0">
                 <a:solidFill>
                   <a:srgbClr val="B84A00"/>
+                </a:solidFill>
+                <a:latin typeface="Manrope SemiBold"/>
+                <a:cs typeface="Manrope SemiBold"/>
+                <a:ea typeface="Manrope SemiBold"/>
+              </a:rPr>
+              <a:t>71,4 / 100</a:t>
+            </a:r>
+          </a:p>
+        </p:txBody>
+      </p:sp>
+      <p:sp>
+        <p:nvSpPr>
+          <p:cNvPr id="13" name="TextBox 12"/>
+          <p:cNvSpPr txBox="1"/>
+          <p:nvPr/>
+        </p:nvSpPr>
+        <p:spPr>
+          <a:xfrm>
+            <a:off x="877824" y="4237672"/>
+            <a:ext cx="3538727" cy="131635"/>
+          </a:xfrm>
+          <a:prstGeom prst="rect">
+            <a:avLst/>
+          </a:prstGeom>
+          <a:noFill/>
+        </p:spPr>
+        <p:txBody>
+          <a:bodyPr wrap="square" anchor="t" lIns="0" rIns="0" tIns="0" bIns="0">
+            <a:spAutoFit/>
+          </a:bodyPr>
+          <a:lstStyle/>
+          <a:p>
+            <a:pPr algn="l">
+              <a:lnSpc>
+                <a:spcPct val="105000"/>
+              </a:lnSpc>
+              <a:spcBef>
+                <a:spcPts val="0"/>
+              </a:spcBef>
+              <a:spcAft>
+                <a:spcPts val="0"/>
+              </a:spcAft>
+            </a:pPr>
+            <a:r>
+              <a:rPr sz="850" b="1" i="0">
+                <a:solidFill>
+                  <a:srgbClr val="666666"/>
+                </a:solidFill>
+                <a:latin typeface="Manrope SemiBold"/>
+                <a:cs typeface="Manrope SemiBold"/>
+                <a:ea typeface="Manrope SemiBold"/>
+              </a:rPr>
+              <a:t>ВЫРУЧКА ПОД РИСКОМ</a:t>
+            </a:r>
+          </a:p>
+        </p:txBody>
+      </p:sp>
+      <p:sp>
+        <p:nvSpPr>
+          <p:cNvPr id="14" name="TextBox 13"/>
+          <p:cNvSpPr txBox="1"/>
+          <p:nvPr/>
+        </p:nvSpPr>
+        <p:spPr>
+          <a:xfrm>
+            <a:off x="877824" y="4393120"/>
+            <a:ext cx="3538727" cy="232600"/>
+          </a:xfrm>
+          <a:prstGeom prst="rect">
+            <a:avLst/>
+          </a:prstGeom>
+          <a:noFill/>
+        </p:spPr>
+        <p:txBody>
+          <a:bodyPr wrap="square" anchor="t" lIns="0" rIns="0" tIns="0" bIns="0">
+            <a:spAutoFit/>
+          </a:bodyPr>
+          <a:lstStyle/>
+          <a:p>
+            <a:pPr algn="l">
+              <a:lnSpc>
+                <a:spcPct val="125000"/>
+              </a:lnSpc>
+              <a:spcBef>
+                <a:spcPts val="0"/>
+              </a:spcBef>
+              <a:spcAft>
+                <a:spcPts val="0"/>
+              </a:spcAft>
+            </a:pPr>
+            <a:r>
+              <a:rPr sz="1350" b="1" i="0">
+                <a:solidFill>
+                  <a:srgbClr val="1A1A1A"/>
+                </a:solidFill>
+                <a:latin typeface="Manrope SemiBold"/>
+                <a:cs typeface="Manrope SemiBold"/>
+                <a:ea typeface="Manrope SemiBold"/>
+              </a:rPr>
+              <a:t>0,00 €</a:t>
+            </a:r>
+          </a:p>
+        </p:txBody>
+      </p:sp>
+      <p:sp>
+        <p:nvSpPr>
+          <p:cNvPr id="15" name="TextBox 14"/>
+          <p:cNvSpPr txBox="1"/>
+          <p:nvPr/>
+        </p:nvSpPr>
+        <p:spPr>
+          <a:xfrm>
+            <a:off x="877824" y="4772024"/>
+            <a:ext cx="3538727" cy="131635"/>
+          </a:xfrm>
+          <a:prstGeom prst="rect">
+            <a:avLst/>
+          </a:prstGeom>
+          <a:noFill/>
+        </p:spPr>
+        <p:txBody>
+          <a:bodyPr wrap="square" anchor="t" lIns="0" rIns="0" tIns="0" bIns="0">
+            <a:spAutoFit/>
+          </a:bodyPr>
+          <a:lstStyle/>
+          <a:p>
+            <a:pPr algn="l">
+              <a:lnSpc>
+                <a:spcPct val="105000"/>
+              </a:lnSpc>
+              <a:spcBef>
+                <a:spcPts val="0"/>
+              </a:spcBef>
+              <a:spcAft>
+                <a:spcPts val="0"/>
+              </a:spcAft>
+            </a:pPr>
+            <a:r>
+              <a:rPr sz="850" b="1" i="0">
+                <a:solidFill>
+                  <a:srgbClr val="666666"/>
+                </a:solidFill>
+                <a:latin typeface="Manrope SemiBold"/>
+                <a:cs typeface="Manrope SemiBold"/>
+                <a:ea typeface="Manrope SemiBold"/>
+              </a:rPr>
+              <a:t>ПОЧЕМУ НОЛЬ</a:t>
+            </a:r>
+          </a:p>
+        </p:txBody>
+      </p:sp>
+      <p:sp>
+        <p:nvSpPr>
+          <p:cNvPr id="16" name="TextBox 15"/>
+          <p:cNvSpPr txBox="1"/>
+          <p:nvPr/>
+        </p:nvSpPr>
+        <p:spPr>
+          <a:xfrm>
+            <a:off x="877824" y="4927472"/>
+            <a:ext cx="3538727" cy="169100"/>
+          </a:xfrm>
+          <a:prstGeom prst="rect">
+            <a:avLst/>
+          </a:prstGeom>
+          <a:noFill/>
+        </p:spPr>
+        <p:txBody>
+          <a:bodyPr wrap="square" anchor="t" lIns="0" rIns="0" tIns="0" bIns="0">
+            <a:spAutoFit/>
+          </a:bodyPr>
+          <a:lstStyle/>
+          <a:p>
+            <a:pPr algn="l">
+              <a:lnSpc>
+                <a:spcPct val="125000"/>
+              </a:lnSpc>
+              <a:spcBef>
+                <a:spcPts val="0"/>
+              </a:spcBef>
+              <a:spcAft>
+                <a:spcPts val="0"/>
+              </a:spcAft>
+            </a:pPr>
+            <a:r>
+              <a:rPr sz="950" b="0" i="0">
+                <a:solidFill>
+                  <a:srgbClr val="666666"/>
                 </a:solidFill>
                 <a:latin typeface="Manrope"/>
                 <a:cs typeface="Manrope"/>
                 <a:ea typeface="Manrope"/>
               </a:rPr>
-              <a:t>ГИПОТЕЗА ДО ИЗМЕНЕНИЯ   </a:t>
-            </a:r>
-            <a:r>
-              <a:rPr sz="1100" b="0">
+              <a:t>Сроки уже прошли — горизонт смотрит вперёд.</a:t>
+            </a:r>
+          </a:p>
+        </p:txBody>
+      </p:sp>
+      <p:sp>
+        <p:nvSpPr>
+          <p:cNvPr id="17" name="TextBox 16"/>
+          <p:cNvSpPr txBox="1"/>
+          <p:nvPr/>
+        </p:nvSpPr>
+        <p:spPr>
+          <a:xfrm>
+            <a:off x="877824" y="5242876"/>
+            <a:ext cx="3538727" cy="131635"/>
+          </a:xfrm>
+          <a:prstGeom prst="rect">
+            <a:avLst/>
+          </a:prstGeom>
+          <a:noFill/>
+        </p:spPr>
+        <p:txBody>
+          <a:bodyPr wrap="square" anchor="t" lIns="0" rIns="0" tIns="0" bIns="0">
+            <a:spAutoFit/>
+          </a:bodyPr>
+          <a:lstStyle/>
+          <a:p>
+            <a:pPr algn="l">
+              <a:lnSpc>
+                <a:spcPct val="105000"/>
+              </a:lnSpc>
+              <a:spcBef>
+                <a:spcPts val="0"/>
+              </a:spcBef>
+              <a:spcAft>
+                <a:spcPts val="0"/>
+              </a:spcAft>
+            </a:pPr>
+            <a:r>
+              <a:rPr sz="850" b="1" i="0">
+                <a:solidFill>
+                  <a:srgbClr val="666666"/>
+                </a:solidFill>
+                <a:latin typeface="Manrope SemiBold"/>
+                <a:cs typeface="Manrope SemiBold"/>
+                <a:ea typeface="Manrope SemiBold"/>
+              </a:rPr>
+              <a:t>БАЛАНС — НЕ ВЫРУЧКА</a:t>
+            </a:r>
+          </a:p>
+        </p:txBody>
+      </p:sp>
+      <p:sp>
+        <p:nvSpPr>
+          <p:cNvPr id="18" name="TextBox 17"/>
+          <p:cNvSpPr txBox="1"/>
+          <p:nvPr/>
+        </p:nvSpPr>
+        <p:spPr>
+          <a:xfrm>
+            <a:off x="877824" y="5398324"/>
+            <a:ext cx="3538727" cy="232600"/>
+          </a:xfrm>
+          <a:prstGeom prst="rect">
+            <a:avLst/>
+          </a:prstGeom>
+          <a:noFill/>
+        </p:spPr>
+        <p:txBody>
+          <a:bodyPr wrap="square" anchor="t" lIns="0" rIns="0" tIns="0" bIns="0">
+            <a:spAutoFit/>
+          </a:bodyPr>
+          <a:lstStyle/>
+          <a:p>
+            <a:pPr algn="l">
+              <a:lnSpc>
+                <a:spcPct val="125000"/>
+              </a:lnSpc>
+              <a:spcBef>
+                <a:spcPts val="0"/>
+              </a:spcBef>
+              <a:spcAft>
+                <a:spcPts val="0"/>
+              </a:spcAft>
+            </a:pPr>
+            <a:r>
+              <a:rPr sz="1350" b="1" i="0">
+                <a:solidFill>
+                  <a:srgbClr val="666666"/>
+                </a:solidFill>
+                <a:latin typeface="Manrope SemiBold"/>
+                <a:cs typeface="Manrope SemiBold"/>
+                <a:ea typeface="Manrope SemiBold"/>
+              </a:rPr>
+              <a:t>203,79 €</a:t>
+            </a:r>
+          </a:p>
+        </p:txBody>
+      </p:sp>
+      <p:sp>
+        <p:nvSpPr>
+          <p:cNvPr id="19" name="TextBox 18"/>
+          <p:cNvSpPr txBox="1"/>
+          <p:nvPr/>
+        </p:nvSpPr>
+        <p:spPr>
+          <a:xfrm>
+            <a:off x="877824" y="5777228"/>
+            <a:ext cx="3538727" cy="131635"/>
+          </a:xfrm>
+          <a:prstGeom prst="rect">
+            <a:avLst/>
+          </a:prstGeom>
+          <a:noFill/>
+        </p:spPr>
+        <p:txBody>
+          <a:bodyPr wrap="square" anchor="t" lIns="0" rIns="0" tIns="0" bIns="0">
+            <a:spAutoFit/>
+          </a:bodyPr>
+          <a:lstStyle/>
+          <a:p>
+            <a:pPr algn="l">
+              <a:lnSpc>
+                <a:spcPct val="105000"/>
+              </a:lnSpc>
+              <a:spcBef>
+                <a:spcPts val="0"/>
+              </a:spcBef>
+              <a:spcAft>
+                <a:spcPts val="0"/>
+              </a:spcAft>
+            </a:pPr>
+            <a:r>
+              <a:rPr sz="850" b="1" i="0">
+                <a:solidFill>
+                  <a:srgbClr val="666666"/>
+                </a:solidFill>
+                <a:latin typeface="Manrope SemiBold"/>
+                <a:cs typeface="Manrope SemiBold"/>
+                <a:ea typeface="Manrope SemiBold"/>
+              </a:rPr>
+              <a:t>ВСЕГО ПОПОЛНЕНО — СПРАВОЧНО</a:t>
+            </a:r>
+          </a:p>
+        </p:txBody>
+      </p:sp>
+      <p:sp>
+        <p:nvSpPr>
+          <p:cNvPr id="20" name="TextBox 19"/>
+          <p:cNvSpPr txBox="1"/>
+          <p:nvPr/>
+        </p:nvSpPr>
+        <p:spPr>
+          <a:xfrm>
+            <a:off x="877824" y="5932676"/>
+            <a:ext cx="3538727" cy="232600"/>
+          </a:xfrm>
+          <a:prstGeom prst="rect">
+            <a:avLst/>
+          </a:prstGeom>
+          <a:noFill/>
+        </p:spPr>
+        <p:txBody>
+          <a:bodyPr wrap="square" anchor="t" lIns="0" rIns="0" tIns="0" bIns="0">
+            <a:spAutoFit/>
+          </a:bodyPr>
+          <a:lstStyle/>
+          <a:p>
+            <a:pPr algn="l">
+              <a:lnSpc>
+                <a:spcPct val="125000"/>
+              </a:lnSpc>
+              <a:spcBef>
+                <a:spcPts val="0"/>
+              </a:spcBef>
+              <a:spcAft>
+                <a:spcPts val="0"/>
+              </a:spcAft>
+            </a:pPr>
+            <a:r>
+              <a:rPr sz="1350" b="1" i="0">
+                <a:solidFill>
+                  <a:srgbClr val="666666"/>
+                </a:solidFill>
+                <a:latin typeface="Manrope SemiBold"/>
+                <a:cs typeface="Manrope SemiBold"/>
+                <a:ea typeface="Manrope SemiBold"/>
+              </a:rPr>
+              <a:t>4 206,69 €</a:t>
+            </a:r>
+          </a:p>
+        </p:txBody>
+      </p:sp>
+      <p:sp>
+        <p:nvSpPr>
+          <p:cNvPr id="21" name="TextBox 20"/>
+          <p:cNvSpPr txBox="1"/>
+          <p:nvPr/>
+        </p:nvSpPr>
+        <p:spPr>
+          <a:xfrm>
+            <a:off x="4910327" y="3090672"/>
+            <a:ext cx="6623000" cy="151003"/>
+          </a:xfrm>
+          <a:prstGeom prst="rect">
+            <a:avLst/>
+          </a:prstGeom>
+          <a:noFill/>
+        </p:spPr>
+        <p:txBody>
+          <a:bodyPr wrap="square" anchor="t" lIns="0" rIns="0" tIns="0" bIns="0">
+            <a:spAutoFit/>
+          </a:bodyPr>
+          <a:lstStyle/>
+          <a:p>
+            <a:pPr algn="l">
+              <a:lnSpc>
+                <a:spcPct val="110000"/>
+              </a:lnSpc>
+              <a:spcBef>
+                <a:spcPts val="0"/>
+              </a:spcBef>
+              <a:spcAft>
+                <a:spcPts val="0"/>
+              </a:spcAft>
+            </a:pPr>
+            <a:r>
+              <a:rPr sz="950" b="1" i="0">
                 <a:solidFill>
                   <a:srgbClr val="666666"/>
                 </a:solidFill>
@@ -14894,115 +17041,21 @@
                 <a:cs typeface="Manrope"/>
                 <a:ea typeface="Manrope"/>
               </a:rPr>
-              <a:t>вес expiry_proximity 3,0 → 9,0 должен повысить баллы и число клиентов высокого риска</a:t>
-            </a:r>
-          </a:p>
-        </p:txBody>
-      </p:sp>
-      <p:sp>
-        <p:nvSpPr>
-          <p:cNvPr id="9" name="TextBox 8"/>
-          <p:cNvSpPr txBox="1"/>
-          <p:nvPr/>
-        </p:nvSpPr>
-        <p:spPr>
-          <a:xfrm>
-            <a:off x="658368" y="2734056"/>
-            <a:ext cx="5282031" cy="151003"/>
-          </a:xfrm>
-          <a:prstGeom prst="rect">
-            <a:avLst/>
-          </a:prstGeom>
-          <a:noFill/>
-        </p:spPr>
-        <p:txBody>
-          <a:bodyPr wrap="square" anchor="t" lIns="0" rIns="0" tIns="0" bIns="0">
-            <a:spAutoFit/>
-          </a:bodyPr>
-          <a:lstStyle/>
-          <a:p>
-            <a:pPr algn="l">
-              <a:lnSpc>
-                <a:spcPct val="110000"/>
-              </a:lnSpc>
-              <a:spcBef>
-                <a:spcPts val="0"/>
-              </a:spcBef>
-              <a:spcAft>
-                <a:spcPts val="0"/>
-              </a:spcAft>
-            </a:pPr>
-            <a:r>
-              <a:rPr sz="950" b="1" i="0">
-                <a:solidFill>
-                  <a:srgbClr val="666666"/>
-                </a:solidFill>
-                <a:latin typeface="Manrope"/>
-                <a:cs typeface="Manrope"/>
-                <a:ea typeface="Manrope"/>
-              </a:rPr>
-              <a:t>ДО · ВЕС 3,0</a:t>
-            </a:r>
-          </a:p>
-        </p:txBody>
-      </p:sp>
-      <p:sp>
-        <p:nvSpPr>
-          <p:cNvPr id="10" name="TextBox 9"/>
-          <p:cNvSpPr txBox="1"/>
-          <p:nvPr/>
-        </p:nvSpPr>
-        <p:spPr>
-          <a:xfrm>
-            <a:off x="6251295" y="2734056"/>
-            <a:ext cx="5282031" cy="151003"/>
-          </a:xfrm>
-          <a:prstGeom prst="rect">
-            <a:avLst/>
-          </a:prstGeom>
-          <a:noFill/>
-        </p:spPr>
-        <p:txBody>
-          <a:bodyPr wrap="square" anchor="t" lIns="0" rIns="0" tIns="0" bIns="0">
-            <a:spAutoFit/>
-          </a:bodyPr>
-          <a:lstStyle/>
-          <a:p>
-            <a:pPr algn="l">
-              <a:lnSpc>
-                <a:spcPct val="110000"/>
-              </a:lnSpc>
-              <a:spcBef>
-                <a:spcPts val="0"/>
-              </a:spcBef>
-              <a:spcAft>
-                <a:spcPts val="0"/>
-              </a:spcAft>
-            </a:pPr>
-            <a:r>
-              <a:rPr sz="950" b="1" i="0">
-                <a:solidFill>
-                  <a:srgbClr val="B84A00"/>
-                </a:solidFill>
-                <a:latin typeface="Manrope"/>
-                <a:cs typeface="Manrope"/>
-                <a:ea typeface="Manrope"/>
-              </a:rPr>
-              <a:t>ПОСЛЕ · ВЕС 9,0</a:t>
-            </a:r>
-          </a:p>
-        </p:txBody>
-      </p:sp>
-      <p:sp>
-        <p:nvSpPr>
-          <p:cNvPr id="11" name="Rectangle 10"/>
+              <a:t>РЕАЛЬНЫЙ ИНТЕРФЕЙС · БЛИЖАЙШИЕ ПРОДЛЕНИЯ В ГОРИЗОНТЕ</a:t>
+            </a:r>
+          </a:p>
+        </p:txBody>
+      </p:sp>
+      <p:sp>
+        <p:nvSpPr>
+          <p:cNvPr id="22" name="Rectangle 21"/>
           <p:cNvSpPr/>
           <p:nvPr/>
         </p:nvSpPr>
         <p:spPr>
           <a:xfrm>
-            <a:off x="626364" y="2921508"/>
-            <a:ext cx="5346039" cy="1978550"/>
+            <a:off x="4878323" y="3323844"/>
+            <a:ext cx="6687008" cy="1462829"/>
           </a:xfrm>
           <a:prstGeom prst="rect">
             <a:avLst/>
@@ -15041,7 +17094,7 @@
       </p:sp>
       <p:pic>
         <p:nvPicPr>
-          <p:cNvPr id="12" name="Picture 11" descr="t_set_before.png"/>
+          <p:cNvPr id="23" name="Picture 22" descr="renew_table.png"/>
           <p:cNvPicPr>
             <a:picLocks noChangeAspect="1"/>
           </p:cNvPicPr>
@@ -15055,8 +17108,8 @@
         </p:blipFill>
         <p:spPr>
           <a:xfrm>
-            <a:off x="658368" y="2953512"/>
-            <a:ext cx="5282031" cy="486502"/>
+            <a:off x="4910327" y="3355848"/>
+            <a:ext cx="6255671" cy="1398821"/>
           </a:xfrm>
           <a:prstGeom prst="rect">
             <a:avLst/>
@@ -15065,84 +17118,14 @@
       </p:pic>
       <p:sp>
         <p:nvSpPr>
-          <p:cNvPr id="13" name="Rectangle 12"/>
+          <p:cNvPr id="24" name="Rectangle 23"/>
           <p:cNvSpPr/>
           <p:nvPr/>
         </p:nvSpPr>
         <p:spPr>
           <a:xfrm>
-            <a:off x="6219291" y="2921508"/>
-            <a:ext cx="5346039" cy="1978550"/>
-          </a:xfrm>
-          <a:prstGeom prst="rect">
-            <a:avLst/>
-          </a:prstGeom>
-          <a:solidFill>
-            <a:srgbClr val="FFFFFF"/>
-          </a:solidFill>
-          <a:ln w="10160">
-            <a:solidFill>
-              <a:srgbClr val="E1E1E1"/>
-            </a:solidFill>
-          </a:ln>
-          <a:effectLst/>
-        </p:spPr>
-        <p:style>
-          <a:lnRef idx="1">
-            <a:schemeClr val="accent1"/>
-          </a:lnRef>
-          <a:fillRef idx="3">
-            <a:schemeClr val="accent1"/>
-          </a:fillRef>
-          <a:effectRef idx="2">
-            <a:schemeClr val="accent1"/>
-          </a:effectRef>
-          <a:fontRef idx="minor">
-            <a:schemeClr val="lt1"/>
-          </a:fontRef>
-        </p:style>
-        <p:txBody>
-          <a:bodyPr rtlCol="0" anchor="ctr"/>
-          <a:lstStyle/>
-          <a:p>
-            <a:pPr algn="ctr"/>
-          </a:p>
-        </p:txBody>
-      </p:sp>
-      <p:pic>
-        <p:nvPicPr>
-          <p:cNvPr id="14" name="Picture 13" descr="t_set_after.png"/>
-          <p:cNvPicPr>
-            <a:picLocks noChangeAspect="1"/>
-          </p:cNvPicPr>
-          <p:nvPr/>
-        </p:nvPicPr>
-        <p:blipFill>
-          <a:blip r:embed="rId3"/>
-          <a:stretch>
-            <a:fillRect/>
-          </a:stretch>
-        </p:blipFill>
-        <p:spPr>
-          <a:xfrm>
-            <a:off x="6251295" y="2953512"/>
-            <a:ext cx="5282031" cy="486502"/>
-          </a:xfrm>
-          <a:prstGeom prst="rect">
-            <a:avLst/>
-          </a:prstGeom>
-        </p:spPr>
-      </p:pic>
-      <p:sp>
-        <p:nvSpPr>
-          <p:cNvPr id="15" name="Rectangle 14"/>
-          <p:cNvSpPr/>
-          <p:nvPr/>
-        </p:nvSpPr>
-        <p:spPr>
-          <a:xfrm>
-            <a:off x="658368" y="3977640"/>
-            <a:ext cx="3533546" cy="640080"/>
+            <a:off x="4910327" y="4965192"/>
+            <a:ext cx="2134514" cy="1088136"/>
           </a:xfrm>
           <a:prstGeom prst="rect">
             <a:avLst/>
@@ -15181,14 +17164,14 @@
       </p:sp>
       <p:sp>
         <p:nvSpPr>
-          <p:cNvPr id="16" name="TextBox 15"/>
+          <p:cNvPr id="25" name="TextBox 24"/>
           <p:cNvSpPr txBox="1"/>
           <p:nvPr/>
         </p:nvSpPr>
         <p:spPr>
           <a:xfrm>
-            <a:off x="804672" y="4069080"/>
-            <a:ext cx="3240938" cy="131635"/>
+            <a:off x="5038343" y="5093208"/>
+            <a:ext cx="1878482" cy="130048"/>
           </a:xfrm>
           <a:prstGeom prst="rect">
             <a:avLst/>
@@ -15203,17 +17186,17 @@
           <a:p>
             <a:pPr algn="l">
               <a:lnSpc>
-                <a:spcPct val="105000"/>
-              </a:lnSpc>
-              <a:spcBef>
-                <a:spcPts val="0"/>
-              </a:spcBef>
-              <a:spcAft>
-                <a:spcPts val="0"/>
-              </a:spcAft>
-            </a:pPr>
-            <a:r>
-              <a:rPr sz="850" b="1" i="0">
+                <a:spcPct val="110000"/>
+              </a:lnSpc>
+              <a:spcBef>
+                <a:spcPts val="0"/>
+              </a:spcBef>
+              <a:spcAft>
+                <a:spcPts val="0"/>
+              </a:spcAft>
+            </a:pPr>
+            <a:r>
+              <a:rPr sz="800" b="1" i="0">
                 <a:solidFill>
                   <a:srgbClr val="666666"/>
                 </a:solidFill>
@@ -15221,21 +17204,21 @@
                 <a:cs typeface="Manrope SemiBold"/>
                 <a:ea typeface="Manrope SemiBold"/>
               </a:rPr>
-              <a:t>Балл риска клиента #10</a:t>
-            </a:r>
-          </a:p>
-        </p:txBody>
-      </p:sp>
-      <p:sp>
-        <p:nvSpPr>
-          <p:cNvPr id="17" name="TextBox 16"/>
+              <a:t>ВЫРУЧКА ПОД РИСКОМ</a:t>
+            </a:r>
+          </a:p>
+        </p:txBody>
+      </p:sp>
+      <p:sp>
+        <p:nvSpPr>
+          <p:cNvPr id="26" name="TextBox 25"/>
           <p:cNvSpPr txBox="1"/>
           <p:nvPr/>
         </p:nvSpPr>
         <p:spPr>
           <a:xfrm>
-            <a:off x="804672" y="4251960"/>
-            <a:ext cx="3240938" cy="310896"/>
+            <a:off x="5038343" y="5330952"/>
+            <a:ext cx="1878482" cy="221487"/>
           </a:xfrm>
           <a:prstGeom prst="rect">
             <a:avLst/>
@@ -15250,39 +17233,17 @@
           <a:p>
             <a:pPr algn="l">
               <a:lnSpc>
-                <a:spcPct val="116000"/>
-              </a:lnSpc>
-              <a:spcBef>
-                <a:spcPts val="0"/>
-              </a:spcBef>
-              <a:spcAft>
-                <a:spcPts val="0"/>
-              </a:spcAft>
-            </a:pPr>
-            <a:r>
-              <a:rPr sz="1500" b="0">
-                <a:solidFill>
-                  <a:srgbClr val="666666"/>
-                </a:solidFill>
-                <a:latin typeface="Manrope Medium"/>
-                <a:cs typeface="Manrope Medium"/>
-                <a:ea typeface="Manrope Medium"/>
-              </a:rPr>
-              <a:t>71,4</a:t>
-            </a:r>
-            <a:r>
-              <a:rPr sz="1500" b="0">
-                <a:solidFill>
-                  <a:srgbClr val="C9C9C9"/>
-                </a:solidFill>
-                <a:latin typeface="Manrope Medium"/>
-                <a:cs typeface="Manrope Medium"/>
-                <a:ea typeface="Manrope Medium"/>
-              </a:rPr>
-              <a:t>   →   </a:t>
-            </a:r>
-            <a:r>
-              <a:rPr sz="1500" b="1">
+                <a:spcPct val="100000"/>
+              </a:lnSpc>
+              <a:spcBef>
+                <a:spcPts val="0"/>
+              </a:spcBef>
+              <a:spcAft>
+                <a:spcPts val="0"/>
+              </a:spcAft>
+            </a:pPr>
+            <a:r>
+              <a:rPr sz="1600" b="1" i="0">
                 <a:solidFill>
                   <a:srgbClr val="B84A00"/>
                 </a:solidFill>
@@ -15290,21 +17251,68 @@
                 <a:cs typeface="Manrope"/>
                 <a:ea typeface="Manrope"/>
               </a:rPr>
-              <a:t>81,8</a:t>
-            </a:r>
-          </a:p>
-        </p:txBody>
-      </p:sp>
-      <p:sp>
-        <p:nvSpPr>
-          <p:cNvPr id="18" name="Rectangle 17"/>
+              <a:t>5,80 €</a:t>
+            </a:r>
+          </a:p>
+        </p:txBody>
+      </p:sp>
+      <p:sp>
+        <p:nvSpPr>
+          <p:cNvPr id="27" name="TextBox 26"/>
+          <p:cNvSpPr txBox="1"/>
+          <p:nvPr/>
+        </p:nvSpPr>
+        <p:spPr>
+          <a:xfrm>
+            <a:off x="5038343" y="5641848"/>
+            <a:ext cx="1878482" cy="142430"/>
+          </a:xfrm>
+          <a:prstGeom prst="rect">
+            <a:avLst/>
+          </a:prstGeom>
+          <a:noFill/>
+        </p:spPr>
+        <p:txBody>
+          <a:bodyPr wrap="square" anchor="t" lIns="0" rIns="0" tIns="0" bIns="0">
+            <a:spAutoFit/>
+          </a:bodyPr>
+          <a:lstStyle/>
+          <a:p>
+            <a:pPr algn="l">
+              <a:lnSpc>
+                <a:spcPct val="115000"/>
+              </a:lnSpc>
+              <a:spcBef>
+                <a:spcPts val="0"/>
+              </a:spcBef>
+              <a:spcAft>
+                <a:spcPts val="0"/>
+              </a:spcAft>
+            </a:pPr>
+            <a:r>
+              <a:rPr sz="850" b="0" i="0">
+                <a:solidFill>
+                  <a:srgbClr val="666666"/>
+                </a:solidFill>
+                <a:latin typeface="Manrope"/>
+                <a:cs typeface="Manrope"/>
+                <a:ea typeface="Manrope"/>
+              </a:rPr>
+              <a:t>прогнозная экспозиция</a:t>
+            </a:r>
+          </a:p>
+        </p:txBody>
+      </p:sp>
+      <p:sp>
+        <p:nvSpPr>
+          <p:cNvPr id="28" name="Rectangle 27"/>
           <p:cNvSpPr/>
           <p:nvPr/>
         </p:nvSpPr>
         <p:spPr>
           <a:xfrm>
-            <a:off x="4329074" y="3977640"/>
-            <a:ext cx="3533546" cy="640080"/>
+            <a:off x="7154569" y="4965192"/>
+            <a:ext cx="2134514" cy="1088136"/>
           </a:xfrm>
           <a:prstGeom prst="rect">
             <a:avLst/>
@@ -15343,14 +17351,14 @@
       </p:sp>
       <p:sp>
         <p:nvSpPr>
-          <p:cNvPr id="19" name="TextBox 18"/>
+          <p:cNvPr id="29" name="TextBox 28"/>
           <p:cNvSpPr txBox="1"/>
           <p:nvPr/>
         </p:nvSpPr>
         <p:spPr>
           <a:xfrm>
-            <a:off x="4475378" y="4069080"/>
-            <a:ext cx="3240938" cy="131635"/>
+            <a:off x="7282585" y="5093208"/>
+            <a:ext cx="1878482" cy="130048"/>
           </a:xfrm>
           <a:prstGeom prst="rect">
             <a:avLst/>
@@ -15365,17 +17373,17 @@
           <a:p>
             <a:pPr algn="l">
               <a:lnSpc>
-                <a:spcPct val="105000"/>
-              </a:lnSpc>
-              <a:spcBef>
-                <a:spcPts val="0"/>
-              </a:spcBef>
-              <a:spcAft>
-                <a:spcPts val="0"/>
-              </a:spcAft>
-            </a:pPr>
-            <a:r>
-              <a:rPr sz="850" b="1" i="0">
+                <a:spcPct val="110000"/>
+              </a:lnSpc>
+              <a:spcBef>
+                <a:spcPts val="0"/>
+              </a:spcBef>
+              <a:spcAft>
+                <a:spcPts val="0"/>
+              </a:spcAft>
+            </a:pPr>
+            <a:r>
+              <a:rPr sz="800" b="1" i="0">
                 <a:solidFill>
                   <a:srgbClr val="666666"/>
                 </a:solidFill>
@@ -15383,21 +17391,21 @@
                 <a:cs typeface="Manrope SemiBold"/>
                 <a:ea typeface="Manrope SemiBold"/>
               </a:rPr>
-              <a:t>Балл service-0030</a:t>
-            </a:r>
-          </a:p>
-        </p:txBody>
-      </p:sp>
-      <p:sp>
-        <p:nvSpPr>
-          <p:cNvPr id="20" name="TextBox 19"/>
+              <a:t>ПРЕДСТОЯЩИЕ ПРОДЛЕНИЯ</a:t>
+            </a:r>
+          </a:p>
+        </p:txBody>
+      </p:sp>
+      <p:sp>
+        <p:nvSpPr>
+          <p:cNvPr id="30" name="TextBox 29"/>
           <p:cNvSpPr txBox="1"/>
           <p:nvPr/>
         </p:nvSpPr>
         <p:spPr>
           <a:xfrm>
-            <a:off x="4475378" y="4251960"/>
-            <a:ext cx="3240938" cy="310896"/>
+            <a:off x="7282585" y="5330952"/>
+            <a:ext cx="1878482" cy="221487"/>
           </a:xfrm>
           <a:prstGeom prst="rect">
             <a:avLst/>
@@ -15412,61 +17420,86 @@
           <a:p>
             <a:pPr algn="l">
               <a:lnSpc>
-                <a:spcPct val="116000"/>
-              </a:lnSpc>
-              <a:spcBef>
-                <a:spcPts val="0"/>
-              </a:spcBef>
-              <a:spcAft>
-                <a:spcPts val="0"/>
-              </a:spcAft>
-            </a:pPr>
-            <a:r>
-              <a:rPr sz="1500" b="0">
-                <a:solidFill>
-                  <a:srgbClr val="666666"/>
-                </a:solidFill>
-                <a:latin typeface="Manrope Medium"/>
-                <a:cs typeface="Manrope Medium"/>
-                <a:ea typeface="Manrope Medium"/>
-              </a:rPr>
-              <a:t>71,4</a:t>
-            </a:r>
-            <a:r>
-              <a:rPr sz="1500" b="0">
-                <a:solidFill>
-                  <a:srgbClr val="C9C9C9"/>
-                </a:solidFill>
-                <a:latin typeface="Manrope Medium"/>
-                <a:cs typeface="Manrope Medium"/>
-                <a:ea typeface="Manrope Medium"/>
-              </a:rPr>
-              <a:t>   →   </a:t>
-            </a:r>
-            <a:r>
-              <a:rPr sz="1500" b="1">
-                <a:solidFill>
-                  <a:srgbClr val="B84A00"/>
+                <a:spcPct val="100000"/>
+              </a:lnSpc>
+              <a:spcBef>
+                <a:spcPts val="0"/>
+              </a:spcBef>
+              <a:spcAft>
+                <a:spcPts val="0"/>
+              </a:spcAft>
+            </a:pPr>
+            <a:r>
+              <a:rPr sz="1600" b="1" i="0">
+                <a:solidFill>
+                  <a:srgbClr val="1A1A1A"/>
                 </a:solidFill>
                 <a:latin typeface="Manrope"/>
                 <a:cs typeface="Manrope"/>
                 <a:ea typeface="Manrope"/>
               </a:rPr>
-              <a:t>81,8</a:t>
-            </a:r>
-          </a:p>
-        </p:txBody>
-      </p:sp>
-      <p:sp>
-        <p:nvSpPr>
-          <p:cNvPr id="21" name="Rectangle 20"/>
+              <a:t>17,03 €</a:t>
+            </a:r>
+          </a:p>
+        </p:txBody>
+      </p:sp>
+      <p:sp>
+        <p:nvSpPr>
+          <p:cNvPr id="31" name="TextBox 30"/>
+          <p:cNvSpPr txBox="1"/>
+          <p:nvPr/>
+        </p:nvSpPr>
+        <p:spPr>
+          <a:xfrm>
+            <a:off x="7282585" y="5641848"/>
+            <a:ext cx="1878482" cy="142430"/>
+          </a:xfrm>
+          <a:prstGeom prst="rect">
+            <a:avLst/>
+          </a:prstGeom>
+          <a:noFill/>
+        </p:spPr>
+        <p:txBody>
+          <a:bodyPr wrap="square" anchor="t" lIns="0" rIns="0" tIns="0" bIns="0">
+            <a:spAutoFit/>
+          </a:bodyPr>
+          <a:lstStyle/>
+          <a:p>
+            <a:pPr algn="l">
+              <a:lnSpc>
+                <a:spcPct val="115000"/>
+              </a:lnSpc>
+              <a:spcBef>
+                <a:spcPts val="0"/>
+              </a:spcBef>
+              <a:spcAft>
+                <a:spcPts val="0"/>
+              </a:spcAft>
+            </a:pPr>
+            <a:r>
+              <a:rPr sz="850" b="0" i="0">
+                <a:solidFill>
+                  <a:srgbClr val="666666"/>
+                </a:solidFill>
+                <a:latin typeface="Manrope"/>
+                <a:cs typeface="Manrope"/>
+                <a:ea typeface="Manrope"/>
+              </a:rPr>
+              <a:t>сумма без учёта риска</a:t>
+            </a:r>
+          </a:p>
+        </p:txBody>
+      </p:sp>
+      <p:sp>
+        <p:nvSpPr>
+          <p:cNvPr id="32" name="Rectangle 31"/>
           <p:cNvSpPr/>
           <p:nvPr/>
         </p:nvSpPr>
         <p:spPr>
           <a:xfrm>
-            <a:off x="7999780" y="3977640"/>
-            <a:ext cx="3533546" cy="640080"/>
+            <a:off x="9398811" y="4965192"/>
+            <a:ext cx="2134514" cy="1088136"/>
           </a:xfrm>
           <a:prstGeom prst="rect">
             <a:avLst/>
@@ -15505,14 +17538,14 @@
       </p:sp>
       <p:sp>
         <p:nvSpPr>
-          <p:cNvPr id="22" name="TextBox 21"/>
+          <p:cNvPr id="33" name="TextBox 32"/>
           <p:cNvSpPr txBox="1"/>
           <p:nvPr/>
         </p:nvSpPr>
         <p:spPr>
           <a:xfrm>
-            <a:off x="8146084" y="4069080"/>
-            <a:ext cx="3240938" cy="131635"/>
+            <a:off x="9526827" y="5093208"/>
+            <a:ext cx="1878482" cy="130048"/>
           </a:xfrm>
           <a:prstGeom prst="rect">
             <a:avLst/>
@@ -15527,17 +17560,17 @@
           <a:p>
             <a:pPr algn="l">
               <a:lnSpc>
-                <a:spcPct val="105000"/>
-              </a:lnSpc>
-              <a:spcBef>
-                <a:spcPts val="0"/>
-              </a:spcBef>
-              <a:spcAft>
-                <a:spcPts val="0"/>
-              </a:spcAft>
-            </a:pPr>
-            <a:r>
-              <a:rPr sz="850" b="1" i="0">
+                <a:spcPct val="110000"/>
+              </a:lnSpc>
+              <a:spcBef>
+                <a:spcPts val="0"/>
+              </a:spcBef>
+              <a:spcAft>
+                <a:spcPts val="0"/>
+              </a:spcAft>
+            </a:pPr>
+            <a:r>
+              <a:rPr sz="800" b="1" i="0">
                 <a:solidFill>
                   <a:srgbClr val="666666"/>
                 </a:solidFill>
@@ -15545,21 +17578,21 @@
                 <a:cs typeface="Manrope SemiBold"/>
                 <a:ea typeface="Manrope SemiBold"/>
               </a:rPr>
-              <a:t>Клиентов высокого риска</a:t>
-            </a:r>
-          </a:p>
-        </p:txBody>
-      </p:sp>
-      <p:sp>
-        <p:nvSpPr>
-          <p:cNvPr id="23" name="TextBox 22"/>
+              <a:t>ИСТОРИЧЕСКИЕ ПОПОЛНЕНИЯ</a:t>
+            </a:r>
+          </a:p>
+        </p:txBody>
+      </p:sp>
+      <p:sp>
+        <p:nvSpPr>
+          <p:cNvPr id="34" name="TextBox 33"/>
           <p:cNvSpPr txBox="1"/>
           <p:nvPr/>
         </p:nvSpPr>
         <p:spPr>
           <a:xfrm>
-            <a:off x="8146084" y="4251960"/>
-            <a:ext cx="3240938" cy="310896"/>
+            <a:off x="9526827" y="5330952"/>
+            <a:ext cx="1878482" cy="221487"/>
           </a:xfrm>
           <a:prstGeom prst="rect">
             <a:avLst/>
@@ -15574,72 +17607,95 @@
           <a:p>
             <a:pPr algn="l">
               <a:lnSpc>
-                <a:spcPct val="116000"/>
-              </a:lnSpc>
-              <a:spcBef>
-                <a:spcPts val="0"/>
-              </a:spcBef>
-              <a:spcAft>
-                <a:spcPts val="0"/>
-              </a:spcAft>
-            </a:pPr>
-            <a:r>
-              <a:rPr sz="1500" b="0">
+                <a:spcPct val="100000"/>
+              </a:lnSpc>
+              <a:spcBef>
+                <a:spcPts val="0"/>
+              </a:spcBef>
+              <a:spcAft>
+                <a:spcPts val="0"/>
+              </a:spcAft>
+            </a:pPr>
+            <a:r>
+              <a:rPr sz="1600" b="1" i="0">
                 <a:solidFill>
                   <a:srgbClr val="666666"/>
-                </a:solidFill>
-                <a:latin typeface="Manrope Medium"/>
-                <a:cs typeface="Manrope Medium"/>
-                <a:ea typeface="Manrope Medium"/>
-              </a:rPr>
-              <a:t>2</a:t>
-            </a:r>
-            <a:r>
-              <a:rPr sz="1500" b="0">
-                <a:solidFill>
-                  <a:srgbClr val="C9C9C9"/>
-                </a:solidFill>
-                <a:latin typeface="Manrope Medium"/>
-                <a:cs typeface="Manrope Medium"/>
-                <a:ea typeface="Manrope Medium"/>
-              </a:rPr>
-              <a:t>   →   </a:t>
-            </a:r>
-            <a:r>
-              <a:rPr sz="1500" b="1">
-                <a:solidFill>
-                  <a:srgbClr val="B84A00"/>
                 </a:solidFill>
                 <a:latin typeface="Manrope"/>
                 <a:cs typeface="Manrope"/>
                 <a:ea typeface="Manrope"/>
               </a:rPr>
-              <a:t>3</a:t>
-            </a:r>
-          </a:p>
-        </p:txBody>
-      </p:sp>
-      <p:sp>
-        <p:nvSpPr>
-          <p:cNvPr id="24" name="Rectangle 23"/>
+              <a:t>22 240,73 €</a:t>
+            </a:r>
+          </a:p>
+        </p:txBody>
+      </p:sp>
+      <p:sp>
+        <p:nvSpPr>
+          <p:cNvPr id="35" name="TextBox 34"/>
+          <p:cNvSpPr txBox="1"/>
+          <p:nvPr/>
+        </p:nvSpPr>
+        <p:spPr>
+          <a:xfrm>
+            <a:off x="9526827" y="5641848"/>
+            <a:ext cx="1878482" cy="142430"/>
+          </a:xfrm>
+          <a:prstGeom prst="rect">
+            <a:avLst/>
+          </a:prstGeom>
+          <a:noFill/>
+        </p:spPr>
+        <p:txBody>
+          <a:bodyPr wrap="square" anchor="t" lIns="0" rIns="0" tIns="0" bIns="0">
+            <a:spAutoFit/>
+          </a:bodyPr>
+          <a:lstStyle/>
+          <a:p>
+            <a:pPr algn="l">
+              <a:lnSpc>
+                <a:spcPct val="115000"/>
+              </a:lnSpc>
+              <a:spcBef>
+                <a:spcPts val="0"/>
+              </a:spcBef>
+              <a:spcAft>
+                <a:spcPts val="0"/>
+              </a:spcAft>
+            </a:pPr>
+            <a:r>
+              <a:rPr sz="850" b="0" i="0">
+                <a:solidFill>
+                  <a:srgbClr val="666666"/>
+                </a:solidFill>
+                <a:latin typeface="Manrope"/>
+                <a:cs typeface="Manrope"/>
+                <a:ea typeface="Manrope"/>
+              </a:rPr>
+              <a:t>справочно, не суммируется</a:t>
+            </a:r>
+          </a:p>
+        </p:txBody>
+      </p:sp>
+      <p:sp>
+        <p:nvSpPr>
+          <p:cNvPr id="36" name="Rectangle 35"/>
           <p:cNvSpPr/>
           <p:nvPr/>
         </p:nvSpPr>
         <p:spPr>
           <a:xfrm>
-            <a:off x="658368" y="4745736"/>
-            <a:ext cx="3533546" cy="640080"/>
+            <a:off x="658368" y="6217920"/>
+            <a:ext cx="10874959" cy="9525"/>
           </a:xfrm>
           <a:prstGeom prst="rect">
             <a:avLst/>
           </a:prstGeom>
           <a:solidFill>
-            <a:srgbClr val="FFFFFF"/>
+            <a:srgbClr val="E1E1E1"/>
           </a:solidFill>
-          <a:ln w="11430">
-            <a:solidFill>
-              <a:srgbClr val="E1E1E1"/>
-            </a:solidFill>
+          <a:ln>
+            <a:noFill/>
           </a:ln>
           <a:effectLst/>
         </p:spPr>
@@ -15667,14 +17723,14 @@
       </p:sp>
       <p:sp>
         <p:nvSpPr>
-          <p:cNvPr id="25" name="TextBox 24"/>
+          <p:cNvPr id="37" name="TextBox 36"/>
           <p:cNvSpPr txBox="1"/>
           <p:nvPr/>
         </p:nvSpPr>
         <p:spPr>
           <a:xfrm>
-            <a:off x="804672" y="4837176"/>
-            <a:ext cx="3240938" cy="131635"/>
+            <a:off x="658368" y="6355080"/>
+            <a:ext cx="10874959" cy="163067"/>
           </a:xfrm>
           <a:prstGeom prst="rect">
             <a:avLst/>
@@ -15689,489 +17745,25 @@
           <a:p>
             <a:pPr algn="l">
               <a:lnSpc>
-                <a:spcPct val="105000"/>
-              </a:lnSpc>
-              <a:spcBef>
-                <a:spcPts val="0"/>
-              </a:spcBef>
-              <a:spcAft>
-                <a:spcPts val="0"/>
-              </a:spcAft>
-            </a:pPr>
-            <a:r>
-              <a:rPr sz="850" b="1" i="0">
+                <a:spcPct val="120000"/>
+              </a:lnSpc>
+              <a:spcBef>
+                <a:spcPts val="0"/>
+              </a:spcBef>
+              <a:spcAft>
+                <a:spcPts val="0"/>
+              </a:spcAft>
+            </a:pPr>
+            <a:r>
+              <a:rPr sz="950" b="0" i="0">
                 <a:solidFill>
                   <a:srgbClr val="666666"/>
-                </a:solidFill>
-                <a:latin typeface="Manrope SemiBold"/>
-                <a:cs typeface="Manrope SemiBold"/>
-                <a:ea typeface="Manrope SemiBold"/>
-              </a:rPr>
-              <a:t>Клиентов среднего риска</a:t>
-            </a:r>
-          </a:p>
-        </p:txBody>
-      </p:sp>
-      <p:sp>
-        <p:nvSpPr>
-          <p:cNvPr id="26" name="TextBox 25"/>
-          <p:cNvSpPr txBox="1"/>
-          <p:nvPr/>
-        </p:nvSpPr>
-        <p:spPr>
-          <a:xfrm>
-            <a:off x="804672" y="5020056"/>
-            <a:ext cx="3240938" cy="310896"/>
-          </a:xfrm>
-          <a:prstGeom prst="rect">
-            <a:avLst/>
-          </a:prstGeom>
-          <a:noFill/>
-        </p:spPr>
-        <p:txBody>
-          <a:bodyPr wrap="square" anchor="t" lIns="0" rIns="0" tIns="0" bIns="0">
-            <a:spAutoFit/>
-          </a:bodyPr>
-          <a:lstStyle/>
-          <a:p>
-            <a:pPr algn="l">
-              <a:lnSpc>
-                <a:spcPct val="116000"/>
-              </a:lnSpc>
-              <a:spcBef>
-                <a:spcPts val="0"/>
-              </a:spcBef>
-              <a:spcAft>
-                <a:spcPts val="0"/>
-              </a:spcAft>
-            </a:pPr>
-            <a:r>
-              <a:rPr sz="1500" b="0">
-                <a:solidFill>
-                  <a:srgbClr val="666666"/>
-                </a:solidFill>
-                <a:latin typeface="Manrope Medium"/>
-                <a:cs typeface="Manrope Medium"/>
-                <a:ea typeface="Manrope Medium"/>
-              </a:rPr>
-              <a:t>4</a:t>
-            </a:r>
-            <a:r>
-              <a:rPr sz="1500" b="0">
-                <a:solidFill>
-                  <a:srgbClr val="C9C9C9"/>
-                </a:solidFill>
-                <a:latin typeface="Manrope Medium"/>
-                <a:cs typeface="Manrope Medium"/>
-                <a:ea typeface="Manrope Medium"/>
-              </a:rPr>
-              <a:t>   →   </a:t>
-            </a:r>
-            <a:r>
-              <a:rPr sz="1500" b="1">
-                <a:solidFill>
-                  <a:srgbClr val="B84A00"/>
                 </a:solidFill>
                 <a:latin typeface="Manrope"/>
                 <a:cs typeface="Manrope"/>
                 <a:ea typeface="Manrope"/>
               </a:rPr>
-              <a:t>3</a:t>
-            </a:r>
-          </a:p>
-        </p:txBody>
-      </p:sp>
-      <p:sp>
-        <p:nvSpPr>
-          <p:cNvPr id="27" name="Rectangle 26"/>
-          <p:cNvSpPr/>
-          <p:nvPr/>
-        </p:nvSpPr>
-        <p:spPr>
-          <a:xfrm>
-            <a:off x="4329074" y="4745736"/>
-            <a:ext cx="3533546" cy="640080"/>
-          </a:xfrm>
-          <a:prstGeom prst="rect">
-            <a:avLst/>
-          </a:prstGeom>
-          <a:solidFill>
-            <a:srgbClr val="FFFFFF"/>
-          </a:solidFill>
-          <a:ln w="11430">
-            <a:solidFill>
-              <a:srgbClr val="E1E1E1"/>
-            </a:solidFill>
-          </a:ln>
-          <a:effectLst/>
-        </p:spPr>
-        <p:style>
-          <a:lnRef idx="1">
-            <a:schemeClr val="accent1"/>
-          </a:lnRef>
-          <a:fillRef idx="3">
-            <a:schemeClr val="accent1"/>
-          </a:fillRef>
-          <a:effectRef idx="2">
-            <a:schemeClr val="accent1"/>
-          </a:effectRef>
-          <a:fontRef idx="minor">
-            <a:schemeClr val="lt1"/>
-          </a:fontRef>
-        </p:style>
-        <p:txBody>
-          <a:bodyPr rtlCol="0" anchor="ctr"/>
-          <a:lstStyle/>
-          <a:p>
-            <a:pPr algn="ctr"/>
-          </a:p>
-        </p:txBody>
-      </p:sp>
-      <p:sp>
-        <p:nvSpPr>
-          <p:cNvPr id="28" name="TextBox 27"/>
-          <p:cNvSpPr txBox="1"/>
-          <p:nvPr/>
-        </p:nvSpPr>
-        <p:spPr>
-          <a:xfrm>
-            <a:off x="4475378" y="4837176"/>
-            <a:ext cx="3240938" cy="131635"/>
-          </a:xfrm>
-          <a:prstGeom prst="rect">
-            <a:avLst/>
-          </a:prstGeom>
-          <a:noFill/>
-        </p:spPr>
-        <p:txBody>
-          <a:bodyPr wrap="square" anchor="t" lIns="0" rIns="0" tIns="0" bIns="0">
-            <a:spAutoFit/>
-          </a:bodyPr>
-          <a:lstStyle/>
-          <a:p>
-            <a:pPr algn="l">
-              <a:lnSpc>
-                <a:spcPct val="105000"/>
-              </a:lnSpc>
-              <a:spcBef>
-                <a:spcPts val="0"/>
-              </a:spcBef>
-              <a:spcAft>
-                <a:spcPts val="0"/>
-              </a:spcAft>
-            </a:pPr>
-            <a:r>
-              <a:rPr sz="850" b="1" i="0">
-                <a:solidFill>
-                  <a:srgbClr val="666666"/>
-                </a:solidFill>
-                <a:latin typeface="Manrope SemiBold"/>
-                <a:cs typeface="Manrope SemiBold"/>
-                <a:ea typeface="Manrope SemiBold"/>
-              </a:rPr>
-              <a:t>Выручка под риском</a:t>
-            </a:r>
-          </a:p>
-        </p:txBody>
-      </p:sp>
-      <p:sp>
-        <p:nvSpPr>
-          <p:cNvPr id="29" name="TextBox 28"/>
-          <p:cNvSpPr txBox="1"/>
-          <p:nvPr/>
-        </p:nvSpPr>
-        <p:spPr>
-          <a:xfrm>
-            <a:off x="4475378" y="5020056"/>
-            <a:ext cx="3240938" cy="310896"/>
-          </a:xfrm>
-          <a:prstGeom prst="rect">
-            <a:avLst/>
-          </a:prstGeom>
-          <a:noFill/>
-        </p:spPr>
-        <p:txBody>
-          <a:bodyPr wrap="square" anchor="t" lIns="0" rIns="0" tIns="0" bIns="0">
-            <a:spAutoFit/>
-          </a:bodyPr>
-          <a:lstStyle/>
-          <a:p>
-            <a:pPr algn="l">
-              <a:lnSpc>
-                <a:spcPct val="116000"/>
-              </a:lnSpc>
-              <a:spcBef>
-                <a:spcPts val="0"/>
-              </a:spcBef>
-              <a:spcAft>
-                <a:spcPts val="0"/>
-              </a:spcAft>
-            </a:pPr>
-            <a:r>
-              <a:rPr sz="1500" b="0">
-                <a:solidFill>
-                  <a:srgbClr val="666666"/>
-                </a:solidFill>
-                <a:latin typeface="Manrope Medium"/>
-                <a:cs typeface="Manrope Medium"/>
-                <a:ea typeface="Manrope Medium"/>
-              </a:rPr>
-              <a:t>5,80 €</a:t>
-            </a:r>
-            <a:r>
-              <a:rPr sz="1500" b="0">
-                <a:solidFill>
-                  <a:srgbClr val="C9C9C9"/>
-                </a:solidFill>
-                <a:latin typeface="Manrope Medium"/>
-                <a:cs typeface="Manrope Medium"/>
-                <a:ea typeface="Manrope Medium"/>
-              </a:rPr>
-              <a:t>   →   </a:t>
-            </a:r>
-            <a:r>
-              <a:rPr sz="1500" b="1">
-                <a:solidFill>
-                  <a:srgbClr val="B84A00"/>
-                </a:solidFill>
-                <a:latin typeface="Manrope"/>
-                <a:cs typeface="Manrope"/>
-                <a:ea typeface="Manrope"/>
-              </a:rPr>
-              <a:t>7,72 €</a:t>
-            </a:r>
-          </a:p>
-        </p:txBody>
-      </p:sp>
-      <p:sp>
-        <p:nvSpPr>
-          <p:cNvPr id="30" name="Rectangle 29"/>
-          <p:cNvSpPr/>
-          <p:nvPr/>
-        </p:nvSpPr>
-        <p:spPr>
-          <a:xfrm>
-            <a:off x="7999780" y="4745736"/>
-            <a:ext cx="3533546" cy="640080"/>
-          </a:xfrm>
-          <a:prstGeom prst="rect">
-            <a:avLst/>
-          </a:prstGeom>
-          <a:solidFill>
-            <a:srgbClr val="FFFFFF"/>
-          </a:solidFill>
-          <a:ln w="11430">
-            <a:solidFill>
-              <a:srgbClr val="E1E1E1"/>
-            </a:solidFill>
-          </a:ln>
-          <a:effectLst/>
-        </p:spPr>
-        <p:style>
-          <a:lnRef idx="1">
-            <a:schemeClr val="accent1"/>
-          </a:lnRef>
-          <a:fillRef idx="3">
-            <a:schemeClr val="accent1"/>
-          </a:fillRef>
-          <a:effectRef idx="2">
-            <a:schemeClr val="accent1"/>
-          </a:effectRef>
-          <a:fontRef idx="minor">
-            <a:schemeClr val="lt1"/>
-          </a:fontRef>
-        </p:style>
-        <p:txBody>
-          <a:bodyPr rtlCol="0" anchor="ctr"/>
-          <a:lstStyle/>
-          <a:p>
-            <a:pPr algn="ctr"/>
-          </a:p>
-        </p:txBody>
-      </p:sp>
-      <p:sp>
-        <p:nvSpPr>
-          <p:cNvPr id="31" name="TextBox 30"/>
-          <p:cNvSpPr txBox="1"/>
-          <p:nvPr/>
-        </p:nvSpPr>
-        <p:spPr>
-          <a:xfrm>
-            <a:off x="8146084" y="4837176"/>
-            <a:ext cx="3240938" cy="131635"/>
-          </a:xfrm>
-          <a:prstGeom prst="rect">
-            <a:avLst/>
-          </a:prstGeom>
-          <a:noFill/>
-        </p:spPr>
-        <p:txBody>
-          <a:bodyPr wrap="square" anchor="t" lIns="0" rIns="0" tIns="0" bIns="0">
-            <a:spAutoFit/>
-          </a:bodyPr>
-          <a:lstStyle/>
-          <a:p>
-            <a:pPr algn="l">
-              <a:lnSpc>
-                <a:spcPct val="105000"/>
-              </a:lnSpc>
-              <a:spcBef>
-                <a:spcPts val="0"/>
-              </a:spcBef>
-              <a:spcAft>
-                <a:spcPts val="0"/>
-              </a:spcAft>
-            </a:pPr>
-            <a:r>
-              <a:rPr sz="850" b="1" i="0">
-                <a:solidFill>
-                  <a:srgbClr val="666666"/>
-                </a:solidFill>
-                <a:latin typeface="Manrope SemiBold"/>
-                <a:cs typeface="Manrope SemiBold"/>
-                <a:ea typeface="Manrope SemiBold"/>
-              </a:rPr>
-              <a:t>Сумма весов</a:t>
-            </a:r>
-          </a:p>
-        </p:txBody>
-      </p:sp>
-      <p:sp>
-        <p:nvSpPr>
-          <p:cNvPr id="32" name="TextBox 31"/>
-          <p:cNvSpPr txBox="1"/>
-          <p:nvPr/>
-        </p:nvSpPr>
-        <p:spPr>
-          <a:xfrm>
-            <a:off x="8146084" y="5020056"/>
-            <a:ext cx="3240938" cy="310896"/>
-          </a:xfrm>
-          <a:prstGeom prst="rect">
-            <a:avLst/>
-          </a:prstGeom>
-          <a:noFill/>
-        </p:spPr>
-        <p:txBody>
-          <a:bodyPr wrap="square" anchor="t" lIns="0" rIns="0" tIns="0" bIns="0">
-            <a:spAutoFit/>
-          </a:bodyPr>
-          <a:lstStyle/>
-          <a:p>
-            <a:pPr algn="l">
-              <a:lnSpc>
-                <a:spcPct val="116000"/>
-              </a:lnSpc>
-              <a:spcBef>
-                <a:spcPts val="0"/>
-              </a:spcBef>
-              <a:spcAft>
-                <a:spcPts val="0"/>
-              </a:spcAft>
-            </a:pPr>
-            <a:r>
-              <a:rPr sz="1500" b="0">
-                <a:solidFill>
-                  <a:srgbClr val="666666"/>
-                </a:solidFill>
-                <a:latin typeface="Manrope Medium"/>
-                <a:cs typeface="Manrope Medium"/>
-                <a:ea typeface="Manrope Medium"/>
-              </a:rPr>
-              <a:t>13.0</a:t>
-            </a:r>
-            <a:r>
-              <a:rPr sz="1500" b="0">
-                <a:solidFill>
-                  <a:srgbClr val="C9C9C9"/>
-                </a:solidFill>
-                <a:latin typeface="Manrope Medium"/>
-                <a:cs typeface="Manrope Medium"/>
-                <a:ea typeface="Manrope Medium"/>
-              </a:rPr>
-              <a:t>   →   </a:t>
-            </a:r>
-            <a:r>
-              <a:rPr sz="1500" b="1">
-                <a:solidFill>
-                  <a:srgbClr val="B84A00"/>
-                </a:solidFill>
-                <a:latin typeface="Manrope"/>
-                <a:cs typeface="Manrope"/>
-                <a:ea typeface="Manrope"/>
-              </a:rPr>
-              <a:t>19.0</a:t>
-            </a:r>
-          </a:p>
-        </p:txBody>
-      </p:sp>
-      <p:sp>
-        <p:nvSpPr>
-          <p:cNvPr id="33" name="TextBox 32"/>
-          <p:cNvSpPr txBox="1"/>
-          <p:nvPr/>
-        </p:nvSpPr>
-        <p:spPr>
-          <a:xfrm>
-            <a:off x="658368" y="5641848"/>
-            <a:ext cx="10874959" cy="364998"/>
-          </a:xfrm>
-          <a:prstGeom prst="rect">
-            <a:avLst/>
-          </a:prstGeom>
-          <a:noFill/>
-        </p:spPr>
-        <p:txBody>
-          <a:bodyPr wrap="square" anchor="t" lIns="0" rIns="0" tIns="0" bIns="0">
-            <a:spAutoFit/>
-          </a:bodyPr>
-          <a:lstStyle/>
-          <a:p>
-            <a:pPr algn="l">
-              <a:lnSpc>
-                <a:spcPct val="130000"/>
-              </a:lnSpc>
-              <a:spcBef>
-                <a:spcPts val="0"/>
-              </a:spcBef>
-              <a:spcAft>
-                <a:spcPts val="0"/>
-              </a:spcAft>
-            </a:pPr>
-            <a:r>
-              <a:rPr sz="1050" b="0" i="0">
-                <a:solidFill>
-                  <a:srgbClr val="666666"/>
-                </a:solidFill>
-                <a:latin typeface="Manrope"/>
-                <a:cs typeface="Manrope"/>
-                <a:ea typeface="Manrope"/>
-              </a:rPr>
-              <a:t>Расчёт: сумма весов выросла с 13.0 до 19.0, вклад фактора — с 3.0 до 9.0, поэтому балл service-0030 стал 81,8. Настройка сохраняется на сервере, сводка обновляется сразу, без</a:t>
-            </a:r>
-          </a:p>
-          <a:p>
-            <a:pPr algn="l">
-              <a:lnSpc>
-                <a:spcPct val="130000"/>
-              </a:lnSpc>
-              <a:spcBef>
-                <a:spcPts val="0"/>
-              </a:spcBef>
-              <a:spcAft>
-                <a:spcPts val="0"/>
-              </a:spcAft>
-            </a:pPr>
-            <a:r>
-              <a:rPr sz="1050" b="0" i="0">
-                <a:solidFill>
-                  <a:srgbClr val="666666"/>
-                </a:solidFill>
-                <a:latin typeface="Manrope"/>
-                <a:cs typeface="Manrope"/>
-                <a:ea typeface="Manrope"/>
-              </a:rPr>
-              <a:t>перезагрузки страницы; кнопка «Значения по умолчанию» возвращает исходные 3,0 и прежние числа.</a:t>
+              <a:t>Горизонт 30 дней. Сумма по 4 продлениям: 0,36 + 0,70 + 1,81 + 2,93 = 5,80 €. Оценка не является гарантированным прогнозом потерь.</a:t>
             </a:r>
           </a:p>
         </p:txBody>
@@ -16280,7 +17872,7 @@
                 <a:cs typeface="Manrope"/>
                 <a:ea typeface="Manrope"/>
               </a:rPr>
-              <a:t>РЕЗУЛЬТАТ ДЛЯ БИЗНЕСА</a:t>
+              <a:t>СКВОЗНОЙ СЦЕНАРИЙ · ШАГ 4–5</a:t>
             </a:r>
           </a:p>
         </p:txBody>
@@ -16327,7 +17919,7 @@
                 <a:cs typeface="Manrope"/>
                 <a:ea typeface="Manrope"/>
               </a:rPr>
-              <a:t>Команда видит, с кого начать</a:t>
+              <a:t>Меняем вес — результат пересчитывается</a:t>
             </a:r>
           </a:p>
         </p:txBody>
@@ -16341,7 +17933,7 @@
         <p:spPr>
           <a:xfrm>
             <a:off x="658368" y="1344168"/>
-            <a:ext cx="10058400" cy="237744"/>
+            <a:ext cx="10058400" cy="457200"/>
           </a:xfrm>
           <a:prstGeom prst="rect">
             <a:avLst/>
@@ -16374,7 +17966,31 @@
                 <a:cs typeface="Manrope"/>
                 <a:ea typeface="Manrope"/>
               </a:rPr>
-              <a:t>Четыре подтверждённые возможности продукта — и то, что мы сознательно не заявляем.</a:t>
+              <a:t>Гипотеза до изменения: усилим «близость даты окончания» с 3,0 до 9,0 — баллы и число услуг высокого риска</a:t>
+            </a:r>
+          </a:p>
+          <a:p>
+            <a:pPr algn="l">
+              <a:lnSpc>
+                <a:spcPct val="128000"/>
+              </a:lnSpc>
+              <a:spcBef>
+                <a:spcPts val="0"/>
+              </a:spcBef>
+              <a:spcAft>
+                <a:spcPts val="0"/>
+              </a:spcAft>
+            </a:pPr>
+            <a:r>
+              <a:rPr sz="1350" b="0" i="0">
+                <a:solidFill>
+                  <a:srgbClr val="666666"/>
+                </a:solidFill>
+                <a:latin typeface="Manrope"/>
+                <a:cs typeface="Manrope"/>
+                <a:ea typeface="Manrope"/>
+              </a:rPr>
+              <a:t>вырастут. Проверяем на реальном интерфейсе.</a:t>
             </a:r>
           </a:p>
         </p:txBody>
@@ -16387,8 +18003,8 @@
         </p:nvSpPr>
         <p:spPr>
           <a:xfrm>
-            <a:off x="658368" y="1856232"/>
-            <a:ext cx="5300319" cy="969264"/>
+            <a:off x="658368" y="2075688"/>
+            <a:ext cx="10874959" cy="420624"/>
           </a:xfrm>
           <a:prstGeom prst="rect">
             <a:avLst/>
@@ -16433,14 +18049,14 @@
         </p:nvSpPr>
         <p:spPr>
           <a:xfrm>
-            <a:off x="658368" y="1856232"/>
-            <a:ext cx="41148" cy="969264"/>
+            <a:off x="658368" y="2075688"/>
+            <a:ext cx="41148" cy="420624"/>
           </a:xfrm>
           <a:prstGeom prst="rect">
             <a:avLst/>
           </a:prstGeom>
           <a:solidFill>
-            <a:srgbClr val="83CDB7"/>
+            <a:srgbClr val="B84A00"/>
           </a:solidFill>
           <a:ln>
             <a:noFill/>
@@ -16477,8 +18093,8 @@
         </p:nvSpPr>
         <p:spPr>
           <a:xfrm>
-            <a:off x="896112" y="2002536"/>
-            <a:ext cx="4843119" cy="199898"/>
+            <a:off x="877824" y="2176272"/>
+            <a:ext cx="10436047" cy="256032"/>
           </a:xfrm>
           <a:prstGeom prst="rect">
             <a:avLst/>
@@ -16493,25 +18109,36 @@
           <a:p>
             <a:pPr algn="l">
               <a:lnSpc>
-                <a:spcPct val="110000"/>
-              </a:lnSpc>
-              <a:spcBef>
-                <a:spcPts val="0"/>
-              </a:spcBef>
-              <a:spcAft>
-                <a:spcPts val="0"/>
-              </a:spcAft>
-            </a:pPr>
-            <a:r>
-              <a:rPr sz="1300" b="1" i="0">
-                <a:solidFill>
-                  <a:srgbClr val="1A1A1A"/>
-                </a:solidFill>
-                <a:latin typeface="Manrope SemiBold"/>
-                <a:cs typeface="Manrope SemiBold"/>
-                <a:ea typeface="Manrope SemiBold"/>
-              </a:rPr>
-              <a:t>Приоритет вместо ручного просмотра</a:t>
+                <a:spcPct val="116000"/>
+              </a:lnSpc>
+              <a:spcBef>
+                <a:spcPts val="0"/>
+              </a:spcBef>
+              <a:spcAft>
+                <a:spcPts val="0"/>
+              </a:spcAft>
+            </a:pPr>
+            <a:r>
+              <a:rPr sz="1100" b="1">
+                <a:solidFill>
+                  <a:srgbClr val="B84A00"/>
+                </a:solidFill>
+                <a:latin typeface="Manrope"/>
+                <a:cs typeface="Manrope"/>
+                <a:ea typeface="Manrope"/>
+              </a:rPr>
+              <a:t>ГИПОТЕЗА ДО ИЗМЕНЕНИЯ   </a:t>
+            </a:r>
+            <a:r>
+              <a:rPr sz="1100" b="0">
+                <a:solidFill>
+                  <a:srgbClr val="666666"/>
+                </a:solidFill>
+                <a:latin typeface="Manrope"/>
+                <a:cs typeface="Manrope"/>
+                <a:ea typeface="Manrope"/>
+              </a:rPr>
+              <a:t>вес expiry_proximity 3,0 → 9,0 должен повысить баллы и число услуг высокого риска</a:t>
             </a:r>
           </a:p>
         </p:txBody>
@@ -16524,8 +18151,8 @@
         </p:nvSpPr>
         <p:spPr>
           <a:xfrm>
-            <a:off x="896112" y="2248154"/>
-            <a:ext cx="4843119" cy="364998"/>
+            <a:off x="658368" y="2734056"/>
+            <a:ext cx="5282031" cy="151003"/>
           </a:xfrm>
           <a:prstGeom prst="rect">
             <a:avLst/>
@@ -16540,17 +18167,17 @@
           <a:p>
             <a:pPr algn="l">
               <a:lnSpc>
-                <a:spcPct val="130000"/>
-              </a:lnSpc>
-              <a:spcBef>
-                <a:spcPts val="0"/>
-              </a:spcBef>
-              <a:spcAft>
-                <a:spcPts val="0"/>
-              </a:spcAft>
-            </a:pPr>
-            <a:r>
-              <a:rPr sz="1050" b="0" i="0">
+                <a:spcPct val="110000"/>
+              </a:lnSpc>
+              <a:spcBef>
+                <a:spcPts val="0"/>
+              </a:spcBef>
+              <a:spcAft>
+                <a:spcPts val="0"/>
+              </a:spcAft>
+            </a:pPr>
+            <a:r>
+              <a:rPr sz="950" b="1" i="0">
                 <a:solidFill>
                   <a:srgbClr val="666666"/>
                 </a:solidFill>
@@ -16558,45 +18185,208 @@
                 <a:cs typeface="Manrope"/>
                 <a:ea typeface="Manrope"/>
               </a:rPr>
-              <a:t>Список отсортирован по риску, фильтр по категории оставляет только тех, кто</a:t>
-            </a:r>
-          </a:p>
-          <a:p>
-            <a:pPr algn="l">
-              <a:lnSpc>
-                <a:spcPct val="130000"/>
-              </a:lnSpc>
-              <a:spcBef>
-                <a:spcPts val="0"/>
-              </a:spcBef>
-              <a:spcAft>
-                <a:spcPts val="0"/>
-              </a:spcAft>
-            </a:pPr>
-            <a:r>
-              <a:rPr sz="1050" b="0" i="0">
-                <a:solidFill>
-                  <a:srgbClr val="666666"/>
+              <a:t>ДО · ВЕС 3,0</a:t>
+            </a:r>
+          </a:p>
+        </p:txBody>
+      </p:sp>
+      <p:sp>
+        <p:nvSpPr>
+          <p:cNvPr id="10" name="TextBox 9"/>
+          <p:cNvSpPr txBox="1"/>
+          <p:nvPr/>
+        </p:nvSpPr>
+        <p:spPr>
+          <a:xfrm>
+            <a:off x="6251295" y="2734056"/>
+            <a:ext cx="5282031" cy="151003"/>
+          </a:xfrm>
+          <a:prstGeom prst="rect">
+            <a:avLst/>
+          </a:prstGeom>
+          <a:noFill/>
+        </p:spPr>
+        <p:txBody>
+          <a:bodyPr wrap="square" anchor="t" lIns="0" rIns="0" tIns="0" bIns="0">
+            <a:spAutoFit/>
+          </a:bodyPr>
+          <a:lstStyle/>
+          <a:p>
+            <a:pPr algn="l">
+              <a:lnSpc>
+                <a:spcPct val="110000"/>
+              </a:lnSpc>
+              <a:spcBef>
+                <a:spcPts val="0"/>
+              </a:spcBef>
+              <a:spcAft>
+                <a:spcPts val="0"/>
+              </a:spcAft>
+            </a:pPr>
+            <a:r>
+              <a:rPr sz="950" b="1" i="0">
+                <a:solidFill>
+                  <a:srgbClr val="B84A00"/>
                 </a:solidFill>
                 <a:latin typeface="Manrope"/>
                 <a:cs typeface="Manrope"/>
                 <a:ea typeface="Manrope"/>
               </a:rPr>
-              <a:t>требует внимания.</a:t>
-            </a:r>
-          </a:p>
-        </p:txBody>
-      </p:sp>
-      <p:sp>
-        <p:nvSpPr>
-          <p:cNvPr id="10" name="Rectangle 9"/>
+              <a:t>ПОСЛЕ · ВЕС 9,0</a:t>
+            </a:r>
+          </a:p>
+        </p:txBody>
+      </p:sp>
+      <p:sp>
+        <p:nvSpPr>
+          <p:cNvPr id="11" name="Rectangle 10"/>
           <p:cNvSpPr/>
           <p:nvPr/>
         </p:nvSpPr>
         <p:spPr>
           <a:xfrm>
-            <a:off x="6233007" y="1856232"/>
-            <a:ext cx="5300319" cy="969264"/>
+            <a:off x="626364" y="2921508"/>
+            <a:ext cx="5346039" cy="1978550"/>
+          </a:xfrm>
+          <a:prstGeom prst="rect">
+            <a:avLst/>
+          </a:prstGeom>
+          <a:solidFill>
+            <a:srgbClr val="FFFFFF"/>
+          </a:solidFill>
+          <a:ln w="10160">
+            <a:solidFill>
+              <a:srgbClr val="E1E1E1"/>
+            </a:solidFill>
+          </a:ln>
+          <a:effectLst/>
+        </p:spPr>
+        <p:style>
+          <a:lnRef idx="1">
+            <a:schemeClr val="accent1"/>
+          </a:lnRef>
+          <a:fillRef idx="3">
+            <a:schemeClr val="accent1"/>
+          </a:fillRef>
+          <a:effectRef idx="2">
+            <a:schemeClr val="accent1"/>
+          </a:effectRef>
+          <a:fontRef idx="minor">
+            <a:schemeClr val="lt1"/>
+          </a:fontRef>
+        </p:style>
+        <p:txBody>
+          <a:bodyPr rtlCol="0" anchor="ctr"/>
+          <a:lstStyle/>
+          <a:p>
+            <a:pPr algn="ctr"/>
+          </a:p>
+        </p:txBody>
+      </p:sp>
+      <p:pic>
+        <p:nvPicPr>
+          <p:cNvPr id="12" name="Picture 11" descr="t_set_before.png"/>
+          <p:cNvPicPr>
+            <a:picLocks noChangeAspect="1"/>
+          </p:cNvPicPr>
+          <p:nvPr/>
+        </p:nvPicPr>
+        <p:blipFill>
+          <a:blip r:embed="rId2"/>
+          <a:stretch>
+            <a:fillRect/>
+          </a:stretch>
+        </p:blipFill>
+        <p:spPr>
+          <a:xfrm>
+            <a:off x="658368" y="2953512"/>
+            <a:ext cx="5282031" cy="486502"/>
+          </a:xfrm>
+          <a:prstGeom prst="rect">
+            <a:avLst/>
+          </a:prstGeom>
+        </p:spPr>
+      </p:pic>
+      <p:sp>
+        <p:nvSpPr>
+          <p:cNvPr id="13" name="Rectangle 12"/>
+          <p:cNvSpPr/>
+          <p:nvPr/>
+        </p:nvSpPr>
+        <p:spPr>
+          <a:xfrm>
+            <a:off x="6219291" y="2921508"/>
+            <a:ext cx="5346039" cy="1978550"/>
+          </a:xfrm>
+          <a:prstGeom prst="rect">
+            <a:avLst/>
+          </a:prstGeom>
+          <a:solidFill>
+            <a:srgbClr val="FFFFFF"/>
+          </a:solidFill>
+          <a:ln w="10160">
+            <a:solidFill>
+              <a:srgbClr val="E1E1E1"/>
+            </a:solidFill>
+          </a:ln>
+          <a:effectLst/>
+        </p:spPr>
+        <p:style>
+          <a:lnRef idx="1">
+            <a:schemeClr val="accent1"/>
+          </a:lnRef>
+          <a:fillRef idx="3">
+            <a:schemeClr val="accent1"/>
+          </a:fillRef>
+          <a:effectRef idx="2">
+            <a:schemeClr val="accent1"/>
+          </a:effectRef>
+          <a:fontRef idx="minor">
+            <a:schemeClr val="lt1"/>
+          </a:fontRef>
+        </p:style>
+        <p:txBody>
+          <a:bodyPr rtlCol="0" anchor="ctr"/>
+          <a:lstStyle/>
+          <a:p>
+            <a:pPr algn="ctr"/>
+          </a:p>
+        </p:txBody>
+      </p:sp>
+      <p:pic>
+        <p:nvPicPr>
+          <p:cNvPr id="14" name="Picture 13" descr="t_set_after.png"/>
+          <p:cNvPicPr>
+            <a:picLocks noChangeAspect="1"/>
+          </p:cNvPicPr>
+          <p:nvPr/>
+        </p:nvPicPr>
+        <p:blipFill>
+          <a:blip r:embed="rId3"/>
+          <a:stretch>
+            <a:fillRect/>
+          </a:stretch>
+        </p:blipFill>
+        <p:spPr>
+          <a:xfrm>
+            <a:off x="6251295" y="2953512"/>
+            <a:ext cx="5282031" cy="486502"/>
+          </a:xfrm>
+          <a:prstGeom prst="rect">
+            <a:avLst/>
+          </a:prstGeom>
+        </p:spPr>
+      </p:pic>
+      <p:sp>
+        <p:nvSpPr>
+          <p:cNvPr id="15" name="Rectangle 14"/>
+          <p:cNvSpPr/>
+          <p:nvPr/>
+        </p:nvSpPr>
+        <p:spPr>
+          <a:xfrm>
+            <a:off x="658368" y="3977640"/>
+            <a:ext cx="3533546" cy="640080"/>
           </a:xfrm>
           <a:prstGeom prst="rect">
             <a:avLst/>
@@ -16635,58 +18425,14 @@
       </p:sp>
       <p:sp>
         <p:nvSpPr>
-          <p:cNvPr id="11" name="Rectangle 10"/>
-          <p:cNvSpPr/>
-          <p:nvPr/>
-        </p:nvSpPr>
-        <p:spPr>
-          <a:xfrm>
-            <a:off x="6233007" y="1856232"/>
-            <a:ext cx="41148" cy="969264"/>
-          </a:xfrm>
-          <a:prstGeom prst="rect">
-            <a:avLst/>
-          </a:prstGeom>
-          <a:solidFill>
-            <a:srgbClr val="83CDB7"/>
-          </a:solidFill>
-          <a:ln>
-            <a:noFill/>
-          </a:ln>
-          <a:effectLst/>
-        </p:spPr>
-        <p:style>
-          <a:lnRef idx="1">
-            <a:schemeClr val="accent1"/>
-          </a:lnRef>
-          <a:fillRef idx="3">
-            <a:schemeClr val="accent1"/>
-          </a:fillRef>
-          <a:effectRef idx="2">
-            <a:schemeClr val="accent1"/>
-          </a:effectRef>
-          <a:fontRef idx="minor">
-            <a:schemeClr val="lt1"/>
-          </a:fontRef>
-        </p:style>
-        <p:txBody>
-          <a:bodyPr rtlCol="0" anchor="ctr"/>
-          <a:lstStyle/>
-          <a:p>
-            <a:pPr algn="ctr"/>
-          </a:p>
-        </p:txBody>
-      </p:sp>
-      <p:sp>
-        <p:nvSpPr>
-          <p:cNvPr id="12" name="TextBox 11"/>
+          <p:cNvPr id="16" name="TextBox 15"/>
           <p:cNvSpPr txBox="1"/>
           <p:nvPr/>
         </p:nvSpPr>
         <p:spPr>
           <a:xfrm>
-            <a:off x="6470751" y="2002536"/>
-            <a:ext cx="4843119" cy="199898"/>
+            <a:off x="804672" y="4069080"/>
+            <a:ext cx="3240938" cy="131635"/>
           </a:xfrm>
           <a:prstGeom prst="rect">
             <a:avLst/>
@@ -16701,39 +18447,39 @@
           <a:p>
             <a:pPr algn="l">
               <a:lnSpc>
-                <a:spcPct val="110000"/>
-              </a:lnSpc>
-              <a:spcBef>
-                <a:spcPts val="0"/>
-              </a:spcBef>
-              <a:spcAft>
-                <a:spcPts val="0"/>
-              </a:spcAft>
-            </a:pPr>
-            <a:r>
-              <a:rPr sz="1300" b="1" i="0">
-                <a:solidFill>
-                  <a:srgbClr val="1A1A1A"/>
+                <a:spcPct val="105000"/>
+              </a:lnSpc>
+              <a:spcBef>
+                <a:spcPts val="0"/>
+              </a:spcBef>
+              <a:spcAft>
+                <a:spcPts val="0"/>
+              </a:spcAft>
+            </a:pPr>
+            <a:r>
+              <a:rPr sz="850" b="1" i="0">
+                <a:solidFill>
+                  <a:srgbClr val="666666"/>
                 </a:solidFill>
                 <a:latin typeface="Manrope SemiBold"/>
                 <a:cs typeface="Manrope SemiBold"/>
                 <a:ea typeface="Manrope SemiBold"/>
               </a:rPr>
-              <a:t>Причина вместо непрозрачного числа</a:t>
-            </a:r>
-          </a:p>
-        </p:txBody>
-      </p:sp>
-      <p:sp>
-        <p:nvSpPr>
-          <p:cNvPr id="13" name="TextBox 12"/>
+              <a:t>Балл риска клиента #10</a:t>
+            </a:r>
+          </a:p>
+        </p:txBody>
+      </p:sp>
+      <p:sp>
+        <p:nvSpPr>
+          <p:cNvPr id="17" name="TextBox 16"/>
           <p:cNvSpPr txBox="1"/>
           <p:nvPr/>
         </p:nvSpPr>
         <p:spPr>
           <a:xfrm>
-            <a:off x="6470751" y="2248154"/>
-            <a:ext cx="4843119" cy="364998"/>
+            <a:off x="804672" y="4251960"/>
+            <a:ext cx="3240938" cy="310896"/>
           </a:xfrm>
           <a:prstGeom prst="rect">
             <a:avLst/>
@@ -16748,63 +18494,61 @@
           <a:p>
             <a:pPr algn="l">
               <a:lnSpc>
-                <a:spcPct val="130000"/>
-              </a:lnSpc>
-              <a:spcBef>
-                <a:spcPts val="0"/>
-              </a:spcBef>
-              <a:spcAft>
-                <a:spcPts val="0"/>
-              </a:spcAft>
-            </a:pPr>
-            <a:r>
-              <a:rPr sz="1050" b="0" i="0">
+                <a:spcPct val="116000"/>
+              </a:lnSpc>
+              <a:spcBef>
+                <a:spcPts val="0"/>
+              </a:spcBef>
+              <a:spcAft>
+                <a:spcPts val="0"/>
+              </a:spcAft>
+            </a:pPr>
+            <a:r>
+              <a:rPr sz="1500" b="0">
                 <a:solidFill>
                   <a:srgbClr val="666666"/>
+                </a:solidFill>
+                <a:latin typeface="Manrope Medium"/>
+                <a:cs typeface="Manrope Medium"/>
+                <a:ea typeface="Manrope Medium"/>
+              </a:rPr>
+              <a:t>71,4</a:t>
+            </a:r>
+            <a:r>
+              <a:rPr sz="1500" b="0">
+                <a:solidFill>
+                  <a:srgbClr val="C9C9C9"/>
+                </a:solidFill>
+                <a:latin typeface="Manrope Medium"/>
+                <a:cs typeface="Manrope Medium"/>
+                <a:ea typeface="Manrope Medium"/>
+              </a:rPr>
+              <a:t>   →   </a:t>
+            </a:r>
+            <a:r>
+              <a:rPr sz="1500" b="1">
+                <a:solidFill>
+                  <a:srgbClr val="B84A00"/>
                 </a:solidFill>
                 <a:latin typeface="Manrope"/>
                 <a:cs typeface="Manrope"/>
                 <a:ea typeface="Manrope"/>
               </a:rPr>
-              <a:t>Каждый балл разложен на факторы с числами из данных и рекомендациями по</a:t>
-            </a:r>
-          </a:p>
-          <a:p>
-            <a:pPr algn="l">
-              <a:lnSpc>
-                <a:spcPct val="130000"/>
-              </a:lnSpc>
-              <a:spcBef>
-                <a:spcPts val="0"/>
-              </a:spcBef>
-              <a:spcAft>
-                <a:spcPts val="0"/>
-              </a:spcAft>
-            </a:pPr>
-            <a:r>
-              <a:rPr sz="1050" b="0" i="0">
-                <a:solidFill>
-                  <a:srgbClr val="666666"/>
-                </a:solidFill>
-                <a:latin typeface="Manrope"/>
-                <a:cs typeface="Manrope"/>
-                <a:ea typeface="Manrope"/>
-              </a:rPr>
-              <a:t>удержанию.</a:t>
-            </a:r>
-          </a:p>
-        </p:txBody>
-      </p:sp>
-      <p:sp>
-        <p:nvSpPr>
-          <p:cNvPr id="14" name="Rectangle 13"/>
+              <a:t>81,8</a:t>
+            </a:r>
+          </a:p>
+        </p:txBody>
+      </p:sp>
+      <p:sp>
+        <p:nvSpPr>
+          <p:cNvPr id="18" name="Rectangle 17"/>
           <p:cNvSpPr/>
           <p:nvPr/>
         </p:nvSpPr>
         <p:spPr>
           <a:xfrm>
-            <a:off x="658368" y="2990088"/>
-            <a:ext cx="5300319" cy="969264"/>
+            <a:off x="4329074" y="3977640"/>
+            <a:ext cx="3533546" cy="640080"/>
           </a:xfrm>
           <a:prstGeom prst="rect">
             <a:avLst/>
@@ -16843,58 +18587,14 @@
       </p:sp>
       <p:sp>
         <p:nvSpPr>
-          <p:cNvPr id="15" name="Rectangle 14"/>
-          <p:cNvSpPr/>
-          <p:nvPr/>
-        </p:nvSpPr>
-        <p:spPr>
-          <a:xfrm>
-            <a:off x="658368" y="2990088"/>
-            <a:ext cx="41148" cy="969264"/>
-          </a:xfrm>
-          <a:prstGeom prst="rect">
-            <a:avLst/>
-          </a:prstGeom>
-          <a:solidFill>
-            <a:srgbClr val="83CDB7"/>
-          </a:solidFill>
-          <a:ln>
-            <a:noFill/>
-          </a:ln>
-          <a:effectLst/>
-        </p:spPr>
-        <p:style>
-          <a:lnRef idx="1">
-            <a:schemeClr val="accent1"/>
-          </a:lnRef>
-          <a:fillRef idx="3">
-            <a:schemeClr val="accent1"/>
-          </a:fillRef>
-          <a:effectRef idx="2">
-            <a:schemeClr val="accent1"/>
-          </a:effectRef>
-          <a:fontRef idx="minor">
-            <a:schemeClr val="lt1"/>
-          </a:fontRef>
-        </p:style>
-        <p:txBody>
-          <a:bodyPr rtlCol="0" anchor="ctr"/>
-          <a:lstStyle/>
-          <a:p>
-            <a:pPr algn="ctr"/>
-          </a:p>
-        </p:txBody>
-      </p:sp>
-      <p:sp>
-        <p:nvSpPr>
-          <p:cNvPr id="16" name="TextBox 15"/>
+          <p:cNvPr id="19" name="TextBox 18"/>
           <p:cNvSpPr txBox="1"/>
           <p:nvPr/>
         </p:nvSpPr>
         <p:spPr>
           <a:xfrm>
-            <a:off x="896112" y="3136392"/>
-            <a:ext cx="4843119" cy="199898"/>
+            <a:off x="4475378" y="4069080"/>
+            <a:ext cx="3240938" cy="131635"/>
           </a:xfrm>
           <a:prstGeom prst="rect">
             <a:avLst/>
@@ -16909,39 +18609,39 @@
           <a:p>
             <a:pPr algn="l">
               <a:lnSpc>
-                <a:spcPct val="110000"/>
-              </a:lnSpc>
-              <a:spcBef>
-                <a:spcPts val="0"/>
-              </a:spcBef>
-              <a:spcAft>
-                <a:spcPts val="0"/>
-              </a:spcAft>
-            </a:pPr>
-            <a:r>
-              <a:rPr sz="1300" b="1" i="0">
-                <a:solidFill>
-                  <a:srgbClr val="1A1A1A"/>
+                <a:spcPct val="105000"/>
+              </a:lnSpc>
+              <a:spcBef>
+                <a:spcPts val="0"/>
+              </a:spcBef>
+              <a:spcAft>
+                <a:spcPts val="0"/>
+              </a:spcAft>
+            </a:pPr>
+            <a:r>
+              <a:rPr sz="850" b="1" i="0">
+                <a:solidFill>
+                  <a:srgbClr val="666666"/>
                 </a:solidFill>
                 <a:latin typeface="Manrope SemiBold"/>
                 <a:cs typeface="Manrope SemiBold"/>
                 <a:ea typeface="Manrope SemiBold"/>
               </a:rPr>
-              <a:t>Деньги отдельно от риска</a:t>
-            </a:r>
-          </a:p>
-        </p:txBody>
-      </p:sp>
-      <p:sp>
-        <p:nvSpPr>
-          <p:cNvPr id="17" name="TextBox 16"/>
+              <a:t>Балл service-0030</a:t>
+            </a:r>
+          </a:p>
+        </p:txBody>
+      </p:sp>
+      <p:sp>
+        <p:nvSpPr>
+          <p:cNvPr id="20" name="TextBox 19"/>
           <p:cNvSpPr txBox="1"/>
           <p:nvPr/>
         </p:nvSpPr>
         <p:spPr>
           <a:xfrm>
-            <a:off x="896112" y="3382010"/>
-            <a:ext cx="4843119" cy="364998"/>
+            <a:off x="4475378" y="4251960"/>
+            <a:ext cx="3240938" cy="310896"/>
           </a:xfrm>
           <a:prstGeom prst="rect">
             <a:avLst/>
@@ -16956,63 +18656,61 @@
           <a:p>
             <a:pPr algn="l">
               <a:lnSpc>
-                <a:spcPct val="130000"/>
-              </a:lnSpc>
-              <a:spcBef>
-                <a:spcPts val="0"/>
-              </a:spcBef>
-              <a:spcAft>
-                <a:spcPts val="0"/>
-              </a:spcAft>
-            </a:pPr>
-            <a:r>
-              <a:rPr sz="1050" b="0" i="0">
+                <a:spcPct val="116000"/>
+              </a:lnSpc>
+              <a:spcBef>
+                <a:spcPts val="0"/>
+              </a:spcBef>
+              <a:spcAft>
+                <a:spcPts val="0"/>
+              </a:spcAft>
+            </a:pPr>
+            <a:r>
+              <a:rPr sz="1500" b="0">
                 <a:solidFill>
                   <a:srgbClr val="666666"/>
+                </a:solidFill>
+                <a:latin typeface="Manrope Medium"/>
+                <a:cs typeface="Manrope Medium"/>
+                <a:ea typeface="Manrope Medium"/>
+              </a:rPr>
+              <a:t>71,4</a:t>
+            </a:r>
+            <a:r>
+              <a:rPr sz="1500" b="0">
+                <a:solidFill>
+                  <a:srgbClr val="C9C9C9"/>
+                </a:solidFill>
+                <a:latin typeface="Manrope Medium"/>
+                <a:cs typeface="Manrope Medium"/>
+                <a:ea typeface="Manrope Medium"/>
+              </a:rPr>
+              <a:t>   →   </a:t>
+            </a:r>
+            <a:r>
+              <a:rPr sz="1500" b="1">
+                <a:solidFill>
+                  <a:srgbClr val="B84A00"/>
                 </a:solidFill>
                 <a:latin typeface="Manrope"/>
                 <a:cs typeface="Manrope"/>
                 <a:ea typeface="Manrope"/>
               </a:rPr>
-              <a:t>Выручка под риском считается по продлениям внутри горизонта; баланс и</a:t>
-            </a:r>
-          </a:p>
-          <a:p>
-            <a:pPr algn="l">
-              <a:lnSpc>
-                <a:spcPct val="130000"/>
-              </a:lnSpc>
-              <a:spcBef>
-                <a:spcPts val="0"/>
-              </a:spcBef>
-              <a:spcAft>
-                <a:spcPts val="0"/>
-              </a:spcAft>
-            </a:pPr>
-            <a:r>
-              <a:rPr sz="1050" b="0" i="0">
-                <a:solidFill>
-                  <a:srgbClr val="666666"/>
-                </a:solidFill>
-                <a:latin typeface="Manrope"/>
-                <a:cs typeface="Manrope"/>
-                <a:ea typeface="Manrope"/>
-              </a:rPr>
-              <a:t>пополнения с ней не смешиваются.</a:t>
-            </a:r>
-          </a:p>
-        </p:txBody>
-      </p:sp>
-      <p:sp>
-        <p:nvSpPr>
-          <p:cNvPr id="18" name="Rectangle 17"/>
+              <a:t>81,8</a:t>
+            </a:r>
+          </a:p>
+        </p:txBody>
+      </p:sp>
+      <p:sp>
+        <p:nvSpPr>
+          <p:cNvPr id="21" name="Rectangle 20"/>
           <p:cNvSpPr/>
           <p:nvPr/>
         </p:nvSpPr>
         <p:spPr>
           <a:xfrm>
-            <a:off x="6233007" y="2990088"/>
-            <a:ext cx="5300319" cy="969264"/>
+            <a:off x="7999780" y="3977640"/>
+            <a:ext cx="3533546" cy="640080"/>
           </a:xfrm>
           <a:prstGeom prst="rect">
             <a:avLst/>
@@ -17051,58 +18749,14 @@
       </p:sp>
       <p:sp>
         <p:nvSpPr>
-          <p:cNvPr id="19" name="Rectangle 18"/>
-          <p:cNvSpPr/>
-          <p:nvPr/>
-        </p:nvSpPr>
-        <p:spPr>
-          <a:xfrm>
-            <a:off x="6233007" y="2990088"/>
-            <a:ext cx="41148" cy="969264"/>
-          </a:xfrm>
-          <a:prstGeom prst="rect">
-            <a:avLst/>
-          </a:prstGeom>
-          <a:solidFill>
-            <a:srgbClr val="83CDB7"/>
-          </a:solidFill>
-          <a:ln>
-            <a:noFill/>
-          </a:ln>
-          <a:effectLst/>
-        </p:spPr>
-        <p:style>
-          <a:lnRef idx="1">
-            <a:schemeClr val="accent1"/>
-          </a:lnRef>
-          <a:fillRef idx="3">
-            <a:schemeClr val="accent1"/>
-          </a:fillRef>
-          <a:effectRef idx="2">
-            <a:schemeClr val="accent1"/>
-          </a:effectRef>
-          <a:fontRef idx="minor">
-            <a:schemeClr val="lt1"/>
-          </a:fontRef>
-        </p:style>
-        <p:txBody>
-          <a:bodyPr rtlCol="0" anchor="ctr"/>
-          <a:lstStyle/>
-          <a:p>
-            <a:pPr algn="ctr"/>
-          </a:p>
-        </p:txBody>
-      </p:sp>
-      <p:sp>
-        <p:nvSpPr>
-          <p:cNvPr id="20" name="TextBox 19"/>
+          <p:cNvPr id="22" name="TextBox 21"/>
           <p:cNvSpPr txBox="1"/>
           <p:nvPr/>
         </p:nvSpPr>
         <p:spPr>
           <a:xfrm>
-            <a:off x="6470751" y="3136392"/>
-            <a:ext cx="4843119" cy="199898"/>
+            <a:off x="8146084" y="4069080"/>
+            <a:ext cx="3240938" cy="131635"/>
           </a:xfrm>
           <a:prstGeom prst="rect">
             <a:avLst/>
@@ -17117,39 +18771,39 @@
           <a:p>
             <a:pPr algn="l">
               <a:lnSpc>
-                <a:spcPct val="110000"/>
-              </a:lnSpc>
-              <a:spcBef>
-                <a:spcPts val="0"/>
-              </a:spcBef>
-              <a:spcAft>
-                <a:spcPts val="0"/>
-              </a:spcAft>
-            </a:pPr>
-            <a:r>
-              <a:rPr sz="1300" b="1" i="0">
-                <a:solidFill>
-                  <a:srgbClr val="1A1A1A"/>
+                <a:spcPct val="105000"/>
+              </a:lnSpc>
+              <a:spcBef>
+                <a:spcPts val="0"/>
+              </a:spcBef>
+              <a:spcAft>
+                <a:spcPts val="0"/>
+              </a:spcAft>
+            </a:pPr>
+            <a:r>
+              <a:rPr sz="850" b="1" i="0">
+                <a:solidFill>
+                  <a:srgbClr val="666666"/>
                 </a:solidFill>
                 <a:latin typeface="Manrope SemiBold"/>
                 <a:cs typeface="Manrope SemiBold"/>
                 <a:ea typeface="Manrope SemiBold"/>
               </a:rPr>
-              <a:t>Проверка гипотез</a:t>
-            </a:r>
-          </a:p>
-        </p:txBody>
-      </p:sp>
-      <p:sp>
-        <p:nvSpPr>
-          <p:cNvPr id="21" name="TextBox 20"/>
+              <a:t>Услуг высокого риска</a:t>
+            </a:r>
+          </a:p>
+        </p:txBody>
+      </p:sp>
+      <p:sp>
+        <p:nvSpPr>
+          <p:cNvPr id="23" name="TextBox 22"/>
           <p:cNvSpPr txBox="1"/>
           <p:nvPr/>
         </p:nvSpPr>
         <p:spPr>
           <a:xfrm>
-            <a:off x="6470751" y="3382010"/>
-            <a:ext cx="4843119" cy="364998"/>
+            <a:off x="8146084" y="4251960"/>
+            <a:ext cx="3240938" cy="310896"/>
           </a:xfrm>
           <a:prstGeom prst="rect">
             <a:avLst/>
@@ -17164,63 +18818,61 @@
           <a:p>
             <a:pPr algn="l">
               <a:lnSpc>
-                <a:spcPct val="130000"/>
-              </a:lnSpc>
-              <a:spcBef>
-                <a:spcPts val="0"/>
-              </a:spcBef>
-              <a:spcAft>
-                <a:spcPts val="0"/>
-              </a:spcAft>
-            </a:pPr>
-            <a:r>
-              <a:rPr sz="1050" b="0" i="0">
+                <a:spcPct val="116000"/>
+              </a:lnSpc>
+              <a:spcBef>
+                <a:spcPts val="0"/>
+              </a:spcBef>
+              <a:spcAft>
+                <a:spcPts val="0"/>
+              </a:spcAft>
+            </a:pPr>
+            <a:r>
+              <a:rPr sz="1500" b="0">
                 <a:solidFill>
                   <a:srgbClr val="666666"/>
+                </a:solidFill>
+                <a:latin typeface="Manrope Medium"/>
+                <a:cs typeface="Manrope Medium"/>
+                <a:ea typeface="Manrope Medium"/>
+              </a:rPr>
+              <a:t>4</a:t>
+            </a:r>
+            <a:r>
+              <a:rPr sz="1500" b="0">
+                <a:solidFill>
+                  <a:srgbClr val="C9C9C9"/>
+                </a:solidFill>
+                <a:latin typeface="Manrope Medium"/>
+                <a:cs typeface="Manrope Medium"/>
+                <a:ea typeface="Manrope Medium"/>
+              </a:rPr>
+              <a:t>   →   </a:t>
+            </a:r>
+            <a:r>
+              <a:rPr sz="1500" b="1">
+                <a:solidFill>
+                  <a:srgbClr val="B84A00"/>
                 </a:solidFill>
                 <a:latin typeface="Manrope"/>
                 <a:cs typeface="Manrope"/>
                 <a:ea typeface="Manrope"/>
               </a:rPr>
-              <a:t>Веса, горизонт и пороги меняются из интерфейса; результат пересчитывается</a:t>
-            </a:r>
-          </a:p>
-          <a:p>
-            <a:pPr algn="l">
-              <a:lnSpc>
-                <a:spcPct val="130000"/>
-              </a:lnSpc>
-              <a:spcBef>
-                <a:spcPts val="0"/>
-              </a:spcBef>
-              <a:spcAft>
-                <a:spcPts val="0"/>
-              </a:spcAft>
-            </a:pPr>
-            <a:r>
-              <a:rPr sz="1050" b="0" i="0">
-                <a:solidFill>
-                  <a:srgbClr val="666666"/>
-                </a:solidFill>
-                <a:latin typeface="Manrope"/>
-                <a:cs typeface="Manrope"/>
-                <a:ea typeface="Manrope"/>
-              </a:rPr>
-              <a:t>сразу.</a:t>
-            </a:r>
-          </a:p>
-        </p:txBody>
-      </p:sp>
-      <p:sp>
-        <p:nvSpPr>
-          <p:cNvPr id="22" name="Rectangle 21"/>
+              <a:t>7</a:t>
+            </a:r>
+          </a:p>
+        </p:txBody>
+      </p:sp>
+      <p:sp>
+        <p:nvSpPr>
+          <p:cNvPr id="24" name="Rectangle 23"/>
           <p:cNvSpPr/>
           <p:nvPr/>
         </p:nvSpPr>
         <p:spPr>
           <a:xfrm>
-            <a:off x="658368" y="4233672"/>
-            <a:ext cx="10874959" cy="1819656"/>
+            <a:off x="658368" y="4745736"/>
+            <a:ext cx="3533546" cy="640080"/>
           </a:xfrm>
           <a:prstGeom prst="rect">
             <a:avLst/>
@@ -17259,23 +18911,141 @@
       </p:sp>
       <p:sp>
         <p:nvSpPr>
-          <p:cNvPr id="23" name="Rectangle 22"/>
+          <p:cNvPr id="25" name="TextBox 24"/>
+          <p:cNvSpPr txBox="1"/>
+          <p:nvPr/>
+        </p:nvSpPr>
+        <p:spPr>
+          <a:xfrm>
+            <a:off x="804672" y="4837176"/>
+            <a:ext cx="3240938" cy="131635"/>
+          </a:xfrm>
+          <a:prstGeom prst="rect">
+            <a:avLst/>
+          </a:prstGeom>
+          <a:noFill/>
+        </p:spPr>
+        <p:txBody>
+          <a:bodyPr wrap="square" anchor="t" lIns="0" rIns="0" tIns="0" bIns="0">
+            <a:spAutoFit/>
+          </a:bodyPr>
+          <a:lstStyle/>
+          <a:p>
+            <a:pPr algn="l">
+              <a:lnSpc>
+                <a:spcPct val="105000"/>
+              </a:lnSpc>
+              <a:spcBef>
+                <a:spcPts val="0"/>
+              </a:spcBef>
+              <a:spcAft>
+                <a:spcPts val="0"/>
+              </a:spcAft>
+            </a:pPr>
+            <a:r>
+              <a:rPr sz="850" b="1" i="0">
+                <a:solidFill>
+                  <a:srgbClr val="666666"/>
+                </a:solidFill>
+                <a:latin typeface="Manrope SemiBold"/>
+                <a:cs typeface="Manrope SemiBold"/>
+                <a:ea typeface="Manrope SemiBold"/>
+              </a:rPr>
+              <a:t>Выручка под риском</a:t>
+            </a:r>
+          </a:p>
+        </p:txBody>
+      </p:sp>
+      <p:sp>
+        <p:nvSpPr>
+          <p:cNvPr id="26" name="TextBox 25"/>
+          <p:cNvSpPr txBox="1"/>
+          <p:nvPr/>
+        </p:nvSpPr>
+        <p:spPr>
+          <a:xfrm>
+            <a:off x="804672" y="5020056"/>
+            <a:ext cx="3240938" cy="310896"/>
+          </a:xfrm>
+          <a:prstGeom prst="rect">
+            <a:avLst/>
+          </a:prstGeom>
+          <a:noFill/>
+        </p:spPr>
+        <p:txBody>
+          <a:bodyPr wrap="square" anchor="t" lIns="0" rIns="0" tIns="0" bIns="0">
+            <a:spAutoFit/>
+          </a:bodyPr>
+          <a:lstStyle/>
+          <a:p>
+            <a:pPr algn="l">
+              <a:lnSpc>
+                <a:spcPct val="116000"/>
+              </a:lnSpc>
+              <a:spcBef>
+                <a:spcPts val="0"/>
+              </a:spcBef>
+              <a:spcAft>
+                <a:spcPts val="0"/>
+              </a:spcAft>
+            </a:pPr>
+            <a:r>
+              <a:rPr sz="1500" b="0">
+                <a:solidFill>
+                  <a:srgbClr val="666666"/>
+                </a:solidFill>
+                <a:latin typeface="Manrope Medium"/>
+                <a:cs typeface="Manrope Medium"/>
+                <a:ea typeface="Manrope Medium"/>
+              </a:rPr>
+              <a:t>5,80 €</a:t>
+            </a:r>
+            <a:r>
+              <a:rPr sz="1500" b="0">
+                <a:solidFill>
+                  <a:srgbClr val="C9C9C9"/>
+                </a:solidFill>
+                <a:latin typeface="Manrope Medium"/>
+                <a:cs typeface="Manrope Medium"/>
+                <a:ea typeface="Manrope Medium"/>
+              </a:rPr>
+              <a:t>   →   </a:t>
+            </a:r>
+            <a:r>
+              <a:rPr sz="1500" b="1">
+                <a:solidFill>
+                  <a:srgbClr val="B84A00"/>
+                </a:solidFill>
+                <a:latin typeface="Manrope"/>
+                <a:cs typeface="Manrope"/>
+                <a:ea typeface="Manrope"/>
+              </a:rPr>
+              <a:t>7,72 €</a:t>
+            </a:r>
+          </a:p>
+        </p:txBody>
+      </p:sp>
+      <p:sp>
+        <p:nvSpPr>
+          <p:cNvPr id="27" name="Rectangle 26"/>
           <p:cNvSpPr/>
           <p:nvPr/>
         </p:nvSpPr>
         <p:spPr>
           <a:xfrm>
-            <a:off x="658368" y="4233672"/>
-            <a:ext cx="41148" cy="1819656"/>
+            <a:off x="4329074" y="4745736"/>
+            <a:ext cx="3533546" cy="640080"/>
           </a:xfrm>
           <a:prstGeom prst="rect">
             <a:avLst/>
           </a:prstGeom>
           <a:solidFill>
-            <a:srgbClr val="B84A00"/>
+            <a:srgbClr val="FFFFFF"/>
           </a:solidFill>
-          <a:ln>
-            <a:noFill/>
+          <a:ln w="11430">
+            <a:solidFill>
+              <a:srgbClr val="E1E1E1"/>
+            </a:solidFill>
           </a:ln>
           <a:effectLst/>
         </p:spPr>
@@ -17303,14 +19073,14 @@
       </p:sp>
       <p:sp>
         <p:nvSpPr>
-          <p:cNvPr id="24" name="TextBox 23"/>
+          <p:cNvPr id="28" name="TextBox 27"/>
           <p:cNvSpPr txBox="1"/>
           <p:nvPr/>
         </p:nvSpPr>
         <p:spPr>
           <a:xfrm>
-            <a:off x="896112" y="4398264"/>
-            <a:ext cx="10399471" cy="192913"/>
+            <a:off x="4475378" y="4837176"/>
+            <a:ext cx="3240938" cy="131635"/>
           </a:xfrm>
           <a:prstGeom prst="rect">
             <a:avLst/>
@@ -17325,39 +19095,39 @@
           <a:p>
             <a:pPr algn="l">
               <a:lnSpc>
-                <a:spcPct val="110000"/>
-              </a:lnSpc>
-              <a:spcBef>
-                <a:spcPts val="0"/>
-              </a:spcBef>
-              <a:spcAft>
-                <a:spcPts val="0"/>
-              </a:spcAft>
-            </a:pPr>
-            <a:r>
-              <a:rPr sz="1250" b="1" i="0">
-                <a:solidFill>
-                  <a:srgbClr val="1A1A1A"/>
+                <a:spcPct val="105000"/>
+              </a:lnSpc>
+              <a:spcBef>
+                <a:spcPts val="0"/>
+              </a:spcBef>
+              <a:spcAft>
+                <a:spcPts val="0"/>
+              </a:spcAft>
+            </a:pPr>
+            <a:r>
+              <a:rPr sz="850" b="1" i="0">
+                <a:solidFill>
+                  <a:srgbClr val="666666"/>
                 </a:solidFill>
                 <a:latin typeface="Manrope SemiBold"/>
                 <a:cs typeface="Manrope SemiBold"/>
                 <a:ea typeface="Manrope SemiBold"/>
               </a:rPr>
-              <a:t>Чего мы не заявляем</a:t>
-            </a:r>
-          </a:p>
-        </p:txBody>
-      </p:sp>
-      <p:sp>
-        <p:nvSpPr>
-          <p:cNvPr id="25" name="TextBox 24"/>
+              <a:t>Сумма весов</a:t>
+            </a:r>
+          </a:p>
+        </p:txBody>
+      </p:sp>
+      <p:sp>
+        <p:nvSpPr>
+          <p:cNvPr id="29" name="TextBox 28"/>
           <p:cNvSpPr txBox="1"/>
           <p:nvPr/>
         </p:nvSpPr>
         <p:spPr>
           <a:xfrm>
-            <a:off x="896112" y="4646041"/>
-            <a:ext cx="10399471" cy="364998"/>
+            <a:off x="4475378" y="5020056"/>
+            <a:ext cx="3240938" cy="310896"/>
           </a:xfrm>
           <a:prstGeom prst="rect">
             <a:avLst/>
@@ -17372,72 +19142,72 @@
           <a:p>
             <a:pPr algn="l">
               <a:lnSpc>
-                <a:spcPct val="130000"/>
-              </a:lnSpc>
-              <a:spcBef>
-                <a:spcPts val="0"/>
-              </a:spcBef>
-              <a:spcAft>
-                <a:spcPts val="0"/>
-              </a:spcAft>
-            </a:pPr>
-            <a:r>
-              <a:rPr sz="1050" b="0" i="0">
+                <a:spcPct val="116000"/>
+              </a:lnSpc>
+              <a:spcBef>
+                <a:spcPts val="0"/>
+              </a:spcBef>
+              <a:spcAft>
+                <a:spcPts val="0"/>
+              </a:spcAft>
+            </a:pPr>
+            <a:r>
+              <a:rPr sz="1500" b="0">
                 <a:solidFill>
                   <a:srgbClr val="666666"/>
+                </a:solidFill>
+                <a:latin typeface="Manrope Medium"/>
+                <a:cs typeface="Manrope Medium"/>
+                <a:ea typeface="Manrope Medium"/>
+              </a:rPr>
+              <a:t>13.0</a:t>
+            </a:r>
+            <a:r>
+              <a:rPr sz="1500" b="0">
+                <a:solidFill>
+                  <a:srgbClr val="C9C9C9"/>
+                </a:solidFill>
+                <a:latin typeface="Manrope Medium"/>
+                <a:cs typeface="Manrope Medium"/>
+                <a:ea typeface="Manrope Medium"/>
+              </a:rPr>
+              <a:t>   →   </a:t>
+            </a:r>
+            <a:r>
+              <a:rPr sz="1500" b="1">
+                <a:solidFill>
+                  <a:srgbClr val="B84A00"/>
                 </a:solidFill>
                 <a:latin typeface="Manrope"/>
                 <a:cs typeface="Manrope"/>
                 <a:ea typeface="Manrope"/>
               </a:rPr>
-              <a:t>Балл риска — не вероятность оттока в процентах: в снимке нет исторических исходов, поэтому модель построена на правилах, а не обучена. Точность, снижение оттока и</a:t>
-            </a:r>
-          </a:p>
-          <a:p>
-            <a:pPr algn="l">
-              <a:lnSpc>
-                <a:spcPct val="130000"/>
-              </a:lnSpc>
-              <a:spcBef>
-                <a:spcPts val="0"/>
-              </a:spcBef>
-              <a:spcAft>
-                <a:spcPts val="0"/>
-              </a:spcAft>
-            </a:pPr>
-            <a:r>
-              <a:rPr sz="1050" b="0" i="0">
-                <a:solidFill>
-                  <a:srgbClr val="666666"/>
-                </a:solidFill>
-                <a:latin typeface="Manrope"/>
-                <a:cs typeface="Manrope"/>
-                <a:ea typeface="Manrope"/>
-              </a:rPr>
-              <a:t>рост выручки не измерены — мы их не обещаем. Продукт помогает анализировать и приоритизировать; удержание зависит от следующих действий команды.</a:t>
-            </a:r>
-          </a:p>
-        </p:txBody>
-      </p:sp>
-      <p:sp>
-        <p:nvSpPr>
-          <p:cNvPr id="26" name="Rectangle 25"/>
+              <a:t>19.0</a:t>
+            </a:r>
+          </a:p>
+        </p:txBody>
+      </p:sp>
+      <p:sp>
+        <p:nvSpPr>
+          <p:cNvPr id="30" name="Rectangle 29"/>
           <p:cNvSpPr/>
           <p:nvPr/>
         </p:nvSpPr>
         <p:spPr>
           <a:xfrm>
-            <a:off x="658368" y="6217920"/>
-            <a:ext cx="10874959" cy="9525"/>
+            <a:off x="7999780" y="4745736"/>
+            <a:ext cx="3533546" cy="640080"/>
           </a:xfrm>
           <a:prstGeom prst="rect">
             <a:avLst/>
           </a:prstGeom>
           <a:solidFill>
-            <a:srgbClr val="E1E1E1"/>
+            <a:srgbClr val="FFFFFF"/>
           </a:solidFill>
-          <a:ln>
-            <a:noFill/>
+          <a:ln w="11430">
+            <a:solidFill>
+              <a:srgbClr val="E1E1E1"/>
+            </a:solidFill>
           </a:ln>
           <a:effectLst/>
         </p:spPr>
@@ -17465,14 +19235,14 @@
       </p:sp>
       <p:sp>
         <p:nvSpPr>
-          <p:cNvPr id="27" name="TextBox 26"/>
+          <p:cNvPr id="31" name="TextBox 30"/>
           <p:cNvSpPr txBox="1"/>
           <p:nvPr/>
         </p:nvSpPr>
         <p:spPr>
           <a:xfrm>
-            <a:off x="658368" y="6355080"/>
-            <a:ext cx="10874959" cy="163067"/>
+            <a:off x="8146084" y="4837176"/>
+            <a:ext cx="3240938" cy="131635"/>
           </a:xfrm>
           <a:prstGeom prst="rect">
             <a:avLst/>
@@ -17487,25 +19257,189 @@
           <a:p>
             <a:pPr algn="l">
               <a:lnSpc>
-                <a:spcPct val="120000"/>
-              </a:lnSpc>
-              <a:spcBef>
-                <a:spcPts val="0"/>
-              </a:spcBef>
-              <a:spcAft>
-                <a:spcPts val="0"/>
-              </a:spcAft>
-            </a:pPr>
-            <a:r>
-              <a:rPr sz="950" b="0" i="0">
+                <a:spcPct val="105000"/>
+              </a:lnSpc>
+              <a:spcBef>
+                <a:spcPts val="0"/>
+              </a:spcBef>
+              <a:spcAft>
+                <a:spcPts val="0"/>
+              </a:spcAft>
+            </a:pPr>
+            <a:r>
+              <a:rPr sz="850" b="1" i="0">
                 <a:solidFill>
                   <a:srgbClr val="666666"/>
+                </a:solidFill>
+                <a:latin typeface="Manrope SemiBold"/>
+                <a:cs typeface="Manrope SemiBold"/>
+                <a:ea typeface="Manrope SemiBold"/>
+              </a:rPr>
+              <a:t>Клиентов высокого риска</a:t>
+            </a:r>
+          </a:p>
+        </p:txBody>
+      </p:sp>
+      <p:sp>
+        <p:nvSpPr>
+          <p:cNvPr id="32" name="TextBox 31"/>
+          <p:cNvSpPr txBox="1"/>
+          <p:nvPr/>
+        </p:nvSpPr>
+        <p:spPr>
+          <a:xfrm>
+            <a:off x="8146084" y="5020056"/>
+            <a:ext cx="3240938" cy="310896"/>
+          </a:xfrm>
+          <a:prstGeom prst="rect">
+            <a:avLst/>
+          </a:prstGeom>
+          <a:noFill/>
+        </p:spPr>
+        <p:txBody>
+          <a:bodyPr wrap="square" anchor="t" lIns="0" rIns="0" tIns="0" bIns="0">
+            <a:spAutoFit/>
+          </a:bodyPr>
+          <a:lstStyle/>
+          <a:p>
+            <a:pPr algn="l">
+              <a:lnSpc>
+                <a:spcPct val="116000"/>
+              </a:lnSpc>
+              <a:spcBef>
+                <a:spcPts val="0"/>
+              </a:spcBef>
+              <a:spcAft>
+                <a:spcPts val="0"/>
+              </a:spcAft>
+            </a:pPr>
+            <a:r>
+              <a:rPr sz="1500" b="0">
+                <a:solidFill>
+                  <a:srgbClr val="666666"/>
+                </a:solidFill>
+                <a:latin typeface="Manrope Medium"/>
+                <a:cs typeface="Manrope Medium"/>
+                <a:ea typeface="Manrope Medium"/>
+              </a:rPr>
+              <a:t>3</a:t>
+            </a:r>
+            <a:r>
+              <a:rPr sz="1500" b="0">
+                <a:solidFill>
+                  <a:srgbClr val="C9C9C9"/>
+                </a:solidFill>
+                <a:latin typeface="Manrope Medium"/>
+                <a:cs typeface="Manrope Medium"/>
+                <a:ea typeface="Manrope Medium"/>
+              </a:rPr>
+              <a:t>   →   </a:t>
+            </a:r>
+            <a:r>
+              <a:rPr sz="1500" b="1">
+                <a:solidFill>
+                  <a:srgbClr val="B84A00"/>
                 </a:solidFill>
                 <a:latin typeface="Manrope"/>
                 <a:cs typeface="Manrope"/>
                 <a:ea typeface="Manrope"/>
               </a:rPr>
-              <a:t>Подтверждено запуском продукта на датасете организатора: снимок импортирован, все экраны и пересчёт проверены вживую.</a:t>
+              <a:t>3</a:t>
+            </a:r>
+          </a:p>
+        </p:txBody>
+      </p:sp>
+      <p:sp>
+        <p:nvSpPr>
+          <p:cNvPr id="33" name="TextBox 32"/>
+          <p:cNvSpPr txBox="1"/>
+          <p:nvPr/>
+        </p:nvSpPr>
+        <p:spPr>
+          <a:xfrm>
+            <a:off x="658368" y="5641848"/>
+            <a:ext cx="10874959" cy="538353"/>
+          </a:xfrm>
+          <a:prstGeom prst="rect">
+            <a:avLst/>
+          </a:prstGeom>
+          <a:noFill/>
+        </p:spPr>
+        <p:txBody>
+          <a:bodyPr wrap="square" anchor="t" lIns="0" rIns="0" tIns="0" bIns="0">
+            <a:spAutoFit/>
+          </a:bodyPr>
+          <a:lstStyle/>
+          <a:p>
+            <a:pPr algn="l">
+              <a:lnSpc>
+                <a:spcPct val="130000"/>
+              </a:lnSpc>
+              <a:spcBef>
+                <a:spcPts val="0"/>
+              </a:spcBef>
+              <a:spcAft>
+                <a:spcPts val="0"/>
+              </a:spcAft>
+            </a:pPr>
+            <a:r>
+              <a:rPr sz="1050" b="0" i="0">
+                <a:solidFill>
+                  <a:srgbClr val="666666"/>
+                </a:solidFill>
+                <a:latin typeface="Manrope"/>
+                <a:cs typeface="Manrope"/>
+                <a:ea typeface="Manrope"/>
+              </a:rPr>
+              <a:t>Расчёт: сумма весов выросла с 13.0 до 19.0, вклад фактора — с 3.0 до 9.0, поэтому балл service-0030 стал 81,8, а услуг высокого риска — 7 вместо 4. Клиентов высокого риска</a:t>
+            </a:r>
+          </a:p>
+          <a:p>
+            <a:pPr algn="l">
+              <a:lnSpc>
+                <a:spcPct val="130000"/>
+              </a:lnSpc>
+              <a:spcBef>
+                <a:spcPts val="0"/>
+              </a:spcBef>
+              <a:spcAft>
+                <a:spcPts val="0"/>
+              </a:spcAft>
+            </a:pPr>
+            <a:r>
+              <a:rPr sz="1050" b="0" i="0">
+                <a:solidFill>
+                  <a:srgbClr val="666666"/>
+                </a:solidFill>
+                <a:latin typeface="Manrope"/>
+                <a:cs typeface="Manrope"/>
+                <a:ea typeface="Manrope"/>
+              </a:rPr>
+              <a:t>осталось 3: категория клиента — это максимум по его услугам, и усиленный вес поднял баллы средних клиентов, но не выше порога 65. Настройка сохраняется на сервере, сводка</a:t>
+            </a:r>
+          </a:p>
+          <a:p>
+            <a:pPr algn="l">
+              <a:lnSpc>
+                <a:spcPct val="130000"/>
+              </a:lnSpc>
+              <a:spcBef>
+                <a:spcPts val="0"/>
+              </a:spcBef>
+              <a:spcAft>
+                <a:spcPts val="0"/>
+              </a:spcAft>
+            </a:pPr>
+            <a:r>
+              <a:rPr sz="1050" b="0" i="0">
+                <a:solidFill>
+                  <a:srgbClr val="666666"/>
+                </a:solidFill>
+                <a:latin typeface="Manrope"/>
+                <a:cs typeface="Manrope"/>
+                <a:ea typeface="Manrope"/>
+              </a:rPr>
+              <a:t>обновляется сразу, без перезагрузки страницы; кнопка «Значения по умолчанию» возвращает исходные 3,0 и прежние числа.</a:t>
             </a:r>
           </a:p>
         </p:txBody>
@@ -17614,7 +19548,7 @@
                 <a:cs typeface="Manrope"/>
                 <a:ea typeface="Manrope"/>
               </a:rPr>
-              <a:t>АРХИТЕКТУРА ДОВЕРИЯ И ОГРАНИЧЕНИЯ</a:t>
+              <a:t>РЕЗУЛЬТАТ ДЛЯ БИЗНЕСА</a:t>
             </a:r>
           </a:p>
         </p:txBody>
@@ -17661,7 +19595,7 @@
                 <a:cs typeface="Manrope"/>
                 <a:ea typeface="Manrope"/>
               </a:rPr>
-              <a:t>Данные → проверка → расчёт → интерфейс</a:t>
+              <a:t>Команда видит, с кого начать</a:t>
             </a:r>
           </a:p>
         </p:txBody>
@@ -17708,7 +19642,7 @@
                 <a:cs typeface="Manrope"/>
                 <a:ea typeface="Manrope"/>
               </a:rPr>
-              <a:t>Короткий путь данных. Никаких скрытых шагов и никакой подмены отсутствующих сигналов нулём.</a:t>
+              <a:t>Четыре подтверждённые возможности продукта — и то, что мы сознательно не заявляем.</a:t>
             </a:r>
           </a:p>
         </p:txBody>
@@ -17722,7 +19656,7 @@
         <p:spPr>
           <a:xfrm>
             <a:off x="658368" y="1856232"/>
-            <a:ext cx="2512999" cy="1188720"/>
+            <a:ext cx="5300319" cy="969264"/>
           </a:xfrm>
           <a:prstGeom prst="rect">
             <a:avLst/>
@@ -17768,13 +19702,13 @@
         <p:spPr>
           <a:xfrm>
             <a:off x="658368" y="1856232"/>
-            <a:ext cx="2512999" cy="41148"/>
+            <a:ext cx="41148" cy="969264"/>
           </a:xfrm>
           <a:prstGeom prst="rect">
             <a:avLst/>
           </a:prstGeom>
           <a:solidFill>
-            <a:srgbClr val="1F1F1F"/>
+            <a:srgbClr val="83CDB7"/>
           </a:solidFill>
           <a:ln>
             <a:noFill/>
@@ -17811,8 +19745,8 @@
         </p:nvSpPr>
         <p:spPr>
           <a:xfrm>
-            <a:off x="822960" y="2039112"/>
-            <a:ext cx="2183815" cy="185928"/>
+            <a:off x="896112" y="2002536"/>
+            <a:ext cx="4843119" cy="199898"/>
           </a:xfrm>
           <a:prstGeom prst="rect">
             <a:avLst/>
@@ -17837,7 +19771,7 @@
               </a:spcAft>
             </a:pPr>
             <a:r>
-              <a:rPr sz="1200" b="1" i="0">
+              <a:rPr sz="1300" b="1" i="0">
                 <a:solidFill>
                   <a:srgbClr val="1A1A1A"/>
                 </a:solidFill>
@@ -17845,7 +19779,7 @@
                 <a:cs typeface="Manrope SemiBold"/>
                 <a:ea typeface="Manrope SemiBold"/>
               </a:rPr>
-              <a:t>Снимок Aéza</a:t>
+              <a:t>Приоритет вместо ручного просмотра</a:t>
             </a:r>
           </a:p>
         </p:txBody>
@@ -17858,8 +19792,8 @@
         </p:nvSpPr>
         <p:spPr>
           <a:xfrm>
-            <a:off x="822960" y="2270760"/>
-            <a:ext cx="2183815" cy="331978"/>
+            <a:off x="896112" y="2248154"/>
+            <a:ext cx="4843119" cy="364998"/>
           </a:xfrm>
           <a:prstGeom prst="rect">
             <a:avLst/>
@@ -17884,7 +19818,7 @@
               </a:spcAft>
             </a:pPr>
             <a:r>
-              <a:rPr sz="950" b="0" i="0">
+              <a:rPr sz="1050" b="0" i="0">
                 <a:solidFill>
                   <a:srgbClr val="666666"/>
                 </a:solidFill>
@@ -17892,7 +19826,7 @@
                 <a:cs typeface="Manrope"/>
                 <a:ea typeface="Manrope"/>
               </a:rPr>
-              <a:t>data.json: 10 аккаунтов, 30 услуг,</a:t>
+              <a:t>Список отсортирован по риску, фильтр по категории оставляет только тех, кто</a:t>
             </a:r>
           </a:p>
           <a:p>
@@ -17908,7 +19842,7 @@
               </a:spcAft>
             </a:pPr>
             <a:r>
-              <a:rPr sz="950" b="0" i="0">
+              <a:rPr sz="1050" b="0" i="0">
                 <a:solidFill>
                   <a:srgbClr val="666666"/>
                 </a:solidFill>
@@ -17916,65 +19850,21 @@
                 <a:cs typeface="Manrope"/>
                 <a:ea typeface="Manrope"/>
               </a:rPr>
-              <a:t>100 транзакций</a:t>
-            </a:r>
-          </a:p>
-        </p:txBody>
-      </p:sp>
-      <p:sp>
-        <p:nvSpPr>
-          <p:cNvPr id="10" name="Right Arrow 9"/>
+              <a:t>требует внимания.</a:t>
+            </a:r>
+          </a:p>
+        </p:txBody>
+      </p:sp>
+      <p:sp>
+        <p:nvSpPr>
+          <p:cNvPr id="10" name="Rectangle 9"/>
           <p:cNvSpPr/>
           <p:nvPr/>
         </p:nvSpPr>
         <p:spPr>
           <a:xfrm>
-            <a:off x="3221659" y="2340864"/>
-            <a:ext cx="173736" cy="219456"/>
-          </a:xfrm>
-          <a:prstGeom prst="rightArrow">
-            <a:avLst/>
-          </a:prstGeom>
-          <a:solidFill>
-            <a:srgbClr val="E1E1E1"/>
-          </a:solidFill>
-          <a:ln>
-            <a:noFill/>
-          </a:ln>
-          <a:effectLst/>
-        </p:spPr>
-        <p:style>
-          <a:lnRef idx="1">
-            <a:schemeClr val="accent1"/>
-          </a:lnRef>
-          <a:fillRef idx="3">
-            <a:schemeClr val="accent1"/>
-          </a:fillRef>
-          <a:effectRef idx="2">
-            <a:schemeClr val="accent1"/>
-          </a:effectRef>
-          <a:fontRef idx="minor">
-            <a:schemeClr val="lt1"/>
-          </a:fontRef>
-        </p:style>
-        <p:txBody>
-          <a:bodyPr rtlCol="0" anchor="ctr"/>
-          <a:lstStyle/>
-          <a:p>
-            <a:pPr algn="ctr"/>
-          </a:p>
-        </p:txBody>
-      </p:sp>
-      <p:sp>
-        <p:nvSpPr>
-          <p:cNvPr id="11" name="Rectangle 10"/>
-          <p:cNvSpPr/>
-          <p:nvPr/>
-        </p:nvSpPr>
-        <p:spPr>
-          <a:xfrm>
-            <a:off x="3445687" y="1856232"/>
-            <a:ext cx="2512999" cy="1188720"/>
+            <a:off x="6233007" y="1856232"/>
+            <a:ext cx="5300319" cy="969264"/>
           </a:xfrm>
           <a:prstGeom prst="rect">
             <a:avLst/>
@@ -18013,20 +19903,20 @@
       </p:sp>
       <p:sp>
         <p:nvSpPr>
-          <p:cNvPr id="12" name="Rectangle 11"/>
+          <p:cNvPr id="11" name="Rectangle 10"/>
           <p:cNvSpPr/>
           <p:nvPr/>
         </p:nvSpPr>
         <p:spPr>
           <a:xfrm>
-            <a:off x="3445687" y="1856232"/>
-            <a:ext cx="2512999" cy="41148"/>
+            <a:off x="6233007" y="1856232"/>
+            <a:ext cx="41148" cy="969264"/>
           </a:xfrm>
           <a:prstGeom prst="rect">
             <a:avLst/>
           </a:prstGeom>
           <a:solidFill>
-            <a:srgbClr val="1F1F1F"/>
+            <a:srgbClr val="83CDB7"/>
           </a:solidFill>
           <a:ln>
             <a:noFill/>
@@ -18057,14 +19947,14 @@
       </p:sp>
       <p:sp>
         <p:nvSpPr>
-          <p:cNvPr id="13" name="TextBox 12"/>
+          <p:cNvPr id="12" name="TextBox 11"/>
           <p:cNvSpPr txBox="1"/>
           <p:nvPr/>
         </p:nvSpPr>
         <p:spPr>
           <a:xfrm>
-            <a:off x="3610279" y="2039112"/>
-            <a:ext cx="2183815" cy="185928"/>
+            <a:off x="6470751" y="2002536"/>
+            <a:ext cx="4843119" cy="199898"/>
           </a:xfrm>
           <a:prstGeom prst="rect">
             <a:avLst/>
@@ -18089,7 +19979,7 @@
               </a:spcAft>
             </a:pPr>
             <a:r>
-              <a:rPr sz="1200" b="1" i="0">
+              <a:rPr sz="1300" b="1" i="0">
                 <a:solidFill>
                   <a:srgbClr val="1A1A1A"/>
                 </a:solidFill>
@@ -18097,21 +19987,21 @@
                 <a:cs typeface="Manrope SemiBold"/>
                 <a:ea typeface="Manrope SemiBold"/>
               </a:rPr>
-              <a:t>Импорт с проверкой</a:t>
-            </a:r>
-          </a:p>
-        </p:txBody>
-      </p:sp>
-      <p:sp>
-        <p:nvSpPr>
-          <p:cNvPr id="14" name="TextBox 13"/>
+              <a:t>Причина вместо непрозрачного числа</a:t>
+            </a:r>
+          </a:p>
+        </p:txBody>
+      </p:sp>
+      <p:sp>
+        <p:nvSpPr>
+          <p:cNvPr id="13" name="TextBox 12"/>
           <p:cNvSpPr txBox="1"/>
           <p:nvPr/>
         </p:nvSpPr>
         <p:spPr>
           <a:xfrm>
-            <a:off x="3610279" y="2270760"/>
-            <a:ext cx="2183815" cy="331978"/>
+            <a:off x="6470751" y="2248154"/>
+            <a:ext cx="4843119" cy="364998"/>
           </a:xfrm>
           <a:prstGeom prst="rect">
             <a:avLst/>
@@ -18136,7 +20026,7 @@
               </a:spcAft>
             </a:pPr>
             <a:r>
-              <a:rPr sz="950" b="0" i="0">
+              <a:rPr sz="1050" b="0" i="0">
                 <a:solidFill>
                   <a:srgbClr val="666666"/>
                 </a:solidFill>
@@ -18144,7 +20034,7 @@
                 <a:cs typeface="Manrope"/>
                 <a:ea typeface="Manrope"/>
               </a:rPr>
-              <a:t>валидация целиком до записи,</a:t>
+              <a:t>Каждый балл разложен на факторы с числами из данных и рекомендациями по</a:t>
             </a:r>
           </a:p>
           <a:p>
@@ -18160,7 +20050,7 @@
               </a:spcAft>
             </a:pPr>
             <a:r>
-              <a:rPr sz="950" b="0" i="0">
+              <a:rPr sz="1050" b="0" i="0">
                 <a:solidFill>
                   <a:srgbClr val="666666"/>
                 </a:solidFill>
@@ -18168,65 +20058,21 @@
                 <a:cs typeface="Manrope"/>
                 <a:ea typeface="Manrope"/>
               </a:rPr>
-              <a:t>применение атомарно</a:t>
-            </a:r>
-          </a:p>
-        </p:txBody>
-      </p:sp>
-      <p:sp>
-        <p:nvSpPr>
-          <p:cNvPr id="15" name="Right Arrow 14"/>
+              <a:t>удержанию.</a:t>
+            </a:r>
+          </a:p>
+        </p:txBody>
+      </p:sp>
+      <p:sp>
+        <p:nvSpPr>
+          <p:cNvPr id="14" name="Rectangle 13"/>
           <p:cNvSpPr/>
           <p:nvPr/>
         </p:nvSpPr>
         <p:spPr>
           <a:xfrm>
-            <a:off x="6008978" y="2340864"/>
-            <a:ext cx="173736" cy="219456"/>
-          </a:xfrm>
-          <a:prstGeom prst="rightArrow">
-            <a:avLst/>
-          </a:prstGeom>
-          <a:solidFill>
-            <a:srgbClr val="E1E1E1"/>
-          </a:solidFill>
-          <a:ln>
-            <a:noFill/>
-          </a:ln>
-          <a:effectLst/>
-        </p:spPr>
-        <p:style>
-          <a:lnRef idx="1">
-            <a:schemeClr val="accent1"/>
-          </a:lnRef>
-          <a:fillRef idx="3">
-            <a:schemeClr val="accent1"/>
-          </a:fillRef>
-          <a:effectRef idx="2">
-            <a:schemeClr val="accent1"/>
-          </a:effectRef>
-          <a:fontRef idx="minor">
-            <a:schemeClr val="lt1"/>
-          </a:fontRef>
-        </p:style>
-        <p:txBody>
-          <a:bodyPr rtlCol="0" anchor="ctr"/>
-          <a:lstStyle/>
-          <a:p>
-            <a:pPr algn="ctr"/>
-          </a:p>
-        </p:txBody>
-      </p:sp>
-      <p:sp>
-        <p:nvSpPr>
-          <p:cNvPr id="16" name="Rectangle 15"/>
-          <p:cNvSpPr/>
-          <p:nvPr/>
-        </p:nvSpPr>
-        <p:spPr>
-          <a:xfrm>
-            <a:off x="6233006" y="1856232"/>
-            <a:ext cx="2512999" cy="1188720"/>
+            <a:off x="658368" y="2990088"/>
+            <a:ext cx="5300319" cy="969264"/>
           </a:xfrm>
           <a:prstGeom prst="rect">
             <a:avLst/>
@@ -18265,20 +20111,20 @@
       </p:sp>
       <p:sp>
         <p:nvSpPr>
-          <p:cNvPr id="17" name="Rectangle 16"/>
+          <p:cNvPr id="15" name="Rectangle 14"/>
           <p:cNvSpPr/>
           <p:nvPr/>
         </p:nvSpPr>
         <p:spPr>
           <a:xfrm>
-            <a:off x="6233006" y="1856232"/>
-            <a:ext cx="2512999" cy="41148"/>
+            <a:off x="658368" y="2990088"/>
+            <a:ext cx="41148" cy="969264"/>
           </a:xfrm>
           <a:prstGeom prst="rect">
             <a:avLst/>
           </a:prstGeom>
           <a:solidFill>
-            <a:srgbClr val="1F1F1F"/>
+            <a:srgbClr val="83CDB7"/>
           </a:solidFill>
           <a:ln>
             <a:noFill/>
@@ -18309,14 +20155,14 @@
       </p:sp>
       <p:sp>
         <p:nvSpPr>
-          <p:cNvPr id="18" name="TextBox 17"/>
+          <p:cNvPr id="16" name="TextBox 15"/>
           <p:cNvSpPr txBox="1"/>
           <p:nvPr/>
         </p:nvSpPr>
         <p:spPr>
           <a:xfrm>
-            <a:off x="6397598" y="2039112"/>
-            <a:ext cx="2183815" cy="185928"/>
+            <a:off x="896112" y="3136392"/>
+            <a:ext cx="4843119" cy="199898"/>
           </a:xfrm>
           <a:prstGeom prst="rect">
             <a:avLst/>
@@ -18341,7 +20187,7 @@
               </a:spcAft>
             </a:pPr>
             <a:r>
-              <a:rPr sz="1200" b="1" i="0">
+              <a:rPr sz="1300" b="1" i="0">
                 <a:solidFill>
                   <a:srgbClr val="1A1A1A"/>
                 </a:solidFill>
@@ -18349,21 +20195,21 @@
                 <a:cs typeface="Manrope SemiBold"/>
                 <a:ea typeface="Manrope SemiBold"/>
               </a:rPr>
-              <a:t>Скоринг</a:t>
-            </a:r>
-          </a:p>
-        </p:txBody>
-      </p:sp>
-      <p:sp>
-        <p:nvSpPr>
-          <p:cNvPr id="19" name="TextBox 18"/>
+              <a:t>Деньги отдельно от риска</a:t>
+            </a:r>
+          </a:p>
+        </p:txBody>
+      </p:sp>
+      <p:sp>
+        <p:nvSpPr>
+          <p:cNvPr id="17" name="TextBox 16"/>
           <p:cNvSpPr txBox="1"/>
           <p:nvPr/>
         </p:nvSpPr>
         <p:spPr>
           <a:xfrm>
-            <a:off x="6397598" y="2270760"/>
-            <a:ext cx="2183815" cy="331978"/>
+            <a:off x="896112" y="3382010"/>
+            <a:ext cx="4843119" cy="364998"/>
           </a:xfrm>
           <a:prstGeom prst="rect">
             <a:avLst/>
@@ -18388,7 +20234,7 @@
               </a:spcAft>
             </a:pPr>
             <a:r>
-              <a:rPr sz="950" b="0" i="0">
+              <a:rPr sz="1050" b="0" i="0">
                 <a:solidFill>
                   <a:srgbClr val="666666"/>
                 </a:solidFill>
@@ -18396,7 +20242,7 @@
                 <a:cs typeface="Manrope"/>
                 <a:ea typeface="Manrope"/>
               </a:rPr>
-              <a:t>один модуль: вес × фактор, сумма</a:t>
+              <a:t>Выручка под риском считается по продлениям внутри горизонта; баланс и</a:t>
             </a:r>
           </a:p>
           <a:p>
@@ -18412,7 +20258,7 @@
               </a:spcAft>
             </a:pPr>
             <a:r>
-              <a:rPr sz="950" b="0" i="0">
+              <a:rPr sz="1050" b="0" i="0">
                 <a:solidFill>
                   <a:srgbClr val="666666"/>
                 </a:solidFill>
@@ -18420,65 +20266,21 @@
                 <a:cs typeface="Manrope"/>
                 <a:ea typeface="Manrope"/>
               </a:rPr>
-              <a:t>весов в знаменателе</a:t>
-            </a:r>
-          </a:p>
-        </p:txBody>
-      </p:sp>
-      <p:sp>
-        <p:nvSpPr>
-          <p:cNvPr id="20" name="Right Arrow 19"/>
+              <a:t>пополнения с ней не смешиваются.</a:t>
+            </a:r>
+          </a:p>
+        </p:txBody>
+      </p:sp>
+      <p:sp>
+        <p:nvSpPr>
+          <p:cNvPr id="18" name="Rectangle 17"/>
           <p:cNvSpPr/>
           <p:nvPr/>
         </p:nvSpPr>
         <p:spPr>
           <a:xfrm>
-            <a:off x="8796297" y="2340864"/>
-            <a:ext cx="173736" cy="219456"/>
-          </a:xfrm>
-          <a:prstGeom prst="rightArrow">
-            <a:avLst/>
-          </a:prstGeom>
-          <a:solidFill>
-            <a:srgbClr val="E1E1E1"/>
-          </a:solidFill>
-          <a:ln>
-            <a:noFill/>
-          </a:ln>
-          <a:effectLst/>
-        </p:spPr>
-        <p:style>
-          <a:lnRef idx="1">
-            <a:schemeClr val="accent1"/>
-          </a:lnRef>
-          <a:fillRef idx="3">
-            <a:schemeClr val="accent1"/>
-          </a:fillRef>
-          <a:effectRef idx="2">
-            <a:schemeClr val="accent1"/>
-          </a:effectRef>
-          <a:fontRef idx="minor">
-            <a:schemeClr val="lt1"/>
-          </a:fontRef>
-        </p:style>
-        <p:txBody>
-          <a:bodyPr rtlCol="0" anchor="ctr"/>
-          <a:lstStyle/>
-          <a:p>
-            <a:pPr algn="ctr"/>
-          </a:p>
-        </p:txBody>
-      </p:sp>
-      <p:sp>
-        <p:nvSpPr>
-          <p:cNvPr id="21" name="Rectangle 20"/>
-          <p:cNvSpPr/>
-          <p:nvPr/>
-        </p:nvSpPr>
-        <p:spPr>
-          <a:xfrm>
-            <a:off x="9020325" y="1856232"/>
-            <a:ext cx="2512999" cy="1188720"/>
+            <a:off x="6233007" y="2990088"/>
+            <a:ext cx="5300319" cy="969264"/>
           </a:xfrm>
           <a:prstGeom prst="rect">
             <a:avLst/>
@@ -18517,20 +20319,20 @@
       </p:sp>
       <p:sp>
         <p:nvSpPr>
-          <p:cNvPr id="22" name="Rectangle 21"/>
+          <p:cNvPr id="19" name="Rectangle 18"/>
           <p:cNvSpPr/>
           <p:nvPr/>
         </p:nvSpPr>
         <p:spPr>
           <a:xfrm>
-            <a:off x="9020325" y="1856232"/>
-            <a:ext cx="2512999" cy="41148"/>
+            <a:off x="6233007" y="2990088"/>
+            <a:ext cx="41148" cy="969264"/>
           </a:xfrm>
           <a:prstGeom prst="rect">
             <a:avLst/>
           </a:prstGeom>
           <a:solidFill>
-            <a:srgbClr val="B84A00"/>
+            <a:srgbClr val="83CDB7"/>
           </a:solidFill>
           <a:ln>
             <a:noFill/>
@@ -18561,14 +20363,14 @@
       </p:sp>
       <p:sp>
         <p:nvSpPr>
-          <p:cNvPr id="23" name="TextBox 22"/>
+          <p:cNvPr id="20" name="TextBox 19"/>
           <p:cNvSpPr txBox="1"/>
           <p:nvPr/>
         </p:nvSpPr>
         <p:spPr>
           <a:xfrm>
-            <a:off x="9184917" y="2039112"/>
-            <a:ext cx="2183815" cy="185928"/>
+            <a:off x="6470751" y="3136392"/>
+            <a:ext cx="4843119" cy="199898"/>
           </a:xfrm>
           <a:prstGeom prst="rect">
             <a:avLst/>
@@ -18593,7 +20395,7 @@
               </a:spcAft>
             </a:pPr>
             <a:r>
-              <a:rPr sz="1200" b="1" i="0">
+              <a:rPr sz="1300" b="1" i="0">
                 <a:solidFill>
                   <a:srgbClr val="1A1A1A"/>
                 </a:solidFill>
@@ -18601,21 +20403,21 @@
                 <a:cs typeface="Manrope SemiBold"/>
                 <a:ea typeface="Manrope SemiBold"/>
               </a:rPr>
-              <a:t>API и интерфейс</a:t>
-            </a:r>
-          </a:p>
-        </p:txBody>
-      </p:sp>
-      <p:sp>
-        <p:nvSpPr>
-          <p:cNvPr id="24" name="TextBox 23"/>
+              <a:t>Проверка гипотез</a:t>
+            </a:r>
+          </a:p>
+        </p:txBody>
+      </p:sp>
+      <p:sp>
+        <p:nvSpPr>
+          <p:cNvPr id="21" name="TextBox 20"/>
           <p:cNvSpPr txBox="1"/>
           <p:nvPr/>
         </p:nvSpPr>
         <p:spPr>
           <a:xfrm>
-            <a:off x="9184917" y="2270760"/>
-            <a:ext cx="2183815" cy="331978"/>
+            <a:off x="6470751" y="3382010"/>
+            <a:ext cx="4843119" cy="364998"/>
           </a:xfrm>
           <a:prstGeom prst="rect">
             <a:avLst/>
@@ -18640,7 +20442,7 @@
               </a:spcAft>
             </a:pPr>
             <a:r>
-              <a:rPr sz="950" b="0" i="0">
+              <a:rPr sz="1050" b="0" i="0">
                 <a:solidFill>
                   <a:srgbClr val="666666"/>
                 </a:solidFill>
@@ -18648,7 +20450,7 @@
                 <a:cs typeface="Manrope"/>
                 <a:ea typeface="Manrope"/>
               </a:rPr>
-              <a:t>FastAPI + Postgres, панель</a:t>
+              <a:t>Веса, горизонт и пороги меняются из интерфейса; результат пересчитывается</a:t>
             </a:r>
           </a:p>
           <a:p>
@@ -18664,7 +20466,7 @@
               </a:spcAft>
             </a:pPr>
             <a:r>
-              <a:rPr sz="950" b="0" i="0">
+              <a:rPr sz="1050" b="0" i="0">
                 <a:solidFill>
                   <a:srgbClr val="666666"/>
                 </a:solidFill>
@@ -18672,21 +20474,21 @@
                 <a:cs typeface="Manrope"/>
                 <a:ea typeface="Manrope"/>
               </a:rPr>
-              <a:t>аналитика на React</a:t>
-            </a:r>
-          </a:p>
-        </p:txBody>
-      </p:sp>
-      <p:sp>
-        <p:nvSpPr>
-          <p:cNvPr id="25" name="Rectangle 24"/>
+              <a:t>сразу.</a:t>
+            </a:r>
+          </a:p>
+        </p:txBody>
+      </p:sp>
+      <p:sp>
+        <p:nvSpPr>
+          <p:cNvPr id="22" name="Rectangle 21"/>
           <p:cNvSpPr/>
           <p:nvPr/>
         </p:nvSpPr>
         <p:spPr>
           <a:xfrm>
-            <a:off x="658368" y="3319272"/>
-            <a:ext cx="5274355" cy="2734056"/>
+            <a:off x="658368" y="4233672"/>
+            <a:ext cx="10874959" cy="1819656"/>
           </a:xfrm>
           <a:prstGeom prst="rect">
             <a:avLst/>
@@ -18725,287 +20527,23 @@
       </p:sp>
       <p:sp>
         <p:nvSpPr>
-          <p:cNvPr id="26" name="TextBox 25"/>
-          <p:cNvSpPr txBox="1"/>
-          <p:nvPr/>
-        </p:nvSpPr>
-        <p:spPr>
-          <a:xfrm>
-            <a:off x="877824" y="3483864"/>
-            <a:ext cx="4835443" cy="192913"/>
-          </a:xfrm>
-          <a:prstGeom prst="rect">
-            <a:avLst/>
-          </a:prstGeom>
-          <a:noFill/>
-        </p:spPr>
-        <p:txBody>
-          <a:bodyPr wrap="square" anchor="t" lIns="0" rIns="0" tIns="0" bIns="0">
-            <a:spAutoFit/>
-          </a:bodyPr>
-          <a:lstStyle/>
-          <a:p>
-            <a:pPr algn="l">
-              <a:lnSpc>
-                <a:spcPct val="110000"/>
-              </a:lnSpc>
-              <a:spcBef>
-                <a:spcPts val="0"/>
-              </a:spcBef>
-              <a:spcAft>
-                <a:spcPts val="0"/>
-              </a:spcAft>
-            </a:pPr>
-            <a:r>
-              <a:rPr sz="1250" b="1" i="0">
-                <a:solidFill>
-                  <a:srgbClr val="1A1A1A"/>
-                </a:solidFill>
-                <a:latin typeface="Manrope SemiBold"/>
-                <a:cs typeface="Manrope SemiBold"/>
-                <a:ea typeface="Manrope SemiBold"/>
-              </a:rPr>
-              <a:t>Как обрабатываются пропуски</a:t>
-            </a:r>
-          </a:p>
-        </p:txBody>
-      </p:sp>
-      <p:sp>
-        <p:nvSpPr>
-          <p:cNvPr id="27" name="TextBox 26"/>
-          <p:cNvSpPr txBox="1"/>
-          <p:nvPr/>
-        </p:nvSpPr>
-        <p:spPr>
-          <a:xfrm>
-            <a:off x="877824" y="3731641"/>
-            <a:ext cx="4835443" cy="1379728"/>
-          </a:xfrm>
-          <a:prstGeom prst="rect">
-            <a:avLst/>
-          </a:prstGeom>
-          <a:noFill/>
-        </p:spPr>
-        <p:txBody>
-          <a:bodyPr wrap="square" anchor="t" lIns="0" rIns="0" tIns="0" bIns="0">
-            <a:spAutoFit/>
-          </a:bodyPr>
-          <a:lstStyle/>
-          <a:p>
-            <a:pPr algn="l">
-              <a:lnSpc>
-                <a:spcPct val="134000"/>
-              </a:lnSpc>
-              <a:spcBef>
-                <a:spcPts val="0"/>
-              </a:spcBef>
-              <a:spcAft>
-                <a:spcPts val="0"/>
-              </a:spcAft>
-            </a:pPr>
-            <a:r>
-              <a:rPr sz="1000" b="0" i="0">
-                <a:solidFill>
-                  <a:srgbClr val="666666"/>
-                </a:solidFill>
-                <a:latin typeface="Manrope"/>
-                <a:cs typeface="Manrope"/>
-                <a:ea typeface="Manrope"/>
-              </a:rPr>
-              <a:t>• Неизвестное ≠ ноль: фактор без данных исключается из числителя и</a:t>
-            </a:r>
-          </a:p>
-          <a:p>
-            <a:pPr algn="l">
-              <a:lnSpc>
-                <a:spcPct val="134000"/>
-              </a:lnSpc>
-              <a:spcBef>
-                <a:spcPts val="0"/>
-              </a:spcBef>
-              <a:spcAft>
-                <a:spcPts val="0"/>
-              </a:spcAft>
-            </a:pPr>
-            <a:r>
-              <a:rPr sz="1000" b="0" i="0">
-                <a:solidFill>
-                  <a:srgbClr val="666666"/>
-                </a:solidFill>
-                <a:latin typeface="Manrope"/>
-                <a:cs typeface="Manrope"/>
-                <a:ea typeface="Manrope"/>
-              </a:rPr>
-              <a:t>знаменателя, веса перенормируются.</a:t>
-            </a:r>
-          </a:p>
-          <a:p>
-            <a:pPr algn="l">
-              <a:lnSpc>
-                <a:spcPct val="134000"/>
-              </a:lnSpc>
-              <a:spcBef>
-                <a:spcPts val="0"/>
-              </a:spcBef>
-              <a:spcAft>
-                <a:spcPts val="0"/>
-              </a:spcAft>
-            </a:pPr>
-            <a:r>
-              <a:rPr sz="1000" b="0" i="0">
-                <a:solidFill>
-                  <a:srgbClr val="666666"/>
-                </a:solidFill>
-                <a:latin typeface="Manrope"/>
-                <a:cs typeface="Manrope"/>
-                <a:ea typeface="Manrope"/>
-              </a:rPr>
-              <a:t>• Услуги deleted и blocked — состоявшееся событие, а не прогноз: балл им не</a:t>
-            </a:r>
-          </a:p>
-          <a:p>
-            <a:pPr algn="l">
-              <a:lnSpc>
-                <a:spcPct val="134000"/>
-              </a:lnSpc>
-              <a:spcBef>
-                <a:spcPts val="0"/>
-              </a:spcBef>
-              <a:spcAft>
-                <a:spcPts val="0"/>
-              </a:spcAft>
-            </a:pPr>
-            <a:r>
-              <a:rPr sz="1000" b="0" i="0">
-                <a:solidFill>
-                  <a:srgbClr val="666666"/>
-                </a:solidFill>
-                <a:latin typeface="Manrope"/>
-                <a:cs typeface="Manrope"/>
-                <a:ea typeface="Manrope"/>
-              </a:rPr>
-              <a:t>присваивается.</a:t>
-            </a:r>
-          </a:p>
-          <a:p>
-            <a:pPr algn="l">
-              <a:lnSpc>
-                <a:spcPct val="134000"/>
-              </a:lnSpc>
-              <a:spcBef>
-                <a:spcPts val="0"/>
-              </a:spcBef>
-              <a:spcAft>
-                <a:spcPts val="0"/>
-              </a:spcAft>
-            </a:pPr>
-            <a:r>
-              <a:rPr sz="1000" b="0" i="0">
-                <a:solidFill>
-                  <a:srgbClr val="666666"/>
-                </a:solidFill>
-                <a:latin typeface="Manrope"/>
-                <a:cs typeface="Manrope"/>
-                <a:ea typeface="Manrope"/>
-              </a:rPr>
-              <a:t>• Цена не входит в формулу риска: price — это экспозиция, а не вероятность</a:t>
-            </a:r>
-          </a:p>
-          <a:p>
-            <a:pPr algn="l">
-              <a:lnSpc>
-                <a:spcPct val="134000"/>
-              </a:lnSpc>
-              <a:spcBef>
-                <a:spcPts val="0"/>
-              </a:spcBef>
-              <a:spcAft>
-                <a:spcPts val="0"/>
-              </a:spcAft>
-            </a:pPr>
-            <a:r>
-              <a:rPr sz="1000" b="0" i="0">
-                <a:solidFill>
-                  <a:srgbClr val="666666"/>
-                </a:solidFill>
-                <a:latin typeface="Manrope"/>
-                <a:cs typeface="Manrope"/>
-                <a:ea typeface="Manrope"/>
-              </a:rPr>
-              <a:t>ухода.</a:t>
-            </a:r>
-          </a:p>
-          <a:p>
-            <a:pPr algn="l">
-              <a:lnSpc>
-                <a:spcPct val="134000"/>
-              </a:lnSpc>
-              <a:spcBef>
-                <a:spcPts val="0"/>
-              </a:spcBef>
-              <a:spcAft>
-                <a:spcPts val="0"/>
-              </a:spcAft>
-            </a:pPr>
-            <a:r>
-              <a:rPr sz="1000" b="0" i="0">
-                <a:solidFill>
-                  <a:srgbClr val="666666"/>
-                </a:solidFill>
-                <a:latin typeface="Manrope"/>
-                <a:cs typeface="Manrope"/>
-                <a:ea typeface="Manrope"/>
-              </a:rPr>
-              <a:t>• Опорный момент зафиксирован (2026-10-19 15:00 UTC), поэтому числа</a:t>
-            </a:r>
-          </a:p>
-          <a:p>
-            <a:pPr algn="l">
-              <a:lnSpc>
-                <a:spcPct val="134000"/>
-              </a:lnSpc>
-              <a:spcBef>
-                <a:spcPts val="0"/>
-              </a:spcBef>
-              <a:spcAft>
-                <a:spcPts val="0"/>
-              </a:spcAft>
-            </a:pPr>
-            <a:r>
-              <a:rPr sz="1000" b="0" i="0">
-                <a:solidFill>
-                  <a:srgbClr val="666666"/>
-                </a:solidFill>
-                <a:latin typeface="Manrope"/>
-                <a:cs typeface="Manrope"/>
-                <a:ea typeface="Manrope"/>
-              </a:rPr>
-              <a:t>воспроизводимы.</a:t>
-            </a:r>
-          </a:p>
-        </p:txBody>
-      </p:sp>
-      <p:sp>
-        <p:nvSpPr>
-          <p:cNvPr id="28" name="Rectangle 27"/>
+          <p:cNvPr id="23" name="Rectangle 22"/>
           <p:cNvSpPr/>
           <p:nvPr/>
         </p:nvSpPr>
         <p:spPr>
           <a:xfrm>
-            <a:off x="6207043" y="3319272"/>
-            <a:ext cx="5326284" cy="2734056"/>
+            <a:off x="658368" y="4233672"/>
+            <a:ext cx="41148" cy="1819656"/>
           </a:xfrm>
           <a:prstGeom prst="rect">
             <a:avLst/>
           </a:prstGeom>
           <a:solidFill>
-            <a:srgbClr val="FFFFFF"/>
+            <a:srgbClr val="B84A00"/>
           </a:solidFill>
-          <a:ln w="11430">
-            <a:solidFill>
-              <a:srgbClr val="E1E1E1"/>
-            </a:solidFill>
+          <a:ln>
+            <a:noFill/>
           </a:ln>
           <a:effectLst/>
         </p:spPr>
@@ -19033,14 +20571,14 @@
       </p:sp>
       <p:sp>
         <p:nvSpPr>
-          <p:cNvPr id="29" name="TextBox 28"/>
+          <p:cNvPr id="24" name="TextBox 23"/>
           <p:cNvSpPr txBox="1"/>
           <p:nvPr/>
         </p:nvSpPr>
         <p:spPr>
           <a:xfrm>
-            <a:off x="6426499" y="3483864"/>
-            <a:ext cx="4887372" cy="192913"/>
+            <a:off x="896112" y="4398264"/>
+            <a:ext cx="10399471" cy="192913"/>
           </a:xfrm>
           <a:prstGeom prst="rect">
             <a:avLst/>
@@ -19073,21 +20611,21 @@
                 <a:cs typeface="Manrope SemiBold"/>
                 <a:ea typeface="Manrope SemiBold"/>
               </a:rPr>
-              <a:t>Ограничения, которые важно знать</a:t>
-            </a:r>
-          </a:p>
-        </p:txBody>
-      </p:sp>
-      <p:sp>
-        <p:nvSpPr>
-          <p:cNvPr id="30" name="TextBox 29"/>
+              <a:t>Чего мы не заявляем</a:t>
+            </a:r>
+          </a:p>
+        </p:txBody>
+      </p:sp>
+      <p:sp>
+        <p:nvSpPr>
+          <p:cNvPr id="25" name="TextBox 24"/>
           <p:cNvSpPr txBox="1"/>
           <p:nvPr/>
         </p:nvSpPr>
         <p:spPr>
           <a:xfrm>
-            <a:off x="6426499" y="3731641"/>
-            <a:ext cx="4887372" cy="1039368"/>
+            <a:off x="896112" y="4646041"/>
+            <a:ext cx="10399471" cy="364998"/>
           </a:xfrm>
           <a:prstGeom prst="rect">
             <a:avLst/>
@@ -19102,17 +20640,17 @@
           <a:p>
             <a:pPr algn="l">
               <a:lnSpc>
-                <a:spcPct val="134000"/>
-              </a:lnSpc>
-              <a:spcBef>
-                <a:spcPts val="0"/>
-              </a:spcBef>
-              <a:spcAft>
-                <a:spcPts val="0"/>
-              </a:spcAft>
-            </a:pPr>
-            <a:r>
-              <a:rPr sz="1000" b="0" i="0">
+                <a:spcPct val="130000"/>
+              </a:lnSpc>
+              <a:spcBef>
+                <a:spcPts val="0"/>
+              </a:spcBef>
+              <a:spcAft>
+                <a:spcPts val="0"/>
+              </a:spcAft>
+            </a:pPr>
+            <a:r>
+              <a:rPr sz="1050" b="0" i="0">
                 <a:solidFill>
                   <a:srgbClr val="666666"/>
                 </a:solidFill>
@@ -19120,23 +20658,23 @@
                 <a:cs typeface="Manrope"/>
                 <a:ea typeface="Manrope"/>
               </a:rPr>
-              <a:t>• Нет истории оттока — отсюда модель на правилах и отсутствие метрик</a:t>
-            </a:r>
-          </a:p>
-          <a:p>
-            <a:pPr algn="l">
-              <a:lnSpc>
-                <a:spcPct val="134000"/>
-              </a:lnSpc>
-              <a:spcBef>
-                <a:spcPts val="0"/>
-              </a:spcBef>
-              <a:spcAft>
-                <a:spcPts val="0"/>
-              </a:spcAft>
-            </a:pPr>
-            <a:r>
-              <a:rPr sz="1000" b="0" i="0">
+              <a:t>Балл риска — не вероятность оттока в процентах: в снимке нет исторических исходов, поэтому модель построена на правилах, а не обучена. Точность, снижение оттока и</a:t>
+            </a:r>
+          </a:p>
+          <a:p>
+            <a:pPr algn="l">
+              <a:lnSpc>
+                <a:spcPct val="130000"/>
+              </a:lnSpc>
+              <a:spcBef>
+                <a:spcPts val="0"/>
+              </a:spcBef>
+              <a:spcAft>
+                <a:spcPts val="0"/>
+              </a:spcAft>
+            </a:pPr>
+            <a:r>
+              <a:rPr sz="1050" b="0" i="0">
                 <a:solidFill>
                   <a:srgbClr val="666666"/>
                 </a:solidFill>
@@ -19144,23 +20682,90 @@
                 <a:cs typeface="Manrope"/>
                 <a:ea typeface="Manrope"/>
               </a:rPr>
-              <a:t>точности.</a:t>
-            </a:r>
-          </a:p>
-          <a:p>
-            <a:pPr algn="l">
-              <a:lnSpc>
-                <a:spcPct val="134000"/>
-              </a:lnSpc>
-              <a:spcBef>
-                <a:spcPts val="0"/>
-              </a:spcBef>
-              <a:spcAft>
-                <a:spcPts val="0"/>
-              </a:spcAft>
-            </a:pPr>
-            <a:r>
-              <a:rPr sz="1000" b="0" i="0">
+              <a:t>рост выручки не измерены — мы их не обещаем. Продукт помогает анализировать и приоритизировать; удержание зависит от следующих действий команды.</a:t>
+            </a:r>
+          </a:p>
+        </p:txBody>
+      </p:sp>
+      <p:sp>
+        <p:nvSpPr>
+          <p:cNvPr id="26" name="Rectangle 25"/>
+          <p:cNvSpPr/>
+          <p:nvPr/>
+        </p:nvSpPr>
+        <p:spPr>
+          <a:xfrm>
+            <a:off x="658368" y="6217920"/>
+            <a:ext cx="10874959" cy="9525"/>
+          </a:xfrm>
+          <a:prstGeom prst="rect">
+            <a:avLst/>
+          </a:prstGeom>
+          <a:solidFill>
+            <a:srgbClr val="E1E1E1"/>
+          </a:solidFill>
+          <a:ln>
+            <a:noFill/>
+          </a:ln>
+          <a:effectLst/>
+        </p:spPr>
+        <p:style>
+          <a:lnRef idx="1">
+            <a:schemeClr val="accent1"/>
+          </a:lnRef>
+          <a:fillRef idx="3">
+            <a:schemeClr val="accent1"/>
+          </a:fillRef>
+          <a:effectRef idx="2">
+            <a:schemeClr val="accent1"/>
+          </a:effectRef>
+          <a:fontRef idx="minor">
+            <a:schemeClr val="lt1"/>
+          </a:fontRef>
+        </p:style>
+        <p:txBody>
+          <a:bodyPr rtlCol="0" anchor="ctr"/>
+          <a:lstStyle/>
+          <a:p>
+            <a:pPr algn="ctr"/>
+          </a:p>
+        </p:txBody>
+      </p:sp>
+      <p:sp>
+        <p:nvSpPr>
+          <p:cNvPr id="27" name="TextBox 26"/>
+          <p:cNvSpPr txBox="1"/>
+          <p:nvPr/>
+        </p:nvSpPr>
+        <p:spPr>
+          <a:xfrm>
+            <a:off x="658368" y="6355080"/>
+            <a:ext cx="10874959" cy="163067"/>
+          </a:xfrm>
+          <a:prstGeom prst="rect">
+            <a:avLst/>
+          </a:prstGeom>
+          <a:noFill/>
+        </p:spPr>
+        <p:txBody>
+          <a:bodyPr wrap="square" anchor="t" lIns="0" rIns="0" tIns="0" bIns="0">
+            <a:spAutoFit/>
+          </a:bodyPr>
+          <a:lstStyle/>
+          <a:p>
+            <a:pPr algn="l">
+              <a:lnSpc>
+                <a:spcPct val="120000"/>
+              </a:lnSpc>
+              <a:spcBef>
+                <a:spcPts val="0"/>
+              </a:spcBef>
+              <a:spcAft>
+                <a:spcPts val="0"/>
+              </a:spcAft>
+            </a:pPr>
+            <a:r>
+              <a:rPr sz="950" b="0" i="0">
                 <a:solidFill>
                   <a:srgbClr val="666666"/>
                 </a:solidFill>
@@ -19168,79 +20773,7 @@
                 <a:cs typeface="Manrope"/>
                 <a:ea typeface="Manrope"/>
               </a:rPr>
-              <a:t>• Нет календаря будущих списаний: даты продлений выведены из expiresAt и</a:t>
-            </a:r>
-          </a:p>
-          <a:p>
-            <a:pPr algn="l">
-              <a:lnSpc>
-                <a:spcPct val="134000"/>
-              </a:lnSpc>
-              <a:spcBef>
-                <a:spcPts val="0"/>
-              </a:spcBef>
-              <a:spcAft>
-                <a:spcPts val="0"/>
-              </a:spcAft>
-            </a:pPr>
-            <a:r>
-              <a:rPr sz="1000" b="0" i="0">
-                <a:solidFill>
-                  <a:srgbClr val="666666"/>
-                </a:solidFill>
-                <a:latin typeface="Manrope"/>
-                <a:cs typeface="Manrope"/>
-                <a:ea typeface="Manrope"/>
-              </a:rPr>
-              <a:t>paymentTerm.</a:t>
-            </a:r>
-          </a:p>
-          <a:p>
-            <a:pPr algn="l">
-              <a:lnSpc>
-                <a:spcPct val="134000"/>
-              </a:lnSpc>
-              <a:spcBef>
-                <a:spcPts val="0"/>
-              </a:spcBef>
-              <a:spcAft>
-                <a:spcPts val="0"/>
-              </a:spcAft>
-            </a:pPr>
-            <a:r>
-              <a:rPr sz="1000" b="0" i="0">
-                <a:solidFill>
-                  <a:srgbClr val="666666"/>
-                </a:solidFill>
-                <a:latin typeface="Manrope"/>
-                <a:cs typeface="Manrope"/>
-                <a:ea typeface="Manrope"/>
-              </a:rPr>
-              <a:t>• Нет динамики: снимок описывает один момент, график тренда не строится.</a:t>
-            </a:r>
-          </a:p>
-          <a:p>
-            <a:pPr algn="l">
-              <a:lnSpc>
-                <a:spcPct val="134000"/>
-              </a:lnSpc>
-              <a:spcBef>
-                <a:spcPts val="0"/>
-              </a:spcBef>
-              <a:spcAft>
-                <a:spcPts val="0"/>
-              </a:spcAft>
-            </a:pPr>
-            <a:r>
-              <a:rPr sz="1000" b="0" i="0">
-                <a:solidFill>
-                  <a:srgbClr val="666666"/>
-                </a:solidFill>
-                <a:latin typeface="Manrope"/>
-                <a:cs typeface="Manrope"/>
-                <a:ea typeface="Manrope"/>
-              </a:rPr>
-              <a:t>• Нагрузка не измерялась: набор кейса — 10 / 30 / 100 записей.</a:t>
+              <a:t>Подтверждено запуском продукта на датасете организатора: снимок импортирован, все экраны и пересчёт проверены вживую.</a:t>
             </a:r>
           </a:p>
         </p:txBody>
